--- a/元数据错误路径.pptx
+++ b/元数据错误路径.pptx
@@ -19,6 +19,24 @@
     <p:sldId id="267" r:id="rId12"/>
     <p:sldId id="268" r:id="rId13"/>
     <p:sldId id="271" r:id="rId14"/>
+    <p:sldId id="272" r:id="rId15"/>
+    <p:sldId id="273" r:id="rId16"/>
+    <p:sldId id="294" r:id="rId17"/>
+    <p:sldId id="275" r:id="rId18"/>
+    <p:sldId id="276" r:id="rId19"/>
+    <p:sldId id="277" r:id="rId20"/>
+    <p:sldId id="281" r:id="rId21"/>
+    <p:sldId id="295" r:id="rId22"/>
+    <p:sldId id="296" r:id="rId23"/>
+    <p:sldId id="297" r:id="rId24"/>
+    <p:sldId id="298" r:id="rId25"/>
+    <p:sldId id="299" r:id="rId26"/>
+    <p:sldId id="300" r:id="rId27"/>
+    <p:sldId id="302" r:id="rId28"/>
+    <p:sldId id="301" r:id="rId29"/>
+    <p:sldId id="303" r:id="rId30"/>
+    <p:sldId id="304" r:id="rId31"/>
+    <p:sldId id="305" r:id="rId32"/>
   </p:sldIdLst>
   <p:sldSz cx="12191365" cy="6858000"/>
   <p:notesSz cx="6858000" cy="12191365"/>
@@ -607,6 +625,543 @@
 </file>
 
 <file path=ppt/notesSlides/notesSlide11.xml><?xml version="1.0" encoding="utf-8"?>
+<p:notes xmlns:a="http://schemas.openxmlformats.org/drawingml/2006/main" xmlns:r="http://schemas.openxmlformats.org/officeDocument/2006/relationships" xmlns:p="http://schemas.openxmlformats.org/presentationml/2006/main">
+  <p:cSld>
+    <p:spTree>
+      <p:nvGrpSpPr>
+        <p:cNvPr id="1" name=""/>
+        <p:cNvGrpSpPr/>
+        <p:nvPr/>
+      </p:nvGrpSpPr>
+      <p:grpSpPr/>
+      <p:sp>
+        <p:nvSpPr>
+          <p:cNvPr id="2" name="Slide Image Placeholder 1"/>
+          <p:cNvSpPr>
+            <a:spLocks noGrp="1"/>
+          </p:cNvSpPr>
+          <p:nvPr>
+            <p:ph type="sldImg"/>
+          </p:nvPr>
+        </p:nvSpPr>
+        <p:spPr/>
+      </p:sp>
+      <p:sp>
+        <p:nvSpPr>
+          <p:cNvPr id="3" name="Notes Placeholder 2"/>
+          <p:cNvSpPr>
+            <a:spLocks noGrp="1"/>
+          </p:cNvSpPr>
+          <p:nvPr>
+            <p:ph type="body" idx="1"/>
+          </p:nvPr>
+        </p:nvSpPr>
+        <p:spPr/>
+        <p:txBody>
+          <a:bodyPr/>
+          <a:lstStyle/>
+          <a:p/>
+        </p:txBody>
+      </p:sp>
+      <p:sp>
+        <p:nvSpPr>
+          <p:cNvPr id="4" name="Slide Number Placeholder 3"/>
+          <p:cNvSpPr>
+            <a:spLocks noGrp="1"/>
+          </p:cNvSpPr>
+          <p:nvPr>
+            <p:ph type="sldNum" idx="5"/>
+          </p:nvPr>
+        </p:nvSpPr>
+        <p:spPr/>
+        <p:txBody>
+          <a:bodyPr/>
+          <a:lstStyle/>
+          <a:p/>
+        </p:txBody>
+      </p:sp>
+    </p:spTree>
+  </p:cSld>
+  <p:clrMapOvr>
+    <a:masterClrMapping/>
+  </p:clrMapOvr>
+</p:notes>
+</file>
+
+<file path=ppt/notesSlides/notesSlide12.xml><?xml version="1.0" encoding="utf-8"?>
+<p:notes xmlns:a="http://schemas.openxmlformats.org/drawingml/2006/main" xmlns:r="http://schemas.openxmlformats.org/officeDocument/2006/relationships" xmlns:p="http://schemas.openxmlformats.org/presentationml/2006/main">
+  <p:cSld>
+    <p:spTree>
+      <p:nvGrpSpPr>
+        <p:cNvPr id="1" name=""/>
+        <p:cNvGrpSpPr/>
+        <p:nvPr/>
+      </p:nvGrpSpPr>
+      <p:grpSpPr/>
+      <p:sp>
+        <p:nvSpPr>
+          <p:cNvPr id="2" name="Slide Image Placeholder 1"/>
+          <p:cNvSpPr>
+            <a:spLocks noGrp="1"/>
+          </p:cNvSpPr>
+          <p:nvPr>
+            <p:ph type="sldImg"/>
+          </p:nvPr>
+        </p:nvSpPr>
+        <p:spPr/>
+      </p:sp>
+      <p:sp>
+        <p:nvSpPr>
+          <p:cNvPr id="3" name="Notes Placeholder 2"/>
+          <p:cNvSpPr>
+            <a:spLocks noGrp="1"/>
+          </p:cNvSpPr>
+          <p:nvPr>
+            <p:ph type="body" idx="1"/>
+          </p:nvPr>
+        </p:nvSpPr>
+        <p:spPr/>
+        <p:txBody>
+          <a:bodyPr/>
+          <a:lstStyle/>
+          <a:p/>
+        </p:txBody>
+      </p:sp>
+      <p:sp>
+        <p:nvSpPr>
+          <p:cNvPr id="4" name="Slide Number Placeholder 3"/>
+          <p:cNvSpPr>
+            <a:spLocks noGrp="1"/>
+          </p:cNvSpPr>
+          <p:nvPr>
+            <p:ph type="sldNum" idx="5"/>
+          </p:nvPr>
+        </p:nvSpPr>
+        <p:spPr/>
+        <p:txBody>
+          <a:bodyPr/>
+          <a:lstStyle/>
+          <a:p/>
+        </p:txBody>
+      </p:sp>
+    </p:spTree>
+  </p:cSld>
+  <p:clrMapOvr>
+    <a:masterClrMapping/>
+  </p:clrMapOvr>
+</p:notes>
+</file>
+
+<file path=ppt/notesSlides/notesSlide13.xml><?xml version="1.0" encoding="utf-8"?>
+<p:notes xmlns:a="http://schemas.openxmlformats.org/drawingml/2006/main" xmlns:r="http://schemas.openxmlformats.org/officeDocument/2006/relationships" xmlns:p="http://schemas.openxmlformats.org/presentationml/2006/main">
+  <p:cSld>
+    <p:spTree>
+      <p:nvGrpSpPr>
+        <p:cNvPr id="1" name=""/>
+        <p:cNvGrpSpPr/>
+        <p:nvPr/>
+      </p:nvGrpSpPr>
+      <p:grpSpPr/>
+      <p:sp>
+        <p:nvSpPr>
+          <p:cNvPr id="2" name="Slide Image Placeholder 1"/>
+          <p:cNvSpPr>
+            <a:spLocks noGrp="1"/>
+          </p:cNvSpPr>
+          <p:nvPr>
+            <p:ph type="sldImg"/>
+          </p:nvPr>
+        </p:nvSpPr>
+        <p:spPr/>
+      </p:sp>
+      <p:sp>
+        <p:nvSpPr>
+          <p:cNvPr id="3" name="Notes Placeholder 2"/>
+          <p:cNvSpPr>
+            <a:spLocks noGrp="1"/>
+          </p:cNvSpPr>
+          <p:nvPr>
+            <p:ph type="body" idx="1"/>
+          </p:nvPr>
+        </p:nvSpPr>
+        <p:spPr/>
+        <p:txBody>
+          <a:bodyPr/>
+          <a:lstStyle/>
+          <a:p/>
+        </p:txBody>
+      </p:sp>
+      <p:sp>
+        <p:nvSpPr>
+          <p:cNvPr id="4" name="Slide Number Placeholder 3"/>
+          <p:cNvSpPr>
+            <a:spLocks noGrp="1"/>
+          </p:cNvSpPr>
+          <p:nvPr>
+            <p:ph type="sldNum" idx="5"/>
+          </p:nvPr>
+        </p:nvSpPr>
+        <p:spPr/>
+        <p:txBody>
+          <a:bodyPr/>
+          <a:lstStyle/>
+          <a:p/>
+        </p:txBody>
+      </p:sp>
+    </p:spTree>
+  </p:cSld>
+  <p:clrMapOvr>
+    <a:masterClrMapping/>
+  </p:clrMapOvr>
+</p:notes>
+</file>
+
+<file path=ppt/notesSlides/notesSlide14.xml><?xml version="1.0" encoding="utf-8"?>
+<p:notes xmlns:a="http://schemas.openxmlformats.org/drawingml/2006/main" xmlns:r="http://schemas.openxmlformats.org/officeDocument/2006/relationships" xmlns:p="http://schemas.openxmlformats.org/presentationml/2006/main">
+  <p:cSld>
+    <p:spTree>
+      <p:nvGrpSpPr>
+        <p:cNvPr id="1" name=""/>
+        <p:cNvGrpSpPr/>
+        <p:nvPr/>
+      </p:nvGrpSpPr>
+      <p:grpSpPr/>
+      <p:sp>
+        <p:nvSpPr>
+          <p:cNvPr id="2" name="Slide Image Placeholder 1"/>
+          <p:cNvSpPr>
+            <a:spLocks noGrp="1"/>
+          </p:cNvSpPr>
+          <p:nvPr>
+            <p:ph type="sldImg"/>
+          </p:nvPr>
+        </p:nvSpPr>
+        <p:spPr/>
+      </p:sp>
+      <p:sp>
+        <p:nvSpPr>
+          <p:cNvPr id="3" name="Notes Placeholder 2"/>
+          <p:cNvSpPr>
+            <a:spLocks noGrp="1"/>
+          </p:cNvSpPr>
+          <p:nvPr>
+            <p:ph type="body" idx="1"/>
+          </p:nvPr>
+        </p:nvSpPr>
+        <p:spPr/>
+        <p:txBody>
+          <a:bodyPr/>
+          <a:lstStyle/>
+          <a:p>
+            <a:r>
+              <a:t>第一步解决字符串不可推理问题。相同变量名不保证同一对象，不同表达式也可能指向同一对象；类型化事件必须保留原始源码与身份推导链。无法证明时输出 UNKNOWN。</a:t>
+            </a:r>
+          </a:p>
+          <a:p/>
+          <a:p>
+            <a:r>
+              <a:t>[Sources]</a:t>
+            </a:r>
+          </a:p>
+          <a:p>
+            <a:r>
+              <a:t>- E:/yanjiusheng/阅读论文/file_system/SE_EOD/PROJECT_HANDOFF.md</a:t>
+            </a:r>
+          </a:p>
+          <a:p>
+            <a:r>
+              <a:t>- C:/Users/yan12/.codex/attachments/d7a7215a-5065-4d78-94c1-caeecf056841/pasted-text.txt</a:t>
+            </a:r>
+          </a:p>
+          <a:p>
+            <a:r>
+              <a:t>[/Sources]</a:t>
+            </a:r>
+          </a:p>
+        </p:txBody>
+      </p:sp>
+      <p:sp>
+        <p:nvSpPr>
+          <p:cNvPr id="4" name="Slide Number Placeholder 3"/>
+          <p:cNvSpPr>
+            <a:spLocks noGrp="1"/>
+          </p:cNvSpPr>
+          <p:nvPr>
+            <p:ph type="sldNum" idx="5"/>
+          </p:nvPr>
+        </p:nvSpPr>
+        <p:spPr/>
+        <p:txBody>
+          <a:bodyPr/>
+          <a:lstStyle/>
+          <a:p/>
+        </p:txBody>
+      </p:sp>
+    </p:spTree>
+  </p:cSld>
+  <p:clrMapOvr>
+    <a:masterClrMapping/>
+  </p:clrMapOvr>
+</p:notes>
+</file>
+
+<file path=ppt/notesSlides/notesSlide15.xml><?xml version="1.0" encoding="utf-8"?>
+<p:notes xmlns:a="http://schemas.openxmlformats.org/drawingml/2006/main" xmlns:r="http://schemas.openxmlformats.org/officeDocument/2006/relationships" xmlns:p="http://schemas.openxmlformats.org/presentationml/2006/main">
+  <p:cSld>
+    <p:spTree>
+      <p:nvGrpSpPr>
+        <p:cNvPr id="1" name=""/>
+        <p:cNvGrpSpPr/>
+        <p:nvPr/>
+      </p:nvGrpSpPr>
+      <p:grpSpPr/>
+      <p:sp>
+        <p:nvSpPr>
+          <p:cNvPr id="2" name="Slide Image Placeholder 1"/>
+          <p:cNvSpPr>
+            <a:spLocks noGrp="1"/>
+          </p:cNvSpPr>
+          <p:nvPr>
+            <p:ph type="sldImg"/>
+          </p:nvPr>
+        </p:nvSpPr>
+        <p:spPr/>
+      </p:sp>
+      <p:sp>
+        <p:nvSpPr>
+          <p:cNvPr id="3" name="Notes Placeholder 2"/>
+          <p:cNvSpPr>
+            <a:spLocks noGrp="1"/>
+          </p:cNvSpPr>
+          <p:nvPr>
+            <p:ph type="body" idx="1"/>
+          </p:nvPr>
+        </p:nvSpPr>
+        <p:spPr/>
+        <p:txBody>
+          <a:bodyPr/>
+          <a:lstStyle/>
+          <a:p/>
+        </p:txBody>
+      </p:sp>
+      <p:sp>
+        <p:nvSpPr>
+          <p:cNvPr id="4" name="Slide Number Placeholder 3"/>
+          <p:cNvSpPr>
+            <a:spLocks noGrp="1"/>
+          </p:cNvSpPr>
+          <p:nvPr>
+            <p:ph type="sldNum" idx="5"/>
+          </p:nvPr>
+        </p:nvSpPr>
+        <p:spPr/>
+        <p:txBody>
+          <a:bodyPr/>
+          <a:lstStyle/>
+          <a:p/>
+        </p:txBody>
+      </p:sp>
+    </p:spTree>
+  </p:cSld>
+  <p:clrMapOvr>
+    <a:masterClrMapping/>
+  </p:clrMapOvr>
+</p:notes>
+</file>
+
+<file path=ppt/notesSlides/notesSlide16.xml><?xml version="1.0" encoding="utf-8"?>
+<p:notes xmlns:a="http://schemas.openxmlformats.org/drawingml/2006/main" xmlns:r="http://schemas.openxmlformats.org/officeDocument/2006/relationships" xmlns:p="http://schemas.openxmlformats.org/presentationml/2006/main">
+  <p:cSld>
+    <p:spTree>
+      <p:nvGrpSpPr>
+        <p:cNvPr id="1" name=""/>
+        <p:cNvGrpSpPr/>
+        <p:nvPr/>
+      </p:nvGrpSpPr>
+      <p:grpSpPr/>
+      <p:sp>
+        <p:nvSpPr>
+          <p:cNvPr id="2" name="Slide Image Placeholder 1"/>
+          <p:cNvSpPr>
+            <a:spLocks noGrp="1"/>
+          </p:cNvSpPr>
+          <p:nvPr>
+            <p:ph type="sldImg"/>
+          </p:nvPr>
+        </p:nvSpPr>
+        <p:spPr/>
+      </p:sp>
+      <p:sp>
+        <p:nvSpPr>
+          <p:cNvPr id="3" name="Notes Placeholder 2"/>
+          <p:cNvSpPr>
+            <a:spLocks noGrp="1"/>
+          </p:cNvSpPr>
+          <p:nvPr>
+            <p:ph type="body" idx="1"/>
+          </p:nvPr>
+        </p:nvSpPr>
+        <p:spPr/>
+        <p:txBody>
+          <a:bodyPr/>
+          <a:lstStyle/>
+          <a:p/>
+        </p:txBody>
+      </p:sp>
+      <p:sp>
+        <p:nvSpPr>
+          <p:cNvPr id="4" name="Slide Number Placeholder 3"/>
+          <p:cNvSpPr>
+            <a:spLocks noGrp="1"/>
+          </p:cNvSpPr>
+          <p:nvPr>
+            <p:ph type="sldNum" idx="5"/>
+          </p:nvPr>
+        </p:nvSpPr>
+        <p:spPr/>
+        <p:txBody>
+          <a:bodyPr/>
+          <a:lstStyle/>
+          <a:p/>
+        </p:txBody>
+      </p:sp>
+    </p:spTree>
+  </p:cSld>
+  <p:clrMapOvr>
+    <a:masterClrMapping/>
+  </p:clrMapOvr>
+</p:notes>
+</file>
+
+<file path=ppt/notesSlides/notesSlide17.xml><?xml version="1.0" encoding="utf-8"?>
+<p:notes xmlns:a="http://schemas.openxmlformats.org/drawingml/2006/main" xmlns:r="http://schemas.openxmlformats.org/officeDocument/2006/relationships" xmlns:p="http://schemas.openxmlformats.org/presentationml/2006/main">
+  <p:cSld>
+    <p:spTree>
+      <p:nvGrpSpPr>
+        <p:cNvPr id="1" name=""/>
+        <p:cNvGrpSpPr/>
+        <p:nvPr/>
+      </p:nvGrpSpPr>
+      <p:grpSpPr/>
+      <p:sp>
+        <p:nvSpPr>
+          <p:cNvPr id="2" name="Slide Image Placeholder 1"/>
+          <p:cNvSpPr>
+            <a:spLocks noGrp="1"/>
+          </p:cNvSpPr>
+          <p:nvPr>
+            <p:ph type="sldImg"/>
+          </p:nvPr>
+        </p:nvSpPr>
+        <p:spPr/>
+      </p:sp>
+      <p:sp>
+        <p:nvSpPr>
+          <p:cNvPr id="3" name="Notes Placeholder 2"/>
+          <p:cNvSpPr>
+            <a:spLocks noGrp="1"/>
+          </p:cNvSpPr>
+          <p:nvPr>
+            <p:ph type="body" idx="1"/>
+          </p:nvPr>
+        </p:nvSpPr>
+        <p:spPr/>
+        <p:txBody>
+          <a:bodyPr/>
+          <a:lstStyle/>
+          <a:p/>
+        </p:txBody>
+      </p:sp>
+      <p:sp>
+        <p:nvSpPr>
+          <p:cNvPr id="4" name="Slide Number Placeholder 3"/>
+          <p:cNvSpPr>
+            <a:spLocks noGrp="1"/>
+          </p:cNvSpPr>
+          <p:nvPr>
+            <p:ph type="sldNum" idx="5"/>
+          </p:nvPr>
+        </p:nvSpPr>
+        <p:spPr/>
+        <p:txBody>
+          <a:bodyPr/>
+          <a:lstStyle/>
+          <a:p/>
+        </p:txBody>
+      </p:sp>
+    </p:spTree>
+  </p:cSld>
+  <p:clrMapOvr>
+    <a:masterClrMapping/>
+  </p:clrMapOvr>
+</p:notes>
+</file>
+
+<file path=ppt/notesSlides/notesSlide18.xml><?xml version="1.0" encoding="utf-8"?>
+<p:notes xmlns:a="http://schemas.openxmlformats.org/drawingml/2006/main" xmlns:r="http://schemas.openxmlformats.org/officeDocument/2006/relationships" xmlns:p="http://schemas.openxmlformats.org/presentationml/2006/main">
+  <p:cSld>
+    <p:spTree>
+      <p:nvGrpSpPr>
+        <p:cNvPr id="1" name=""/>
+        <p:cNvGrpSpPr/>
+        <p:nvPr/>
+      </p:nvGrpSpPr>
+      <p:grpSpPr/>
+      <p:sp>
+        <p:nvSpPr>
+          <p:cNvPr id="2" name="Slide Image Placeholder 1"/>
+          <p:cNvSpPr>
+            <a:spLocks noGrp="1"/>
+          </p:cNvSpPr>
+          <p:nvPr>
+            <p:ph type="sldImg"/>
+          </p:nvPr>
+        </p:nvSpPr>
+        <p:spPr/>
+      </p:sp>
+      <p:sp>
+        <p:nvSpPr>
+          <p:cNvPr id="3" name="Notes Placeholder 2"/>
+          <p:cNvSpPr>
+            <a:spLocks noGrp="1"/>
+          </p:cNvSpPr>
+          <p:nvPr>
+            <p:ph type="body" idx="1"/>
+          </p:nvPr>
+        </p:nvSpPr>
+        <p:spPr/>
+        <p:txBody>
+          <a:bodyPr/>
+          <a:lstStyle/>
+          <a:p/>
+        </p:txBody>
+      </p:sp>
+      <p:sp>
+        <p:nvSpPr>
+          <p:cNvPr id="4" name="Slide Number Placeholder 3"/>
+          <p:cNvSpPr>
+            <a:spLocks noGrp="1"/>
+          </p:cNvSpPr>
+          <p:nvPr>
+            <p:ph type="sldNum" idx="5"/>
+          </p:nvPr>
+        </p:nvSpPr>
+        <p:spPr/>
+        <p:txBody>
+          <a:bodyPr/>
+          <a:lstStyle/>
+          <a:p/>
+        </p:txBody>
+      </p:sp>
+    </p:spTree>
+  </p:cSld>
+  <p:clrMapOvr>
+    <a:masterClrMapping/>
+  </p:clrMapOvr>
+</p:notes>
+</file>
+
+<file path=ppt/notesSlides/notesSlide19.xml><?xml version="1.0" encoding="utf-8"?>
 <p:notes xmlns:a="http://schemas.openxmlformats.org/drawingml/2006/main" xmlns:r="http://schemas.openxmlformats.org/officeDocument/2006/relationships" xmlns:p="http://schemas.openxmlformats.org/presentationml/2006/main">
   <p:cSld>
     <p:spTree>
@@ -3065,9 +3620,2371 @@
           </a:p>
         </p:txBody>
       </p:sp>
-      <p:sp>
-        <p:nvSpPr>
-          <p:cNvPr id="21" name="code-IDENTITY-AWARE CANCELLATION"/>
+    </p:spTree>
+  </p:cSld>
+  <p:clrMapOvr>
+    <a:masterClrMapping/>
+  </p:clrMapOvr>
+</p:sld>
+</file>
+
+<file path=ppt/slides/slide12.xml><?xml version="1.0" encoding="utf-8"?>
+<p:sld xmlns:a="http://schemas.openxmlformats.org/drawingml/2006/main" xmlns:r="http://schemas.openxmlformats.org/officeDocument/2006/relationships" xmlns:p="http://schemas.openxmlformats.org/presentationml/2006/main">
+  <p:cSld>
+    <p:spTree>
+      <p:nvGrpSpPr>
+        <p:cNvPr id="1" name=""/>
+        <p:cNvGrpSpPr/>
+        <p:nvPr/>
+      </p:nvGrpSpPr>
+      <p:grpSpPr/>
+      <p:sp>
+        <p:nvSpPr>
+          <p:cNvPr id="2" name="文本框 1"/>
+          <p:cNvSpPr txBox="1"/>
+          <p:nvPr/>
+        </p:nvSpPr>
+        <p:spPr>
+          <a:xfrm>
+            <a:off x="104775" y="159385"/>
+            <a:ext cx="6096000" cy="306705"/>
+          </a:xfrm>
+          <a:prstGeom prst="rect">
+            <a:avLst/>
+          </a:prstGeom>
+          <a:noFill/>
+        </p:spPr>
+        <p:txBody>
+          <a:bodyPr wrap="square" rtlCol="0" anchor="t">
+            <a:spAutoFit/>
+          </a:bodyPr>
+          <a:p>
+            <a:r>
+              <a:rPr sz="1400" b="1">
+                <a:solidFill>
+                  <a:srgbClr val="000000"/>
+                </a:solidFill>
+                <a:latin typeface="微软雅黑" panose="020B0503020204020204" pitchFamily="34" charset="-122"/>
+                <a:ea typeface="微软雅黑" panose="020B0503020204020204" pitchFamily="34" charset="-122"/>
+                <a:cs typeface="微软雅黑" panose="020B0503020204020204" pitchFamily="34" charset="-122"/>
+                <a:sym typeface="+mn-ea"/>
+              </a:rPr>
+              <a:t>E_f · reaching effects</a:t>
+            </a:r>
+            <a:endParaRPr lang="zh-CN" altLang="en-US" sz="1400" b="1">
+              <a:solidFill>
+                <a:srgbClr val="000000"/>
+              </a:solidFill>
+              <a:latin typeface="微软雅黑" panose="020B0503020204020204" pitchFamily="34" charset="-122"/>
+              <a:ea typeface="微软雅黑" panose="020B0503020204020204" pitchFamily="34" charset="-122"/>
+              <a:cs typeface="微软雅黑" panose="020B0503020204020204" pitchFamily="34" charset="-122"/>
+              <a:sym typeface="+mn-ea"/>
+            </a:endParaRPr>
+          </a:p>
+        </p:txBody>
+      </p:sp>
+      <p:sp>
+        <p:nvSpPr>
+          <p:cNvPr id="3" name="文本框 2"/>
+          <p:cNvSpPr txBox="1"/>
+          <p:nvPr/>
+        </p:nvSpPr>
+        <p:spPr>
+          <a:xfrm>
+            <a:off x="339725" y="591185"/>
+            <a:ext cx="10419080" cy="6048375"/>
+          </a:xfrm>
+          <a:prstGeom prst="rect">
+            <a:avLst/>
+          </a:prstGeom>
+          <a:noFill/>
+        </p:spPr>
+        <p:txBody>
+          <a:bodyPr wrap="square" rtlCol="0">
+            <a:noAutofit/>
+          </a:bodyPr>
+          <a:p>
+            <a:r>
+              <a:rPr lang="zh-CN" altLang="en-US" sz="1400"/>
+              <a:t>具体工作</a:t>
+            </a:r>
+            <a:endParaRPr lang="zh-CN" altLang="en-US" sz="1400"/>
+          </a:p>
+          <a:p>
+            <a:r>
+              <a:rPr lang="zh-CN" altLang="en-US" sz="1400"/>
+              <a:t>对于每个失败点</a:t>
+            </a:r>
+            <a:r>
+              <a:rPr lang="en-US" altLang="zh-CN" sz="1400"/>
+              <a:t> f</a:t>
+            </a:r>
+            <a:r>
+              <a:rPr lang="zh-CN" altLang="en-US" sz="1400"/>
+              <a:t>，从失败点向后遍历</a:t>
+            </a:r>
+            <a:r>
+              <a:rPr lang="en-US" altLang="zh-CN" sz="1400"/>
+              <a:t> CFG</a:t>
+            </a:r>
+            <a:r>
+              <a:rPr lang="zh-CN" altLang="en-US" sz="1400"/>
+              <a:t>，找出能够到达该失败点的元数据</a:t>
+            </a:r>
+            <a:r>
+              <a:rPr lang="en-US" altLang="zh-CN" sz="1400"/>
+              <a:t> effect</a:t>
+            </a:r>
+            <a:r>
+              <a:rPr lang="zh-CN" altLang="en-US" sz="1400"/>
+              <a:t>。</a:t>
+            </a:r>
+            <a:endParaRPr lang="zh-CN" altLang="en-US" sz="1400"/>
+          </a:p>
+          <a:p>
+            <a:endParaRPr lang="zh-CN" altLang="en-US" sz="1400"/>
+          </a:p>
+          <a:p>
+            <a:r>
+              <a:rPr lang="zh-CN" altLang="en-US" sz="1400"/>
+              <a:t>主要来源包括：</a:t>
+            </a:r>
+            <a:endParaRPr lang="zh-CN" altLang="en-US" sz="1400"/>
+          </a:p>
+          <a:p>
+            <a:r>
+              <a:rPr lang="zh-CN" altLang="en-US" sz="1400"/>
+              <a:t>当前函数中的直接字段修改</a:t>
+            </a:r>
+            <a:endParaRPr lang="zh-CN" altLang="en-US" sz="1400"/>
+          </a:p>
+          <a:p>
+            <a:r>
+              <a:rPr lang="zh-CN" altLang="en-US" sz="1400"/>
+              <a:t>显式元数据</a:t>
+            </a:r>
+            <a:r>
+              <a:rPr lang="en-US" altLang="zh-CN" sz="1400"/>
+              <a:t> API</a:t>
+            </a:r>
+            <a:endParaRPr lang="en-US" altLang="zh-CN" sz="1400"/>
+          </a:p>
+          <a:p>
+            <a:r>
+              <a:rPr lang="zh-CN" altLang="en-US" sz="1400"/>
+              <a:t>跨函数</a:t>
+            </a:r>
+            <a:r>
+              <a:rPr lang="en-US" altLang="zh-CN" sz="1400"/>
+              <a:t> summary </a:t>
+            </a:r>
+            <a:r>
+              <a:rPr lang="zh-CN" altLang="en-US" sz="1400"/>
+              <a:t>投影</a:t>
+            </a:r>
+            <a:endParaRPr lang="zh-CN" altLang="en-US" sz="1400"/>
+          </a:p>
+          <a:p>
+            <a:endParaRPr lang="zh-CN" altLang="en-US" sz="1400"/>
+          </a:p>
+          <a:p>
+            <a:r>
+              <a:rPr lang="zh-CN" altLang="en-US" sz="1400"/>
+              <a:t>它解决的是：</a:t>
+            </a:r>
+            <a:endParaRPr lang="zh-CN" altLang="en-US" sz="1400"/>
+          </a:p>
+          <a:p>
+            <a:r>
+              <a:rPr lang="zh-CN" altLang="en-US" sz="1400"/>
+              <a:t>失败发生之前，哪些元数据修改已经执行，因而可能需要在错误路径中处理？</a:t>
+            </a:r>
+            <a:endParaRPr lang="zh-CN" altLang="en-US" sz="1400"/>
+          </a:p>
+          <a:p>
+            <a:endParaRPr lang="en-US" altLang="zh-CN" sz="1400"/>
+          </a:p>
+          <a:p>
+            <a:r>
+              <a:rPr lang="zh-CN" altLang="en-US" sz="1400"/>
+              <a:t>没有</a:t>
+            </a:r>
+            <a:r>
+              <a:rPr lang="en-US" altLang="zh-CN" sz="1400"/>
+              <a:t> E_f</a:t>
+            </a:r>
+            <a:r>
+              <a:rPr lang="zh-CN" altLang="en-US" sz="1400"/>
+              <a:t>，工具只能看到错误路径上的</a:t>
+            </a:r>
+            <a:r>
+              <a:rPr lang="en-US" altLang="zh-CN" sz="1400"/>
+              <a:t> cleanup</a:t>
+            </a:r>
+            <a:r>
+              <a:rPr lang="zh-CN" altLang="en-US" sz="1400"/>
+              <a:t>，却不知道</a:t>
+            </a:r>
+            <a:r>
+              <a:rPr lang="en-US" altLang="zh-CN" sz="1400"/>
+              <a:t> cleanup </a:t>
+            </a:r>
+            <a:r>
+              <a:rPr lang="zh-CN" altLang="en-US" sz="1400"/>
+              <a:t>应该对应什么修改。</a:t>
+            </a:r>
+            <a:endParaRPr lang="zh-CN" altLang="en-US" sz="1400"/>
+          </a:p>
+          <a:p>
+            <a:endParaRPr lang="zh-CN" altLang="en-US" sz="1400"/>
+          </a:p>
+          <a:p>
+            <a:endParaRPr lang="zh-CN" altLang="en-US" sz="1400"/>
+          </a:p>
+          <a:p>
+            <a:r>
+              <a:rPr lang="zh-CN" altLang="en-US" sz="1400"/>
+              <a:t>缺点：</a:t>
+            </a:r>
+            <a:endParaRPr lang="zh-CN" altLang="en-US" sz="1400"/>
+          </a:p>
+          <a:p>
+            <a:endParaRPr lang="zh-CN" altLang="en-US" sz="1400"/>
+          </a:p>
+          <a:p>
+            <a:r>
+              <a:rPr lang="en-US" altLang="zh-CN" sz="1400"/>
+              <a:t>E_f </a:t>
+            </a:r>
+            <a:r>
+              <a:rPr lang="zh-CN" altLang="en-US" sz="1400"/>
+              <a:t>记录的是单个</a:t>
+            </a:r>
+            <a:r>
+              <a:rPr lang="en-US" altLang="zh-CN" sz="1400"/>
+              <a:t> effect</a:t>
+            </a:r>
+            <a:r>
+              <a:rPr lang="zh-CN" altLang="en-US" sz="1400"/>
+              <a:t>：</a:t>
+            </a:r>
+            <a:endParaRPr lang="zh-CN" altLang="en-US" sz="1400"/>
+          </a:p>
+          <a:p>
+            <a:r>
+              <a:rPr lang="zh-CN" altLang="en-US" sz="1400"/>
+              <a:t>被修改的根对象</a:t>
+            </a:r>
+            <a:r>
+              <a:rPr lang="en-US" altLang="zh-CN" sz="1400"/>
+              <a:t>   </a:t>
+            </a:r>
+            <a:r>
+              <a:rPr lang="zh-CN" altLang="en-US" sz="1400"/>
+              <a:t>被修改的字段或属性</a:t>
+            </a:r>
+            <a:r>
+              <a:rPr lang="en-US" altLang="zh-CN" sz="1400"/>
+              <a:t>     </a:t>
+            </a:r>
+            <a:r>
+              <a:rPr lang="zh-CN" altLang="en-US" sz="1400"/>
+              <a:t>修改类型</a:t>
+            </a:r>
+            <a:r>
+              <a:rPr lang="en-US" altLang="zh-CN" sz="1400"/>
+              <a:t>       </a:t>
+            </a:r>
+            <a:r>
+              <a:rPr lang="zh-CN" altLang="en-US" sz="1400"/>
+              <a:t>写入或操作的值</a:t>
+            </a:r>
+            <a:endParaRPr lang="zh-CN" altLang="en-US" sz="1400"/>
+          </a:p>
+          <a:p>
+            <a:r>
+              <a:rPr lang="en-US" altLang="zh-CN" sz="1400"/>
+              <a:t>root +                key +                          delta +          value</a:t>
+            </a:r>
+            <a:endParaRPr lang="en-US" altLang="zh-CN" sz="1400"/>
+          </a:p>
+          <a:p>
+            <a:r>
+              <a:rPr lang="zh-CN" altLang="en-US" sz="1400"/>
+              <a:t>例如：</a:t>
+            </a:r>
+            <a:endParaRPr lang="zh-CN" altLang="en-US" sz="1400"/>
+          </a:p>
+          <a:p>
+            <a:r>
+              <a:rPr lang="en-US" altLang="zh-CN" sz="1400"/>
+              <a:t>SET inode.bitmap = allocated</a:t>
+            </a:r>
+            <a:endParaRPr lang="en-US" altLang="zh-CN" sz="1400"/>
+          </a:p>
+          <a:p>
+            <a:endParaRPr lang="en-US" altLang="zh-CN" sz="1400"/>
+          </a:p>
+          <a:p>
+            <a:endParaRPr lang="en-US" altLang="zh-CN" sz="1400"/>
+          </a:p>
+          <a:p>
+            <a:r>
+              <a:rPr lang="zh-CN" altLang="en-US" sz="1400"/>
+              <a:t>但它不理解</a:t>
+            </a:r>
+            <a:r>
+              <a:rPr lang="zh-CN" altLang="en-US" sz="1400"/>
+              <a:t>元数据之间的不变量：</a:t>
+            </a:r>
+            <a:endParaRPr lang="zh-CN" altLang="en-US" sz="1400"/>
+          </a:p>
+          <a:p>
+            <a:r>
+              <a:rPr lang="en-US" altLang="zh-CN" sz="1400"/>
+              <a:t>Dentry(P,N,I) -&gt; AllocatedInode(I)</a:t>
+            </a:r>
+            <a:br>
+              <a:rPr lang="en-US" altLang="zh-CN" sz="1400"/>
+            </a:br>
+            <a:r>
+              <a:rPr lang="zh-CN" altLang="en-US" sz="1400"/>
+              <a:t>如果父目录</a:t>
+            </a:r>
+            <a:r>
+              <a:rPr lang="en-US" altLang="zh-CN" sz="1400"/>
+              <a:t> P </a:t>
+            </a:r>
+            <a:r>
+              <a:rPr lang="zh-CN" altLang="en-US" sz="1400"/>
+              <a:t>中存在名称为</a:t>
+            </a:r>
+            <a:r>
+              <a:rPr lang="en-US" altLang="zh-CN" sz="1400"/>
+              <a:t> N</a:t>
+            </a:r>
+            <a:r>
+              <a:rPr lang="zh-CN" altLang="en-US" sz="1400"/>
+              <a:t>、指向</a:t>
+            </a:r>
+            <a:r>
+              <a:rPr lang="en-US" altLang="zh-CN" sz="1400"/>
+              <a:t> inode I </a:t>
+            </a:r>
+            <a:r>
+              <a:rPr lang="zh-CN" altLang="en-US" sz="1400"/>
+              <a:t>的目录项，那么</a:t>
+            </a:r>
+            <a:r>
+              <a:rPr lang="en-US" altLang="zh-CN" sz="1400"/>
+              <a:t> inode I </a:t>
+            </a:r>
+            <a:r>
+              <a:rPr lang="zh-CN" altLang="en-US" sz="1400"/>
+              <a:t>必须是已分配的。</a:t>
+            </a:r>
+            <a:endParaRPr lang="zh-CN" altLang="en-US" sz="1400"/>
+          </a:p>
+          <a:p>
+            <a:endParaRPr lang="zh-CN" altLang="en-US" sz="1400"/>
+          </a:p>
+        </p:txBody>
+      </p:sp>
+    </p:spTree>
+  </p:cSld>
+  <p:clrMapOvr>
+    <a:masterClrMapping/>
+  </p:clrMapOvr>
+</p:sld>
+</file>
+
+<file path=ppt/slides/slide13.xml><?xml version="1.0" encoding="utf-8"?>
+<p:sld xmlns:a="http://schemas.openxmlformats.org/drawingml/2006/main" xmlns:r="http://schemas.openxmlformats.org/officeDocument/2006/relationships" xmlns:p="http://schemas.openxmlformats.org/presentationml/2006/main">
+  <p:cSld>
+    <p:spTree>
+      <p:nvGrpSpPr>
+        <p:cNvPr id="1" name=""/>
+        <p:cNvGrpSpPr/>
+        <p:nvPr/>
+      </p:nvGrpSpPr>
+      <p:grpSpPr/>
+      <p:sp>
+        <p:nvSpPr>
+          <p:cNvPr id="2" name="文本框 1"/>
+          <p:cNvSpPr txBox="1"/>
+          <p:nvPr/>
+        </p:nvSpPr>
+        <p:spPr>
+          <a:xfrm>
+            <a:off x="247015" y="158115"/>
+            <a:ext cx="4064000" cy="368300"/>
+          </a:xfrm>
+          <a:prstGeom prst="rect">
+            <a:avLst/>
+          </a:prstGeom>
+          <a:noFill/>
+        </p:spPr>
+        <p:txBody>
+          <a:bodyPr wrap="square" rtlCol="0">
+            <a:spAutoFit/>
+          </a:bodyPr>
+          <a:p>
+            <a:r>
+              <a:rPr b="1">
+                <a:solidFill>
+                  <a:srgbClr val="000000"/>
+                </a:solidFill>
+                <a:latin typeface="微软雅黑" panose="020B0503020204020204" pitchFamily="34" charset="-122"/>
+                <a:ea typeface="微软雅黑" panose="020B0503020204020204" pitchFamily="34" charset="-122"/>
+                <a:cs typeface="微软雅黑" panose="020B0503020204020204" pitchFamily="34" charset="-122"/>
+                <a:sym typeface="+mn-ea"/>
+              </a:rPr>
+              <a:t>C_f · cancellation</a:t>
+            </a:r>
+            <a:endParaRPr lang="zh-CN" altLang="en-US"/>
+          </a:p>
+        </p:txBody>
+      </p:sp>
+      <p:sp>
+        <p:nvSpPr>
+          <p:cNvPr id="3" name="文本框 2"/>
+          <p:cNvSpPr txBox="1"/>
+          <p:nvPr/>
+        </p:nvSpPr>
+        <p:spPr>
+          <a:xfrm>
+            <a:off x="474980" y="526415"/>
+            <a:ext cx="11358245" cy="6122035"/>
+          </a:xfrm>
+          <a:prstGeom prst="rect">
+            <a:avLst/>
+          </a:prstGeom>
+          <a:noFill/>
+        </p:spPr>
+        <p:txBody>
+          <a:bodyPr wrap="square" rtlCol="0">
+            <a:noAutofit/>
+          </a:bodyPr>
+          <a:p>
+            <a:r>
+              <a:rPr lang="zh-CN" altLang="en-US" sz="1400"/>
+              <a:t>具体工作</a:t>
+            </a:r>
+            <a:endParaRPr lang="zh-CN" altLang="en-US" sz="1400"/>
+          </a:p>
+          <a:p>
+            <a:r>
+              <a:rPr lang="en-US" altLang="zh-CN" sz="1400"/>
+              <a:t>C_f </a:t>
+            </a:r>
+            <a:r>
+              <a:rPr lang="zh-CN" altLang="en-US" sz="1400"/>
+              <a:t>收集能够撤销或补偿</a:t>
+            </a:r>
+            <a:r>
+              <a:rPr lang="en-US" altLang="zh-CN" sz="1400"/>
+              <a:t> E_f </a:t>
+            </a:r>
+            <a:r>
+              <a:rPr lang="zh-CN" altLang="en-US" sz="1400"/>
+              <a:t>的操作，</a:t>
+            </a:r>
+            <a:endParaRPr lang="zh-CN" altLang="en-US" sz="1400"/>
+          </a:p>
+          <a:p>
+            <a:r>
+              <a:rPr lang="zh-CN" altLang="en-US" sz="1400"/>
+              <a:t>包括：</a:t>
+            </a:r>
+            <a:endParaRPr lang="zh-CN" altLang="en-US" sz="1400"/>
+          </a:p>
+          <a:p>
+            <a:r>
+              <a:rPr lang="zh-CN" altLang="en-US" sz="1400"/>
+              <a:t>失败前已经执行的补偿</a:t>
+            </a:r>
+            <a:endParaRPr lang="zh-CN" altLang="en-US" sz="1400"/>
+          </a:p>
+          <a:p>
+            <a:r>
+              <a:rPr lang="zh-CN" altLang="en-US" sz="1400"/>
+              <a:t>失败调用与错误检查之间的补偿</a:t>
+            </a:r>
+            <a:endParaRPr lang="zh-CN" altLang="en-US" sz="1400"/>
+          </a:p>
+          <a:p>
+            <a:r>
+              <a:rPr lang="zh-CN" altLang="en-US" sz="1400"/>
+              <a:t>错误路径上执行的</a:t>
+            </a:r>
+            <a:r>
+              <a:rPr lang="en-US" altLang="zh-CN" sz="1400"/>
+              <a:t> cleanup</a:t>
+            </a:r>
+            <a:endParaRPr lang="en-US" altLang="zh-CN" sz="1400"/>
+          </a:p>
+          <a:p>
+            <a:endParaRPr lang="en-US" altLang="zh-CN" sz="1400"/>
+          </a:p>
+          <a:p>
+            <a:r>
+              <a:rPr lang="zh-CN" altLang="en-US" sz="1400"/>
+              <a:t>例如：</a:t>
+            </a:r>
+            <a:endParaRPr lang="zh-CN" altLang="en-US" sz="1400"/>
+          </a:p>
+          <a:p>
+            <a:r>
+              <a:rPr lang="en-US" altLang="zh-CN" sz="1400"/>
+              <a:t>inode-&gt;i_blocks += nr;</a:t>
+            </a:r>
+            <a:endParaRPr lang="en-US" altLang="zh-CN" sz="1400"/>
+          </a:p>
+          <a:p>
+            <a:r>
+              <a:rPr lang="en-US" altLang="zh-CN" sz="1400"/>
+              <a:t>ret = fail_metadata();</a:t>
+            </a:r>
+            <a:endParaRPr lang="en-US" altLang="zh-CN" sz="1400"/>
+          </a:p>
+          <a:p>
+            <a:r>
+              <a:rPr lang="en-US" altLang="zh-CN" sz="1400"/>
+              <a:t>if (ret)</a:t>
+            </a:r>
+            <a:endParaRPr lang="en-US" altLang="zh-CN" sz="1400"/>
+          </a:p>
+          <a:p>
+            <a:r>
+              <a:rPr lang="en-US" altLang="zh-CN" sz="1400"/>
+              <a:t>    inode-&gt;i_blocks -= nr;</a:t>
+            </a:r>
+            <a:endParaRPr lang="en-US" altLang="zh-CN" sz="1400"/>
+          </a:p>
+          <a:p>
+            <a:r>
+              <a:rPr lang="zh-CN" altLang="en-US" sz="1400"/>
+              <a:t>得到：</a:t>
+            </a:r>
+            <a:endParaRPr lang="zh-CN" altLang="en-US" sz="1400"/>
+          </a:p>
+          <a:p>
+            <a:r>
+              <a:rPr lang="en-US" altLang="zh-CN" sz="1400"/>
+              <a:t>E_f = { INC inode.i_blocks nr }</a:t>
+            </a:r>
+            <a:endParaRPr lang="en-US" altLang="zh-CN" sz="1400"/>
+          </a:p>
+          <a:p>
+            <a:r>
+              <a:rPr lang="en-US" altLang="zh-CN" sz="1400"/>
+              <a:t>C_f = { DEC inode.i_blocks nr }</a:t>
+            </a:r>
+            <a:endParaRPr lang="en-US" altLang="zh-CN" sz="1400"/>
+          </a:p>
+          <a:p>
+            <a:r>
+              <a:rPr lang="en-US" altLang="zh-CN" sz="1400"/>
+              <a:t>R_f = ∅</a:t>
+            </a:r>
+            <a:endParaRPr lang="en-US" altLang="zh-CN" sz="1400"/>
+          </a:p>
+          <a:p>
+            <a:endParaRPr lang="en-US" altLang="zh-CN" sz="1400"/>
+          </a:p>
+          <a:p>
+            <a:r>
+              <a:rPr lang="zh-CN" altLang="en-US" sz="1400"/>
+              <a:t>它解决的是：</a:t>
+            </a:r>
+            <a:endParaRPr lang="zh-CN" altLang="en-US" sz="1400"/>
+          </a:p>
+          <a:p>
+            <a:r>
+              <a:rPr lang="zh-CN" altLang="en-US" sz="1400"/>
+              <a:t>失败前虽然修改了元数据，但错误路径是否已经通过</a:t>
+            </a:r>
+            <a:r>
+              <a:rPr lang="en-US" altLang="zh-CN" sz="1400"/>
+              <a:t> cleanup </a:t>
+            </a:r>
+            <a:r>
+              <a:rPr lang="zh-CN" altLang="en-US" sz="1400"/>
+              <a:t>把该修改撤销？</a:t>
+            </a:r>
+            <a:endParaRPr lang="zh-CN" altLang="en-US" sz="1400"/>
+          </a:p>
+          <a:p>
+            <a:endParaRPr lang="en-US" altLang="zh-CN" sz="1400"/>
+          </a:p>
+          <a:p>
+            <a:r>
+              <a:rPr lang="zh-CN" altLang="en-US" sz="1400"/>
+              <a:t>缺点</a:t>
+            </a:r>
+            <a:endParaRPr lang="zh-CN" altLang="en-US" sz="1400"/>
+          </a:p>
+          <a:p>
+            <a:r>
+              <a:rPr lang="zh-CN" altLang="en-US" sz="1400"/>
+              <a:t>核心缺点是：</a:t>
+            </a:r>
+            <a:r>
+              <a:rPr lang="en-US" altLang="zh-CN" sz="1400"/>
+              <a:t>C_f </a:t>
+            </a:r>
+            <a:r>
+              <a:rPr lang="zh-CN" altLang="en-US" sz="1400"/>
+              <a:t>判断的是</a:t>
+            </a:r>
+            <a:r>
+              <a:rPr lang="en-US" altLang="zh-CN" sz="1400"/>
+              <a:t>“effect </a:t>
+            </a:r>
+            <a:r>
+              <a:rPr lang="zh-CN" altLang="en-US" sz="1400"/>
+              <a:t>是否被匹配关闭</a:t>
+            </a:r>
+            <a:r>
+              <a:rPr lang="en-US" altLang="zh-CN" sz="1400"/>
+              <a:t>”</a:t>
+            </a:r>
+            <a:r>
+              <a:rPr lang="zh-CN" altLang="en-US" sz="1400"/>
+              <a:t>，不是</a:t>
+            </a:r>
+            <a:r>
+              <a:rPr lang="en-US" altLang="zh-CN" sz="1400"/>
+              <a:t>“cleanup </a:t>
+            </a:r>
+            <a:r>
+              <a:rPr lang="zh-CN" altLang="en-US" sz="1400"/>
+              <a:t>后文件系统是否重新一致</a:t>
+            </a:r>
+            <a:r>
+              <a:rPr lang="en-US" altLang="zh-CN" sz="1400"/>
+              <a:t>”</a:t>
+            </a:r>
+            <a:r>
+              <a:rPr lang="zh-CN" altLang="en-US" sz="1400"/>
+              <a:t>。</a:t>
+            </a:r>
+            <a:endParaRPr lang="zh-CN" altLang="en-US" sz="1400"/>
+          </a:p>
+          <a:p>
+            <a:r>
+              <a:rPr lang="zh-CN" altLang="en-US" sz="1400"/>
+              <a:t>例如：</a:t>
+            </a:r>
+            <a:endParaRPr lang="zh-CN" altLang="en-US" sz="1400"/>
+          </a:p>
+          <a:p>
+            <a:r>
+              <a:rPr lang="en-US" altLang="zh-CN" sz="1400"/>
+              <a:t>ADD_DENTRY(P,N,I)</a:t>
+            </a:r>
+            <a:endParaRPr lang="en-US" altLang="zh-CN" sz="1400"/>
+          </a:p>
+          <a:p>
+            <a:r>
+              <a:rPr lang="en-US" altLang="zh-CN" sz="1400"/>
+              <a:t>FREE_INODE(I)</a:t>
+            </a:r>
+            <a:endParaRPr lang="en-US" altLang="zh-CN" sz="1400"/>
+          </a:p>
+          <a:p>
+            <a:r>
+              <a:rPr lang="zh-CN" altLang="en-US" sz="1400"/>
+              <a:t>即使</a:t>
+            </a:r>
+            <a:r>
+              <a:rPr lang="en-US" altLang="zh-CN" sz="1400"/>
+              <a:t> inode </a:t>
+            </a:r>
+            <a:r>
+              <a:rPr lang="zh-CN" altLang="en-US" sz="1400"/>
+              <a:t>自身的：</a:t>
+            </a:r>
+            <a:endParaRPr lang="zh-CN" altLang="en-US" sz="1400"/>
+          </a:p>
+          <a:p>
+            <a:r>
+              <a:rPr lang="en-US" altLang="zh-CN" sz="1400"/>
+              <a:t>ALLOC_INODE(I) &lt;-&gt; FREE_INODE(I)</a:t>
+            </a:r>
+            <a:endParaRPr lang="en-US" altLang="zh-CN" sz="1400"/>
+          </a:p>
+          <a:p>
+            <a:r>
+              <a:rPr lang="zh-CN" altLang="en-US" sz="1400"/>
+              <a:t>已经完成配对，目录项仍然指向已释放</a:t>
+            </a:r>
+            <a:r>
+              <a:rPr lang="en-US" altLang="zh-CN" sz="1400"/>
+              <a:t> inode</a:t>
+            </a:r>
+            <a:r>
+              <a:rPr lang="zh-CN" altLang="en-US" sz="1400"/>
+              <a:t>。当前</a:t>
+            </a:r>
+            <a:r>
+              <a:rPr lang="en-US" altLang="zh-CN" sz="1400"/>
+              <a:t> C_f </a:t>
+            </a:r>
+            <a:r>
+              <a:rPr lang="zh-CN" altLang="en-US" sz="1400"/>
+              <a:t>没有通用不变量执行器来检查这种跨对象问题。</a:t>
+            </a:r>
+            <a:endParaRPr lang="zh-CN" altLang="en-US" sz="1400"/>
+          </a:p>
+          <a:p>
+            <a:r>
+              <a:rPr lang="zh-CN" altLang="en-US" sz="1400"/>
+              <a:t>本质上仍以匹配和关闭</a:t>
+            </a:r>
+            <a:r>
+              <a:rPr lang="en-US" altLang="zh-CN" sz="1400"/>
+              <a:t> effect </a:t>
+            </a:r>
+            <a:r>
+              <a:rPr lang="zh-CN" altLang="en-US" sz="1400"/>
+              <a:t>为中心。</a:t>
+            </a:r>
+            <a:endParaRPr lang="zh-CN" altLang="en-US" sz="1400"/>
+          </a:p>
+        </p:txBody>
+      </p:sp>
+    </p:spTree>
+  </p:cSld>
+  <p:clrMapOvr>
+    <a:masterClrMapping/>
+  </p:clrMapOvr>
+</p:sld>
+</file>
+
+<file path=ppt/slides/slide14.xml><?xml version="1.0" encoding="utf-8"?>
+<p:sld xmlns:a="http://schemas.openxmlformats.org/drawingml/2006/main" xmlns:r="http://schemas.openxmlformats.org/officeDocument/2006/relationships" xmlns:p="http://schemas.openxmlformats.org/presentationml/2006/main">
+  <p:cSld>
+    <p:spTree>
+      <p:nvGrpSpPr>
+        <p:cNvPr id="1" name=""/>
+        <p:cNvGrpSpPr/>
+        <p:nvPr/>
+      </p:nvGrpSpPr>
+      <p:grpSpPr/>
+      <p:sp>
+        <p:nvSpPr>
+          <p:cNvPr id="2" name="文本框 1"/>
+          <p:cNvSpPr txBox="1"/>
+          <p:nvPr/>
+        </p:nvSpPr>
+        <p:spPr>
+          <a:xfrm>
+            <a:off x="364490" y="151765"/>
+            <a:ext cx="4064000" cy="368300"/>
+          </a:xfrm>
+          <a:prstGeom prst="rect">
+            <a:avLst/>
+          </a:prstGeom>
+          <a:noFill/>
+        </p:spPr>
+        <p:txBody>
+          <a:bodyPr wrap="square" rtlCol="0">
+            <a:spAutoFit/>
+          </a:bodyPr>
+          <a:p>
+            <a:r>
+              <a:rPr b="1">
+                <a:solidFill>
+                  <a:srgbClr val="000000"/>
+                </a:solidFill>
+                <a:latin typeface="微软雅黑" panose="020B0503020204020204" pitchFamily="34" charset="-122"/>
+                <a:ea typeface="微软雅黑" panose="020B0503020204020204" pitchFamily="34" charset="-122"/>
+                <a:cs typeface="微软雅黑" panose="020B0503020204020204" pitchFamily="34" charset="-122"/>
+                <a:sym typeface="+mn-ea"/>
+              </a:rPr>
+              <a:t>T_f · protection</a:t>
+            </a:r>
+            <a:endParaRPr lang="zh-CN" altLang="en-US"/>
+          </a:p>
+        </p:txBody>
+      </p:sp>
+      <p:sp>
+        <p:nvSpPr>
+          <p:cNvPr id="3" name="文本框 2"/>
+          <p:cNvSpPr txBox="1"/>
+          <p:nvPr/>
+        </p:nvSpPr>
+        <p:spPr>
+          <a:xfrm>
+            <a:off x="377190" y="634365"/>
+            <a:ext cx="11568430" cy="6130925"/>
+          </a:xfrm>
+          <a:prstGeom prst="rect">
+            <a:avLst/>
+          </a:prstGeom>
+          <a:noFill/>
+        </p:spPr>
+        <p:txBody>
+          <a:bodyPr wrap="square" rtlCol="0">
+            <a:noAutofit/>
+          </a:bodyPr>
+          <a:p>
+            <a:r>
+              <a:rPr lang="zh-CN" altLang="en-US" sz="1400"/>
+              <a:t>具体工作</a:t>
+            </a:r>
+            <a:endParaRPr lang="zh-CN" altLang="en-US" sz="1400"/>
+          </a:p>
+          <a:p>
+            <a:r>
+              <a:rPr lang="en-US" altLang="zh-CN" sz="1400"/>
+              <a:t>T_f </a:t>
+            </a:r>
+            <a:r>
+              <a:rPr lang="zh-CN" altLang="en-US" sz="1400"/>
+              <a:t>处理那些不需要在当前函数中直接逆转、而是被其他机制接管的</a:t>
+            </a:r>
+            <a:r>
+              <a:rPr lang="en-US" altLang="zh-CN" sz="1400"/>
+              <a:t> effect</a:t>
+            </a:r>
+            <a:r>
+              <a:rPr lang="zh-CN" altLang="en-US" sz="1400"/>
+              <a:t>。</a:t>
+            </a:r>
+            <a:endParaRPr lang="zh-CN" altLang="en-US" sz="1400"/>
+          </a:p>
+          <a:p>
+            <a:endParaRPr lang="zh-CN" altLang="en-US" sz="1400"/>
+          </a:p>
+          <a:p>
+            <a:r>
+              <a:rPr lang="zh-CN" altLang="en-US" sz="1400"/>
+              <a:t>目前考虑：</a:t>
+            </a:r>
+            <a:endParaRPr lang="zh-CN" altLang="en-US" sz="1400"/>
+          </a:p>
+          <a:p>
+            <a:r>
+              <a:rPr lang="en-US" altLang="zh-CN" sz="1400"/>
+              <a:t>transaction abort</a:t>
+            </a:r>
+            <a:endParaRPr lang="en-US" altLang="zh-CN" sz="1400"/>
+          </a:p>
+          <a:p>
+            <a:r>
+              <a:rPr lang="en-US" altLang="zh-CN" sz="1400"/>
+              <a:t>journal ownership</a:t>
+            </a:r>
+            <a:endParaRPr lang="en-US" altLang="zh-CN" sz="1400"/>
+          </a:p>
+          <a:p>
+            <a:r>
+              <a:rPr lang="en-US" altLang="zh-CN" sz="1400"/>
+              <a:t>orphan registration</a:t>
+            </a:r>
+            <a:endParaRPr lang="en-US" altLang="zh-CN" sz="1400"/>
+          </a:p>
+          <a:p>
+            <a:r>
+              <a:rPr lang="en-US" altLang="zh-CN" sz="1400"/>
+              <a:t>recovery/replay ownership</a:t>
+            </a:r>
+            <a:endParaRPr lang="en-US" altLang="zh-CN" sz="1400"/>
+          </a:p>
+          <a:p>
+            <a:endParaRPr lang="en-US" altLang="zh-CN" sz="1400"/>
+          </a:p>
+          <a:p>
+            <a:r>
+              <a:rPr lang="zh-CN" altLang="en-US" sz="1400"/>
+              <a:t>例如，一个</a:t>
+            </a:r>
+            <a:r>
+              <a:rPr lang="en-US" altLang="zh-CN" sz="1400"/>
+              <a:t> effect </a:t>
+            </a:r>
+            <a:r>
+              <a:rPr lang="zh-CN" altLang="en-US" sz="1400"/>
+              <a:t>已明确属于事务</a:t>
+            </a:r>
+            <a:r>
+              <a:rPr lang="en-US" altLang="zh-CN" sz="1400"/>
+              <a:t> trans</a:t>
+            </a:r>
+            <a:r>
+              <a:rPr lang="zh-CN" altLang="en-US" sz="1400"/>
+              <a:t>：</a:t>
+            </a:r>
+            <a:endParaRPr lang="zh-CN" altLang="en-US" sz="1400"/>
+          </a:p>
+          <a:p>
+            <a:r>
+              <a:rPr lang="en-US" altLang="zh-CN" sz="1400"/>
+              <a:t>effect.transaction_ownership.transaction_root = trans</a:t>
+            </a:r>
+            <a:endParaRPr lang="en-US" altLang="zh-CN" sz="1400"/>
+          </a:p>
+          <a:p>
+            <a:r>
+              <a:rPr lang="en-US" altLang="zh-CN" sz="1400"/>
+              <a:t>effect.visibility = TRANSACTION_LOCAL</a:t>
+            </a:r>
+            <a:endParaRPr lang="en-US" altLang="zh-CN" sz="1400"/>
+          </a:p>
+          <a:p>
+            <a:r>
+              <a:rPr lang="zh-CN" altLang="en-US" sz="1400"/>
+              <a:t>错误路径又执行：</a:t>
+            </a:r>
+            <a:endParaRPr lang="zh-CN" altLang="en-US" sz="1400"/>
+          </a:p>
+          <a:p>
+            <a:r>
+              <a:rPr lang="en-US" altLang="zh-CN" sz="1400"/>
+              <a:t>btrfs_abort_transaction(trans, err);</a:t>
+            </a:r>
+            <a:endParaRPr lang="en-US" altLang="zh-CN" sz="1400"/>
+          </a:p>
+          <a:p>
+            <a:r>
+              <a:rPr lang="zh-CN" altLang="en-US" sz="1400"/>
+              <a:t>那么工具可以认定该</a:t>
+            </a:r>
+            <a:r>
+              <a:rPr lang="en-US" altLang="zh-CN" sz="1400"/>
+              <a:t> effect </a:t>
+            </a:r>
+            <a:r>
+              <a:rPr lang="zh-CN" altLang="en-US" sz="1400"/>
+              <a:t>被事务</a:t>
+            </a:r>
+            <a:r>
+              <a:rPr lang="en-US" altLang="zh-CN" sz="1400"/>
+              <a:t> failure domain </a:t>
+            </a:r>
+            <a:r>
+              <a:rPr lang="zh-CN" altLang="en-US" sz="1400"/>
+              <a:t>覆盖。</a:t>
+            </a:r>
+            <a:endParaRPr lang="zh-CN" altLang="en-US" sz="1400"/>
+          </a:p>
+          <a:p>
+            <a:endParaRPr lang="zh-CN" altLang="en-US" sz="1400"/>
+          </a:p>
+          <a:p>
+            <a:r>
+              <a:rPr lang="zh-CN" altLang="en-US" sz="1400"/>
+              <a:t>它解决的是：</a:t>
+            </a:r>
+            <a:endParaRPr lang="zh-CN" altLang="en-US" sz="1400"/>
+          </a:p>
+          <a:p>
+            <a:r>
+              <a:rPr lang="zh-CN" altLang="en-US" sz="1400"/>
+              <a:t>某个</a:t>
+            </a:r>
+            <a:r>
+              <a:rPr lang="en-US" altLang="zh-CN" sz="1400"/>
+              <a:t> effect </a:t>
+            </a:r>
+            <a:r>
+              <a:rPr lang="zh-CN" altLang="en-US" sz="1400"/>
+              <a:t>虽然没有被当前函数显式反向写回，但是否已经合法转交给事务、日志、恢复或终止机制？</a:t>
+            </a:r>
+            <a:endParaRPr lang="zh-CN" altLang="en-US" sz="1400"/>
+          </a:p>
+          <a:p>
+            <a:endParaRPr lang="en-US" altLang="zh-CN" sz="1400"/>
+          </a:p>
+          <a:p>
+            <a:r>
+              <a:rPr lang="zh-CN" altLang="en-US" sz="1400"/>
+              <a:t>缺点</a:t>
+            </a:r>
+            <a:endParaRPr lang="zh-CN" altLang="en-US" sz="1400"/>
+          </a:p>
+          <a:p>
+            <a:r>
+              <a:rPr lang="en-US" altLang="zh-CN" sz="1400"/>
+              <a:t>T_f </a:t>
+            </a:r>
+            <a:r>
+              <a:rPr lang="zh-CN" altLang="en-US" sz="1400"/>
+              <a:t>当前仍然是</a:t>
+            </a:r>
+            <a:r>
+              <a:rPr lang="en-US" altLang="zh-CN" sz="1400"/>
+              <a:t>“effect </a:t>
+            </a:r>
+            <a:r>
+              <a:rPr lang="zh-CN" altLang="en-US" sz="1400"/>
+              <a:t>覆盖关系</a:t>
+            </a:r>
+            <a:r>
+              <a:rPr lang="en-US" altLang="zh-CN" sz="1400"/>
+              <a:t>”</a:t>
+            </a:r>
+            <a:r>
+              <a:rPr lang="zh-CN" altLang="en-US" sz="1400"/>
+              <a:t>，不是真正的恢复状态转换。</a:t>
+            </a:r>
+            <a:endParaRPr lang="zh-CN" altLang="en-US" sz="1400"/>
+          </a:p>
+          <a:p>
+            <a:r>
+              <a:rPr lang="zh-CN" altLang="en-US" sz="1400"/>
+              <a:t>它不能完整执行：</a:t>
+            </a:r>
+            <a:endParaRPr lang="zh-CN" altLang="en-US" sz="1400"/>
+          </a:p>
+          <a:p>
+            <a:r>
+              <a:rPr lang="zh-CN" altLang="en-US" sz="1400"/>
+              <a:t>哪些状态已经发布</a:t>
+            </a:r>
+            <a:endParaRPr lang="zh-CN" altLang="en-US" sz="1400"/>
+          </a:p>
+          <a:p>
+            <a:r>
+              <a:rPr lang="zh-CN" altLang="en-US" sz="1400"/>
+              <a:t>也就是说，目前能够判断：</a:t>
+            </a:r>
+            <a:endParaRPr lang="zh-CN" altLang="en-US" sz="1400"/>
+          </a:p>
+          <a:p>
+            <a:r>
+              <a:rPr lang="zh-CN" altLang="en-US" sz="1400"/>
+              <a:t>这个</a:t>
+            </a:r>
+            <a:r>
+              <a:rPr lang="en-US" altLang="zh-CN" sz="1400"/>
+              <a:t> effect </a:t>
+            </a:r>
+            <a:r>
+              <a:rPr lang="zh-CN" altLang="en-US" sz="1400"/>
+              <a:t>看起来属于该事务的保护范围</a:t>
+            </a:r>
+            <a:endParaRPr lang="zh-CN" altLang="en-US" sz="1400"/>
+          </a:p>
+          <a:p>
+            <a:r>
+              <a:rPr lang="zh-CN" altLang="en-US" sz="1400"/>
+              <a:t>但不能计算：</a:t>
+            </a:r>
+            <a:endParaRPr lang="zh-CN" altLang="en-US" sz="1400"/>
+          </a:p>
+          <a:p>
+            <a:r>
+              <a:rPr lang="en-US" altLang="zh-CN" sz="1400"/>
+              <a:t>S_final = Recover(Apply(S_initial, failure_path))</a:t>
+            </a:r>
+            <a:endParaRPr lang="en-US" altLang="zh-CN" sz="1400"/>
+          </a:p>
+          <a:p>
+            <a:r>
+              <a:rPr lang="zh-CN" altLang="en-US" sz="1400"/>
+              <a:t>然后验证</a:t>
+            </a:r>
+            <a:r>
+              <a:rPr lang="en-US" altLang="zh-CN" sz="1400"/>
+              <a:t> S_final </a:t>
+            </a:r>
+            <a:r>
+              <a:rPr lang="zh-CN" altLang="en-US" sz="1400"/>
+              <a:t>的文件系统不变量。</a:t>
+            </a:r>
+            <a:endParaRPr lang="zh-CN" altLang="en-US" sz="1400"/>
+          </a:p>
+          <a:p>
+            <a:endParaRPr lang="zh-CN" altLang="en-US" sz="1400"/>
+          </a:p>
+        </p:txBody>
+      </p:sp>
+    </p:spTree>
+  </p:cSld>
+  <p:clrMapOvr>
+    <a:masterClrMapping/>
+  </p:clrMapOvr>
+</p:sld>
+</file>
+
+<file path=ppt/slides/slide15.xml><?xml version="1.0" encoding="utf-8"?>
+<p:sld xmlns:a="http://schemas.openxmlformats.org/drawingml/2006/main" xmlns:r="http://schemas.openxmlformats.org/officeDocument/2006/relationships" xmlns:p="http://schemas.openxmlformats.org/presentationml/2006/main">
+  <p:cSld>
+    <p:spTree>
+      <p:nvGrpSpPr>
+        <p:cNvPr id="1" name=""/>
+        <p:cNvGrpSpPr/>
+        <p:nvPr/>
+      </p:nvGrpSpPr>
+      <p:grpSpPr/>
+      <p:sp>
+        <p:nvSpPr>
+          <p:cNvPr id="2" name="文本框 1"/>
+          <p:cNvSpPr txBox="1"/>
+          <p:nvPr/>
+        </p:nvSpPr>
+        <p:spPr>
+          <a:xfrm>
+            <a:off x="210185" y="740410"/>
+            <a:ext cx="11648440" cy="6340475"/>
+          </a:xfrm>
+          <a:prstGeom prst="rect">
+            <a:avLst/>
+          </a:prstGeom>
+          <a:noFill/>
+        </p:spPr>
+        <p:txBody>
+          <a:bodyPr wrap="square" rtlCol="0">
+            <a:noAutofit/>
+          </a:bodyPr>
+          <a:p>
+            <a:r>
+              <a:rPr lang="zh-CN" altLang="en-US" sz="1600"/>
+              <a:t>具体工作：</a:t>
+            </a:r>
+            <a:endParaRPr lang="zh-CN" altLang="en-US" sz="1600"/>
+          </a:p>
+          <a:p>
+            <a:r>
+              <a:rPr lang="en-US" altLang="zh-CN" sz="1600"/>
+              <a:t>R_f = E_f </a:t>
+            </a:r>
+            <a:r>
+              <a:rPr lang="zh-CN" altLang="en-US" sz="1600"/>
+              <a:t>中没有被</a:t>
+            </a:r>
+            <a:r>
+              <a:rPr lang="en-US" altLang="zh-CN" sz="1600"/>
+              <a:t> C_f </a:t>
+            </a:r>
+            <a:r>
+              <a:rPr lang="zh-CN" altLang="en-US" sz="1600"/>
+              <a:t>抵消、也没有被</a:t>
+            </a:r>
+            <a:r>
+              <a:rPr lang="en-US" altLang="zh-CN" sz="1600"/>
+              <a:t> T_f </a:t>
+            </a:r>
+            <a:r>
+              <a:rPr lang="zh-CN" altLang="en-US" sz="1600"/>
+              <a:t>保护的</a:t>
+            </a:r>
+            <a:r>
+              <a:rPr lang="en-US" altLang="zh-CN" sz="1600"/>
+              <a:t> effect</a:t>
+            </a:r>
+            <a:endParaRPr lang="en-US" altLang="zh-CN" sz="1600"/>
+          </a:p>
+          <a:p>
+            <a:endParaRPr lang="zh-CN" altLang="en-US" sz="1600"/>
+          </a:p>
+          <a:p>
+            <a:r>
+              <a:rPr lang="zh-CN" altLang="en-US" sz="1600"/>
+              <a:t>它解决的是：</a:t>
+            </a:r>
+            <a:endParaRPr lang="zh-CN" altLang="en-US" sz="1600"/>
+          </a:p>
+          <a:p>
+            <a:r>
+              <a:rPr lang="zh-CN" altLang="en-US" sz="1600"/>
+              <a:t>到达错误出口时，哪些元数据修改仍缺少可证明的处理？</a:t>
+            </a:r>
+            <a:endParaRPr lang="zh-CN" altLang="en-US" sz="1600"/>
+          </a:p>
+          <a:p>
+            <a:endParaRPr lang="en-US" altLang="zh-CN" sz="1600"/>
+          </a:p>
+          <a:p>
+            <a:r>
+              <a:rPr lang="en-US" altLang="zh-CN" sz="1600"/>
+              <a:t>R_f </a:t>
+            </a:r>
+            <a:r>
+              <a:rPr lang="zh-CN" altLang="en-US" sz="1600"/>
+              <a:t>是最终</a:t>
+            </a:r>
+            <a:r>
+              <a:rPr lang="en-US" altLang="zh-CN" sz="1600"/>
+              <a:t> witness</a:t>
+            </a:r>
+            <a:r>
+              <a:rPr lang="zh-CN" altLang="en-US" sz="1600"/>
+              <a:t>，用来定位：</a:t>
+            </a:r>
+            <a:endParaRPr lang="zh-CN" altLang="en-US" sz="1600"/>
+          </a:p>
+          <a:p>
+            <a:r>
+              <a:rPr lang="zh-CN" altLang="en-US" sz="1600"/>
+              <a:t>修改发生在哪里</a:t>
+            </a:r>
+            <a:endParaRPr lang="zh-CN" altLang="en-US" sz="1600"/>
+          </a:p>
+          <a:p>
+            <a:r>
+              <a:rPr lang="zh-CN" altLang="en-US" sz="1600"/>
+              <a:t>失败点在哪里</a:t>
+            </a:r>
+            <a:endParaRPr lang="zh-CN" altLang="en-US" sz="1600"/>
+          </a:p>
+          <a:p>
+            <a:r>
+              <a:rPr lang="zh-CN" altLang="en-US" sz="1600"/>
+              <a:t>错误出口在哪里</a:t>
+            </a:r>
+            <a:endParaRPr lang="zh-CN" altLang="en-US" sz="1600"/>
+          </a:p>
+          <a:p>
+            <a:r>
+              <a:rPr lang="zh-CN" altLang="en-US" sz="1600"/>
+              <a:t>执行了什么</a:t>
+            </a:r>
+            <a:r>
+              <a:rPr lang="en-US" altLang="zh-CN" sz="1600"/>
+              <a:t> cleanup</a:t>
+            </a:r>
+            <a:endParaRPr lang="en-US" altLang="zh-CN" sz="1600"/>
+          </a:p>
+          <a:p>
+            <a:r>
+              <a:rPr lang="zh-CN" altLang="en-US" sz="1600"/>
+              <a:t>最终留下了什么</a:t>
+            </a:r>
+            <a:endParaRPr lang="zh-CN" altLang="en-US" sz="1600"/>
+          </a:p>
+          <a:p>
+            <a:r>
+              <a:rPr lang="zh-CN" altLang="en-US" sz="1600"/>
+              <a:t>缺点</a:t>
+            </a:r>
+            <a:endParaRPr lang="zh-CN" altLang="en-US" sz="1600"/>
+          </a:p>
+          <a:p>
+            <a:r>
+              <a:rPr lang="en-US" altLang="zh-CN" sz="1600"/>
+              <a:t>R_f = ∅ </a:t>
+            </a:r>
+            <a:r>
+              <a:rPr lang="zh-CN" altLang="en-US" sz="1600"/>
+              <a:t>也不等于文件系统一定一致。因为所有局部</a:t>
+            </a:r>
+            <a:r>
+              <a:rPr lang="en-US" altLang="zh-CN" sz="1600"/>
+              <a:t> effect </a:t>
+            </a:r>
+            <a:r>
+              <a:rPr lang="zh-CN" altLang="en-US" sz="1600"/>
+              <a:t>即使都完成匹配，跨对象关系仍可能被破坏。</a:t>
+            </a:r>
+            <a:endParaRPr lang="zh-CN" altLang="en-US" sz="1600"/>
+          </a:p>
+          <a:p>
+            <a:endParaRPr lang="zh-CN" altLang="en-US" sz="1600"/>
+          </a:p>
+        </p:txBody>
+      </p:sp>
+      <p:sp>
+        <p:nvSpPr>
+          <p:cNvPr id="3" name="文本框 2"/>
+          <p:cNvSpPr txBox="1"/>
+          <p:nvPr/>
+        </p:nvSpPr>
+        <p:spPr>
+          <a:xfrm>
+            <a:off x="318135" y="132715"/>
+            <a:ext cx="4064000" cy="368300"/>
+          </a:xfrm>
+          <a:prstGeom prst="rect">
+            <a:avLst/>
+          </a:prstGeom>
+          <a:noFill/>
+        </p:spPr>
+        <p:txBody>
+          <a:bodyPr wrap="square" rtlCol="0">
+            <a:spAutoFit/>
+          </a:bodyPr>
+          <a:p>
+            <a:r>
+              <a:rPr lang="en-US" altLang="zh-CN">
+                <a:sym typeface="+mn-ea"/>
+              </a:rPr>
+              <a:t>R_f</a:t>
+            </a:r>
+            <a:r>
+              <a:rPr lang="zh-CN" altLang="en-US">
+                <a:sym typeface="+mn-ea"/>
+              </a:rPr>
+              <a:t>：</a:t>
+            </a:r>
+            <a:r>
+              <a:rPr lang="en-US" altLang="zh-CN">
+                <a:sym typeface="+mn-ea"/>
+              </a:rPr>
+              <a:t>Residuals</a:t>
+            </a:r>
+            <a:endParaRPr lang="zh-CN" altLang="en-US"/>
+          </a:p>
+        </p:txBody>
+      </p:sp>
+    </p:spTree>
+  </p:cSld>
+  <p:clrMapOvr>
+    <a:masterClrMapping/>
+  </p:clrMapOvr>
+</p:sld>
+</file>
+
+<file path=ppt/slides/slide16.xml><?xml version="1.0" encoding="utf-8"?>
+<p:sld xmlns:a="http://schemas.openxmlformats.org/drawingml/2006/main" xmlns:r="http://schemas.openxmlformats.org/officeDocument/2006/relationships" xmlns:p="http://schemas.openxmlformats.org/presentationml/2006/main">
+  <p:cSld>
+    <p:spTree>
+      <p:nvGrpSpPr>
+        <p:cNvPr id="1" name=""/>
+        <p:cNvGrpSpPr/>
+        <p:nvPr/>
+      </p:nvGrpSpPr>
+      <p:grpSpPr/>
+      <p:sp>
+        <p:nvSpPr>
+          <p:cNvPr id="2" name="文本框 1"/>
+          <p:cNvSpPr txBox="1"/>
+          <p:nvPr/>
+        </p:nvSpPr>
+        <p:spPr>
+          <a:xfrm>
+            <a:off x="362585" y="35560"/>
+            <a:ext cx="4064000" cy="368300"/>
+          </a:xfrm>
+          <a:prstGeom prst="rect">
+            <a:avLst/>
+          </a:prstGeom>
+          <a:noFill/>
+        </p:spPr>
+        <p:txBody>
+          <a:bodyPr wrap="square" rtlCol="0">
+            <a:spAutoFit/>
+          </a:bodyPr>
+          <a:p>
+            <a:r>
+              <a:rPr lang="zh-CN" altLang="en-US"/>
+              <a:t>缺点展示</a:t>
+            </a:r>
+            <a:endParaRPr lang="zh-CN" altLang="en-US"/>
+          </a:p>
+        </p:txBody>
+      </p:sp>
+      <p:sp>
+        <p:nvSpPr>
+          <p:cNvPr id="3" name="文本框 2"/>
+          <p:cNvSpPr txBox="1"/>
+          <p:nvPr/>
+        </p:nvSpPr>
+        <p:spPr>
+          <a:xfrm>
+            <a:off x="599440" y="591185"/>
+            <a:ext cx="4404360" cy="6416675"/>
+          </a:xfrm>
+          <a:prstGeom prst="rect">
+            <a:avLst/>
+          </a:prstGeom>
+          <a:noFill/>
+        </p:spPr>
+        <p:txBody>
+          <a:bodyPr wrap="square" rtlCol="0">
+            <a:noAutofit/>
+          </a:bodyPr>
+          <a:p>
+            <a:r>
+              <a:rPr lang="zh-CN" altLang="en-US" sz="1600"/>
+              <a:t>例如，操作失败前的合法状态是：</a:t>
+            </a:r>
+            <a:endParaRPr lang="zh-CN" altLang="en-US" sz="1600"/>
+          </a:p>
+          <a:p>
+            <a:r>
+              <a:rPr lang="en-US" altLang="zh-CN" sz="1600"/>
+              <a:t>Dentry(P, "a") = I_old</a:t>
+            </a:r>
+            <a:endParaRPr lang="en-US" altLang="zh-CN" sz="1600"/>
+          </a:p>
+          <a:p>
+            <a:r>
+              <a:rPr lang="en-US" altLang="zh-CN" sz="1600"/>
+              <a:t>Allocated(I_old) = true</a:t>
+            </a:r>
+            <a:endParaRPr lang="en-US" altLang="zh-CN" sz="1600"/>
+          </a:p>
+          <a:p>
+            <a:r>
+              <a:rPr lang="en-US" altLang="zh-CN" sz="1600"/>
+              <a:t>LinkCount(I_old) = 1</a:t>
+            </a:r>
+            <a:endParaRPr lang="en-US" altLang="zh-CN" sz="1600"/>
+          </a:p>
+          <a:p>
+            <a:endParaRPr lang="en-US" altLang="zh-CN" sz="1600"/>
+          </a:p>
+          <a:p>
+            <a:r>
+              <a:rPr lang="zh-CN" altLang="en-US" sz="1600"/>
+              <a:t>函数尝试用新</a:t>
+            </a:r>
+            <a:r>
+              <a:rPr lang="en-US" altLang="zh-CN" sz="1600"/>
+              <a:t> inode </a:t>
+            </a:r>
+            <a:r>
+              <a:rPr lang="zh-CN" altLang="en-US" sz="1600"/>
+              <a:t>替换该目录项：</a:t>
+            </a:r>
+            <a:endParaRPr lang="zh-CN" altLang="en-US" sz="1600"/>
+          </a:p>
+          <a:p>
+            <a:r>
+              <a:rPr lang="en-US" altLang="zh-CN" sz="1600"/>
+              <a:t>new = alloc_inode();</a:t>
+            </a:r>
+            <a:endParaRPr lang="en-US" altLang="zh-CN" sz="1600"/>
+          </a:p>
+          <a:p>
+            <a:r>
+              <a:rPr lang="en-US" altLang="zh-CN" sz="1600"/>
+              <a:t>set_dentry(parent, "a", new);</a:t>
+            </a:r>
+            <a:endParaRPr lang="en-US" altLang="zh-CN" sz="1600"/>
+          </a:p>
+          <a:p>
+            <a:endParaRPr lang="en-US" altLang="zh-CN" sz="1600"/>
+          </a:p>
+          <a:p>
+            <a:r>
+              <a:rPr lang="en-US" altLang="zh-CN" sz="1600"/>
+              <a:t>ret = update_quota(new);</a:t>
+            </a:r>
+            <a:endParaRPr lang="en-US" altLang="zh-CN" sz="1600"/>
+          </a:p>
+          <a:p>
+            <a:r>
+              <a:rPr lang="en-US" altLang="zh-CN" sz="1600"/>
+              <a:t>if (ret)</a:t>
+            </a:r>
+            <a:endParaRPr lang="en-US" altLang="zh-CN" sz="1600"/>
+          </a:p>
+          <a:p>
+            <a:r>
+              <a:rPr lang="en-US" altLang="zh-CN" sz="1600"/>
+              <a:t>    goto error;</a:t>
+            </a:r>
+            <a:endParaRPr lang="en-US" altLang="zh-CN" sz="1600"/>
+          </a:p>
+          <a:p>
+            <a:endParaRPr lang="en-US" altLang="zh-CN" sz="1600"/>
+          </a:p>
+          <a:p>
+            <a:r>
+              <a:rPr lang="en-US" altLang="zh-CN" sz="1600"/>
+              <a:t>error:</a:t>
+            </a:r>
+            <a:endParaRPr lang="en-US" altLang="zh-CN" sz="1600"/>
+          </a:p>
+          <a:p>
+            <a:r>
+              <a:rPr lang="en-US" altLang="zh-CN" sz="1600"/>
+              <a:t>clear_dentry(parent, "a");</a:t>
+            </a:r>
+            <a:endParaRPr lang="en-US" altLang="zh-CN" sz="1600"/>
+          </a:p>
+          <a:p>
+            <a:r>
+              <a:rPr lang="en-US" altLang="zh-CN" sz="1600"/>
+              <a:t>free_inode(new);</a:t>
+            </a:r>
+            <a:endParaRPr lang="en-US" altLang="zh-CN" sz="1600"/>
+          </a:p>
+          <a:p>
+            <a:r>
+              <a:rPr lang="en-US" altLang="zh-CN" sz="1600"/>
+              <a:t>return ret;</a:t>
+            </a:r>
+            <a:endParaRPr lang="en-US" altLang="zh-CN" sz="1600"/>
+          </a:p>
+          <a:p>
+            <a:endParaRPr lang="en-US" altLang="zh-CN" sz="1600"/>
+          </a:p>
+          <a:p>
+            <a:r>
+              <a:rPr lang="zh-CN" altLang="en-US" sz="1600"/>
+              <a:t>执行</a:t>
+            </a:r>
+            <a:r>
+              <a:rPr lang="en-US" altLang="zh-CN" sz="1600"/>
+              <a:t> SET </a:t>
+            </a:r>
+            <a:r>
+              <a:rPr lang="zh-CN" altLang="en-US" sz="1600"/>
+              <a:t>后：</a:t>
+            </a:r>
+            <a:endParaRPr lang="zh-CN" altLang="en-US" sz="1600"/>
+          </a:p>
+          <a:p>
+            <a:r>
+              <a:rPr lang="en-US" altLang="zh-CN" sz="1600"/>
+              <a:t>P/"a" -&gt; I_new</a:t>
+            </a:r>
+            <a:endParaRPr lang="en-US" altLang="zh-CN" sz="1600"/>
+          </a:p>
+          <a:p>
+            <a:endParaRPr lang="en-US" altLang="zh-CN" sz="1600"/>
+          </a:p>
+          <a:p>
+            <a:r>
+              <a:rPr lang="zh-CN" altLang="en-US" sz="1600"/>
+              <a:t>执行</a:t>
+            </a:r>
+            <a:r>
+              <a:rPr lang="en-US" altLang="zh-CN" sz="1600"/>
+              <a:t> CLEAR </a:t>
+            </a:r>
+            <a:r>
+              <a:rPr lang="zh-CN" altLang="en-US" sz="1600"/>
+              <a:t>后：</a:t>
+            </a:r>
+            <a:endParaRPr lang="zh-CN" altLang="en-US" sz="1600"/>
+          </a:p>
+          <a:p>
+            <a:r>
+              <a:rPr lang="en-US" altLang="zh-CN" sz="1600"/>
+              <a:t>P/"a" -&gt; NULL</a:t>
+            </a:r>
+            <a:endParaRPr lang="en-US" altLang="zh-CN" sz="1600"/>
+          </a:p>
+        </p:txBody>
+      </p:sp>
+      <p:sp>
+        <p:nvSpPr>
+          <p:cNvPr id="4" name="文本框 3"/>
+          <p:cNvSpPr txBox="1"/>
+          <p:nvPr/>
+        </p:nvSpPr>
+        <p:spPr>
+          <a:xfrm>
+            <a:off x="5561965" y="591185"/>
+            <a:ext cx="4064000" cy="4276725"/>
+          </a:xfrm>
+          <a:prstGeom prst="rect">
+            <a:avLst/>
+          </a:prstGeom>
+          <a:noFill/>
+        </p:spPr>
+        <p:txBody>
+          <a:bodyPr wrap="square" rtlCol="0">
+            <a:spAutoFit/>
+          </a:bodyPr>
+          <a:p>
+            <a:r>
+              <a:rPr lang="zh-CN" altLang="en-US" sz="1600">
+                <a:sym typeface="+mn-ea"/>
+              </a:rPr>
+              <a:t>当前</a:t>
+            </a:r>
+            <a:r>
+              <a:rPr lang="en-US" altLang="zh-CN" sz="1600">
+                <a:sym typeface="+mn-ea"/>
+              </a:rPr>
+              <a:t> effect </a:t>
+            </a:r>
+            <a:r>
+              <a:rPr lang="zh-CN" altLang="en-US" sz="1600">
+                <a:sym typeface="+mn-ea"/>
+              </a:rPr>
+              <a:t>模型可能得到：</a:t>
+            </a:r>
+            <a:endParaRPr lang="zh-CN" altLang="en-US" sz="1600"/>
+          </a:p>
+          <a:p>
+            <a:r>
+              <a:rPr lang="en-US" altLang="zh-CN" sz="1600">
+                <a:sym typeface="+mn-ea"/>
+              </a:rPr>
+              <a:t>E_f:</a:t>
+            </a:r>
+            <a:endParaRPr lang="en-US" altLang="zh-CN" sz="1600"/>
+          </a:p>
+          <a:p>
+            <a:r>
+              <a:rPr lang="en-US" altLang="zh-CN" sz="1600">
+                <a:sym typeface="+mn-ea"/>
+              </a:rPr>
+              <a:t>  SET   Dentry(P, "a") = I_new</a:t>
+            </a:r>
+            <a:endParaRPr lang="en-US" altLang="zh-CN" sz="1600"/>
+          </a:p>
+          <a:p>
+            <a:r>
+              <a:rPr lang="en-US" altLang="zh-CN" sz="1600">
+                <a:sym typeface="+mn-ea"/>
+              </a:rPr>
+              <a:t>  ALLOC I_new</a:t>
+            </a:r>
+            <a:endParaRPr lang="en-US" altLang="zh-CN" sz="1600"/>
+          </a:p>
+          <a:p>
+            <a:endParaRPr lang="en-US" altLang="zh-CN" sz="1600"/>
+          </a:p>
+          <a:p>
+            <a:r>
+              <a:rPr lang="en-US" altLang="zh-CN" sz="1600">
+                <a:sym typeface="+mn-ea"/>
+              </a:rPr>
+              <a:t>C_f:</a:t>
+            </a:r>
+            <a:endParaRPr lang="en-US" altLang="zh-CN" sz="1600"/>
+          </a:p>
+          <a:p>
+            <a:r>
+              <a:rPr lang="en-US" altLang="zh-CN" sz="1600">
+                <a:sym typeface="+mn-ea"/>
+              </a:rPr>
+              <a:t>  CLEAR Dentry(P, "a")</a:t>
+            </a:r>
+            <a:endParaRPr lang="en-US" altLang="zh-CN" sz="1600"/>
+          </a:p>
+          <a:p>
+            <a:r>
+              <a:rPr lang="en-US" altLang="zh-CN" sz="1600">
+                <a:sym typeface="+mn-ea"/>
+              </a:rPr>
+              <a:t>  FREE  I_new</a:t>
+            </a:r>
+            <a:endParaRPr lang="en-US" altLang="zh-CN" sz="1600"/>
+          </a:p>
+          <a:p>
+            <a:r>
+              <a:rPr lang="zh-CN" altLang="en-US" sz="1600">
+                <a:sym typeface="+mn-ea"/>
+              </a:rPr>
+              <a:t>局部配对结果：</a:t>
+            </a:r>
+            <a:endParaRPr lang="zh-CN" altLang="en-US" sz="1600"/>
+          </a:p>
+          <a:p>
+            <a:r>
+              <a:rPr lang="en-US" altLang="zh-CN" sz="1600">
+                <a:sym typeface="+mn-ea"/>
+              </a:rPr>
+              <a:t>SET   &lt;-&gt; CLEAR</a:t>
+            </a:r>
+            <a:endParaRPr lang="en-US" altLang="zh-CN" sz="1600"/>
+          </a:p>
+          <a:p>
+            <a:r>
+              <a:rPr lang="en-US" altLang="zh-CN" sz="1600">
+                <a:sym typeface="+mn-ea"/>
+              </a:rPr>
+              <a:t>ALLOC &lt;-&gt; FREE</a:t>
+            </a:r>
+            <a:endParaRPr lang="en-US" altLang="zh-CN" sz="1600"/>
+          </a:p>
+          <a:p>
+            <a:endParaRPr lang="en-US" altLang="zh-CN" sz="1600"/>
+          </a:p>
+          <a:p>
+            <a:r>
+              <a:rPr lang="en-US" altLang="zh-CN" sz="1600">
+                <a:sym typeface="+mn-ea"/>
+              </a:rPr>
+              <a:t>R_f = ∅</a:t>
+            </a:r>
+            <a:endParaRPr lang="en-US" altLang="zh-CN" sz="1600"/>
+          </a:p>
+          <a:p>
+            <a:r>
+              <a:rPr lang="zh-CN" altLang="en-US" sz="1600">
+                <a:sym typeface="+mn-ea"/>
+              </a:rPr>
+              <a:t>但实际状态转换是：</a:t>
+            </a:r>
+            <a:endParaRPr lang="zh-CN" altLang="en-US" sz="1600"/>
+          </a:p>
+          <a:p>
+            <a:r>
+              <a:rPr lang="zh-CN" altLang="en-US" sz="1600">
+                <a:sym typeface="+mn-ea"/>
+              </a:rPr>
+              <a:t>初始：</a:t>
+            </a:r>
+            <a:endParaRPr lang="zh-CN" altLang="en-US" sz="1600"/>
+          </a:p>
+          <a:p>
+            <a:r>
+              <a:rPr lang="en-US" altLang="zh-CN" sz="1600">
+                <a:sym typeface="+mn-ea"/>
+              </a:rPr>
+              <a:t>P/"a" -&gt; I_old</a:t>
+            </a:r>
+            <a:endParaRPr lang="en-US" altLang="zh-CN" sz="1600"/>
+          </a:p>
+          <a:p>
+            <a:endParaRPr lang="zh-CN" altLang="en-US" sz="1600"/>
+          </a:p>
+        </p:txBody>
+      </p:sp>
+    </p:spTree>
+  </p:cSld>
+  <p:clrMapOvr>
+    <a:masterClrMapping/>
+  </p:clrMapOvr>
+</p:sld>
+</file>
+
+<file path=ppt/slides/slide17.xml><?xml version="1.0" encoding="utf-8"?>
+<p:sld xmlns:a="http://schemas.openxmlformats.org/drawingml/2006/main" xmlns:r="http://schemas.openxmlformats.org/officeDocument/2006/relationships" xmlns:p="http://schemas.openxmlformats.org/presentationml/2006/main">
+  <p:cSld>
+    <p:spTree>
+      <p:nvGrpSpPr>
+        <p:cNvPr id="1" name=""/>
+        <p:cNvGrpSpPr/>
+        <p:nvPr/>
+      </p:nvGrpSpPr>
+      <p:grpSpPr/>
+      <p:sp>
+        <p:nvSpPr>
+          <p:cNvPr id="3" name="文本框 2"/>
+          <p:cNvSpPr txBox="1"/>
+          <p:nvPr/>
+        </p:nvSpPr>
+        <p:spPr>
+          <a:xfrm>
+            <a:off x="283845" y="176530"/>
+            <a:ext cx="4064000" cy="368300"/>
+          </a:xfrm>
+          <a:prstGeom prst="rect">
+            <a:avLst/>
+          </a:prstGeom>
+          <a:noFill/>
+        </p:spPr>
+        <p:txBody>
+          <a:bodyPr wrap="square" rtlCol="0">
+            <a:spAutoFit/>
+          </a:bodyPr>
+          <a:p>
+            <a:r>
+              <a:rPr lang="zh-CN" altLang="en-US"/>
+              <a:t>跨对象关系型元数据</a:t>
+            </a:r>
+            <a:endParaRPr lang="zh-CN" altLang="en-US"/>
+          </a:p>
+        </p:txBody>
+      </p:sp>
+      <p:sp>
+        <p:nvSpPr>
+          <p:cNvPr id="4" name="文本框 3"/>
+          <p:cNvSpPr txBox="1"/>
+          <p:nvPr/>
+        </p:nvSpPr>
+        <p:spPr>
+          <a:xfrm>
+            <a:off x="413385" y="596900"/>
+            <a:ext cx="5765165" cy="6261100"/>
+          </a:xfrm>
+          <a:prstGeom prst="rect">
+            <a:avLst/>
+          </a:prstGeom>
+          <a:noFill/>
+        </p:spPr>
+        <p:txBody>
+          <a:bodyPr wrap="square" rtlCol="0">
+            <a:noAutofit/>
+          </a:bodyPr>
+          <a:p>
+            <a:r>
+              <a:rPr lang="zh-CN" altLang="en-US" sz="1400"/>
+              <a:t>例子一：文件名</a:t>
+            </a:r>
+            <a:r>
+              <a:rPr lang="en-US" altLang="zh-CN" sz="1400"/>
+              <a:t> a </a:t>
+            </a:r>
+            <a:r>
+              <a:rPr lang="zh-CN" altLang="en-US" sz="1400"/>
+              <a:t>指向</a:t>
+            </a:r>
+            <a:r>
+              <a:rPr lang="en-US" altLang="zh-CN" sz="1400"/>
+              <a:t> inode 100</a:t>
+            </a:r>
+            <a:endParaRPr lang="en-US" altLang="zh-CN" sz="1400"/>
+          </a:p>
+          <a:p>
+            <a:endParaRPr lang="en-US" altLang="zh-CN" sz="1400"/>
+          </a:p>
+          <a:p>
+            <a:r>
+              <a:rPr lang="zh-CN" altLang="en-US" sz="1400"/>
+              <a:t>用户看到的是一个简单事实：</a:t>
+            </a:r>
+            <a:endParaRPr lang="en-US" altLang="zh-CN" sz="1400"/>
+          </a:p>
+          <a:p>
+            <a:r>
+              <a:rPr lang="zh-CN" altLang="en-US" sz="1400"/>
+              <a:t>目录</a:t>
+            </a:r>
+            <a:r>
+              <a:rPr lang="en-US" altLang="zh-CN" sz="1400"/>
+              <a:t> P </a:t>
+            </a:r>
+            <a:r>
+              <a:rPr lang="zh-CN" altLang="en-US" sz="1400"/>
+              <a:t>中的文件名</a:t>
+            </a:r>
+            <a:r>
+              <a:rPr lang="en-US" altLang="zh-CN" sz="1400"/>
+              <a:t> a </a:t>
+            </a:r>
+            <a:r>
+              <a:rPr lang="zh-CN" altLang="en-US" sz="1400"/>
+              <a:t>对应</a:t>
+            </a:r>
+            <a:r>
+              <a:rPr lang="en-US" altLang="zh-CN" sz="1400"/>
+              <a:t> inode 100</a:t>
+            </a:r>
+            <a:endParaRPr lang="en-US" altLang="zh-CN" sz="1400"/>
+          </a:p>
+          <a:p>
+            <a:endParaRPr lang="en-US" altLang="zh-CN" sz="1400"/>
+          </a:p>
+          <a:p>
+            <a:r>
+              <a:rPr lang="zh-CN" altLang="en-US" sz="1400"/>
+              <a:t>但文件系统内部可能要同时维护：</a:t>
+            </a:r>
+            <a:endParaRPr lang="zh-CN" altLang="en-US" sz="1400"/>
+          </a:p>
+          <a:p>
+            <a:endParaRPr lang="en-US" altLang="zh-CN" sz="1400"/>
+          </a:p>
+          <a:p>
+            <a:r>
+              <a:rPr lang="zh-CN" altLang="en-US" sz="1400"/>
+              <a:t>目录项：</a:t>
+            </a:r>
+            <a:endParaRPr lang="zh-CN" altLang="en-US" sz="1400"/>
+          </a:p>
+          <a:p>
+            <a:r>
+              <a:rPr lang="en-US" altLang="zh-CN" sz="1400"/>
+              <a:t>P/a </a:t>
+            </a:r>
+            <a:r>
+              <a:rPr lang="en-US" altLang="en-US" sz="1400"/>
+              <a:t>→</a:t>
+            </a:r>
+            <a:r>
+              <a:rPr lang="en-US" altLang="zh-CN" sz="1400"/>
+              <a:t> inode 100</a:t>
+            </a:r>
+            <a:endParaRPr lang="en-US" altLang="zh-CN" sz="1400"/>
+          </a:p>
+          <a:p>
+            <a:endParaRPr lang="en-US" altLang="zh-CN" sz="1400"/>
+          </a:p>
+          <a:p>
+            <a:r>
+              <a:rPr lang="en-US" altLang="zh-CN" sz="1400"/>
+              <a:t>inode </a:t>
+            </a:r>
+            <a:r>
+              <a:rPr lang="zh-CN" altLang="en-US" sz="1400"/>
+              <a:t>位图：</a:t>
+            </a:r>
+            <a:endParaRPr lang="zh-CN" altLang="en-US" sz="1400"/>
+          </a:p>
+          <a:p>
+            <a:r>
+              <a:rPr lang="en-US" altLang="zh-CN" sz="1400"/>
+              <a:t>inode 100 </a:t>
+            </a:r>
+            <a:r>
+              <a:rPr lang="zh-CN" altLang="en-US" sz="1400"/>
+              <a:t>已分配</a:t>
+            </a:r>
+            <a:endParaRPr lang="zh-CN" altLang="en-US" sz="1400"/>
+          </a:p>
+          <a:p>
+            <a:endParaRPr lang="en-US" altLang="zh-CN" sz="1400"/>
+          </a:p>
+          <a:p>
+            <a:r>
+              <a:rPr lang="en-US" altLang="zh-CN" sz="1400"/>
+              <a:t>inode </a:t>
+            </a:r>
+            <a:r>
+              <a:rPr lang="zh-CN" altLang="en-US" sz="1400"/>
+              <a:t>内容：</a:t>
+            </a:r>
+            <a:endParaRPr lang="zh-CN" altLang="en-US" sz="1400"/>
+          </a:p>
+          <a:p>
+            <a:r>
+              <a:rPr lang="en-US" altLang="zh-CN" sz="1400"/>
+              <a:t>inode 100 </a:t>
+            </a:r>
+            <a:r>
+              <a:rPr lang="zh-CN" altLang="en-US" sz="1400"/>
+              <a:t>已初始化，类型为普通文件</a:t>
+            </a:r>
+            <a:endParaRPr lang="zh-CN" altLang="en-US" sz="1400"/>
+          </a:p>
+          <a:p>
+            <a:endParaRPr lang="en-US" altLang="zh-CN" sz="1400"/>
+          </a:p>
+          <a:p>
+            <a:r>
+              <a:rPr lang="en-US" altLang="zh-CN" sz="1400"/>
+              <a:t>link count</a:t>
+            </a:r>
+            <a:r>
+              <a:rPr lang="zh-CN" altLang="en-US" sz="1400"/>
+              <a:t>：</a:t>
+            </a:r>
+            <a:endParaRPr lang="zh-CN" altLang="en-US" sz="1400"/>
+          </a:p>
+          <a:p>
+            <a:r>
+              <a:rPr lang="en-US" altLang="zh-CN" sz="1400"/>
+              <a:t>inode 100 </a:t>
+            </a:r>
+            <a:r>
+              <a:rPr lang="zh-CN" altLang="en-US" sz="1400"/>
+              <a:t>的</a:t>
+            </a:r>
+            <a:r>
+              <a:rPr lang="en-US" altLang="zh-CN" sz="1400"/>
+              <a:t> i_nlink </a:t>
+            </a:r>
+            <a:r>
+              <a:rPr lang="zh-CN" altLang="en-US" sz="1400"/>
+              <a:t>包含</a:t>
+            </a:r>
+            <a:r>
+              <a:rPr lang="en-US" altLang="zh-CN" sz="1400"/>
+              <a:t> P/a </a:t>
+            </a:r>
+            <a:r>
+              <a:rPr lang="zh-CN" altLang="en-US" sz="1400"/>
+              <a:t>这条引用</a:t>
+            </a:r>
+            <a:endParaRPr lang="zh-CN" altLang="en-US" sz="1400"/>
+          </a:p>
+          <a:p>
+            <a:endParaRPr lang="en-US" altLang="zh-CN" sz="1400"/>
+          </a:p>
+          <a:p>
+            <a:r>
+              <a:rPr lang="zh-CN" altLang="en-US" sz="1400"/>
+              <a:t>事务状态：</a:t>
+            </a:r>
+            <a:endParaRPr lang="zh-CN" altLang="en-US" sz="1400"/>
+          </a:p>
+          <a:p>
+            <a:r>
+              <a:rPr lang="zh-CN" altLang="en-US" sz="1400"/>
+              <a:t>相关目录项和</a:t>
+            </a:r>
+            <a:r>
+              <a:rPr lang="en-US" altLang="zh-CN" sz="1400"/>
+              <a:t> inode </a:t>
+            </a:r>
+            <a:r>
+              <a:rPr lang="zh-CN" altLang="en-US" sz="1400"/>
+              <a:t>更新属于某个</a:t>
+            </a:r>
+            <a:r>
+              <a:rPr lang="en-US" altLang="zh-CN" sz="1400"/>
+              <a:t> transaction</a:t>
+            </a:r>
+            <a:endParaRPr lang="en-US" altLang="zh-CN" sz="1400"/>
+          </a:p>
+          <a:p>
+            <a:endParaRPr lang="en-US" altLang="zh-CN" sz="1400"/>
+          </a:p>
+          <a:p>
+            <a:r>
+              <a:rPr lang="zh-CN" altLang="en-US" sz="1400"/>
+              <a:t>恢复状态：</a:t>
+            </a:r>
+            <a:endParaRPr lang="zh-CN" altLang="en-US" sz="1400"/>
+          </a:p>
+          <a:p>
+            <a:r>
+              <a:rPr lang="zh-CN" altLang="en-US" sz="1400"/>
+              <a:t>如果创建中途失败，</a:t>
+            </a:r>
+            <a:r>
+              <a:rPr lang="en-US" altLang="zh-CN" sz="1400"/>
+              <a:t>inode 100 </a:t>
+            </a:r>
+            <a:r>
+              <a:rPr lang="zh-CN" altLang="en-US" sz="1400"/>
+              <a:t>可能进入</a:t>
+            </a:r>
+            <a:r>
+              <a:rPr lang="en-US" altLang="zh-CN" sz="1400"/>
+              <a:t> orphan list</a:t>
+            </a:r>
+            <a:endParaRPr lang="en-US" altLang="zh-CN" sz="1400"/>
+          </a:p>
+          <a:p>
+            <a:endParaRPr lang="en-US" altLang="zh-CN" sz="1400"/>
+          </a:p>
+          <a:p>
+            <a:endParaRPr lang="zh-CN" altLang="en-US" sz="1400"/>
+          </a:p>
+        </p:txBody>
+      </p:sp>
+      <p:sp>
+        <p:nvSpPr>
+          <p:cNvPr id="5" name="文本框 4"/>
+          <p:cNvSpPr txBox="1"/>
+          <p:nvPr/>
+        </p:nvSpPr>
+        <p:spPr>
+          <a:xfrm>
+            <a:off x="7059295" y="544830"/>
+            <a:ext cx="4064000" cy="6339205"/>
+          </a:xfrm>
+          <a:prstGeom prst="rect">
+            <a:avLst/>
+          </a:prstGeom>
+          <a:noFill/>
+        </p:spPr>
+        <p:txBody>
+          <a:bodyPr wrap="square" rtlCol="0">
+            <a:spAutoFit/>
+          </a:bodyPr>
+          <a:p>
+            <a:endParaRPr lang="en-US" altLang="zh-CN" sz="1400"/>
+          </a:p>
+          <a:p>
+            <a:r>
+              <a:rPr lang="zh-CN" altLang="en-US" sz="1400">
+                <a:sym typeface="+mn-ea"/>
+              </a:rPr>
+              <a:t>例子二：设备</a:t>
+            </a:r>
+            <a:r>
+              <a:rPr lang="en-US" altLang="zh-CN" sz="1400">
+                <a:sym typeface="+mn-ea"/>
+              </a:rPr>
+              <a:t> D </a:t>
+            </a:r>
+            <a:r>
+              <a:rPr lang="zh-CN" altLang="en-US" sz="1400">
+                <a:sym typeface="+mn-ea"/>
+              </a:rPr>
+              <a:t>已加入</a:t>
+            </a:r>
+            <a:r>
+              <a:rPr lang="en-US" altLang="zh-CN" sz="1400">
+                <a:sym typeface="+mn-ea"/>
+              </a:rPr>
+              <a:t> Btrfs </a:t>
+            </a:r>
+            <a:r>
+              <a:rPr lang="zh-CN" altLang="en-US" sz="1400">
+                <a:sym typeface="+mn-ea"/>
+              </a:rPr>
+              <a:t>文件系统</a:t>
+            </a:r>
+            <a:endParaRPr lang="zh-CN" altLang="en-US" sz="1400"/>
+          </a:p>
+          <a:p>
+            <a:endParaRPr lang="en-US" altLang="zh-CN" sz="1400"/>
+          </a:p>
+          <a:p>
+            <a:r>
+              <a:rPr lang="zh-CN" altLang="en-US" sz="1400">
+                <a:sym typeface="+mn-ea"/>
+              </a:rPr>
+              <a:t>从逻辑上看，事实很简单：</a:t>
+            </a:r>
+            <a:endParaRPr lang="en-US" altLang="zh-CN" sz="1400"/>
+          </a:p>
+          <a:p>
+            <a:r>
+              <a:rPr lang="zh-CN" altLang="en-US" sz="1400">
+                <a:sym typeface="+mn-ea"/>
+              </a:rPr>
+              <a:t>设备</a:t>
+            </a:r>
+            <a:r>
+              <a:rPr lang="en-US" altLang="zh-CN" sz="1400">
+                <a:sym typeface="+mn-ea"/>
+              </a:rPr>
+              <a:t> D </a:t>
+            </a:r>
+            <a:r>
+              <a:rPr lang="zh-CN" altLang="en-US" sz="1400">
+                <a:sym typeface="+mn-ea"/>
+              </a:rPr>
+              <a:t>是文件系统</a:t>
+            </a:r>
+            <a:r>
+              <a:rPr lang="en-US" altLang="zh-CN" sz="1400">
+                <a:sym typeface="+mn-ea"/>
+              </a:rPr>
+              <a:t> F </a:t>
+            </a:r>
+            <a:r>
+              <a:rPr lang="zh-CN" altLang="en-US" sz="1400">
+                <a:sym typeface="+mn-ea"/>
+              </a:rPr>
+              <a:t>的成员</a:t>
+            </a:r>
+            <a:endParaRPr lang="zh-CN" altLang="en-US" sz="1400"/>
+          </a:p>
+          <a:p>
+            <a:endParaRPr lang="en-US" altLang="zh-CN" sz="1400"/>
+          </a:p>
+          <a:p>
+            <a:r>
+              <a:rPr lang="zh-CN" altLang="en-US" sz="1400">
+                <a:sym typeface="+mn-ea"/>
+              </a:rPr>
+              <a:t>代码中可能同时使用：</a:t>
+            </a:r>
+            <a:endParaRPr lang="zh-CN" altLang="en-US" sz="1400"/>
+          </a:p>
+          <a:p>
+            <a:endParaRPr lang="en-US" altLang="zh-CN" sz="1400"/>
+          </a:p>
+          <a:p>
+            <a:r>
+              <a:rPr lang="zh-CN" altLang="en-US" sz="1400">
+                <a:sym typeface="+mn-ea"/>
+              </a:rPr>
+              <a:t>设备成员链表：</a:t>
+            </a:r>
+            <a:endParaRPr lang="zh-CN" altLang="en-US" sz="1400"/>
+          </a:p>
+          <a:p>
+            <a:r>
+              <a:rPr lang="en-US" altLang="zh-CN" sz="1400">
+                <a:sym typeface="+mn-ea"/>
+              </a:rPr>
+              <a:t>D ∈ F.devices</a:t>
+            </a:r>
+            <a:endParaRPr lang="en-US" altLang="zh-CN" sz="1400"/>
+          </a:p>
+          <a:p>
+            <a:endParaRPr lang="en-US" altLang="zh-CN" sz="1400"/>
+          </a:p>
+          <a:p>
+            <a:r>
+              <a:rPr lang="zh-CN" altLang="en-US" sz="1400">
+                <a:sym typeface="+mn-ea"/>
+              </a:rPr>
+              <a:t>设备数量：</a:t>
+            </a:r>
+            <a:endParaRPr lang="zh-CN" altLang="en-US" sz="1400"/>
+          </a:p>
+          <a:p>
+            <a:r>
+              <a:rPr lang="en-US" altLang="zh-CN" sz="1400">
+                <a:sym typeface="+mn-ea"/>
+              </a:rPr>
+              <a:t>F.num_devices </a:t>
+            </a:r>
+            <a:r>
+              <a:rPr lang="zh-CN" altLang="en-US" sz="1400">
+                <a:sym typeface="+mn-ea"/>
+              </a:rPr>
+              <a:t>增加</a:t>
+            </a:r>
+            <a:r>
+              <a:rPr lang="en-US" altLang="zh-CN" sz="1400">
+                <a:sym typeface="+mn-ea"/>
+              </a:rPr>
+              <a:t> 1</a:t>
+            </a:r>
+            <a:endParaRPr lang="en-US" altLang="zh-CN" sz="1400"/>
+          </a:p>
+          <a:p>
+            <a:endParaRPr lang="en-US" altLang="zh-CN" sz="1400"/>
+          </a:p>
+          <a:p>
+            <a:r>
+              <a:rPr lang="zh-CN" altLang="en-US" sz="1400">
+                <a:sym typeface="+mn-ea"/>
+              </a:rPr>
+              <a:t>活动设备指针：</a:t>
+            </a:r>
+            <a:endParaRPr lang="zh-CN" altLang="en-US" sz="1400"/>
+          </a:p>
+          <a:p>
+            <a:r>
+              <a:rPr lang="en-US" altLang="zh-CN" sz="1400">
+                <a:sym typeface="+mn-ea"/>
+              </a:rPr>
+              <a:t>F.latest_dev = D</a:t>
+            </a:r>
+            <a:endParaRPr lang="en-US" altLang="zh-CN" sz="1400"/>
+          </a:p>
+          <a:p>
+            <a:endParaRPr lang="en-US" altLang="zh-CN" sz="1400"/>
+          </a:p>
+          <a:p>
+            <a:r>
+              <a:rPr lang="zh-CN" altLang="en-US" sz="1400">
+                <a:sym typeface="+mn-ea"/>
+              </a:rPr>
+              <a:t>设备状态：</a:t>
+            </a:r>
+            <a:endParaRPr lang="zh-CN" altLang="en-US" sz="1400"/>
+          </a:p>
+          <a:p>
+            <a:r>
+              <a:rPr lang="en-US" altLang="zh-CN" sz="1400">
+                <a:sym typeface="+mn-ea"/>
+              </a:rPr>
+              <a:t>D.opened = true</a:t>
+            </a:r>
+            <a:endParaRPr lang="en-US" altLang="zh-CN" sz="1400"/>
+          </a:p>
+          <a:p>
+            <a:r>
+              <a:rPr lang="en-US" altLang="zh-CN" sz="1400">
+                <a:sym typeface="+mn-ea"/>
+              </a:rPr>
+              <a:t>D.writeable = true</a:t>
+            </a:r>
+            <a:endParaRPr lang="en-US" altLang="zh-CN" sz="1400"/>
+          </a:p>
+          <a:p>
+            <a:endParaRPr lang="en-US" altLang="zh-CN" sz="1400"/>
+          </a:p>
+          <a:p>
+            <a:r>
+              <a:rPr lang="zh-CN" altLang="en-US" sz="1400">
+                <a:sym typeface="+mn-ea"/>
+              </a:rPr>
+              <a:t>事务引用：</a:t>
+            </a:r>
+            <a:endParaRPr lang="zh-CN" altLang="en-US" sz="1400"/>
+          </a:p>
+          <a:p>
+            <a:r>
+              <a:rPr lang="en-US" altLang="zh-CN" sz="1400">
+                <a:sym typeface="+mn-ea"/>
+              </a:rPr>
+              <a:t>D </a:t>
+            </a:r>
+            <a:r>
+              <a:rPr lang="zh-CN" altLang="en-US" sz="1400">
+                <a:sym typeface="+mn-ea"/>
+              </a:rPr>
+              <a:t>被加入当前</a:t>
+            </a:r>
+            <a:r>
+              <a:rPr lang="en-US" altLang="zh-CN" sz="1400">
+                <a:sym typeface="+mn-ea"/>
+              </a:rPr>
+              <a:t> transaction </a:t>
+            </a:r>
+            <a:r>
+              <a:rPr lang="zh-CN" altLang="en-US" sz="1400">
+                <a:sym typeface="+mn-ea"/>
+              </a:rPr>
+              <a:t>的设备集合</a:t>
+            </a:r>
+            <a:endParaRPr lang="zh-CN" altLang="en-US" sz="1400"/>
+          </a:p>
+          <a:p>
+            <a:endParaRPr lang="en-US" altLang="zh-CN" sz="1400"/>
+          </a:p>
+          <a:p>
+            <a:r>
+              <a:rPr lang="zh-CN" altLang="en-US" sz="1400">
+                <a:sym typeface="+mn-ea"/>
+              </a:rPr>
+              <a:t>恢复或关闭状态：</a:t>
+            </a:r>
+            <a:endParaRPr lang="zh-CN" altLang="en-US" sz="1400"/>
+          </a:p>
+          <a:p>
+            <a:r>
+              <a:rPr lang="zh-CN" altLang="en-US" sz="1400">
+                <a:sym typeface="+mn-ea"/>
+              </a:rPr>
+              <a:t>失败后由</a:t>
+            </a:r>
+            <a:r>
+              <a:rPr lang="en-US" altLang="zh-CN" sz="1400">
+                <a:sym typeface="+mn-ea"/>
+              </a:rPr>
+              <a:t> teardown </a:t>
+            </a:r>
+            <a:r>
+              <a:rPr lang="zh-CN" altLang="en-US" sz="1400">
+                <a:sym typeface="+mn-ea"/>
+              </a:rPr>
+              <a:t>或</a:t>
+            </a:r>
+            <a:r>
+              <a:rPr lang="en-US" altLang="zh-CN" sz="1400">
+                <a:sym typeface="+mn-ea"/>
+              </a:rPr>
+              <a:t> transaction cleanup </a:t>
+            </a:r>
+            <a:r>
+              <a:rPr lang="zh-CN" altLang="en-US" sz="1400">
+                <a:sym typeface="+mn-ea"/>
+              </a:rPr>
+              <a:t>处理</a:t>
+            </a:r>
+            <a:r>
+              <a:rPr lang="en-US" altLang="zh-CN" sz="1400">
+                <a:sym typeface="+mn-ea"/>
+              </a:rPr>
+              <a:t> D</a:t>
+            </a:r>
+            <a:endParaRPr lang="en-US" altLang="zh-CN" sz="1400"/>
+          </a:p>
+          <a:p>
+            <a:endParaRPr lang="en-US" altLang="zh-CN" sz="1400"/>
+          </a:p>
+          <a:p>
+            <a:endParaRPr lang="zh-CN" altLang="en-US" sz="1400"/>
+          </a:p>
+        </p:txBody>
+      </p:sp>
+    </p:spTree>
+  </p:cSld>
+  <p:clrMapOvr>
+    <a:masterClrMapping/>
+  </p:clrMapOvr>
+</p:sld>
+</file>
+
+<file path=ppt/slides/slide18.xml><?xml version="1.0" encoding="utf-8"?>
+<p:sld xmlns:a="http://schemas.openxmlformats.org/drawingml/2006/main" xmlns:r="http://schemas.openxmlformats.org/officeDocument/2006/relationships" xmlns:p="http://schemas.openxmlformats.org/presentationml/2006/main">
+  <p:cSld>
+    <p:spTree>
+      <p:nvGrpSpPr>
+        <p:cNvPr id="1" name=""/>
+        <p:cNvGrpSpPr/>
+        <p:nvPr/>
+      </p:nvGrpSpPr>
+      <p:grpSpPr/>
+      <p:sp>
+        <p:nvSpPr>
+          <p:cNvPr id="2" name="title-2"/>
           <p:cNvSpPr>
             <a:spLocks noGrp="1"/>
           </p:cNvSpPr>
@@ -3075,62 +5992,8 @@
         </p:nvSpPr>
         <p:spPr>
           <a:xfrm>
-            <a:off x="2927198" y="3076593"/>
-            <a:ext cx="6372528" cy="3047206"/>
-          </a:xfrm>
-          <a:prstGeom prst="rect">
-            <a:avLst/>
-          </a:prstGeom>
-          <a:solidFill>
-            <a:srgbClr val="F7F7F7"/>
-          </a:solidFill>
-          <a:ln w="9525">
-            <a:solidFill>
-              <a:srgbClr val="BDBDBD"/>
-            </a:solidFill>
-            <a:prstDash val="solid"/>
-          </a:ln>
-        </p:spPr>
-      </p:sp>
-      <p:sp>
-        <p:nvSpPr>
-          <p:cNvPr id="22" name="bar-IDENTITY-AWARE CANCELLATION"/>
-          <p:cNvSpPr>
-            <a:spLocks noGrp="1"/>
-          </p:cNvSpPr>
-          <p:nvPr/>
-        </p:nvSpPr>
-        <p:spPr>
-          <a:xfrm>
-            <a:off x="2927198" y="3076593"/>
-            <a:ext cx="78101" cy="3047206"/>
-          </a:xfrm>
-          <a:prstGeom prst="rect">
-            <a:avLst/>
-          </a:prstGeom>
-          <a:solidFill>
-            <a:srgbClr val="000000"/>
-          </a:solidFill>
-          <a:ln w="9525">
-            <a:solidFill>
-              <a:srgbClr val="000000"/>
-            </a:solidFill>
-            <a:prstDash val="solid"/>
-          </a:ln>
-        </p:spPr>
-      </p:sp>
-      <p:sp>
-        <p:nvSpPr>
-          <p:cNvPr id="23" name="text"/>
-          <p:cNvSpPr>
-            <a:spLocks noGrp="1"/>
-          </p:cNvSpPr>
-          <p:nvPr/>
-        </p:nvSpPr>
-        <p:spPr>
-          <a:xfrm>
-            <a:off x="3117688" y="3209936"/>
-            <a:ext cx="5945830" cy="250177"/>
+            <a:off x="209550" y="228600"/>
+            <a:ext cx="11238865" cy="476250"/>
           </a:xfrm>
           <a:prstGeom prst="rect">
             <a:avLst/>
@@ -3142,46 +6005,66 @@
           </a:ln>
         </p:spPr>
         <p:txBody>
-          <a:bodyPr anchor="t">
-            <a:noAutofit/>
-          </a:bodyPr>
+          <a:bodyPr anchor="t"/>
           <a:lstStyle/>
           <a:p>
             <a:pPr algn="l">
-              <a:defRPr sz="1050" b="1">
-                <a:solidFill>
-                  <a:srgbClr val="000000"/>
-                </a:solidFill>
-                <a:latin typeface="Consolas" panose="020B0609020204030204"/>
-                <a:ea typeface="Consolas" panose="020B0609020204030204"/>
-                <a:cs typeface="Consolas" panose="020B0609020204030204"/>
+              <a:defRPr sz="3225" b="1">
+                <a:solidFill>
+                  <a:srgbClr val="111111"/>
+                </a:solidFill>
+                <a:latin typeface="微软雅黑" panose="020B0503020204020204" pitchFamily="34" charset="-122"/>
+                <a:ea typeface="微软雅黑" panose="020B0503020204020204" pitchFamily="34" charset="-122"/>
+                <a:cs typeface="微软雅黑" panose="020B0503020204020204" pitchFamily="34" charset="-122"/>
               </a:defRPr>
             </a:pPr>
             <a:r>
-              <a:rPr sz="1400" b="1">
-                <a:solidFill>
-                  <a:srgbClr val="000000"/>
-                </a:solidFill>
-                <a:latin typeface="Consolas" panose="020B0609020204030204"/>
-                <a:ea typeface="Consolas" panose="020B0609020204030204"/>
-                <a:cs typeface="Consolas" panose="020B0609020204030204"/>
-              </a:rPr>
-              <a:t>IDENTITY-AWARE CANCELLATION</a:t>
-            </a:r>
-            <a:endParaRPr sz="1400" b="1">
+              <a:rPr sz="1800" b="0">
+                <a:solidFill>
+                  <a:srgbClr val="111111"/>
+                </a:solidFill>
+                <a:latin typeface="微软雅黑" panose="020B0503020204020204" pitchFamily="34" charset="-122"/>
+                <a:ea typeface="微软雅黑" panose="020B0503020204020204" pitchFamily="34" charset="-122"/>
+                <a:cs typeface="微软雅黑" panose="020B0503020204020204" pitchFamily="34" charset="-122"/>
+              </a:rPr>
+              <a:t> Bug 暴露</a:t>
+            </a:r>
+            <a:r>
+              <a:rPr lang="zh-CN" sz="1800" b="0">
+                <a:solidFill>
+                  <a:srgbClr val="111111"/>
+                </a:solidFill>
+                <a:latin typeface="微软雅黑" panose="020B0503020204020204" pitchFamily="34" charset="-122"/>
+                <a:ea typeface="微软雅黑" panose="020B0503020204020204" pitchFamily="34" charset="-122"/>
+                <a:cs typeface="微软雅黑" panose="020B0503020204020204" pitchFamily="34" charset="-122"/>
+              </a:rPr>
+              <a:t>的</a:t>
+            </a:r>
+            <a:r>
+              <a:rPr sz="1800" b="0">
+                <a:solidFill>
+                  <a:srgbClr val="111111"/>
+                </a:solidFill>
+                <a:latin typeface="微软雅黑" panose="020B0503020204020204" pitchFamily="34" charset="-122"/>
+                <a:ea typeface="微软雅黑" panose="020B0503020204020204" pitchFamily="34" charset="-122"/>
+                <a:cs typeface="微软雅黑" panose="020B0503020204020204" pitchFamily="34" charset="-122"/>
+              </a:rPr>
+              <a:t>研究缺口</a:t>
+            </a:r>
+            <a:endParaRPr sz="1800" b="0">
               <a:solidFill>
-                <a:srgbClr val="000000"/>
+                <a:srgbClr val="111111"/>
               </a:solidFill>
-              <a:latin typeface="Consolas" panose="020B0609020204030204"/>
-              <a:ea typeface="Consolas" panose="020B0609020204030204"/>
-              <a:cs typeface="Consolas" panose="020B0609020204030204"/>
+              <a:latin typeface="微软雅黑" panose="020B0503020204020204" pitchFamily="34" charset="-122"/>
+              <a:ea typeface="微软雅黑" panose="020B0503020204020204" pitchFamily="34" charset="-122"/>
+              <a:cs typeface="微软雅黑" panose="020B0503020204020204" pitchFamily="34" charset="-122"/>
             </a:endParaRPr>
           </a:p>
         </p:txBody>
       </p:sp>
       <p:sp>
         <p:nvSpPr>
-          <p:cNvPr id="24" name="text"/>
+          <p:cNvPr id="4" name="page-2"/>
           <p:cNvSpPr>
             <a:spLocks noGrp="1"/>
           </p:cNvSpPr>
@@ -3189,8 +6072,8 @@
         </p:nvSpPr>
         <p:spPr>
           <a:xfrm>
-            <a:off x="3117688" y="3524245"/>
-            <a:ext cx="5968054" cy="2421129"/>
+            <a:off x="11143670" y="6324449"/>
+            <a:ext cx="647666" cy="228588"/>
           </a:xfrm>
           <a:prstGeom prst="rect">
             <a:avLst/>
@@ -3202,228 +6085,2398 @@
           </a:ln>
         </p:spPr>
         <p:txBody>
-          <a:bodyPr anchor="t">
-            <a:normAutofit/>
-          </a:bodyPr>
+          <a:bodyPr anchor="t"/>
           <a:lstStyle/>
           <a:p>
-            <a:pPr algn="l">
-              <a:defRPr sz="1350" b="0">
-                <a:solidFill>
-                  <a:srgbClr val="000000"/>
-                </a:solidFill>
-                <a:latin typeface="Consolas" panose="020B0609020204030204"/>
-                <a:ea typeface="Consolas" panose="020B0609020204030204"/>
-                <a:cs typeface="Consolas" panose="020B0609020204030204"/>
+            <a:pPr algn="r">
+              <a:defRPr sz="1050" b="0">
+                <a:solidFill>
+                  <a:srgbClr val="5F6672"/>
+                </a:solidFill>
+                <a:latin typeface="微软雅黑" panose="020B0503020204020204" pitchFamily="34" charset="-122"/>
+                <a:ea typeface="微软雅黑" panose="020B0503020204020204" pitchFamily="34" charset="-122"/>
+                <a:cs typeface="微软雅黑" panose="020B0503020204020204" pitchFamily="34" charset="-122"/>
               </a:defRPr>
             </a:pPr>
             <a:r>
-              <a:rPr sz="1400" b="0">
-                <a:solidFill>
-                  <a:srgbClr val="000000"/>
-                </a:solidFill>
-                <a:latin typeface="Consolas" panose="020B0609020204030204"/>
-                <a:ea typeface="Consolas" panose="020B0609020204030204"/>
-                <a:cs typeface="Consolas" panose="020B0609020204030204"/>
-              </a:rPr>
-              <a:t>ADD(list, device)       ↔ REMOVE(list, device)</a:t>
-            </a:r>
-            <a:endParaRPr sz="1400" b="0">
+              <a:rPr b="0">
+                <a:solidFill>
+                  <a:srgbClr val="5F6672"/>
+                </a:solidFill>
+                <a:latin typeface="微软雅黑" panose="020B0503020204020204" pitchFamily="34" charset="-122"/>
+                <a:ea typeface="微软雅黑" panose="020B0503020204020204" pitchFamily="34" charset="-122"/>
+                <a:cs typeface="微软雅黑" panose="020B0503020204020204" pitchFamily="34" charset="-122"/>
+              </a:rPr>
+              <a:t>02</a:t>
+            </a:r>
+            <a:endParaRPr b="0">
               <a:solidFill>
-                <a:srgbClr val="000000"/>
+                <a:srgbClr val="5F6672"/>
               </a:solidFill>
-              <a:latin typeface="Consolas" panose="020B0609020204030204"/>
-              <a:ea typeface="Consolas" panose="020B0609020204030204"/>
-              <a:cs typeface="Consolas" panose="020B0609020204030204"/>
+              <a:latin typeface="微软雅黑" panose="020B0503020204020204" pitchFamily="34" charset="-122"/>
+              <a:ea typeface="微软雅黑" panose="020B0503020204020204" pitchFamily="34" charset="-122"/>
+              <a:cs typeface="微软雅黑" panose="020B0503020204020204" pitchFamily="34" charset="-122"/>
             </a:endParaRPr>
           </a:p>
+        </p:txBody>
+      </p:sp>
+      <p:sp>
+        <p:nvSpPr>
+          <p:cNvPr id="5" name="motivation-lead"/>
+          <p:cNvSpPr>
+            <a:spLocks noGrp="1"/>
+          </p:cNvSpPr>
+          <p:nvPr/>
+        </p:nvSpPr>
+        <p:spPr>
+          <a:xfrm>
+            <a:off x="350499" y="828766"/>
+            <a:ext cx="11048425" cy="523848"/>
+          </a:xfrm>
+          <a:prstGeom prst="rect">
+            <a:avLst/>
+          </a:prstGeom>
+          <a:noFill/>
+          <a:ln w="0">
+            <a:noFill/>
+            <a:prstDash val="solid"/>
+          </a:ln>
+        </p:spPr>
+        <p:txBody>
+          <a:bodyPr anchor="t"/>
+          <a:lstStyle/>
           <a:p>
             <a:pPr algn="l">
-              <a:defRPr sz="1350" b="0">
-                <a:solidFill>
-                  <a:srgbClr val="000000"/>
-                </a:solidFill>
-                <a:latin typeface="Consolas" panose="020B0609020204030204"/>
-                <a:ea typeface="Consolas" panose="020B0609020204030204"/>
-                <a:cs typeface="Consolas" panose="020B0609020204030204"/>
+              <a:defRPr sz="2175" b="1">
+                <a:solidFill>
+                  <a:srgbClr val="111111"/>
+                </a:solidFill>
+                <a:latin typeface="微软雅黑" panose="020B0503020204020204" pitchFamily="34" charset="-122"/>
+                <a:ea typeface="微软雅黑" panose="020B0503020204020204" pitchFamily="34" charset="-122"/>
+                <a:cs typeface="微软雅黑" panose="020B0503020204020204" pitchFamily="34" charset="-122"/>
               </a:defRPr>
             </a:pPr>
             <a:r>
-              <a:rPr sz="1400" b="0">
-                <a:solidFill>
-                  <a:srgbClr val="000000"/>
-                </a:solidFill>
-                <a:latin typeface="Consolas" panose="020B0609020204030204"/>
-                <a:ea typeface="Consolas" panose="020B0609020204030204"/>
-                <a:cs typeface="Consolas" panose="020B0609020204030204"/>
-              </a:rPr>
-              <a:t>INC(counter, n)         ↔ DEC(counter, n)</a:t>
-            </a:r>
-            <a:endParaRPr sz="1400" b="0">
+              <a:rPr sz="1600" b="0">
+                <a:solidFill>
+                  <a:srgbClr val="111111"/>
+                </a:solidFill>
+                <a:latin typeface="微软雅黑" panose="020B0503020204020204" pitchFamily="34" charset="-122"/>
+                <a:ea typeface="微软雅黑" panose="020B0503020204020204" pitchFamily="34" charset="-122"/>
+                <a:cs typeface="微软雅黑" panose="020B0503020204020204" pitchFamily="34" charset="-122"/>
+              </a:rPr>
+              <a:t>问题不只是“忘了 cleanup”，而是返回结果、元数据完成程度与恢复责任不一致。</a:t>
+            </a:r>
+            <a:endParaRPr sz="1600" b="0">
               <a:solidFill>
-                <a:srgbClr val="000000"/>
+                <a:srgbClr val="111111"/>
               </a:solidFill>
-              <a:latin typeface="Consolas" panose="020B0609020204030204"/>
-              <a:ea typeface="Consolas" panose="020B0609020204030204"/>
-              <a:cs typeface="Consolas" panose="020B0609020204030204"/>
+              <a:latin typeface="微软雅黑" panose="020B0503020204020204" pitchFamily="34" charset="-122"/>
+              <a:ea typeface="微软雅黑" panose="020B0503020204020204" pitchFamily="34" charset="-122"/>
+              <a:cs typeface="微软雅黑" panose="020B0503020204020204" pitchFamily="34" charset="-122"/>
             </a:endParaRPr>
           </a:p>
+        </p:txBody>
+      </p:sp>
+      <p:sp>
+        <p:nvSpPr>
+          <p:cNvPr id="6" name="bug-outcome-panel"/>
+          <p:cNvSpPr>
+            <a:spLocks noGrp="1"/>
+          </p:cNvSpPr>
+          <p:nvPr/>
+        </p:nvSpPr>
+        <p:spPr>
+          <a:xfrm>
+            <a:off x="399394" y="1476421"/>
+            <a:ext cx="3428821" cy="2571616"/>
+          </a:xfrm>
+          <a:prstGeom prst="rect">
+            <a:avLst/>
+          </a:prstGeom>
+          <a:solidFill>
+            <a:srgbClr val="F6F7F8"/>
+          </a:solidFill>
+          <a:ln w="0">
+            <a:noFill/>
+            <a:prstDash val="solid"/>
+          </a:ln>
+        </p:spPr>
+      </p:sp>
+      <p:sp>
+        <p:nvSpPr>
+          <p:cNvPr id="7" name="bug-outcome-title"/>
+          <p:cNvSpPr>
+            <a:spLocks noGrp="1"/>
+          </p:cNvSpPr>
+          <p:nvPr/>
+        </p:nvSpPr>
+        <p:spPr>
+          <a:xfrm>
+            <a:off x="627982" y="1685960"/>
+            <a:ext cx="2971645" cy="361931"/>
+          </a:xfrm>
+          <a:prstGeom prst="rect">
+            <a:avLst/>
+          </a:prstGeom>
+          <a:noFill/>
+          <a:ln w="0">
+            <a:noFill/>
+            <a:prstDash val="solid"/>
+          </a:ln>
+        </p:spPr>
+        <p:txBody>
+          <a:bodyPr anchor="t"/>
+          <a:lstStyle/>
           <a:p>
             <a:pPr algn="l">
-              <a:defRPr sz="1350" b="0">
-                <a:solidFill>
-                  <a:srgbClr val="000000"/>
-                </a:solidFill>
-                <a:latin typeface="Consolas" panose="020B0609020204030204"/>
-                <a:ea typeface="Consolas" panose="020B0609020204030204"/>
-                <a:cs typeface="Consolas" panose="020B0609020204030204"/>
+              <a:defRPr sz="1875" b="1">
+                <a:solidFill>
+                  <a:srgbClr val="111111"/>
+                </a:solidFill>
+                <a:latin typeface="微软雅黑" panose="020B0503020204020204" pitchFamily="34" charset="-122"/>
+                <a:ea typeface="微软雅黑" panose="020B0503020204020204" pitchFamily="34" charset="-122"/>
+                <a:cs typeface="微软雅黑" panose="020B0503020204020204" pitchFamily="34" charset="-122"/>
               </a:defRPr>
             </a:pPr>
             <a:r>
-              <a:rPr sz="1400" b="0">
-                <a:solidFill>
-                  <a:srgbClr val="000000"/>
-                </a:solidFill>
-                <a:latin typeface="Consolas" panose="020B0609020204030204"/>
-                <a:ea typeface="Consolas" panose="020B0609020204030204"/>
-                <a:cs typeface="Consolas" panose="020B0609020204030204"/>
-              </a:rPr>
-              <a:t>SET(state_bit, value)   ↔ CLEAR(state_bit, value)</a:t>
-            </a:r>
-            <a:endParaRPr sz="1400" b="0">
+              <a:rPr sz="1600" b="0">
+                <a:solidFill>
+                  <a:schemeClr val="tx1"/>
+                </a:solidFill>
+                <a:latin typeface="微软雅黑" panose="020B0503020204020204" pitchFamily="34" charset="-122"/>
+                <a:ea typeface="微软雅黑" panose="020B0503020204020204" pitchFamily="34" charset="-122"/>
+                <a:cs typeface="微软雅黑" panose="020B0503020204020204" pitchFamily="34" charset="-122"/>
+              </a:rPr>
+              <a:t>6 个 Outcome Bug</a:t>
+            </a:r>
+            <a:endParaRPr sz="1600" b="0">
               <a:solidFill>
-                <a:srgbClr val="000000"/>
+                <a:schemeClr val="tx1"/>
               </a:solidFill>
-              <a:latin typeface="Consolas" panose="020B0609020204030204"/>
-              <a:ea typeface="Consolas" panose="020B0609020204030204"/>
-              <a:cs typeface="Consolas" panose="020B0609020204030204"/>
+              <a:latin typeface="微软雅黑" panose="020B0503020204020204" pitchFamily="34" charset="-122"/>
+              <a:ea typeface="微软雅黑" panose="020B0503020204020204" pitchFamily="34" charset="-122"/>
+              <a:cs typeface="微软雅黑" panose="020B0503020204020204" pitchFamily="34" charset="-122"/>
             </a:endParaRPr>
           </a:p>
+        </p:txBody>
+      </p:sp>
+      <p:sp>
+        <p:nvSpPr>
+          <p:cNvPr id="8" name="bug-outcome-body"/>
+          <p:cNvSpPr>
+            <a:spLocks noGrp="1"/>
+          </p:cNvSpPr>
+          <p:nvPr/>
+        </p:nvSpPr>
+        <p:spPr>
+          <a:xfrm>
+            <a:off x="627982" y="2162185"/>
+            <a:ext cx="2971645" cy="1695362"/>
+          </a:xfrm>
+          <a:prstGeom prst="rect">
+            <a:avLst/>
+          </a:prstGeom>
+          <a:noFill/>
+          <a:ln w="0">
+            <a:noFill/>
+            <a:prstDash val="solid"/>
+          </a:ln>
+        </p:spPr>
+        <p:txBody>
+          <a:bodyPr anchor="t"/>
+          <a:lstStyle/>
           <a:p>
             <a:pPr algn="l">
-              <a:defRPr sz="1350" b="0">
-                <a:solidFill>
-                  <a:srgbClr val="000000"/>
-                </a:solidFill>
-                <a:latin typeface="Consolas" panose="020B0609020204030204"/>
-                <a:ea typeface="Consolas" panose="020B0609020204030204"/>
-                <a:cs typeface="Consolas" panose="020B0609020204030204"/>
+              <a:defRPr sz="1500" b="0">
+                <a:solidFill>
+                  <a:srgbClr val="111111"/>
+                </a:solidFill>
+                <a:latin typeface="微软雅黑" panose="020B0503020204020204" pitchFamily="34" charset="-122"/>
+                <a:ea typeface="微软雅黑" panose="020B0503020204020204" pitchFamily="34" charset="-122"/>
+                <a:cs typeface="微软雅黑" panose="020B0503020204020204" pitchFamily="34" charset="-122"/>
               </a:defRPr>
             </a:pPr>
             <a:r>
-              <a:rPr sz="1400" b="0">
-                <a:solidFill>
-                  <a:srgbClr val="000000"/>
-                </a:solidFill>
-                <a:latin typeface="Consolas" panose="020B0609020204030204"/>
-                <a:ea typeface="Consolas" panose="020B0609020204030204"/>
-                <a:cs typeface="Consolas" panose="020B0609020204030204"/>
-              </a:rPr>
-              <a:t>ATTACH(owner.field, x)  ↔ DROP(owner.field, x)</a:t>
-            </a:r>
-            <a:endParaRPr sz="1400" b="0">
+              <a:rPr sz="1600">
+                <a:solidFill>
+                  <a:schemeClr val="tx1"/>
+                </a:solidFill>
+                <a:latin typeface="微软雅黑" panose="020B0503020204020204" pitchFamily="34" charset="-122"/>
+                <a:ea typeface="微软雅黑" panose="020B0503020204020204" pitchFamily="34" charset="-122"/>
+                <a:cs typeface="微软雅黑" panose="020B0503020204020204" pitchFamily="34" charset="-122"/>
+              </a:rPr>
+              <a:t>#1/#2/#4/#5/#8/#13</a:t>
+            </a:r>
+            <a:endParaRPr sz="1600">
               <a:solidFill>
-                <a:srgbClr val="000000"/>
+                <a:schemeClr val="tx1"/>
               </a:solidFill>
-              <a:latin typeface="Consolas" panose="020B0609020204030204"/>
-              <a:ea typeface="Consolas" panose="020B0609020204030204"/>
-              <a:cs typeface="Consolas" panose="020B0609020204030204"/>
+              <a:latin typeface="微软雅黑" panose="020B0503020204020204" pitchFamily="34" charset="-122"/>
+              <a:ea typeface="微软雅黑" panose="020B0503020204020204" pitchFamily="34" charset="-122"/>
+              <a:cs typeface="微软雅黑" panose="020B0503020204020204" pitchFamily="34" charset="-122"/>
             </a:endParaRPr>
           </a:p>
           <a:p>
-            <a:endParaRPr sz="1400"/>
-          </a:p>
-          <a:p>
             <a:pPr algn="l">
-              <a:defRPr sz="1350" b="0">
-                <a:solidFill>
-                  <a:srgbClr val="000000"/>
-                </a:solidFill>
-                <a:latin typeface="Consolas" panose="020B0609020204030204"/>
-                <a:ea typeface="Consolas" panose="020B0609020204030204"/>
-                <a:cs typeface="Consolas" panose="020B0609020204030204"/>
+              <a:defRPr sz="1500" b="0">
+                <a:solidFill>
+                  <a:srgbClr val="111111"/>
+                </a:solidFill>
+                <a:latin typeface="微软雅黑" panose="020B0503020204020204" pitchFamily="34" charset="-122"/>
+                <a:ea typeface="微软雅黑" panose="020B0503020204020204" pitchFamily="34" charset="-122"/>
+                <a:cs typeface="微软雅黑" panose="020B0503020204020204" pitchFamily="34" charset="-122"/>
               </a:defRPr>
             </a:pPr>
             <a:r>
-              <a:rPr sz="1400" b="0">
-                <a:solidFill>
-                  <a:srgbClr val="000000"/>
-                </a:solidFill>
-                <a:latin typeface="Consolas" panose="020B0609020204030204"/>
-                <a:ea typeface="Consolas" panose="020B0609020204030204"/>
-                <a:cs typeface="Consolas" panose="020B0609020204030204"/>
-              </a:rPr>
-              <a:t>same spelling           ≠ same identity</a:t>
-            </a:r>
-            <a:endParaRPr sz="1400" b="0">
+              <a:rPr sz="1600">
+                <a:solidFill>
+                  <a:schemeClr val="tx1"/>
+                </a:solidFill>
+                <a:latin typeface="微软雅黑" panose="020B0503020204020204" pitchFamily="34" charset="-122"/>
+                <a:ea typeface="微软雅黑" panose="020B0503020204020204" pitchFamily="34" charset="-122"/>
+                <a:cs typeface="微软雅黑" panose="020B0503020204020204" pitchFamily="34" charset="-122"/>
+              </a:rPr>
+              <a:t>元数据 transition 失败却报成功，或重试成功后仍返回旧错误。</a:t>
+            </a:r>
+            <a:endParaRPr sz="1600">
               <a:solidFill>
-                <a:srgbClr val="000000"/>
+                <a:schemeClr val="tx1"/>
               </a:solidFill>
-              <a:latin typeface="Consolas" panose="020B0609020204030204"/>
-              <a:ea typeface="Consolas" panose="020B0609020204030204"/>
-              <a:cs typeface="Consolas" panose="020B0609020204030204"/>
+              <a:latin typeface="微软雅黑" panose="020B0503020204020204" pitchFamily="34" charset="-122"/>
+              <a:ea typeface="微软雅黑" panose="020B0503020204020204" pitchFamily="34" charset="-122"/>
+              <a:cs typeface="微软雅黑" panose="020B0503020204020204" pitchFamily="34" charset="-122"/>
             </a:endParaRPr>
           </a:p>
+        </p:txBody>
+      </p:sp>
+      <p:sp>
+        <p:nvSpPr>
+          <p:cNvPr id="9" name="bug-relation-panel"/>
+          <p:cNvSpPr>
+            <a:spLocks noGrp="1"/>
+          </p:cNvSpPr>
+          <p:nvPr/>
+        </p:nvSpPr>
+        <p:spPr>
+          <a:xfrm>
+            <a:off x="4380637" y="1476421"/>
+            <a:ext cx="3428821" cy="2571616"/>
+          </a:xfrm>
+          <a:prstGeom prst="rect">
+            <a:avLst/>
+          </a:prstGeom>
+          <a:solidFill>
+            <a:srgbClr val="F6F7F8"/>
+          </a:solidFill>
+          <a:ln w="0">
+            <a:noFill/>
+            <a:prstDash val="solid"/>
+          </a:ln>
+        </p:spPr>
+      </p:sp>
+      <p:sp>
+        <p:nvSpPr>
+          <p:cNvPr id="10" name="bug-relation-title"/>
+          <p:cNvSpPr>
+            <a:spLocks noGrp="1"/>
+          </p:cNvSpPr>
+          <p:nvPr/>
+        </p:nvSpPr>
+        <p:spPr>
+          <a:xfrm>
+            <a:off x="4609225" y="1685960"/>
+            <a:ext cx="2971645" cy="361931"/>
+          </a:xfrm>
+          <a:prstGeom prst="rect">
+            <a:avLst/>
+          </a:prstGeom>
+          <a:noFill/>
+          <a:ln w="0">
+            <a:noFill/>
+            <a:prstDash val="solid"/>
+          </a:ln>
+        </p:spPr>
+        <p:txBody>
+          <a:bodyPr anchor="t"/>
+          <a:lstStyle/>
           <a:p>
             <a:pPr algn="l">
-              <a:defRPr sz="1350" b="0">
-                <a:solidFill>
-                  <a:srgbClr val="000000"/>
-                </a:solidFill>
-                <a:latin typeface="Consolas" panose="020B0609020204030204"/>
-                <a:ea typeface="Consolas" panose="020B0609020204030204"/>
-                <a:cs typeface="Consolas" panose="020B0609020204030204"/>
+              <a:defRPr sz="1875" b="1">
+                <a:solidFill>
+                  <a:srgbClr val="111111"/>
+                </a:solidFill>
+                <a:latin typeface="微软雅黑" panose="020B0503020204020204" pitchFamily="34" charset="-122"/>
+                <a:ea typeface="微软雅黑" panose="020B0503020204020204" pitchFamily="34" charset="-122"/>
+                <a:cs typeface="微软雅黑" panose="020B0503020204020204" pitchFamily="34" charset="-122"/>
               </a:defRPr>
             </a:pPr>
             <a:r>
-              <a:rPr sz="1400" b="0">
-                <a:solidFill>
-                  <a:srgbClr val="000000"/>
-                </a:solidFill>
-                <a:latin typeface="Consolas" panose="020B0609020204030204"/>
-                <a:ea typeface="Consolas" panose="020B0609020204030204"/>
-                <a:cs typeface="Consolas" panose="020B0609020204030204"/>
-              </a:rPr>
-              <a:t>free(local_object)      ≠ rollback(owner.field)</a:t>
-            </a:r>
-            <a:endParaRPr sz="1400" b="0">
+              <a:rPr sz="1600" b="0">
+                <a:solidFill>
+                  <a:schemeClr val="tx1"/>
+                </a:solidFill>
+                <a:latin typeface="微软雅黑" panose="020B0503020204020204" pitchFamily="34" charset="-122"/>
+                <a:ea typeface="微软雅黑" panose="020B0503020204020204" pitchFamily="34" charset="-122"/>
+                <a:cs typeface="微软雅黑" panose="020B0503020204020204" pitchFamily="34" charset="-122"/>
+              </a:rPr>
+              <a:t>6 个跨对象问题</a:t>
+            </a:r>
+            <a:endParaRPr sz="1600" b="0">
               <a:solidFill>
-                <a:srgbClr val="000000"/>
+                <a:schemeClr val="tx1"/>
               </a:solidFill>
-              <a:latin typeface="Consolas" panose="020B0609020204030204"/>
-              <a:ea typeface="Consolas" panose="020B0609020204030204"/>
-              <a:cs typeface="Consolas" panose="020B0609020204030204"/>
+              <a:latin typeface="微软雅黑" panose="020B0503020204020204" pitchFamily="34" charset="-122"/>
+              <a:ea typeface="微软雅黑" panose="020B0503020204020204" pitchFamily="34" charset="-122"/>
+              <a:cs typeface="微软雅黑" panose="020B0503020204020204" pitchFamily="34" charset="-122"/>
             </a:endParaRPr>
           </a:p>
+        </p:txBody>
+      </p:sp>
+      <p:sp>
+        <p:nvSpPr>
+          <p:cNvPr id="11" name="bug-relation-body"/>
+          <p:cNvSpPr>
+            <a:spLocks noGrp="1"/>
+          </p:cNvSpPr>
+          <p:nvPr/>
+        </p:nvSpPr>
+        <p:spPr>
+          <a:xfrm>
+            <a:off x="4609225" y="2162185"/>
+            <a:ext cx="2971645" cy="1695362"/>
+          </a:xfrm>
+          <a:prstGeom prst="rect">
+            <a:avLst/>
+          </a:prstGeom>
+          <a:noFill/>
+          <a:ln w="0">
+            <a:noFill/>
+            <a:prstDash val="solid"/>
+          </a:ln>
+        </p:spPr>
+        <p:txBody>
+          <a:bodyPr anchor="t"/>
+          <a:lstStyle/>
           <a:p>
             <a:pPr algn="l">
-              <a:defRPr sz="1350" b="0">
-                <a:solidFill>
-                  <a:srgbClr val="000000"/>
-                </a:solidFill>
-                <a:latin typeface="Consolas" panose="020B0609020204030204"/>
-                <a:ea typeface="Consolas" panose="020B0609020204030204"/>
-                <a:cs typeface="Consolas" panose="020B0609020204030204"/>
+              <a:defRPr sz="1500" b="0">
+                <a:solidFill>
+                  <a:srgbClr val="111111"/>
+                </a:solidFill>
+                <a:latin typeface="微软雅黑" panose="020B0503020204020204" pitchFamily="34" charset="-122"/>
+                <a:ea typeface="微软雅黑" panose="020B0503020204020204" pitchFamily="34" charset="-122"/>
+                <a:cs typeface="微软雅黑" panose="020B0503020204020204" pitchFamily="34" charset="-122"/>
               </a:defRPr>
             </a:pPr>
             <a:r>
-              <a:rPr sz="1400" b="0">
-                <a:solidFill>
-                  <a:srgbClr val="000000"/>
-                </a:solidFill>
-                <a:latin typeface="Consolas" panose="020B0609020204030204"/>
-                <a:ea typeface="Consolas" panose="020B0609020204030204"/>
-                <a:cs typeface="Consolas" panose="020B0609020204030204"/>
-              </a:rPr>
-              <a:t>transaction abort       ≠ arbitrary state restore</a:t>
-            </a:r>
-            <a:endParaRPr sz="1400" b="0">
+              <a:rPr sz="1600">
+                <a:solidFill>
+                  <a:schemeClr val="tx1"/>
+                </a:solidFill>
+                <a:latin typeface="微软雅黑" panose="020B0503020204020204" pitchFamily="34" charset="-122"/>
+                <a:ea typeface="微软雅黑" panose="020B0503020204020204" pitchFamily="34" charset="-122"/>
+                <a:cs typeface="微软雅黑" panose="020B0503020204020204" pitchFamily="34" charset="-122"/>
+              </a:rPr>
+              <a:t>#7/#16/#17/#18/P1/P3</a:t>
+            </a:r>
+            <a:endParaRPr sz="1600">
               <a:solidFill>
-                <a:srgbClr val="000000"/>
+                <a:schemeClr val="tx1"/>
               </a:solidFill>
-              <a:latin typeface="Consolas" panose="020B0609020204030204"/>
-              <a:ea typeface="Consolas" panose="020B0609020204030204"/>
-              <a:cs typeface="Consolas" panose="020B0609020204030204"/>
+              <a:latin typeface="微软雅黑" panose="020B0503020204020204" pitchFamily="34" charset="-122"/>
+              <a:ea typeface="微软雅黑" panose="020B0503020204020204" pitchFamily="34" charset="-122"/>
+              <a:cs typeface="微软雅黑" panose="020B0503020204020204" pitchFamily="34" charset="-122"/>
+            </a:endParaRPr>
+          </a:p>
+          <a:p>
+            <a:pPr algn="l">
+              <a:defRPr sz="1500" b="0">
+                <a:solidFill>
+                  <a:srgbClr val="111111"/>
+                </a:solidFill>
+                <a:latin typeface="微软雅黑" panose="020B0503020204020204" pitchFamily="34" charset="-122"/>
+                <a:ea typeface="微软雅黑" panose="020B0503020204020204" pitchFamily="34" charset="-122"/>
+                <a:cs typeface="微软雅黑" panose="020B0503020204020204" pitchFamily="34" charset="-122"/>
+              </a:defRPr>
+            </a:pPr>
+            <a:r>
+              <a:rPr sz="1600">
+                <a:solidFill>
+                  <a:schemeClr val="tx1"/>
+                </a:solidFill>
+                <a:latin typeface="微软雅黑" panose="020B0503020204020204" pitchFamily="34" charset="-122"/>
+                <a:ea typeface="微软雅黑" panose="020B0503020204020204" pitchFamily="34" charset="-122"/>
+                <a:cs typeface="微软雅黑" panose="020B0503020204020204" pitchFamily="34" charset="-122"/>
+              </a:rPr>
+              <a:t>设备拓扑、active pointer、transaction list 或阶段标记停在非法组合。</a:t>
+            </a:r>
+            <a:endParaRPr sz="1600">
+              <a:solidFill>
+                <a:schemeClr val="tx1"/>
+              </a:solidFill>
+              <a:latin typeface="微软雅黑" panose="020B0503020204020204" pitchFamily="34" charset="-122"/>
+              <a:ea typeface="微软雅黑" panose="020B0503020204020204" pitchFamily="34" charset="-122"/>
+              <a:cs typeface="微软雅黑" panose="020B0503020204020204" pitchFamily="34" charset="-122"/>
+            </a:endParaRPr>
+          </a:p>
+        </p:txBody>
+      </p:sp>
+      <p:sp>
+        <p:nvSpPr>
+          <p:cNvPr id="12" name="bug-companion-panel"/>
+          <p:cNvSpPr>
+            <a:spLocks noGrp="1"/>
+          </p:cNvSpPr>
+          <p:nvPr/>
+        </p:nvSpPr>
+        <p:spPr>
+          <a:xfrm>
+            <a:off x="8361879" y="1476421"/>
+            <a:ext cx="3428821" cy="2571616"/>
+          </a:xfrm>
+          <a:prstGeom prst="rect">
+            <a:avLst/>
+          </a:prstGeom>
+          <a:solidFill>
+            <a:schemeClr val="bg2"/>
+          </a:solidFill>
+          <a:ln w="0">
+            <a:noFill/>
+            <a:prstDash val="solid"/>
+          </a:ln>
+        </p:spPr>
+      </p:sp>
+      <p:sp>
+        <p:nvSpPr>
+          <p:cNvPr id="13" name="bug-companion-title"/>
+          <p:cNvSpPr>
+            <a:spLocks noGrp="1"/>
+          </p:cNvSpPr>
+          <p:nvPr/>
+        </p:nvSpPr>
+        <p:spPr>
+          <a:xfrm>
+            <a:off x="8590468" y="1685960"/>
+            <a:ext cx="2971645" cy="361931"/>
+          </a:xfrm>
+          <a:prstGeom prst="rect">
+            <a:avLst/>
+          </a:prstGeom>
+          <a:noFill/>
+          <a:ln w="0">
+            <a:noFill/>
+            <a:prstDash val="solid"/>
+          </a:ln>
+        </p:spPr>
+        <p:txBody>
+          <a:bodyPr anchor="t"/>
+          <a:lstStyle/>
+          <a:p>
+            <a:pPr algn="l">
+              <a:defRPr sz="1875" b="1">
+                <a:solidFill>
+                  <a:srgbClr val="3D8DFF"/>
+                </a:solidFill>
+                <a:latin typeface="微软雅黑" panose="020B0503020204020204" pitchFamily="34" charset="-122"/>
+                <a:ea typeface="微软雅黑" panose="020B0503020204020204" pitchFamily="34" charset="-122"/>
+                <a:cs typeface="微软雅黑" panose="020B0503020204020204" pitchFamily="34" charset="-122"/>
+              </a:defRPr>
+            </a:pPr>
+            <a:r>
+              <a:rPr sz="1600" b="0">
+                <a:solidFill>
+                  <a:schemeClr val="tx1"/>
+                </a:solidFill>
+                <a:latin typeface="微软雅黑" panose="020B0503020204020204" pitchFamily="34" charset="-122"/>
+                <a:ea typeface="微软雅黑" panose="020B0503020204020204" pitchFamily="34" charset="-122"/>
+                <a:cs typeface="微软雅黑" panose="020B0503020204020204" pitchFamily="34" charset="-122"/>
+              </a:rPr>
+              <a:t>1 个伴随义务缺失</a:t>
+            </a:r>
+            <a:endParaRPr sz="1600" b="0">
+              <a:solidFill>
+                <a:schemeClr val="tx1"/>
+              </a:solidFill>
+              <a:latin typeface="微软雅黑" panose="020B0503020204020204" pitchFamily="34" charset="-122"/>
+              <a:ea typeface="微软雅黑" panose="020B0503020204020204" pitchFamily="34" charset="-122"/>
+              <a:cs typeface="微软雅黑" panose="020B0503020204020204" pitchFamily="34" charset="-122"/>
+            </a:endParaRPr>
+          </a:p>
+        </p:txBody>
+      </p:sp>
+      <p:sp>
+        <p:nvSpPr>
+          <p:cNvPr id="14" name="bug-companion-body"/>
+          <p:cNvSpPr>
+            <a:spLocks noGrp="1"/>
+          </p:cNvSpPr>
+          <p:nvPr/>
+        </p:nvSpPr>
+        <p:spPr>
+          <a:xfrm>
+            <a:off x="8590468" y="2162185"/>
+            <a:ext cx="2971645" cy="1695362"/>
+          </a:xfrm>
+          <a:prstGeom prst="rect">
+            <a:avLst/>
+          </a:prstGeom>
+          <a:noFill/>
+          <a:ln w="0">
+            <a:noFill/>
+            <a:prstDash val="solid"/>
+          </a:ln>
+        </p:spPr>
+        <p:txBody>
+          <a:bodyPr anchor="t"/>
+          <a:lstStyle/>
+          <a:p>
+            <a:pPr algn="l">
+              <a:defRPr sz="1500" b="0">
+                <a:solidFill>
+                  <a:srgbClr val="111111"/>
+                </a:solidFill>
+                <a:latin typeface="微软雅黑" panose="020B0503020204020204" pitchFamily="34" charset="-122"/>
+                <a:ea typeface="微软雅黑" panose="020B0503020204020204" pitchFamily="34" charset="-122"/>
+                <a:cs typeface="微软雅黑" panose="020B0503020204020204" pitchFamily="34" charset="-122"/>
+              </a:defRPr>
+            </a:pPr>
+            <a:r>
+              <a:rPr sz="1600">
+                <a:solidFill>
+                  <a:schemeClr val="tx1"/>
+                </a:solidFill>
+                <a:latin typeface="微软雅黑" panose="020B0503020204020204" pitchFamily="34" charset="-122"/>
+                <a:ea typeface="微软雅黑" panose="020B0503020204020204" pitchFamily="34" charset="-122"/>
+                <a:cs typeface="微软雅黑" panose="020B0503020204020204" pitchFamily="34" charset="-122"/>
+              </a:rPr>
+              <a:t>#15</a:t>
+            </a:r>
+            <a:endParaRPr sz="1600">
+              <a:solidFill>
+                <a:schemeClr val="tx1"/>
+              </a:solidFill>
+              <a:latin typeface="微软雅黑" panose="020B0503020204020204" pitchFamily="34" charset="-122"/>
+              <a:ea typeface="微软雅黑" panose="020B0503020204020204" pitchFamily="34" charset="-122"/>
+              <a:cs typeface="微软雅黑" panose="020B0503020204020204" pitchFamily="34" charset="-122"/>
+            </a:endParaRPr>
+          </a:p>
+          <a:p>
+            <a:pPr algn="l">
+              <a:defRPr sz="1500" b="0">
+                <a:solidFill>
+                  <a:srgbClr val="111111"/>
+                </a:solidFill>
+                <a:latin typeface="微软雅黑" panose="020B0503020204020204" pitchFamily="34" charset="-122"/>
+                <a:ea typeface="微软雅黑" panose="020B0503020204020204" pitchFamily="34" charset="-122"/>
+                <a:cs typeface="微软雅黑" panose="020B0503020204020204" pitchFamily="34" charset="-122"/>
+              </a:defRPr>
+            </a:pPr>
+            <a:r>
+              <a:rPr sz="1600">
+                <a:solidFill>
+                  <a:schemeClr val="tx1"/>
+                </a:solidFill>
+                <a:latin typeface="微软雅黑" panose="020B0503020204020204" pitchFamily="34" charset="-122"/>
+                <a:ea typeface="微软雅黑" panose="020B0503020204020204" pitchFamily="34" charset="-122"/>
+                <a:cs typeface="微软雅黑" panose="020B0503020204020204" pitchFamily="34" charset="-122"/>
+              </a:rPr>
+              <a:t>chunk 已创建，但协议要求的 metadata reservation 完全没有执行。</a:t>
+            </a:r>
+            <a:endParaRPr sz="1600">
+              <a:solidFill>
+                <a:schemeClr val="tx1"/>
+              </a:solidFill>
+              <a:latin typeface="微软雅黑" panose="020B0503020204020204" pitchFamily="34" charset="-122"/>
+              <a:ea typeface="微软雅黑" panose="020B0503020204020204" pitchFamily="34" charset="-122"/>
+              <a:cs typeface="微软雅黑" panose="020B0503020204020204" pitchFamily="34" charset="-122"/>
+            </a:endParaRPr>
+          </a:p>
+        </p:txBody>
+      </p:sp>
+    </p:spTree>
+  </p:cSld>
+  <p:clrMapOvr>
+    <a:masterClrMapping/>
+  </p:clrMapOvr>
+</p:sld>
+</file>
+
+<file path=ppt/slides/slide19.xml><?xml version="1.0" encoding="utf-8"?>
+<p:sld xmlns:a="http://schemas.openxmlformats.org/drawingml/2006/main" xmlns:r="http://schemas.openxmlformats.org/officeDocument/2006/relationships" xmlns:p="http://schemas.openxmlformats.org/presentationml/2006/main">
+  <p:cSld>
+    <p:spTree>
+      <p:nvGrpSpPr>
+        <p:cNvPr id="1" name=""/>
+        <p:cNvGrpSpPr/>
+        <p:nvPr/>
+      </p:nvGrpSpPr>
+      <p:grpSpPr/>
+      <p:sp>
+        <p:nvSpPr>
+          <p:cNvPr id="40" name="eyebrow-8"/>
+          <p:cNvSpPr>
+            <a:spLocks noGrp="1"/>
+          </p:cNvSpPr>
+          <p:nvPr/>
+        </p:nvSpPr>
+        <p:spPr>
+          <a:xfrm>
+            <a:off x="400029" y="285914"/>
+            <a:ext cx="4571762" cy="323833"/>
+          </a:xfrm>
+          <a:prstGeom prst="rect">
+            <a:avLst/>
+          </a:prstGeom>
+          <a:noFill/>
+          <a:ln w="0">
+            <a:noFill/>
+            <a:prstDash val="solid"/>
+          </a:ln>
+        </p:spPr>
+        <p:txBody>
+          <a:bodyPr anchor="t"/>
+          <a:lstStyle/>
+          <a:p>
+            <a:pPr algn="l">
+              <a:defRPr sz="1350" b="1">
+                <a:solidFill>
+                  <a:srgbClr val="5F6672"/>
+                </a:solidFill>
+                <a:latin typeface="微软雅黑" panose="020B0503020204020204" pitchFamily="34" charset="-122"/>
+                <a:ea typeface="微软雅黑" panose="020B0503020204020204" pitchFamily="34" charset="-122"/>
+                <a:cs typeface="微软雅黑" panose="020B0503020204020204" pitchFamily="34" charset="-122"/>
+              </a:defRPr>
+            </a:pPr>
+            <a:endParaRPr b="1">
+              <a:solidFill>
+                <a:srgbClr val="5F6672"/>
+              </a:solidFill>
+              <a:latin typeface="微软雅黑" panose="020B0503020204020204" pitchFamily="34" charset="-122"/>
+              <a:ea typeface="微软雅黑" panose="020B0503020204020204" pitchFamily="34" charset="-122"/>
+              <a:cs typeface="微软雅黑" panose="020B0503020204020204" pitchFamily="34" charset="-122"/>
+            </a:endParaRPr>
+          </a:p>
+        </p:txBody>
+      </p:sp>
+      <p:sp>
+        <p:nvSpPr>
+          <p:cNvPr id="2" name="title-8"/>
+          <p:cNvSpPr>
+            <a:spLocks noGrp="1"/>
+          </p:cNvSpPr>
+          <p:nvPr/>
+        </p:nvSpPr>
+        <p:spPr>
+          <a:xfrm>
+            <a:off x="400029" y="704992"/>
+            <a:ext cx="11238915" cy="685764"/>
+          </a:xfrm>
+          <a:prstGeom prst="rect">
+            <a:avLst/>
+          </a:prstGeom>
+          <a:noFill/>
+          <a:ln w="0">
+            <a:noFill/>
+            <a:prstDash val="solid"/>
+          </a:ln>
+        </p:spPr>
+        <p:txBody>
+          <a:bodyPr anchor="t"/>
+          <a:lstStyle/>
+          <a:p>
+            <a:pPr algn="l">
+              <a:defRPr sz="3225" b="1">
+                <a:solidFill>
+                  <a:srgbClr val="111111"/>
+                </a:solidFill>
+                <a:latin typeface="微软雅黑" panose="020B0503020204020204" pitchFamily="34" charset="-122"/>
+                <a:ea typeface="微软雅黑" panose="020B0503020204020204" pitchFamily="34" charset="-122"/>
+                <a:cs typeface="微软雅黑" panose="020B0503020204020204" pitchFamily="34" charset="-122"/>
+              </a:defRPr>
+            </a:pPr>
+            <a:r>
+              <a:rPr sz="1800" b="0">
+                <a:solidFill>
+                  <a:srgbClr val="111111"/>
+                </a:solidFill>
+                <a:latin typeface="微软雅黑" panose="020B0503020204020204" pitchFamily="34" charset="-122"/>
+                <a:ea typeface="微软雅黑" panose="020B0503020204020204" pitchFamily="34" charset="-122"/>
+                <a:cs typeface="微软雅黑" panose="020B0503020204020204" pitchFamily="34" charset="-122"/>
+              </a:rPr>
+              <a:t>从内核源码到协议违例证据链</a:t>
+            </a:r>
+            <a:endParaRPr sz="1800" b="0">
+              <a:solidFill>
+                <a:srgbClr val="111111"/>
+              </a:solidFill>
+              <a:latin typeface="微软雅黑" panose="020B0503020204020204" pitchFamily="34" charset="-122"/>
+              <a:ea typeface="微软雅黑" panose="020B0503020204020204" pitchFamily="34" charset="-122"/>
+              <a:cs typeface="微软雅黑" panose="020B0503020204020204" pitchFamily="34" charset="-122"/>
+            </a:endParaRPr>
+          </a:p>
+        </p:txBody>
+      </p:sp>
+      <p:cxnSp>
+        <p:nvCxnSpPr>
+          <p:cNvPr id="44" name="tool-input-arrow"/>
+          <p:cNvCxnSpPr/>
+          <p:nvPr/>
+        </p:nvCxnSpPr>
+        <p:spPr>
+          <a:xfrm>
+            <a:off x="2781155" y="3305181"/>
+            <a:ext cx="514323" cy="95"/>
+          </a:xfrm>
+          <a:prstGeom prst="straightConnector1">
+            <a:avLst/>
+          </a:prstGeom>
+          <a:ln w="28575">
+            <a:solidFill>
+              <a:schemeClr val="tx1"/>
+            </a:solidFill>
+            <a:prstDash val="solid"/>
+          </a:ln>
+        </p:spPr>
+      </p:cxnSp>
+      <p:cxnSp>
+        <p:nvCxnSpPr>
+          <p:cNvPr id="45" name="tool-output-arrow"/>
+          <p:cNvCxnSpPr/>
+          <p:nvPr/>
+        </p:nvCxnSpPr>
+        <p:spPr>
+          <a:xfrm>
+            <a:off x="8895887" y="3305181"/>
+            <a:ext cx="419078" cy="95"/>
+          </a:xfrm>
+          <a:prstGeom prst="straightConnector1">
+            <a:avLst/>
+          </a:prstGeom>
+          <a:ln w="28575">
+            <a:solidFill>
+              <a:schemeClr val="tx1"/>
+            </a:solidFill>
+            <a:prstDash val="solid"/>
+          </a:ln>
+        </p:spPr>
+      </p:cxnSp>
+      <p:sp>
+        <p:nvSpPr>
+          <p:cNvPr id="7" name="tool-input-panel"/>
+          <p:cNvSpPr>
+            <a:spLocks noGrp="1"/>
+          </p:cNvSpPr>
+          <p:nvPr/>
+        </p:nvSpPr>
+        <p:spPr>
+          <a:xfrm>
+            <a:off x="400029" y="2152716"/>
+            <a:ext cx="2381126" cy="2609714"/>
+          </a:xfrm>
+          <a:prstGeom prst="rect">
+            <a:avLst/>
+          </a:prstGeom>
+          <a:solidFill>
+            <a:srgbClr val="F6F7F8"/>
+          </a:solidFill>
+          <a:ln w="0">
+            <a:noFill/>
+            <a:prstDash val="solid"/>
+          </a:ln>
+        </p:spPr>
+      </p:sp>
+      <p:sp>
+        <p:nvSpPr>
+          <p:cNvPr id="8" name="tool-input-title"/>
+          <p:cNvSpPr>
+            <a:spLocks noGrp="1"/>
+          </p:cNvSpPr>
+          <p:nvPr/>
+        </p:nvSpPr>
+        <p:spPr>
+          <a:xfrm>
+            <a:off x="628617" y="2362256"/>
+            <a:ext cx="1923950" cy="361931"/>
+          </a:xfrm>
+          <a:prstGeom prst="rect">
+            <a:avLst/>
+          </a:prstGeom>
+          <a:noFill/>
+          <a:ln w="0">
+            <a:noFill/>
+            <a:prstDash val="solid"/>
+          </a:ln>
+        </p:spPr>
+        <p:txBody>
+          <a:bodyPr anchor="t"/>
+          <a:lstStyle/>
+          <a:p>
+            <a:pPr algn="l">
+              <a:defRPr sz="1875" b="1">
+                <a:solidFill>
+                  <a:srgbClr val="111111"/>
+                </a:solidFill>
+                <a:latin typeface="微软雅黑" panose="020B0503020204020204" pitchFamily="34" charset="-122"/>
+                <a:ea typeface="微软雅黑" panose="020B0503020204020204" pitchFamily="34" charset="-122"/>
+                <a:cs typeface="微软雅黑" panose="020B0503020204020204" pitchFamily="34" charset="-122"/>
+              </a:defRPr>
+            </a:pPr>
+            <a:r>
+              <a:rPr b="1">
+                <a:solidFill>
+                  <a:srgbClr val="111111"/>
+                </a:solidFill>
+                <a:latin typeface="微软雅黑" panose="020B0503020204020204" pitchFamily="34" charset="-122"/>
+                <a:ea typeface="微软雅黑" panose="020B0503020204020204" pitchFamily="34" charset="-122"/>
+                <a:cs typeface="微软雅黑" panose="020B0503020204020204" pitchFamily="34" charset="-122"/>
+              </a:rPr>
+              <a:t>输入</a:t>
+            </a:r>
+            <a:endParaRPr b="1">
+              <a:solidFill>
+                <a:srgbClr val="111111"/>
+              </a:solidFill>
+              <a:latin typeface="微软雅黑" panose="020B0503020204020204" pitchFamily="34" charset="-122"/>
+              <a:ea typeface="微软雅黑" panose="020B0503020204020204" pitchFamily="34" charset="-122"/>
+              <a:cs typeface="微软雅黑" panose="020B0503020204020204" pitchFamily="34" charset="-122"/>
+            </a:endParaRPr>
+          </a:p>
+        </p:txBody>
+      </p:sp>
+      <p:sp>
+        <p:nvSpPr>
+          <p:cNvPr id="9" name="tool-input-body"/>
+          <p:cNvSpPr>
+            <a:spLocks noGrp="1"/>
+          </p:cNvSpPr>
+          <p:nvPr/>
+        </p:nvSpPr>
+        <p:spPr>
+          <a:xfrm>
+            <a:off x="628617" y="2838481"/>
+            <a:ext cx="1923950" cy="1733460"/>
+          </a:xfrm>
+          <a:prstGeom prst="rect">
+            <a:avLst/>
+          </a:prstGeom>
+          <a:noFill/>
+          <a:ln w="0">
+            <a:noFill/>
+            <a:prstDash val="solid"/>
+          </a:ln>
+        </p:spPr>
+        <p:txBody>
+          <a:bodyPr anchor="t"/>
+          <a:lstStyle/>
+          <a:p>
+            <a:pPr algn="l">
+              <a:defRPr sz="1500" b="0">
+                <a:solidFill>
+                  <a:srgbClr val="111111"/>
+                </a:solidFill>
+                <a:latin typeface="微软雅黑" panose="020B0503020204020204" pitchFamily="34" charset="-122"/>
+                <a:ea typeface="微软雅黑" panose="020B0503020204020204" pitchFamily="34" charset="-122"/>
+                <a:cs typeface="微软雅黑" panose="020B0503020204020204" pitchFamily="34" charset="-122"/>
+              </a:defRPr>
+            </a:pPr>
+            <a:r>
+              <a:rPr b="0">
+                <a:solidFill>
+                  <a:srgbClr val="111111"/>
+                </a:solidFill>
+                <a:latin typeface="微软雅黑" panose="020B0503020204020204" pitchFamily="34" charset="-122"/>
+                <a:ea typeface="微软雅黑" panose="020B0503020204020204" pitchFamily="34" charset="-122"/>
+                <a:cs typeface="微软雅黑" panose="020B0503020204020204" pitchFamily="34" charset="-122"/>
+              </a:rPr>
+              <a:t>Linux 文件系统源码</a:t>
+            </a:r>
+            <a:endParaRPr b="0">
+              <a:solidFill>
+                <a:srgbClr val="111111"/>
+              </a:solidFill>
+              <a:latin typeface="微软雅黑" panose="020B0503020204020204" pitchFamily="34" charset="-122"/>
+              <a:ea typeface="微软雅黑" panose="020B0503020204020204" pitchFamily="34" charset="-122"/>
+              <a:cs typeface="微软雅黑" panose="020B0503020204020204" pitchFamily="34" charset="-122"/>
+            </a:endParaRPr>
+          </a:p>
+          <a:p>
+            <a:pPr algn="l">
+              <a:defRPr sz="1500" b="0">
+                <a:solidFill>
+                  <a:srgbClr val="111111"/>
+                </a:solidFill>
+                <a:latin typeface="微软雅黑" panose="020B0503020204020204" pitchFamily="34" charset="-122"/>
+                <a:ea typeface="微软雅黑" panose="020B0503020204020204" pitchFamily="34" charset="-122"/>
+                <a:cs typeface="微软雅黑" panose="020B0503020204020204" pitchFamily="34" charset="-122"/>
+              </a:defRPr>
+            </a:pPr>
+            <a:r>
+              <a:rPr b="0">
+                <a:solidFill>
+                  <a:srgbClr val="111111"/>
+                </a:solidFill>
+                <a:latin typeface="微软雅黑" panose="020B0503020204020204" pitchFamily="34" charset="-122"/>
+                <a:ea typeface="微软雅黑" panose="020B0503020204020204" pitchFamily="34" charset="-122"/>
+                <a:cs typeface="微软雅黑" panose="020B0503020204020204" pitchFamily="34" charset="-122"/>
+              </a:rPr>
+              <a:t>受限元数据协议规格</a:t>
+            </a:r>
+            <a:endParaRPr b="0">
+              <a:solidFill>
+                <a:srgbClr val="111111"/>
+              </a:solidFill>
+              <a:latin typeface="微软雅黑" panose="020B0503020204020204" pitchFamily="34" charset="-122"/>
+              <a:ea typeface="微软雅黑" panose="020B0503020204020204" pitchFamily="34" charset="-122"/>
+              <a:cs typeface="微软雅黑" panose="020B0503020204020204" pitchFamily="34" charset="-122"/>
+            </a:endParaRPr>
+          </a:p>
+        </p:txBody>
+      </p:sp>
+      <p:sp>
+        <p:nvSpPr>
+          <p:cNvPr id="10" name="tool-engine"/>
+          <p:cNvSpPr>
+            <a:spLocks noGrp="1"/>
+          </p:cNvSpPr>
+          <p:nvPr/>
+        </p:nvSpPr>
+        <p:spPr>
+          <a:xfrm>
+            <a:off x="3295478" y="1809834"/>
+            <a:ext cx="5600408" cy="3295478"/>
+          </a:xfrm>
+          <a:prstGeom prst="rect">
+            <a:avLst/>
+          </a:prstGeom>
+          <a:solidFill>
+            <a:schemeClr val="bg2"/>
+          </a:solidFill>
+          <a:ln w="9525">
+            <a:solidFill>
+              <a:schemeClr val="tx1"/>
+            </a:solidFill>
+            <a:prstDash val="solid"/>
+          </a:ln>
+        </p:spPr>
+      </p:sp>
+      <p:sp>
+        <p:nvSpPr>
+          <p:cNvPr id="11" name="tool-engine-title"/>
+          <p:cNvSpPr>
+            <a:spLocks noGrp="1"/>
+          </p:cNvSpPr>
+          <p:nvPr/>
+        </p:nvSpPr>
+        <p:spPr>
+          <a:xfrm>
+            <a:off x="3562164" y="2019373"/>
+            <a:ext cx="4952742" cy="342882"/>
+          </a:xfrm>
+          <a:prstGeom prst="rect">
+            <a:avLst/>
+          </a:prstGeom>
+          <a:noFill/>
+          <a:ln w="0">
+            <a:noFill/>
+            <a:prstDash val="solid"/>
+          </a:ln>
+        </p:spPr>
+        <p:txBody>
+          <a:bodyPr anchor="t"/>
+          <a:lstStyle/>
+          <a:p>
+            <a:pPr algn="l">
+              <a:defRPr sz="2025" b="1">
+                <a:solidFill>
+                  <a:srgbClr val="3D8DFF"/>
+                </a:solidFill>
+                <a:latin typeface="微软雅黑" panose="020B0503020204020204" pitchFamily="34" charset="-122"/>
+                <a:ea typeface="微软雅黑" panose="020B0503020204020204" pitchFamily="34" charset="-122"/>
+                <a:cs typeface="微软雅黑" panose="020B0503020204020204" pitchFamily="34" charset="-122"/>
+              </a:defRPr>
+            </a:pPr>
+            <a:r>
+              <a:rPr b="1">
+                <a:solidFill>
+                  <a:schemeClr val="tx1"/>
+                </a:solidFill>
+                <a:latin typeface="微软雅黑" panose="020B0503020204020204" pitchFamily="34" charset="-122"/>
+                <a:ea typeface="微软雅黑" panose="020B0503020204020204" pitchFamily="34" charset="-122"/>
+                <a:cs typeface="微软雅黑" panose="020B0503020204020204" pitchFamily="34" charset="-122"/>
+              </a:rPr>
+              <a:t>分析引擎</a:t>
+            </a:r>
+            <a:endParaRPr b="1">
+              <a:solidFill>
+                <a:schemeClr val="tx1"/>
+              </a:solidFill>
+              <a:latin typeface="微软雅黑" panose="020B0503020204020204" pitchFamily="34" charset="-122"/>
+              <a:ea typeface="微软雅黑" panose="020B0503020204020204" pitchFamily="34" charset="-122"/>
+              <a:cs typeface="微软雅黑" panose="020B0503020204020204" pitchFamily="34" charset="-122"/>
+            </a:endParaRPr>
+          </a:p>
+        </p:txBody>
+      </p:sp>
+      <p:sp>
+        <p:nvSpPr>
+          <p:cNvPr id="12" name="tool-stage-0"/>
+          <p:cNvSpPr>
+            <a:spLocks noGrp="1"/>
+          </p:cNvSpPr>
+          <p:nvPr>
+            <p:custDataLst>
+              <p:tags r:id="rId1"/>
+            </p:custDataLst>
+          </p:nvPr>
+        </p:nvSpPr>
+        <p:spPr>
+          <a:xfrm>
+            <a:off x="3562164" y="2647991"/>
+            <a:ext cx="1104842" cy="857205"/>
+          </a:xfrm>
+          <a:prstGeom prst="rect">
+            <a:avLst/>
+          </a:prstGeom>
+          <a:solidFill>
+            <a:srgbClr val="FFFFFF"/>
+          </a:solidFill>
+          <a:ln w="9525">
+            <a:solidFill>
+              <a:schemeClr val="bg2"/>
+            </a:solidFill>
+            <a:prstDash val="solid"/>
+          </a:ln>
+        </p:spPr>
+      </p:sp>
+      <p:sp>
+        <p:nvSpPr>
+          <p:cNvPr id="13" name="tool-stage-num-0"/>
+          <p:cNvSpPr>
+            <a:spLocks noGrp="1"/>
+          </p:cNvSpPr>
+          <p:nvPr>
+            <p:custDataLst>
+              <p:tags r:id="rId2"/>
+            </p:custDataLst>
+          </p:nvPr>
+        </p:nvSpPr>
+        <p:spPr>
+          <a:xfrm>
+            <a:off x="3676459" y="2743236"/>
+            <a:ext cx="266686" cy="247637"/>
+          </a:xfrm>
+          <a:prstGeom prst="rect">
+            <a:avLst/>
+          </a:prstGeom>
+          <a:noFill/>
+          <a:ln w="0">
+            <a:noFill/>
+            <a:prstDash val="solid"/>
+          </a:ln>
+        </p:spPr>
+        <p:txBody>
+          <a:bodyPr anchor="t"/>
+          <a:lstStyle/>
+          <a:p>
+            <a:pPr algn="l">
+              <a:defRPr sz="1275" b="1">
+                <a:solidFill>
+                  <a:srgbClr val="3D8DFF"/>
+                </a:solidFill>
+                <a:latin typeface="微软雅黑" panose="020B0503020204020204" pitchFamily="34" charset="-122"/>
+                <a:ea typeface="微软雅黑" panose="020B0503020204020204" pitchFamily="34" charset="-122"/>
+                <a:cs typeface="微软雅黑" panose="020B0503020204020204" pitchFamily="34" charset="-122"/>
+              </a:defRPr>
+            </a:pPr>
+            <a:r>
+              <a:rPr b="1">
+                <a:solidFill>
+                  <a:schemeClr val="tx1"/>
+                </a:solidFill>
+                <a:latin typeface="微软雅黑" panose="020B0503020204020204" pitchFamily="34" charset="-122"/>
+                <a:ea typeface="微软雅黑" panose="020B0503020204020204" pitchFamily="34" charset="-122"/>
+                <a:cs typeface="微软雅黑" panose="020B0503020204020204" pitchFamily="34" charset="-122"/>
+              </a:rPr>
+              <a:t>1</a:t>
+            </a:r>
+            <a:endParaRPr b="1">
+              <a:solidFill>
+                <a:schemeClr val="tx1"/>
+              </a:solidFill>
+              <a:latin typeface="微软雅黑" panose="020B0503020204020204" pitchFamily="34" charset="-122"/>
+              <a:ea typeface="微软雅黑" panose="020B0503020204020204" pitchFamily="34" charset="-122"/>
+              <a:cs typeface="微软雅黑" panose="020B0503020204020204" pitchFamily="34" charset="-122"/>
+            </a:endParaRPr>
+          </a:p>
+        </p:txBody>
+      </p:sp>
+      <p:sp>
+        <p:nvSpPr>
+          <p:cNvPr id="14" name="tool-stage-name-0"/>
+          <p:cNvSpPr>
+            <a:spLocks noGrp="1"/>
+          </p:cNvSpPr>
+          <p:nvPr>
+            <p:custDataLst>
+              <p:tags r:id="rId3"/>
+            </p:custDataLst>
+          </p:nvPr>
+        </p:nvSpPr>
+        <p:spPr>
+          <a:xfrm>
+            <a:off x="3676459" y="3048020"/>
+            <a:ext cx="895303" cy="285735"/>
+          </a:xfrm>
+          <a:prstGeom prst="rect">
+            <a:avLst/>
+          </a:prstGeom>
+          <a:noFill/>
+          <a:ln w="0">
+            <a:noFill/>
+            <a:prstDash val="solid"/>
+          </a:ln>
+        </p:spPr>
+        <p:txBody>
+          <a:bodyPr anchor="t"/>
+          <a:lstStyle/>
+          <a:p>
+            <a:pPr algn="l">
+              <a:defRPr sz="1275" b="1">
+                <a:solidFill>
+                  <a:srgbClr val="111111"/>
+                </a:solidFill>
+                <a:latin typeface="微软雅黑" panose="020B0503020204020204" pitchFamily="34" charset="-122"/>
+                <a:ea typeface="微软雅黑" panose="020B0503020204020204" pitchFamily="34" charset="-122"/>
+                <a:cs typeface="微软雅黑" panose="020B0503020204020204" pitchFamily="34" charset="-122"/>
+              </a:defRPr>
+            </a:pPr>
+            <a:r>
+              <a:rPr lang="zh-CN" b="1">
+                <a:solidFill>
+                  <a:srgbClr val="111111"/>
+                </a:solidFill>
+                <a:latin typeface="微软雅黑" panose="020B0503020204020204" pitchFamily="34" charset="-122"/>
+                <a:ea typeface="微软雅黑" panose="020B0503020204020204" pitchFamily="34" charset="-122"/>
+                <a:cs typeface="微软雅黑" panose="020B0503020204020204" pitchFamily="34" charset="-122"/>
+              </a:rPr>
+              <a:t>错误</a:t>
+            </a:r>
+            <a:r>
+              <a:rPr b="1">
+                <a:solidFill>
+                  <a:srgbClr val="111111"/>
+                </a:solidFill>
+                <a:latin typeface="微软雅黑" panose="020B0503020204020204" pitchFamily="34" charset="-122"/>
+                <a:ea typeface="微软雅黑" panose="020B0503020204020204" pitchFamily="34" charset="-122"/>
+                <a:cs typeface="微软雅黑" panose="020B0503020204020204" pitchFamily="34" charset="-122"/>
+              </a:rPr>
+              <a:t>提取</a:t>
+            </a:r>
+            <a:endParaRPr b="1">
+              <a:solidFill>
+                <a:srgbClr val="111111"/>
+              </a:solidFill>
+              <a:latin typeface="微软雅黑" panose="020B0503020204020204" pitchFamily="34" charset="-122"/>
+              <a:ea typeface="微软雅黑" panose="020B0503020204020204" pitchFamily="34" charset="-122"/>
+              <a:cs typeface="微软雅黑" panose="020B0503020204020204" pitchFamily="34" charset="-122"/>
+            </a:endParaRPr>
+          </a:p>
+        </p:txBody>
+      </p:sp>
+      <p:sp>
+        <p:nvSpPr>
+          <p:cNvPr id="15" name="tool-stage-1"/>
+          <p:cNvSpPr>
+            <a:spLocks noGrp="1"/>
+          </p:cNvSpPr>
+          <p:nvPr>
+            <p:custDataLst>
+              <p:tags r:id="rId4"/>
+            </p:custDataLst>
+          </p:nvPr>
+        </p:nvSpPr>
+        <p:spPr>
+          <a:xfrm>
+            <a:off x="4819399" y="2647991"/>
+            <a:ext cx="1104842" cy="857205"/>
+          </a:xfrm>
+          <a:prstGeom prst="rect">
+            <a:avLst/>
+          </a:prstGeom>
+          <a:solidFill>
+            <a:srgbClr val="F6F7F8"/>
+          </a:solidFill>
+          <a:ln w="9525">
+            <a:solidFill>
+              <a:srgbClr val="B8BCC4"/>
+            </a:solidFill>
+            <a:prstDash val="solid"/>
+          </a:ln>
+        </p:spPr>
+      </p:sp>
+      <p:sp>
+        <p:nvSpPr>
+          <p:cNvPr id="16" name="tool-stage-num-1"/>
+          <p:cNvSpPr>
+            <a:spLocks noGrp="1"/>
+          </p:cNvSpPr>
+          <p:nvPr>
+            <p:custDataLst>
+              <p:tags r:id="rId5"/>
+            </p:custDataLst>
+          </p:nvPr>
+        </p:nvSpPr>
+        <p:spPr>
+          <a:xfrm>
+            <a:off x="4933693" y="2743236"/>
+            <a:ext cx="266686" cy="247637"/>
+          </a:xfrm>
+          <a:prstGeom prst="rect">
+            <a:avLst/>
+          </a:prstGeom>
+          <a:noFill/>
+          <a:ln w="0">
+            <a:noFill/>
+            <a:prstDash val="solid"/>
+          </a:ln>
+        </p:spPr>
+        <p:txBody>
+          <a:bodyPr anchor="t"/>
+          <a:lstStyle/>
+          <a:p>
+            <a:pPr algn="l">
+              <a:defRPr sz="1275" b="1">
+                <a:solidFill>
+                  <a:srgbClr val="3D8DFF"/>
+                </a:solidFill>
+                <a:latin typeface="微软雅黑" panose="020B0503020204020204" pitchFamily="34" charset="-122"/>
+                <a:ea typeface="微软雅黑" panose="020B0503020204020204" pitchFamily="34" charset="-122"/>
+                <a:cs typeface="微软雅黑" panose="020B0503020204020204" pitchFamily="34" charset="-122"/>
+              </a:defRPr>
+            </a:pPr>
+            <a:r>
+              <a:rPr b="1">
+                <a:solidFill>
+                  <a:schemeClr val="tx1"/>
+                </a:solidFill>
+                <a:latin typeface="微软雅黑" panose="020B0503020204020204" pitchFamily="34" charset="-122"/>
+                <a:ea typeface="微软雅黑" panose="020B0503020204020204" pitchFamily="34" charset="-122"/>
+                <a:cs typeface="微软雅黑" panose="020B0503020204020204" pitchFamily="34" charset="-122"/>
+              </a:rPr>
+              <a:t>2</a:t>
+            </a:r>
+            <a:endParaRPr b="1">
+              <a:solidFill>
+                <a:schemeClr val="tx1"/>
+              </a:solidFill>
+              <a:latin typeface="微软雅黑" panose="020B0503020204020204" pitchFamily="34" charset="-122"/>
+              <a:ea typeface="微软雅黑" panose="020B0503020204020204" pitchFamily="34" charset="-122"/>
+              <a:cs typeface="微软雅黑" panose="020B0503020204020204" pitchFamily="34" charset="-122"/>
+            </a:endParaRPr>
+          </a:p>
+        </p:txBody>
+      </p:sp>
+      <p:sp>
+        <p:nvSpPr>
+          <p:cNvPr id="17" name="tool-stage-name-1"/>
+          <p:cNvSpPr>
+            <a:spLocks noGrp="1"/>
+          </p:cNvSpPr>
+          <p:nvPr>
+            <p:custDataLst>
+              <p:tags r:id="rId6"/>
+            </p:custDataLst>
+          </p:nvPr>
+        </p:nvSpPr>
+        <p:spPr>
+          <a:xfrm>
+            <a:off x="4933693" y="3048020"/>
+            <a:ext cx="895303" cy="285735"/>
+          </a:xfrm>
+          <a:prstGeom prst="rect">
+            <a:avLst/>
+          </a:prstGeom>
+          <a:noFill/>
+          <a:ln w="0">
+            <a:noFill/>
+            <a:prstDash val="solid"/>
+          </a:ln>
+        </p:spPr>
+        <p:txBody>
+          <a:bodyPr anchor="t"/>
+          <a:lstStyle/>
+          <a:p>
+            <a:pPr algn="l">
+              <a:defRPr sz="1275" b="1">
+                <a:solidFill>
+                  <a:srgbClr val="111111"/>
+                </a:solidFill>
+                <a:latin typeface="微软雅黑" panose="020B0503020204020204" pitchFamily="34" charset="-122"/>
+                <a:ea typeface="微软雅黑" panose="020B0503020204020204" pitchFamily="34" charset="-122"/>
+                <a:cs typeface="微软雅黑" panose="020B0503020204020204" pitchFamily="34" charset="-122"/>
+              </a:defRPr>
+            </a:pPr>
+            <a:r>
+              <a:rPr b="1">
+                <a:solidFill>
+                  <a:schemeClr val="tx1"/>
+                </a:solidFill>
+                <a:latin typeface="微软雅黑" panose="020B0503020204020204" pitchFamily="34" charset="-122"/>
+                <a:ea typeface="微软雅黑" panose="020B0503020204020204" pitchFamily="34" charset="-122"/>
+                <a:cs typeface="微软雅黑" panose="020B0503020204020204" pitchFamily="34" charset="-122"/>
+              </a:rPr>
+              <a:t>类型化</a:t>
+            </a:r>
+            <a:endParaRPr b="1">
+              <a:solidFill>
+                <a:schemeClr val="tx1"/>
+              </a:solidFill>
+              <a:latin typeface="微软雅黑" panose="020B0503020204020204" pitchFamily="34" charset="-122"/>
+              <a:ea typeface="微软雅黑" panose="020B0503020204020204" pitchFamily="34" charset="-122"/>
+              <a:cs typeface="微软雅黑" panose="020B0503020204020204" pitchFamily="34" charset="-122"/>
+            </a:endParaRPr>
+          </a:p>
+        </p:txBody>
+      </p:sp>
+      <p:sp>
+        <p:nvSpPr>
+          <p:cNvPr id="18" name="tool-stage-2"/>
+          <p:cNvSpPr>
+            <a:spLocks noGrp="1"/>
+          </p:cNvSpPr>
+          <p:nvPr>
+            <p:custDataLst>
+              <p:tags r:id="rId7"/>
+            </p:custDataLst>
+          </p:nvPr>
+        </p:nvSpPr>
+        <p:spPr>
+          <a:xfrm>
+            <a:off x="6076633" y="2647991"/>
+            <a:ext cx="1104842" cy="857205"/>
+          </a:xfrm>
+          <a:prstGeom prst="rect">
+            <a:avLst/>
+          </a:prstGeom>
+          <a:solidFill>
+            <a:srgbClr val="F6F7F8"/>
+          </a:solidFill>
+          <a:ln w="9525">
+            <a:solidFill>
+              <a:srgbClr val="B8BCC4"/>
+            </a:solidFill>
+            <a:prstDash val="solid"/>
+          </a:ln>
+        </p:spPr>
+      </p:sp>
+      <p:sp>
+        <p:nvSpPr>
+          <p:cNvPr id="19" name="tool-stage-num-2"/>
+          <p:cNvSpPr>
+            <a:spLocks noGrp="1"/>
+          </p:cNvSpPr>
+          <p:nvPr>
+            <p:custDataLst>
+              <p:tags r:id="rId8"/>
+            </p:custDataLst>
+          </p:nvPr>
+        </p:nvSpPr>
+        <p:spPr>
+          <a:xfrm>
+            <a:off x="6190928" y="2743236"/>
+            <a:ext cx="266686" cy="247637"/>
+          </a:xfrm>
+          <a:prstGeom prst="rect">
+            <a:avLst/>
+          </a:prstGeom>
+          <a:noFill/>
+          <a:ln w="0">
+            <a:noFill/>
+            <a:prstDash val="solid"/>
+          </a:ln>
+        </p:spPr>
+        <p:txBody>
+          <a:bodyPr anchor="t"/>
+          <a:lstStyle/>
+          <a:p>
+            <a:pPr algn="l">
+              <a:defRPr sz="1275" b="1">
+                <a:solidFill>
+                  <a:srgbClr val="3D8DFF"/>
+                </a:solidFill>
+                <a:latin typeface="微软雅黑" panose="020B0503020204020204" pitchFamily="34" charset="-122"/>
+                <a:ea typeface="微软雅黑" panose="020B0503020204020204" pitchFamily="34" charset="-122"/>
+                <a:cs typeface="微软雅黑" panose="020B0503020204020204" pitchFamily="34" charset="-122"/>
+              </a:defRPr>
+            </a:pPr>
+            <a:r>
+              <a:rPr b="1">
+                <a:solidFill>
+                  <a:schemeClr val="tx1"/>
+                </a:solidFill>
+                <a:latin typeface="微软雅黑" panose="020B0503020204020204" pitchFamily="34" charset="-122"/>
+                <a:ea typeface="微软雅黑" panose="020B0503020204020204" pitchFamily="34" charset="-122"/>
+                <a:cs typeface="微软雅黑" panose="020B0503020204020204" pitchFamily="34" charset="-122"/>
+              </a:rPr>
+              <a:t>3</a:t>
+            </a:r>
+            <a:endParaRPr b="1">
+              <a:solidFill>
+                <a:schemeClr val="tx1"/>
+              </a:solidFill>
+              <a:latin typeface="微软雅黑" panose="020B0503020204020204" pitchFamily="34" charset="-122"/>
+              <a:ea typeface="微软雅黑" panose="020B0503020204020204" pitchFamily="34" charset="-122"/>
+              <a:cs typeface="微软雅黑" panose="020B0503020204020204" pitchFamily="34" charset="-122"/>
+            </a:endParaRPr>
+          </a:p>
+        </p:txBody>
+      </p:sp>
+      <p:sp>
+        <p:nvSpPr>
+          <p:cNvPr id="20" name="tool-stage-name-2"/>
+          <p:cNvSpPr>
+            <a:spLocks noGrp="1"/>
+          </p:cNvSpPr>
+          <p:nvPr>
+            <p:custDataLst>
+              <p:tags r:id="rId9"/>
+            </p:custDataLst>
+          </p:nvPr>
+        </p:nvSpPr>
+        <p:spPr>
+          <a:xfrm>
+            <a:off x="6190928" y="3048020"/>
+            <a:ext cx="895303" cy="285735"/>
+          </a:xfrm>
+          <a:prstGeom prst="rect">
+            <a:avLst/>
+          </a:prstGeom>
+          <a:noFill/>
+          <a:ln w="0">
+            <a:noFill/>
+            <a:prstDash val="solid"/>
+          </a:ln>
+        </p:spPr>
+        <p:txBody>
+          <a:bodyPr anchor="t"/>
+          <a:lstStyle/>
+          <a:p>
+            <a:pPr algn="l">
+              <a:defRPr sz="1275" b="1">
+                <a:solidFill>
+                  <a:srgbClr val="111111"/>
+                </a:solidFill>
+                <a:latin typeface="微软雅黑" panose="020B0503020204020204" pitchFamily="34" charset="-122"/>
+                <a:ea typeface="微软雅黑" panose="020B0503020204020204" pitchFamily="34" charset="-122"/>
+                <a:cs typeface="微软雅黑" panose="020B0503020204020204" pitchFamily="34" charset="-122"/>
+              </a:defRPr>
+            </a:pPr>
+            <a:r>
+              <a:rPr lang="zh-CN" b="1">
+                <a:solidFill>
+                  <a:srgbClr val="111111"/>
+                </a:solidFill>
+                <a:latin typeface="微软雅黑" panose="020B0503020204020204" pitchFamily="34" charset="-122"/>
+                <a:ea typeface="微软雅黑" panose="020B0503020204020204" pitchFamily="34" charset="-122"/>
+                <a:cs typeface="微软雅黑" panose="020B0503020204020204" pitchFamily="34" charset="-122"/>
+              </a:rPr>
+              <a:t>协议</a:t>
+            </a:r>
+            <a:r>
+              <a:rPr b="1">
+                <a:solidFill>
+                  <a:srgbClr val="111111"/>
+                </a:solidFill>
+                <a:latin typeface="微软雅黑" panose="020B0503020204020204" pitchFamily="34" charset="-122"/>
+                <a:ea typeface="微软雅黑" panose="020B0503020204020204" pitchFamily="34" charset="-122"/>
+                <a:cs typeface="微软雅黑" panose="020B0503020204020204" pitchFamily="34" charset="-122"/>
+              </a:rPr>
+              <a:t>重建</a:t>
+            </a:r>
+            <a:endParaRPr b="1">
+              <a:solidFill>
+                <a:srgbClr val="111111"/>
+              </a:solidFill>
+              <a:latin typeface="微软雅黑" panose="020B0503020204020204" pitchFamily="34" charset="-122"/>
+              <a:ea typeface="微软雅黑" panose="020B0503020204020204" pitchFamily="34" charset="-122"/>
+              <a:cs typeface="微软雅黑" panose="020B0503020204020204" pitchFamily="34" charset="-122"/>
+            </a:endParaRPr>
+          </a:p>
+        </p:txBody>
+      </p:sp>
+      <p:sp>
+        <p:nvSpPr>
+          <p:cNvPr id="21" name="tool-stage-3"/>
+          <p:cNvSpPr>
+            <a:spLocks noGrp="1"/>
+          </p:cNvSpPr>
+          <p:nvPr>
+            <p:custDataLst>
+              <p:tags r:id="rId10"/>
+            </p:custDataLst>
+          </p:nvPr>
+        </p:nvSpPr>
+        <p:spPr>
+          <a:xfrm>
+            <a:off x="7333868" y="2647991"/>
+            <a:ext cx="1104842" cy="857205"/>
+          </a:xfrm>
+          <a:prstGeom prst="rect">
+            <a:avLst/>
+          </a:prstGeom>
+          <a:solidFill>
+            <a:srgbClr val="F6F7F8"/>
+          </a:solidFill>
+          <a:ln w="9525">
+            <a:solidFill>
+              <a:srgbClr val="B8BCC4"/>
+            </a:solidFill>
+            <a:prstDash val="solid"/>
+          </a:ln>
+        </p:spPr>
+      </p:sp>
+      <p:sp>
+        <p:nvSpPr>
+          <p:cNvPr id="22" name="tool-stage-num-3"/>
+          <p:cNvSpPr>
+            <a:spLocks noGrp="1"/>
+          </p:cNvSpPr>
+          <p:nvPr>
+            <p:custDataLst>
+              <p:tags r:id="rId11"/>
+            </p:custDataLst>
+          </p:nvPr>
+        </p:nvSpPr>
+        <p:spPr>
+          <a:xfrm>
+            <a:off x="7448162" y="2743236"/>
+            <a:ext cx="266686" cy="247637"/>
+          </a:xfrm>
+          <a:prstGeom prst="rect">
+            <a:avLst/>
+          </a:prstGeom>
+          <a:noFill/>
+          <a:ln w="0">
+            <a:noFill/>
+            <a:prstDash val="solid"/>
+          </a:ln>
+        </p:spPr>
+        <p:txBody>
+          <a:bodyPr anchor="t"/>
+          <a:lstStyle/>
+          <a:p>
+            <a:pPr algn="l">
+              <a:defRPr sz="1275" b="1">
+                <a:solidFill>
+                  <a:srgbClr val="3D8DFF"/>
+                </a:solidFill>
+                <a:latin typeface="微软雅黑" panose="020B0503020204020204" pitchFamily="34" charset="-122"/>
+                <a:ea typeface="微软雅黑" panose="020B0503020204020204" pitchFamily="34" charset="-122"/>
+                <a:cs typeface="微软雅黑" panose="020B0503020204020204" pitchFamily="34" charset="-122"/>
+              </a:defRPr>
+            </a:pPr>
+            <a:r>
+              <a:rPr b="1">
+                <a:solidFill>
+                  <a:schemeClr val="tx1"/>
+                </a:solidFill>
+                <a:latin typeface="微软雅黑" panose="020B0503020204020204" pitchFamily="34" charset="-122"/>
+                <a:ea typeface="微软雅黑" panose="020B0503020204020204" pitchFamily="34" charset="-122"/>
+                <a:cs typeface="微软雅黑" panose="020B0503020204020204" pitchFamily="34" charset="-122"/>
+              </a:rPr>
+              <a:t>4</a:t>
+            </a:r>
+            <a:endParaRPr b="1">
+              <a:solidFill>
+                <a:schemeClr val="tx1"/>
+              </a:solidFill>
+              <a:latin typeface="微软雅黑" panose="020B0503020204020204" pitchFamily="34" charset="-122"/>
+              <a:ea typeface="微软雅黑" panose="020B0503020204020204" pitchFamily="34" charset="-122"/>
+              <a:cs typeface="微软雅黑" panose="020B0503020204020204" pitchFamily="34" charset="-122"/>
+            </a:endParaRPr>
+          </a:p>
+        </p:txBody>
+      </p:sp>
+      <p:sp>
+        <p:nvSpPr>
+          <p:cNvPr id="23" name="tool-stage-name-3"/>
+          <p:cNvSpPr>
+            <a:spLocks noGrp="1"/>
+          </p:cNvSpPr>
+          <p:nvPr>
+            <p:custDataLst>
+              <p:tags r:id="rId12"/>
+            </p:custDataLst>
+          </p:nvPr>
+        </p:nvSpPr>
+        <p:spPr>
+          <a:xfrm>
+            <a:off x="7448162" y="3048020"/>
+            <a:ext cx="895303" cy="285735"/>
+          </a:xfrm>
+          <a:prstGeom prst="rect">
+            <a:avLst/>
+          </a:prstGeom>
+          <a:noFill/>
+          <a:ln w="0">
+            <a:noFill/>
+            <a:prstDash val="solid"/>
+          </a:ln>
+        </p:spPr>
+        <p:txBody>
+          <a:bodyPr anchor="t"/>
+          <a:lstStyle/>
+          <a:p>
+            <a:pPr algn="l">
+              <a:defRPr sz="1275" b="1">
+                <a:solidFill>
+                  <a:srgbClr val="111111"/>
+                </a:solidFill>
+                <a:latin typeface="微软雅黑" panose="020B0503020204020204" pitchFamily="34" charset="-122"/>
+                <a:ea typeface="微软雅黑" panose="020B0503020204020204" pitchFamily="34" charset="-122"/>
+                <a:cs typeface="微软雅黑" panose="020B0503020204020204" pitchFamily="34" charset="-122"/>
+              </a:defRPr>
+            </a:pPr>
+            <a:r>
+              <a:rPr b="1">
+                <a:solidFill>
+                  <a:srgbClr val="111111"/>
+                </a:solidFill>
+                <a:latin typeface="微软雅黑" panose="020B0503020204020204" pitchFamily="34" charset="-122"/>
+                <a:ea typeface="微软雅黑" panose="020B0503020204020204" pitchFamily="34" charset="-122"/>
+                <a:cs typeface="微软雅黑" panose="020B0503020204020204" pitchFamily="34" charset="-122"/>
+              </a:rPr>
+              <a:t>状态</a:t>
+            </a:r>
+            <a:r>
+              <a:rPr lang="zh-CN" b="1">
+                <a:solidFill>
+                  <a:srgbClr val="111111"/>
+                </a:solidFill>
+                <a:latin typeface="微软雅黑" panose="020B0503020204020204" pitchFamily="34" charset="-122"/>
+                <a:ea typeface="微软雅黑" panose="020B0503020204020204" pitchFamily="34" charset="-122"/>
+                <a:cs typeface="微软雅黑" panose="020B0503020204020204" pitchFamily="34" charset="-122"/>
+              </a:rPr>
+              <a:t>检查</a:t>
+            </a:r>
+            <a:endParaRPr lang="zh-CN" b="1">
+              <a:solidFill>
+                <a:srgbClr val="111111"/>
+              </a:solidFill>
+              <a:latin typeface="微软雅黑" panose="020B0503020204020204" pitchFamily="34" charset="-122"/>
+              <a:ea typeface="微软雅黑" panose="020B0503020204020204" pitchFamily="34" charset="-122"/>
+              <a:cs typeface="微软雅黑" panose="020B0503020204020204" pitchFamily="34" charset="-122"/>
+            </a:endParaRPr>
+          </a:p>
+        </p:txBody>
+      </p:sp>
+      <p:sp>
+        <p:nvSpPr>
+          <p:cNvPr id="27" name="tool-stage-5"/>
+          <p:cNvSpPr>
+            <a:spLocks noGrp="1"/>
+          </p:cNvSpPr>
+          <p:nvPr>
+            <p:custDataLst>
+              <p:tags r:id="rId13"/>
+            </p:custDataLst>
+          </p:nvPr>
+        </p:nvSpPr>
+        <p:spPr>
+          <a:xfrm>
+            <a:off x="6029074" y="3848078"/>
+            <a:ext cx="1104842" cy="857205"/>
+          </a:xfrm>
+          <a:prstGeom prst="rect">
+            <a:avLst/>
+          </a:prstGeom>
+          <a:solidFill>
+            <a:srgbClr val="F6F7F8"/>
+          </a:solidFill>
+          <a:ln w="9525">
+            <a:solidFill>
+              <a:srgbClr val="B8BCC4"/>
+            </a:solidFill>
+            <a:prstDash val="solid"/>
+          </a:ln>
+        </p:spPr>
+      </p:sp>
+      <p:sp>
+        <p:nvSpPr>
+          <p:cNvPr id="28" name="tool-stage-num-5"/>
+          <p:cNvSpPr>
+            <a:spLocks noGrp="1"/>
+          </p:cNvSpPr>
+          <p:nvPr>
+            <p:custDataLst>
+              <p:tags r:id="rId14"/>
+            </p:custDataLst>
+          </p:nvPr>
+        </p:nvSpPr>
+        <p:spPr>
+          <a:xfrm>
+            <a:off x="6143368" y="3943323"/>
+            <a:ext cx="266686" cy="247637"/>
+          </a:xfrm>
+          <a:prstGeom prst="rect">
+            <a:avLst/>
+          </a:prstGeom>
+          <a:noFill/>
+          <a:ln w="0">
+            <a:noFill/>
+            <a:prstDash val="solid"/>
+          </a:ln>
+        </p:spPr>
+        <p:txBody>
+          <a:bodyPr anchor="t"/>
+          <a:lstStyle/>
+          <a:p>
+            <a:pPr algn="l">
+              <a:defRPr sz="1275" b="1">
+                <a:solidFill>
+                  <a:srgbClr val="3D8DFF"/>
+                </a:solidFill>
+                <a:latin typeface="微软雅黑" panose="020B0503020204020204" pitchFamily="34" charset="-122"/>
+                <a:ea typeface="微软雅黑" panose="020B0503020204020204" pitchFamily="34" charset="-122"/>
+                <a:cs typeface="微软雅黑" panose="020B0503020204020204" pitchFamily="34" charset="-122"/>
+              </a:defRPr>
+            </a:pPr>
+            <a:r>
+              <a:rPr b="1">
+                <a:solidFill>
+                  <a:schemeClr val="tx1"/>
+                </a:solidFill>
+                <a:latin typeface="微软雅黑" panose="020B0503020204020204" pitchFamily="34" charset="-122"/>
+                <a:ea typeface="微软雅黑" panose="020B0503020204020204" pitchFamily="34" charset="-122"/>
+                <a:cs typeface="微软雅黑" panose="020B0503020204020204" pitchFamily="34" charset="-122"/>
+              </a:rPr>
+              <a:t>7</a:t>
+            </a:r>
+            <a:endParaRPr b="1">
+              <a:solidFill>
+                <a:schemeClr val="tx1"/>
+              </a:solidFill>
+              <a:latin typeface="微软雅黑" panose="020B0503020204020204" pitchFamily="34" charset="-122"/>
+              <a:ea typeface="微软雅黑" panose="020B0503020204020204" pitchFamily="34" charset="-122"/>
+              <a:cs typeface="微软雅黑" panose="020B0503020204020204" pitchFamily="34" charset="-122"/>
+            </a:endParaRPr>
+          </a:p>
+        </p:txBody>
+      </p:sp>
+      <p:sp>
+        <p:nvSpPr>
+          <p:cNvPr id="29" name="tool-stage-name-5"/>
+          <p:cNvSpPr>
+            <a:spLocks noGrp="1"/>
+          </p:cNvSpPr>
+          <p:nvPr>
+            <p:custDataLst>
+              <p:tags r:id="rId15"/>
+            </p:custDataLst>
+          </p:nvPr>
+        </p:nvSpPr>
+        <p:spPr>
+          <a:xfrm>
+            <a:off x="6143368" y="4248107"/>
+            <a:ext cx="895303" cy="285735"/>
+          </a:xfrm>
+          <a:prstGeom prst="rect">
+            <a:avLst/>
+          </a:prstGeom>
+          <a:noFill/>
+          <a:ln w="0">
+            <a:noFill/>
+            <a:prstDash val="solid"/>
+          </a:ln>
+        </p:spPr>
+        <p:txBody>
+          <a:bodyPr anchor="t"/>
+          <a:lstStyle/>
+          <a:p>
+            <a:pPr algn="l">
+              <a:defRPr sz="1275" b="1">
+                <a:solidFill>
+                  <a:srgbClr val="111111"/>
+                </a:solidFill>
+                <a:latin typeface="微软雅黑" panose="020B0503020204020204" pitchFamily="34" charset="-122"/>
+                <a:ea typeface="微软雅黑" panose="020B0503020204020204" pitchFamily="34" charset="-122"/>
+                <a:cs typeface="微软雅黑" panose="020B0503020204020204" pitchFamily="34" charset="-122"/>
+              </a:defRPr>
+            </a:pPr>
+            <a:r>
+              <a:rPr b="1">
+                <a:solidFill>
+                  <a:srgbClr val="111111"/>
+                </a:solidFill>
+                <a:latin typeface="微软雅黑" panose="020B0503020204020204" pitchFamily="34" charset="-122"/>
+                <a:ea typeface="微软雅黑" panose="020B0503020204020204" pitchFamily="34" charset="-122"/>
+                <a:cs typeface="微软雅黑" panose="020B0503020204020204" pitchFamily="34" charset="-122"/>
+              </a:rPr>
+              <a:t>边界结算</a:t>
+            </a:r>
+            <a:r>
+              <a:rPr lang="zh-CN" b="1">
+                <a:solidFill>
+                  <a:srgbClr val="111111"/>
+                </a:solidFill>
+                <a:latin typeface="微软雅黑" panose="020B0503020204020204" pitchFamily="34" charset="-122"/>
+                <a:ea typeface="微软雅黑" panose="020B0503020204020204" pitchFamily="34" charset="-122"/>
+                <a:cs typeface="微软雅黑" panose="020B0503020204020204" pitchFamily="34" charset="-122"/>
+              </a:rPr>
+              <a:t>判定</a:t>
+            </a:r>
+            <a:endParaRPr lang="zh-CN" b="1">
+              <a:solidFill>
+                <a:srgbClr val="111111"/>
+              </a:solidFill>
+              <a:latin typeface="微软雅黑" panose="020B0503020204020204" pitchFamily="34" charset="-122"/>
+              <a:ea typeface="微软雅黑" panose="020B0503020204020204" pitchFamily="34" charset="-122"/>
+              <a:cs typeface="微软雅黑" panose="020B0503020204020204" pitchFamily="34" charset="-122"/>
+            </a:endParaRPr>
+          </a:p>
+        </p:txBody>
+      </p:sp>
+      <p:sp>
+        <p:nvSpPr>
+          <p:cNvPr id="30" name="tool-stage-6"/>
+          <p:cNvSpPr>
+            <a:spLocks noGrp="1"/>
+          </p:cNvSpPr>
+          <p:nvPr>
+            <p:custDataLst>
+              <p:tags r:id="rId16"/>
+            </p:custDataLst>
+          </p:nvPr>
+        </p:nvSpPr>
+        <p:spPr>
+          <a:xfrm>
+            <a:off x="4805363" y="3848078"/>
+            <a:ext cx="1104842" cy="857205"/>
+          </a:xfrm>
+          <a:prstGeom prst="rect">
+            <a:avLst/>
+          </a:prstGeom>
+          <a:solidFill>
+            <a:srgbClr val="F6F7F8"/>
+          </a:solidFill>
+          <a:ln w="9525">
+            <a:solidFill>
+              <a:srgbClr val="B8BCC4"/>
+            </a:solidFill>
+            <a:prstDash val="solid"/>
+          </a:ln>
+        </p:spPr>
+      </p:sp>
+      <p:sp>
+        <p:nvSpPr>
+          <p:cNvPr id="31" name="tool-stage-num-6"/>
+          <p:cNvSpPr>
+            <a:spLocks noGrp="1"/>
+          </p:cNvSpPr>
+          <p:nvPr>
+            <p:custDataLst>
+              <p:tags r:id="rId17"/>
+            </p:custDataLst>
+          </p:nvPr>
+        </p:nvSpPr>
+        <p:spPr>
+          <a:xfrm>
+            <a:off x="4919658" y="3943323"/>
+            <a:ext cx="266686" cy="247637"/>
+          </a:xfrm>
+          <a:prstGeom prst="rect">
+            <a:avLst/>
+          </a:prstGeom>
+          <a:noFill/>
+          <a:ln w="0">
+            <a:noFill/>
+            <a:prstDash val="solid"/>
+          </a:ln>
+        </p:spPr>
+        <p:txBody>
+          <a:bodyPr anchor="t"/>
+          <a:lstStyle/>
+          <a:p>
+            <a:pPr algn="l">
+              <a:defRPr sz="1275" b="1">
+                <a:solidFill>
+                  <a:srgbClr val="3D8DFF"/>
+                </a:solidFill>
+                <a:latin typeface="微软雅黑" panose="020B0503020204020204" pitchFamily="34" charset="-122"/>
+                <a:ea typeface="微软雅黑" panose="020B0503020204020204" pitchFamily="34" charset="-122"/>
+                <a:cs typeface="微软雅黑" panose="020B0503020204020204" pitchFamily="34" charset="-122"/>
+              </a:defRPr>
+            </a:pPr>
+            <a:r>
+              <a:rPr b="1">
+                <a:solidFill>
+                  <a:schemeClr val="tx1"/>
+                </a:solidFill>
+                <a:latin typeface="微软雅黑" panose="020B0503020204020204" pitchFamily="34" charset="-122"/>
+                <a:ea typeface="微软雅黑" panose="020B0503020204020204" pitchFamily="34" charset="-122"/>
+                <a:cs typeface="微软雅黑" panose="020B0503020204020204" pitchFamily="34" charset="-122"/>
+              </a:rPr>
+              <a:t>6</a:t>
+            </a:r>
+            <a:endParaRPr b="1">
+              <a:solidFill>
+                <a:schemeClr val="tx1"/>
+              </a:solidFill>
+              <a:latin typeface="微软雅黑" panose="020B0503020204020204" pitchFamily="34" charset="-122"/>
+              <a:ea typeface="微软雅黑" panose="020B0503020204020204" pitchFamily="34" charset="-122"/>
+              <a:cs typeface="微软雅黑" panose="020B0503020204020204" pitchFamily="34" charset="-122"/>
+            </a:endParaRPr>
+          </a:p>
+        </p:txBody>
+      </p:sp>
+      <p:sp>
+        <p:nvSpPr>
+          <p:cNvPr id="32" name="tool-stage-name-6"/>
+          <p:cNvSpPr>
+            <a:spLocks noGrp="1"/>
+          </p:cNvSpPr>
+          <p:nvPr>
+            <p:custDataLst>
+              <p:tags r:id="rId18"/>
+            </p:custDataLst>
+          </p:nvPr>
+        </p:nvSpPr>
+        <p:spPr>
+          <a:xfrm>
+            <a:off x="4919658" y="4248107"/>
+            <a:ext cx="895303" cy="285735"/>
+          </a:xfrm>
+          <a:prstGeom prst="rect">
+            <a:avLst/>
+          </a:prstGeom>
+          <a:noFill/>
+          <a:ln w="0">
+            <a:noFill/>
+            <a:prstDash val="solid"/>
+          </a:ln>
+        </p:spPr>
+        <p:txBody>
+          <a:bodyPr anchor="t"/>
+          <a:lstStyle/>
+          <a:p>
+            <a:pPr algn="l">
+              <a:defRPr sz="1275" b="1">
+                <a:solidFill>
+                  <a:srgbClr val="111111"/>
+                </a:solidFill>
+                <a:latin typeface="微软雅黑" panose="020B0503020204020204" pitchFamily="34" charset="-122"/>
+                <a:ea typeface="微软雅黑" panose="020B0503020204020204" pitchFamily="34" charset="-122"/>
+                <a:cs typeface="微软雅黑" panose="020B0503020204020204" pitchFamily="34" charset="-122"/>
+              </a:defRPr>
+            </a:pPr>
+            <a:r>
+              <a:rPr b="1">
+                <a:solidFill>
+                  <a:srgbClr val="111111"/>
+                </a:solidFill>
+                <a:latin typeface="微软雅黑" panose="020B0503020204020204" pitchFamily="34" charset="-122"/>
+                <a:ea typeface="微软雅黑" panose="020B0503020204020204" pitchFamily="34" charset="-122"/>
+                <a:cs typeface="微软雅黑" panose="020B0503020204020204" pitchFamily="34" charset="-122"/>
+              </a:rPr>
+              <a:t>责任传播</a:t>
+            </a:r>
+            <a:endParaRPr b="1">
+              <a:solidFill>
+                <a:srgbClr val="111111"/>
+              </a:solidFill>
+              <a:latin typeface="微软雅黑" panose="020B0503020204020204" pitchFamily="34" charset="-122"/>
+              <a:ea typeface="微软雅黑" panose="020B0503020204020204" pitchFamily="34" charset="-122"/>
+              <a:cs typeface="微软雅黑" panose="020B0503020204020204" pitchFamily="34" charset="-122"/>
+            </a:endParaRPr>
+          </a:p>
+        </p:txBody>
+      </p:sp>
+      <p:sp>
+        <p:nvSpPr>
+          <p:cNvPr id="33" name="tool-stage-7"/>
+          <p:cNvSpPr>
+            <a:spLocks noGrp="1"/>
+          </p:cNvSpPr>
+          <p:nvPr>
+            <p:custDataLst>
+              <p:tags r:id="rId19"/>
+            </p:custDataLst>
+          </p:nvPr>
+        </p:nvSpPr>
+        <p:spPr>
+          <a:xfrm>
+            <a:off x="3581653" y="3848078"/>
+            <a:ext cx="1104842" cy="857205"/>
+          </a:xfrm>
+          <a:prstGeom prst="rect">
+            <a:avLst/>
+          </a:prstGeom>
+          <a:solidFill>
+            <a:srgbClr val="F6F7F8"/>
+          </a:solidFill>
+          <a:ln w="9525">
+            <a:solidFill>
+              <a:srgbClr val="B8BCC4"/>
+            </a:solidFill>
+            <a:prstDash val="solid"/>
+          </a:ln>
+        </p:spPr>
+      </p:sp>
+      <p:sp>
+        <p:nvSpPr>
+          <p:cNvPr id="34" name="tool-stage-num-7"/>
+          <p:cNvSpPr>
+            <a:spLocks noGrp="1"/>
+          </p:cNvSpPr>
+          <p:nvPr>
+            <p:custDataLst>
+              <p:tags r:id="rId20"/>
+            </p:custDataLst>
+          </p:nvPr>
+        </p:nvSpPr>
+        <p:spPr>
+          <a:xfrm>
+            <a:off x="3695947" y="3943323"/>
+            <a:ext cx="266686" cy="247637"/>
+          </a:xfrm>
+          <a:prstGeom prst="rect">
+            <a:avLst/>
+          </a:prstGeom>
+          <a:noFill/>
+          <a:ln w="0">
+            <a:noFill/>
+            <a:prstDash val="solid"/>
+          </a:ln>
+        </p:spPr>
+        <p:txBody>
+          <a:bodyPr anchor="t"/>
+          <a:lstStyle/>
+          <a:p>
+            <a:pPr algn="l">
+              <a:defRPr sz="1275" b="1">
+                <a:solidFill>
+                  <a:srgbClr val="3D8DFF"/>
+                </a:solidFill>
+                <a:latin typeface="微软雅黑" panose="020B0503020204020204" pitchFamily="34" charset="-122"/>
+                <a:ea typeface="微软雅黑" panose="020B0503020204020204" pitchFamily="34" charset="-122"/>
+                <a:cs typeface="微软雅黑" panose="020B0503020204020204" pitchFamily="34" charset="-122"/>
+              </a:defRPr>
+            </a:pPr>
+            <a:r>
+              <a:rPr b="1">
+                <a:solidFill>
+                  <a:schemeClr val="tx1"/>
+                </a:solidFill>
+                <a:latin typeface="微软雅黑" panose="020B0503020204020204" pitchFamily="34" charset="-122"/>
+                <a:ea typeface="微软雅黑" panose="020B0503020204020204" pitchFamily="34" charset="-122"/>
+                <a:cs typeface="微软雅黑" panose="020B0503020204020204" pitchFamily="34" charset="-122"/>
+              </a:rPr>
+              <a:t>5</a:t>
+            </a:r>
+            <a:endParaRPr b="1">
+              <a:solidFill>
+                <a:schemeClr val="tx1"/>
+              </a:solidFill>
+              <a:latin typeface="微软雅黑" panose="020B0503020204020204" pitchFamily="34" charset="-122"/>
+              <a:ea typeface="微软雅黑" panose="020B0503020204020204" pitchFamily="34" charset="-122"/>
+              <a:cs typeface="微软雅黑" panose="020B0503020204020204" pitchFamily="34" charset="-122"/>
+            </a:endParaRPr>
+          </a:p>
+        </p:txBody>
+      </p:sp>
+      <p:sp>
+        <p:nvSpPr>
+          <p:cNvPr id="35" name="tool-stage-name-7"/>
+          <p:cNvSpPr>
+            <a:spLocks noGrp="1"/>
+          </p:cNvSpPr>
+          <p:nvPr>
+            <p:custDataLst>
+              <p:tags r:id="rId21"/>
+            </p:custDataLst>
+          </p:nvPr>
+        </p:nvSpPr>
+        <p:spPr>
+          <a:xfrm>
+            <a:off x="3695947" y="4248107"/>
+            <a:ext cx="895303" cy="285735"/>
+          </a:xfrm>
+          <a:prstGeom prst="rect">
+            <a:avLst/>
+          </a:prstGeom>
+          <a:noFill/>
+          <a:ln w="0">
+            <a:noFill/>
+            <a:prstDash val="solid"/>
+          </a:ln>
+        </p:spPr>
+        <p:txBody>
+          <a:bodyPr anchor="t"/>
+          <a:lstStyle/>
+          <a:p>
+            <a:pPr algn="l">
+              <a:defRPr sz="1275" b="1">
+                <a:solidFill>
+                  <a:srgbClr val="111111"/>
+                </a:solidFill>
+                <a:latin typeface="微软雅黑" panose="020B0503020204020204" pitchFamily="34" charset="-122"/>
+                <a:ea typeface="微软雅黑" panose="020B0503020204020204" pitchFamily="34" charset="-122"/>
+                <a:cs typeface="微软雅黑" panose="020B0503020204020204" pitchFamily="34" charset="-122"/>
+              </a:defRPr>
+            </a:pPr>
+            <a:r>
+              <a:rPr b="1">
+                <a:solidFill>
+                  <a:srgbClr val="111111"/>
+                </a:solidFill>
+                <a:latin typeface="微软雅黑" panose="020B0503020204020204" pitchFamily="34" charset="-122"/>
+                <a:ea typeface="微软雅黑" panose="020B0503020204020204" pitchFamily="34" charset="-122"/>
+                <a:cs typeface="微软雅黑" panose="020B0503020204020204" pitchFamily="34" charset="-122"/>
+              </a:rPr>
+              <a:t>义务生成</a:t>
+            </a:r>
+            <a:endParaRPr b="1">
+              <a:solidFill>
+                <a:srgbClr val="111111"/>
+              </a:solidFill>
+              <a:latin typeface="微软雅黑" panose="020B0503020204020204" pitchFamily="34" charset="-122"/>
+              <a:ea typeface="微软雅黑" panose="020B0503020204020204" pitchFamily="34" charset="-122"/>
+              <a:cs typeface="微软雅黑" panose="020B0503020204020204" pitchFamily="34" charset="-122"/>
+            </a:endParaRPr>
+          </a:p>
+        </p:txBody>
+      </p:sp>
+      <p:sp>
+        <p:nvSpPr>
+          <p:cNvPr id="36" name="tool-output-panel"/>
+          <p:cNvSpPr>
+            <a:spLocks noGrp="1"/>
+          </p:cNvSpPr>
+          <p:nvPr/>
+        </p:nvSpPr>
+        <p:spPr>
+          <a:xfrm>
+            <a:off x="9314965" y="2152716"/>
+            <a:ext cx="2476371" cy="2609714"/>
+          </a:xfrm>
+          <a:prstGeom prst="rect">
+            <a:avLst/>
+          </a:prstGeom>
+          <a:solidFill>
+            <a:srgbClr val="F6F7F8"/>
+          </a:solidFill>
+          <a:ln w="0">
+            <a:noFill/>
+            <a:prstDash val="solid"/>
+          </a:ln>
+        </p:spPr>
+      </p:sp>
+      <p:sp>
+        <p:nvSpPr>
+          <p:cNvPr id="37" name="tool-output-title"/>
+          <p:cNvSpPr>
+            <a:spLocks noGrp="1"/>
+          </p:cNvSpPr>
+          <p:nvPr/>
+        </p:nvSpPr>
+        <p:spPr>
+          <a:xfrm>
+            <a:off x="9543553" y="2362256"/>
+            <a:ext cx="2019195" cy="361931"/>
+          </a:xfrm>
+          <a:prstGeom prst="rect">
+            <a:avLst/>
+          </a:prstGeom>
+          <a:noFill/>
+          <a:ln w="0">
+            <a:noFill/>
+            <a:prstDash val="solid"/>
+          </a:ln>
+        </p:spPr>
+        <p:txBody>
+          <a:bodyPr anchor="t"/>
+          <a:lstStyle/>
+          <a:p>
+            <a:pPr algn="l">
+              <a:defRPr sz="1875" b="1">
+                <a:solidFill>
+                  <a:srgbClr val="111111"/>
+                </a:solidFill>
+                <a:latin typeface="微软雅黑" panose="020B0503020204020204" pitchFamily="34" charset="-122"/>
+                <a:ea typeface="微软雅黑" panose="020B0503020204020204" pitchFamily="34" charset="-122"/>
+                <a:cs typeface="微软雅黑" panose="020B0503020204020204" pitchFamily="34" charset="-122"/>
+              </a:defRPr>
+            </a:pPr>
+            <a:r>
+              <a:rPr b="1">
+                <a:solidFill>
+                  <a:srgbClr val="111111"/>
+                </a:solidFill>
+                <a:latin typeface="微软雅黑" panose="020B0503020204020204" pitchFamily="34" charset="-122"/>
+                <a:ea typeface="微软雅黑" panose="020B0503020204020204" pitchFamily="34" charset="-122"/>
+                <a:cs typeface="微软雅黑" panose="020B0503020204020204" pitchFamily="34" charset="-122"/>
+              </a:rPr>
+              <a:t>输出</a:t>
+            </a:r>
+            <a:endParaRPr b="1">
+              <a:solidFill>
+                <a:srgbClr val="111111"/>
+              </a:solidFill>
+              <a:latin typeface="微软雅黑" panose="020B0503020204020204" pitchFamily="34" charset="-122"/>
+              <a:ea typeface="微软雅黑" panose="020B0503020204020204" pitchFamily="34" charset="-122"/>
+              <a:cs typeface="微软雅黑" panose="020B0503020204020204" pitchFamily="34" charset="-122"/>
+            </a:endParaRPr>
+          </a:p>
+        </p:txBody>
+      </p:sp>
+      <p:sp>
+        <p:nvSpPr>
+          <p:cNvPr id="38" name="tool-output-body"/>
+          <p:cNvSpPr>
+            <a:spLocks noGrp="1"/>
+          </p:cNvSpPr>
+          <p:nvPr/>
+        </p:nvSpPr>
+        <p:spPr>
+          <a:xfrm>
+            <a:off x="9543553" y="2838481"/>
+            <a:ext cx="2019195" cy="1733460"/>
+          </a:xfrm>
+          <a:prstGeom prst="rect">
+            <a:avLst/>
+          </a:prstGeom>
+          <a:noFill/>
+          <a:ln w="0">
+            <a:noFill/>
+            <a:prstDash val="solid"/>
+          </a:ln>
+        </p:spPr>
+        <p:txBody>
+          <a:bodyPr anchor="t"/>
+          <a:lstStyle/>
+          <a:p>
+            <a:pPr algn="l">
+              <a:defRPr sz="1500" b="0">
+                <a:solidFill>
+                  <a:srgbClr val="111111"/>
+                </a:solidFill>
+                <a:latin typeface="微软雅黑" panose="020B0503020204020204" pitchFamily="34" charset="-122"/>
+                <a:ea typeface="微软雅黑" panose="020B0503020204020204" pitchFamily="34" charset="-122"/>
+                <a:cs typeface="微软雅黑" panose="020B0503020204020204" pitchFamily="34" charset="-122"/>
+              </a:defRPr>
+            </a:pPr>
+            <a:r>
+              <a:rPr b="0">
+                <a:solidFill>
+                  <a:srgbClr val="111111"/>
+                </a:solidFill>
+                <a:latin typeface="微软雅黑" panose="020B0503020204020204" pitchFamily="34" charset="-122"/>
+                <a:ea typeface="微软雅黑" panose="020B0503020204020204" pitchFamily="34" charset="-122"/>
+                <a:cs typeface="微软雅黑" panose="020B0503020204020204" pitchFamily="34" charset="-122"/>
+              </a:rPr>
+              <a:t>协议违例 witness</a:t>
+            </a:r>
+            <a:endParaRPr b="0">
+              <a:solidFill>
+                <a:srgbClr val="111111"/>
+              </a:solidFill>
+              <a:latin typeface="微软雅黑" panose="020B0503020204020204" pitchFamily="34" charset="-122"/>
+              <a:ea typeface="微软雅黑" panose="020B0503020204020204" pitchFamily="34" charset="-122"/>
+              <a:cs typeface="微软雅黑" panose="020B0503020204020204" pitchFamily="34" charset="-122"/>
+            </a:endParaRPr>
+          </a:p>
+          <a:p>
+            <a:pPr algn="l">
+              <a:defRPr sz="1500" b="0">
+                <a:solidFill>
+                  <a:srgbClr val="111111"/>
+                </a:solidFill>
+                <a:latin typeface="微软雅黑" panose="020B0503020204020204" pitchFamily="34" charset="-122"/>
+                <a:ea typeface="微软雅黑" panose="020B0503020204020204" pitchFamily="34" charset="-122"/>
+                <a:cs typeface="微软雅黑" panose="020B0503020204020204" pitchFamily="34" charset="-122"/>
+              </a:defRPr>
+            </a:pPr>
+            <a:r>
+              <a:rPr b="0">
+                <a:solidFill>
+                  <a:srgbClr val="111111"/>
+                </a:solidFill>
+                <a:latin typeface="微软雅黑" panose="020B0503020204020204" pitchFamily="34" charset="-122"/>
+                <a:ea typeface="微软雅黑" panose="020B0503020204020204" pitchFamily="34" charset="-122"/>
+                <a:cs typeface="微软雅黑" panose="020B0503020204020204" pitchFamily="34" charset="-122"/>
+              </a:rPr>
+              <a:t>可能问题与 UNKNOWN</a:t>
+            </a:r>
+            <a:endParaRPr b="0">
+              <a:solidFill>
+                <a:srgbClr val="111111"/>
+              </a:solidFill>
+              <a:latin typeface="微软雅黑" panose="020B0503020204020204" pitchFamily="34" charset="-122"/>
+              <a:ea typeface="微软雅黑" panose="020B0503020204020204" pitchFamily="34" charset="-122"/>
+              <a:cs typeface="微软雅黑" panose="020B0503020204020204" pitchFamily="34" charset="-122"/>
+            </a:endParaRPr>
+          </a:p>
+          <a:p>
+            <a:pPr algn="l">
+              <a:defRPr sz="1500" b="0">
+                <a:solidFill>
+                  <a:srgbClr val="111111"/>
+                </a:solidFill>
+                <a:latin typeface="微软雅黑" panose="020B0503020204020204" pitchFamily="34" charset="-122"/>
+                <a:ea typeface="微软雅黑" panose="020B0503020204020204" pitchFamily="34" charset="-122"/>
+                <a:cs typeface="微软雅黑" panose="020B0503020204020204" pitchFamily="34" charset="-122"/>
+              </a:defRPr>
+            </a:pPr>
+            <a:r>
+              <a:rPr b="0">
+                <a:solidFill>
+                  <a:srgbClr val="111111"/>
+                </a:solidFill>
+                <a:latin typeface="微软雅黑" panose="020B0503020204020204" pitchFamily="34" charset="-122"/>
+                <a:ea typeface="微软雅黑" panose="020B0503020204020204" pitchFamily="34" charset="-122"/>
+                <a:cs typeface="微软雅黑" panose="020B0503020204020204" pitchFamily="34" charset="-122"/>
+              </a:rPr>
+              <a:t>规格内一致性结果</a:t>
+            </a:r>
+            <a:endParaRPr b="0">
+              <a:solidFill>
+                <a:srgbClr val="111111"/>
+              </a:solidFill>
+              <a:latin typeface="微软雅黑" panose="020B0503020204020204" pitchFamily="34" charset="-122"/>
+              <a:ea typeface="微软雅黑" panose="020B0503020204020204" pitchFamily="34" charset="-122"/>
+              <a:cs typeface="微软雅黑" panose="020B0503020204020204" pitchFamily="34" charset="-122"/>
+            </a:endParaRPr>
+          </a:p>
+          <a:p>
+            <a:pPr algn="l">
+              <a:defRPr sz="1500" b="0">
+                <a:solidFill>
+                  <a:srgbClr val="111111"/>
+                </a:solidFill>
+                <a:latin typeface="微软雅黑" panose="020B0503020204020204" pitchFamily="34" charset="-122"/>
+                <a:ea typeface="微软雅黑" panose="020B0503020204020204" pitchFamily="34" charset="-122"/>
+                <a:cs typeface="微软雅黑" panose="020B0503020204020204" pitchFamily="34" charset="-122"/>
+              </a:defRPr>
+            </a:pPr>
+            <a:r>
+              <a:rPr b="0">
+                <a:solidFill>
+                  <a:srgbClr val="111111"/>
+                </a:solidFill>
+                <a:latin typeface="微软雅黑" panose="020B0503020204020204" pitchFamily="34" charset="-122"/>
+                <a:ea typeface="微软雅黑" panose="020B0503020204020204" pitchFamily="34" charset="-122"/>
+                <a:cs typeface="微软雅黑" panose="020B0503020204020204" pitchFamily="34" charset="-122"/>
+              </a:rPr>
+              <a:t>可审计 proof chain</a:t>
+            </a:r>
+            <a:endParaRPr b="0">
+              <a:solidFill>
+                <a:srgbClr val="111111"/>
+              </a:solidFill>
+              <a:latin typeface="微软雅黑" panose="020B0503020204020204" pitchFamily="34" charset="-122"/>
+              <a:ea typeface="微软雅黑" panose="020B0503020204020204" pitchFamily="34" charset="-122"/>
+              <a:cs typeface="微软雅黑" panose="020B0503020204020204" pitchFamily="34" charset="-122"/>
             </a:endParaRPr>
           </a:p>
         </p:txBody>
@@ -4262,6 +9315,3785 @@
 </p:sld>
 </file>
 
+<file path=ppt/slides/slide20.xml><?xml version="1.0" encoding="utf-8"?>
+<p:sld xmlns:a="http://schemas.openxmlformats.org/drawingml/2006/main" xmlns:r="http://schemas.openxmlformats.org/officeDocument/2006/relationships" xmlns:p="http://schemas.openxmlformats.org/presentationml/2006/main">
+  <p:cSld>
+    <p:spTree>
+      <p:nvGrpSpPr>
+        <p:cNvPr id="1" name=""/>
+        <p:cNvGrpSpPr/>
+        <p:nvPr/>
+      </p:nvGrpSpPr>
+      <p:grpSpPr/>
+      <p:sp>
+        <p:nvSpPr>
+          <p:cNvPr id="2" name="title-9"/>
+          <p:cNvSpPr>
+            <a:spLocks noGrp="1"/>
+          </p:cNvSpPr>
+          <p:nvPr/>
+        </p:nvSpPr>
+        <p:spPr>
+          <a:xfrm>
+            <a:off x="295275" y="161290"/>
+            <a:ext cx="11162665" cy="556260"/>
+          </a:xfrm>
+          <a:prstGeom prst="rect">
+            <a:avLst/>
+          </a:prstGeom>
+          <a:noFill/>
+          <a:ln w="0">
+            <a:noFill/>
+            <a:prstDash val="solid"/>
+          </a:ln>
+        </p:spPr>
+        <p:txBody>
+          <a:bodyPr anchor="t"/>
+          <a:lstStyle/>
+          <a:p>
+            <a:pPr algn="l">
+              <a:defRPr sz="3225" b="1">
+                <a:solidFill>
+                  <a:srgbClr val="111111"/>
+                </a:solidFill>
+                <a:latin typeface="微软雅黑" panose="020B0503020204020204" pitchFamily="34" charset="-122"/>
+                <a:ea typeface="微软雅黑" panose="020B0503020204020204" pitchFamily="34" charset="-122"/>
+                <a:cs typeface="微软雅黑" panose="020B0503020204020204" pitchFamily="34" charset="-122"/>
+              </a:defRPr>
+            </a:pPr>
+            <a:r>
+              <a:rPr lang="zh-CN" sz="1800" b="0">
+                <a:solidFill>
+                  <a:srgbClr val="111111"/>
+                </a:solidFill>
+                <a:latin typeface="微软雅黑" panose="020B0503020204020204" pitchFamily="34" charset="-122"/>
+                <a:ea typeface="微软雅黑" panose="020B0503020204020204" pitchFamily="34" charset="-122"/>
+                <a:cs typeface="微软雅黑" panose="020B0503020204020204" pitchFamily="34" charset="-122"/>
+              </a:rPr>
+              <a:t>类型化</a:t>
+            </a:r>
+            <a:endParaRPr lang="zh-CN" sz="1800" b="0">
+              <a:solidFill>
+                <a:srgbClr val="111111"/>
+              </a:solidFill>
+              <a:latin typeface="微软雅黑" panose="020B0503020204020204" pitchFamily="34" charset="-122"/>
+              <a:ea typeface="微软雅黑" panose="020B0503020204020204" pitchFamily="34" charset="-122"/>
+              <a:cs typeface="微软雅黑" panose="020B0503020204020204" pitchFamily="34" charset="-122"/>
+            </a:endParaRPr>
+          </a:p>
+        </p:txBody>
+      </p:sp>
+      <p:sp>
+        <p:nvSpPr>
+          <p:cNvPr id="3" name="文本框 2"/>
+          <p:cNvSpPr txBox="1"/>
+          <p:nvPr/>
+        </p:nvSpPr>
+        <p:spPr>
+          <a:xfrm>
+            <a:off x="400050" y="717550"/>
+            <a:ext cx="9196705" cy="418465"/>
+          </a:xfrm>
+          <a:prstGeom prst="rect">
+            <a:avLst/>
+          </a:prstGeom>
+          <a:noFill/>
+        </p:spPr>
+        <p:txBody>
+          <a:bodyPr wrap="square" rtlCol="0">
+            <a:noAutofit/>
+          </a:bodyPr>
+          <a:p>
+            <a:r>
+              <a:rPr lang="zh-CN" altLang="en-US"/>
+              <a:t>类型化，就是把一条模糊的源码修改，翻译成一条结构明确、可以参与推理的元数据事实。</a:t>
+            </a:r>
+            <a:endParaRPr lang="zh-CN" altLang="en-US"/>
+          </a:p>
+        </p:txBody>
+      </p:sp>
+      <p:sp>
+        <p:nvSpPr>
+          <p:cNvPr id="5" name="文本框 4"/>
+          <p:cNvSpPr txBox="1"/>
+          <p:nvPr/>
+        </p:nvSpPr>
+        <p:spPr>
+          <a:xfrm>
+            <a:off x="555625" y="1283335"/>
+            <a:ext cx="9305925" cy="5623560"/>
+          </a:xfrm>
+          <a:prstGeom prst="rect">
+            <a:avLst/>
+          </a:prstGeom>
+          <a:noFill/>
+        </p:spPr>
+        <p:txBody>
+          <a:bodyPr wrap="square" rtlCol="0">
+            <a:noAutofit/>
+          </a:bodyPr>
+          <a:p>
+            <a:r>
+              <a:rPr lang="zh-CN" altLang="en-US"/>
+              <a:t>类型化前：</a:t>
+            </a:r>
+            <a:endParaRPr lang="zh-CN" altLang="en-US"/>
+          </a:p>
+          <a:p>
+            <a:r>
+              <a:rPr lang="en-US" altLang="zh-CN"/>
+              <a:t>latest_dev = device</a:t>
+            </a:r>
+            <a:endParaRPr lang="en-US" altLang="zh-CN"/>
+          </a:p>
+          <a:p>
+            <a:r>
+              <a:rPr lang="en-US" altLang="zh-CN"/>
+              <a:t>free(device)</a:t>
+            </a:r>
+            <a:endParaRPr lang="en-US" altLang="zh-CN"/>
+          </a:p>
+          <a:p>
+            <a:r>
+              <a:rPr lang="zh-CN" altLang="en-US"/>
+              <a:t>它们只是两条孤立的源码操作。</a:t>
+            </a:r>
+            <a:endParaRPr lang="zh-CN" altLang="en-US"/>
+          </a:p>
+          <a:p>
+            <a:endParaRPr lang="zh-CN" altLang="en-US"/>
+          </a:p>
+          <a:p>
+            <a:r>
+              <a:rPr lang="zh-CN" altLang="en-US"/>
+              <a:t>类型化后：</a:t>
+            </a:r>
+            <a:endParaRPr lang="zh-CN" altLang="en-US"/>
+          </a:p>
+          <a:p>
+            <a:r>
+              <a:rPr lang="en-US" altLang="zh-CN"/>
+              <a:t>POINTER_BIND(</a:t>
+            </a:r>
+            <a:endParaRPr lang="en-US" altLang="zh-CN"/>
+          </a:p>
+          <a:p>
+            <a:r>
+              <a:rPr lang="en-US" altLang="zh-CN"/>
+              <a:t>    role   = ACTIVE_DEVICE_POINTER,</a:t>
+            </a:r>
+            <a:endParaRPr lang="en-US" altLang="zh-CN"/>
+          </a:p>
+          <a:p>
+            <a:r>
+              <a:rPr lang="en-US" altLang="zh-CN"/>
+              <a:t>    target = new_device#7</a:t>
+            </a:r>
+            <a:endParaRPr lang="en-US" altLang="zh-CN"/>
+          </a:p>
+          <a:p>
+            <a:r>
+              <a:rPr lang="en-US" altLang="zh-CN"/>
+              <a:t>)</a:t>
+            </a:r>
+            <a:endParaRPr lang="en-US" altLang="zh-CN"/>
+          </a:p>
+          <a:p>
+            <a:endParaRPr lang="en-US" altLang="zh-CN"/>
+          </a:p>
+          <a:p>
+            <a:r>
+              <a:rPr lang="en-US" altLang="zh-CN"/>
+              <a:t>OWNER_FREE(</a:t>
+            </a:r>
+            <a:endParaRPr lang="en-US" altLang="zh-CN"/>
+          </a:p>
+          <a:p>
+            <a:r>
+              <a:rPr lang="en-US" altLang="zh-CN"/>
+              <a:t>    object = new_device#7</a:t>
+            </a:r>
+            <a:endParaRPr lang="en-US" altLang="zh-CN"/>
+          </a:p>
+          <a:p>
+            <a:r>
+              <a:rPr lang="en-US" altLang="zh-CN"/>
+              <a:t>)</a:t>
+            </a:r>
+            <a:endParaRPr lang="en-US" altLang="zh-CN"/>
+          </a:p>
+          <a:p>
+            <a:r>
+              <a:rPr lang="zh-CN" altLang="en-US"/>
+              <a:t>工具就可以联合推理：</a:t>
+            </a:r>
+            <a:endParaRPr lang="zh-CN" altLang="en-US"/>
+          </a:p>
+          <a:p>
+            <a:r>
+              <a:rPr lang="en-US" altLang="zh-CN"/>
+              <a:t>active pointer </a:t>
+            </a:r>
+            <a:r>
+              <a:rPr lang="en-US" altLang="en-US"/>
+              <a:t>→</a:t>
+            </a:r>
+            <a:r>
+              <a:rPr lang="en-US" altLang="zh-CN"/>
+              <a:t> new_device#7</a:t>
+            </a:r>
+            <a:endParaRPr lang="en-US" altLang="zh-CN"/>
+          </a:p>
+          <a:p>
+            <a:r>
+              <a:rPr lang="en-US" altLang="zh-CN"/>
+              <a:t>alive(new_device#7) = false</a:t>
+            </a:r>
+            <a:endParaRPr lang="en-US" altLang="zh-CN"/>
+          </a:p>
+          <a:p>
+            <a:endParaRPr lang="en-US" altLang="zh-CN"/>
+          </a:p>
+          <a:p>
+            <a:r>
+              <a:rPr lang="en-US" altLang="en-US"/>
+              <a:t>→</a:t>
+            </a:r>
+            <a:r>
+              <a:rPr lang="en-US" altLang="zh-CN"/>
+              <a:t> </a:t>
+            </a:r>
+            <a:r>
+              <a:rPr lang="zh-CN" altLang="en-US"/>
+              <a:t>活动设备指针指向已释放对象</a:t>
+            </a:r>
+            <a:endParaRPr lang="zh-CN" altLang="en-US"/>
+          </a:p>
+          <a:p>
+            <a:r>
+              <a:rPr lang="en-US" altLang="en-US"/>
+              <a:t>→</a:t>
+            </a:r>
+            <a:r>
+              <a:rPr lang="en-US" altLang="zh-CN"/>
+              <a:t> InvalidRelation</a:t>
+            </a:r>
+            <a:endParaRPr lang="en-US" altLang="zh-CN"/>
+          </a:p>
+        </p:txBody>
+      </p:sp>
+    </p:spTree>
+  </p:cSld>
+  <p:clrMapOvr>
+    <a:masterClrMapping/>
+  </p:clrMapOvr>
+</p:sld>
+</file>
+
+<file path=ppt/slides/slide21.xml><?xml version="1.0" encoding="utf-8"?>
+<p:sld xmlns:a="http://schemas.openxmlformats.org/drawingml/2006/main" xmlns:r="http://schemas.openxmlformats.org/officeDocument/2006/relationships" xmlns:p="http://schemas.openxmlformats.org/presentationml/2006/main">
+  <p:cSld>
+    <p:spTree>
+      <p:nvGrpSpPr>
+        <p:cNvPr id="1" name=""/>
+        <p:cNvGrpSpPr/>
+        <p:nvPr/>
+      </p:nvGrpSpPr>
+      <p:grpSpPr/>
+      <p:sp>
+        <p:nvSpPr>
+          <p:cNvPr id="2" name="title-10"/>
+          <p:cNvSpPr>
+            <a:spLocks noGrp="1"/>
+          </p:cNvSpPr>
+          <p:nvPr/>
+        </p:nvSpPr>
+        <p:spPr>
+          <a:xfrm>
+            <a:off x="398780" y="114300"/>
+            <a:ext cx="11240135" cy="401955"/>
+          </a:xfrm>
+          <a:prstGeom prst="rect">
+            <a:avLst/>
+          </a:prstGeom>
+          <a:noFill/>
+          <a:ln w="0">
+            <a:noFill/>
+            <a:prstDash val="solid"/>
+          </a:ln>
+        </p:spPr>
+        <p:txBody>
+          <a:bodyPr anchor="t"/>
+          <a:lstStyle/>
+          <a:p>
+            <a:pPr algn="l">
+              <a:defRPr sz="3225" b="1">
+                <a:solidFill>
+                  <a:srgbClr val="111111"/>
+                </a:solidFill>
+                <a:latin typeface="微软雅黑" panose="020B0503020204020204" pitchFamily="34" charset="-122"/>
+                <a:ea typeface="微软雅黑" panose="020B0503020204020204" pitchFamily="34" charset="-122"/>
+                <a:cs typeface="微软雅黑" panose="020B0503020204020204" pitchFamily="34" charset="-122"/>
+              </a:defRPr>
+            </a:pPr>
+            <a:r>
+              <a:rPr lang="zh-CN" sz="1800" b="0">
+                <a:solidFill>
+                  <a:srgbClr val="111111"/>
+                </a:solidFill>
+                <a:latin typeface="微软雅黑" panose="020B0503020204020204" pitchFamily="34" charset="-122"/>
+                <a:ea typeface="微软雅黑" panose="020B0503020204020204" pitchFamily="34" charset="-122"/>
+                <a:cs typeface="微软雅黑" panose="020B0503020204020204" pitchFamily="34" charset="-122"/>
+              </a:rPr>
+              <a:t>实例</a:t>
+            </a:r>
+            <a:r>
+              <a:rPr sz="1800" b="0">
+                <a:solidFill>
+                  <a:srgbClr val="111111"/>
+                </a:solidFill>
+                <a:latin typeface="微软雅黑" panose="020B0503020204020204" pitchFamily="34" charset="-122"/>
+                <a:ea typeface="微软雅黑" panose="020B0503020204020204" pitchFamily="34" charset="-122"/>
+                <a:cs typeface="微软雅黑" panose="020B0503020204020204" pitchFamily="34" charset="-122"/>
+              </a:rPr>
+              <a:t>重建：识别同一次元数据操作</a:t>
+            </a:r>
+            <a:endParaRPr sz="1800" b="0">
+              <a:solidFill>
+                <a:srgbClr val="111111"/>
+              </a:solidFill>
+              <a:latin typeface="微软雅黑" panose="020B0503020204020204" pitchFamily="34" charset="-122"/>
+              <a:ea typeface="微软雅黑" panose="020B0503020204020204" pitchFamily="34" charset="-122"/>
+              <a:cs typeface="微软雅黑" panose="020B0503020204020204" pitchFamily="34" charset="-122"/>
+            </a:endParaRPr>
+          </a:p>
+        </p:txBody>
+      </p:sp>
+      <p:sp>
+        <p:nvSpPr>
+          <p:cNvPr id="3" name="文本框 2"/>
+          <p:cNvSpPr txBox="1"/>
+          <p:nvPr/>
+        </p:nvSpPr>
+        <p:spPr>
+          <a:xfrm>
+            <a:off x="487680" y="812800"/>
+            <a:ext cx="9491980" cy="902970"/>
+          </a:xfrm>
+          <a:prstGeom prst="rect">
+            <a:avLst/>
+          </a:prstGeom>
+          <a:noFill/>
+        </p:spPr>
+        <p:txBody>
+          <a:bodyPr wrap="square" rtlCol="0">
+            <a:noAutofit/>
+          </a:bodyPr>
+          <a:p>
+            <a:r>
+              <a:rPr lang="zh-CN" altLang="en-US"/>
+              <a:t>实例重建就是把分散在不同函数、字段和对象上的事件，判断为</a:t>
+            </a:r>
+            <a:r>
+              <a:rPr lang="en-US" altLang="zh-CN"/>
+              <a:t>“</a:t>
+            </a:r>
+            <a:r>
+              <a:rPr lang="zh-CN" altLang="en-US"/>
+              <a:t>属于同一次文件系统元数据操作</a:t>
+            </a:r>
+            <a:r>
+              <a:rPr lang="en-US" altLang="zh-CN"/>
+              <a:t>”</a:t>
+            </a:r>
+            <a:r>
+              <a:rPr lang="zh-CN" altLang="en-US"/>
+              <a:t>，并把它们组合成一个可跟踪的协议实例。</a:t>
+            </a:r>
+            <a:endParaRPr lang="zh-CN" altLang="en-US"/>
+          </a:p>
+        </p:txBody>
+      </p:sp>
+      <p:sp>
+        <p:nvSpPr>
+          <p:cNvPr id="17" name="文本框 16"/>
+          <p:cNvSpPr txBox="1"/>
+          <p:nvPr/>
+        </p:nvSpPr>
+        <p:spPr>
+          <a:xfrm>
+            <a:off x="326390" y="1492250"/>
+            <a:ext cx="5004435" cy="4824095"/>
+          </a:xfrm>
+          <a:prstGeom prst="rect">
+            <a:avLst/>
+          </a:prstGeom>
+          <a:noFill/>
+        </p:spPr>
+        <p:txBody>
+          <a:bodyPr wrap="square" rtlCol="0">
+            <a:noAutofit/>
+          </a:bodyPr>
+          <a:p>
+            <a:r>
+              <a:rPr lang="zh-CN" altLang="en-US"/>
+              <a:t>以</a:t>
+            </a:r>
+            <a:r>
+              <a:rPr lang="en-US" altLang="zh-CN"/>
+              <a:t> Btrfs </a:t>
+            </a:r>
+            <a:r>
+              <a:rPr lang="zh-CN" altLang="en-US"/>
+              <a:t>添加设备为例，源码中可能分别出现：</a:t>
+            </a:r>
+            <a:endParaRPr lang="zh-CN" altLang="en-US"/>
+          </a:p>
+          <a:p>
+            <a:r>
+              <a:rPr lang="zh-CN" altLang="en-US"/>
+              <a:t>函数</a:t>
+            </a:r>
+            <a:r>
+              <a:rPr lang="en-US" altLang="zh-CN"/>
+              <a:t> A</a:t>
+            </a:r>
+            <a:r>
+              <a:rPr lang="zh-CN" altLang="en-US"/>
+              <a:t>：设备加入</a:t>
+            </a:r>
+            <a:r>
+              <a:rPr lang="en-US" altLang="zh-CN"/>
+              <a:t> device list</a:t>
+            </a:r>
+            <a:endParaRPr lang="en-US" altLang="zh-CN"/>
+          </a:p>
+          <a:p>
+            <a:r>
+              <a:rPr lang="zh-CN" altLang="en-US"/>
+              <a:t>函数</a:t>
+            </a:r>
+            <a:r>
+              <a:rPr lang="en-US" altLang="zh-CN"/>
+              <a:t> B</a:t>
+            </a:r>
+            <a:r>
+              <a:rPr lang="zh-CN" altLang="en-US"/>
+              <a:t>：</a:t>
+            </a:r>
+            <a:r>
+              <a:rPr lang="en-US" altLang="zh-CN"/>
+              <a:t>num_devices </a:t>
+            </a:r>
+            <a:r>
+              <a:rPr lang="zh-CN" altLang="en-US"/>
+              <a:t>加一</a:t>
+            </a:r>
+            <a:endParaRPr lang="zh-CN" altLang="en-US"/>
+          </a:p>
+          <a:p>
+            <a:r>
+              <a:rPr lang="zh-CN" altLang="en-US"/>
+              <a:t>函数</a:t>
+            </a:r>
+            <a:r>
+              <a:rPr lang="en-US" altLang="zh-CN"/>
+              <a:t> C</a:t>
+            </a:r>
+            <a:r>
+              <a:rPr lang="zh-CN" altLang="en-US"/>
+              <a:t>：</a:t>
+            </a:r>
+            <a:r>
+              <a:rPr lang="en-US" altLang="zh-CN"/>
+              <a:t>latest_dev </a:t>
+            </a:r>
+            <a:r>
+              <a:rPr lang="zh-CN" altLang="en-US"/>
+              <a:t>指向新设备</a:t>
+            </a:r>
+            <a:endParaRPr lang="zh-CN" altLang="en-US"/>
+          </a:p>
+          <a:p>
+            <a:r>
+              <a:rPr lang="zh-CN" altLang="en-US"/>
+              <a:t>函数</a:t>
+            </a:r>
+            <a:r>
+              <a:rPr lang="en-US" altLang="zh-CN"/>
+              <a:t> D</a:t>
+            </a:r>
+            <a:r>
+              <a:rPr lang="zh-CN" altLang="en-US"/>
+              <a:t>：设备加入</a:t>
+            </a:r>
+            <a:r>
+              <a:rPr lang="en-US" altLang="zh-CN"/>
+              <a:t> transaction update list</a:t>
+            </a:r>
+            <a:endParaRPr lang="en-US" altLang="zh-CN"/>
+          </a:p>
+          <a:p>
+            <a:r>
+              <a:rPr lang="zh-CN" altLang="en-US"/>
+              <a:t>函数</a:t>
+            </a:r>
+            <a:r>
+              <a:rPr lang="en-US" altLang="zh-CN"/>
+              <a:t> E</a:t>
+            </a:r>
+            <a:r>
+              <a:rPr lang="zh-CN" altLang="en-US"/>
+              <a:t>：失败后释放新设备</a:t>
+            </a:r>
+            <a:endParaRPr lang="zh-CN" altLang="en-US"/>
+          </a:p>
+          <a:p>
+            <a:endParaRPr lang="zh-CN" altLang="en-US"/>
+          </a:p>
+          <a:p>
+            <a:r>
+              <a:rPr lang="zh-CN" altLang="en-US"/>
+              <a:t>类型化之后得到：</a:t>
+            </a:r>
+            <a:endParaRPr lang="zh-CN" altLang="en-US"/>
+          </a:p>
+          <a:p>
+            <a:r>
+              <a:rPr lang="en-US" altLang="zh-CN"/>
+              <a:t>MEMBER_ADD(devices, device)</a:t>
+            </a:r>
+            <a:endParaRPr lang="en-US" altLang="zh-CN"/>
+          </a:p>
+          <a:p>
+            <a:r>
+              <a:rPr lang="en-US" altLang="zh-CN"/>
+              <a:t>COUNTER_DELTA(num_devices, +1)</a:t>
+            </a:r>
+            <a:endParaRPr lang="en-US" altLang="zh-CN"/>
+          </a:p>
+          <a:p>
+            <a:r>
+              <a:rPr lang="en-US" altLang="zh-CN"/>
+              <a:t>POINTER_BIND(latest_dev, device)</a:t>
+            </a:r>
+            <a:endParaRPr lang="en-US" altLang="zh-CN"/>
+          </a:p>
+          <a:p>
+            <a:r>
+              <a:rPr lang="en-US" altLang="zh-CN"/>
+              <a:t>TRANSACTION_ATTACH(trans, device)</a:t>
+            </a:r>
+            <a:endParaRPr lang="en-US" altLang="zh-CN"/>
+          </a:p>
+          <a:p>
+            <a:r>
+              <a:rPr lang="en-US" altLang="zh-CN"/>
+              <a:t>OWNER_FREE(device)</a:t>
+            </a:r>
+            <a:endParaRPr lang="en-US" altLang="zh-CN"/>
+          </a:p>
+          <a:p>
+            <a:endParaRPr lang="zh-CN" altLang="en-US"/>
+          </a:p>
+        </p:txBody>
+      </p:sp>
+    </p:spTree>
+  </p:cSld>
+  <p:clrMapOvr>
+    <a:masterClrMapping/>
+  </p:clrMapOvr>
+</p:sld>
+</file>
+
+<file path=ppt/slides/slide22.xml><?xml version="1.0" encoding="utf-8"?>
+<p:sld xmlns:a="http://schemas.openxmlformats.org/drawingml/2006/main" xmlns:r="http://schemas.openxmlformats.org/officeDocument/2006/relationships" xmlns:p="http://schemas.openxmlformats.org/presentationml/2006/main">
+  <p:cSld>
+    <p:spTree>
+      <p:nvGrpSpPr>
+        <p:cNvPr id="1" name=""/>
+        <p:cNvGrpSpPr/>
+        <p:nvPr/>
+      </p:nvGrpSpPr>
+      <p:grpSpPr/>
+      <p:sp>
+        <p:nvSpPr>
+          <p:cNvPr id="2" name="title-11"/>
+          <p:cNvSpPr>
+            <a:spLocks noGrp="1"/>
+          </p:cNvSpPr>
+          <p:nvPr/>
+        </p:nvSpPr>
+        <p:spPr>
+          <a:xfrm>
+            <a:off x="403225" y="133350"/>
+            <a:ext cx="11159490" cy="383540"/>
+          </a:xfrm>
+          <a:prstGeom prst="rect">
+            <a:avLst/>
+          </a:prstGeom>
+          <a:noFill/>
+          <a:ln w="0">
+            <a:noFill/>
+            <a:prstDash val="solid"/>
+          </a:ln>
+        </p:spPr>
+        <p:txBody>
+          <a:bodyPr anchor="t"/>
+          <a:lstStyle/>
+          <a:p>
+            <a:pPr algn="l">
+              <a:defRPr sz="3225" b="1">
+                <a:solidFill>
+                  <a:srgbClr val="111111"/>
+                </a:solidFill>
+                <a:latin typeface="微软雅黑" panose="020B0503020204020204" pitchFamily="34" charset="-122"/>
+                <a:ea typeface="微软雅黑" panose="020B0503020204020204" pitchFamily="34" charset="-122"/>
+                <a:cs typeface="微软雅黑" panose="020B0503020204020204" pitchFamily="34" charset="-122"/>
+              </a:defRPr>
+            </a:pPr>
+            <a:r>
+              <a:rPr lang="zh-CN" sz="1800" b="0">
+                <a:solidFill>
+                  <a:srgbClr val="111111"/>
+                </a:solidFill>
+                <a:latin typeface="微软雅黑" panose="020B0503020204020204" pitchFamily="34" charset="-122"/>
+                <a:ea typeface="微软雅黑" panose="020B0503020204020204" pitchFamily="34" charset="-122"/>
+                <a:cs typeface="微软雅黑" panose="020B0503020204020204" pitchFamily="34" charset="-122"/>
+              </a:rPr>
+              <a:t>协议</a:t>
+            </a:r>
+            <a:r>
+              <a:rPr sz="1800" b="0">
+                <a:solidFill>
+                  <a:srgbClr val="111111"/>
+                </a:solidFill>
+                <a:latin typeface="微软雅黑" panose="020B0503020204020204" pitchFamily="34" charset="-122"/>
+                <a:ea typeface="微软雅黑" panose="020B0503020204020204" pitchFamily="34" charset="-122"/>
+                <a:cs typeface="微软雅黑" panose="020B0503020204020204" pitchFamily="34" charset="-122"/>
+              </a:rPr>
+              <a:t>状态</a:t>
+            </a:r>
+            <a:r>
+              <a:rPr lang="zh-CN" sz="1800" b="0">
+                <a:solidFill>
+                  <a:srgbClr val="111111"/>
+                </a:solidFill>
+                <a:latin typeface="微软雅黑" panose="020B0503020204020204" pitchFamily="34" charset="-122"/>
+                <a:ea typeface="微软雅黑" panose="020B0503020204020204" pitchFamily="34" charset="-122"/>
+                <a:cs typeface="微软雅黑" panose="020B0503020204020204" pitchFamily="34" charset="-122"/>
+              </a:rPr>
+              <a:t>检查</a:t>
+            </a:r>
+            <a:endParaRPr sz="1800" b="0">
+              <a:solidFill>
+                <a:srgbClr val="111111"/>
+              </a:solidFill>
+              <a:latin typeface="微软雅黑" panose="020B0503020204020204" pitchFamily="34" charset="-122"/>
+              <a:ea typeface="微软雅黑" panose="020B0503020204020204" pitchFamily="34" charset="-122"/>
+              <a:cs typeface="微软雅黑" panose="020B0503020204020204" pitchFamily="34" charset="-122"/>
+            </a:endParaRPr>
+          </a:p>
+        </p:txBody>
+      </p:sp>
+      <p:sp>
+        <p:nvSpPr>
+          <p:cNvPr id="5" name="文本框 4"/>
+          <p:cNvSpPr txBox="1"/>
+          <p:nvPr/>
+        </p:nvSpPr>
+        <p:spPr>
+          <a:xfrm>
+            <a:off x="599440" y="646430"/>
+            <a:ext cx="7300595" cy="417830"/>
+          </a:xfrm>
+          <a:prstGeom prst="rect">
+            <a:avLst/>
+          </a:prstGeom>
+          <a:noFill/>
+        </p:spPr>
+        <p:txBody>
+          <a:bodyPr wrap="square" rtlCol="0">
+            <a:noAutofit/>
+          </a:bodyPr>
+          <a:p>
+            <a:r>
+              <a:rPr lang="zh-CN" altLang="en-US"/>
+              <a:t>某条路径上的元数据事件对协议抽象状态造成的变化。</a:t>
+            </a:r>
+            <a:endParaRPr lang="zh-CN" altLang="en-US"/>
+          </a:p>
+        </p:txBody>
+      </p:sp>
+      <p:sp>
+        <p:nvSpPr>
+          <p:cNvPr id="6" name="文本框 5"/>
+          <p:cNvSpPr txBox="1"/>
+          <p:nvPr/>
+        </p:nvSpPr>
+        <p:spPr>
+          <a:xfrm>
+            <a:off x="810260" y="1252220"/>
+            <a:ext cx="4064000" cy="1476375"/>
+          </a:xfrm>
+          <a:prstGeom prst="rect">
+            <a:avLst/>
+          </a:prstGeom>
+          <a:noFill/>
+        </p:spPr>
+        <p:txBody>
+          <a:bodyPr wrap="square" rtlCol="0">
+            <a:spAutoFit/>
+          </a:bodyPr>
+          <a:p>
+            <a:r>
+              <a:rPr lang="zh-CN" altLang="en-US"/>
+              <a:t>变化：</a:t>
+            </a:r>
+            <a:br>
+              <a:rPr lang="zh-CN" altLang="en-US"/>
+            </a:br>
+            <a:r>
+              <a:rPr lang="en-US" altLang="zh-CN"/>
+              <a:t>1.</a:t>
+            </a:r>
+            <a:r>
+              <a:rPr lang="zh-CN" altLang="en-US"/>
+              <a:t>计数变化</a:t>
+            </a:r>
+            <a:br>
+              <a:rPr lang="zh-CN" altLang="en-US"/>
+            </a:br>
+            <a:r>
+              <a:rPr lang="en-US" altLang="zh-CN"/>
+              <a:t>2.</a:t>
+            </a:r>
+            <a:r>
+              <a:rPr lang="zh-CN" altLang="en-US"/>
+              <a:t>成员集合变化</a:t>
+            </a:r>
+            <a:br>
+              <a:rPr lang="zh-CN" altLang="en-US"/>
+            </a:br>
+            <a:r>
+              <a:rPr lang="en-US" altLang="zh-CN"/>
+              <a:t>3.bit/flag </a:t>
+            </a:r>
+            <a:r>
+              <a:rPr lang="zh-CN" altLang="en-US"/>
+              <a:t>变化</a:t>
+            </a:r>
+            <a:endParaRPr lang="zh-CN" altLang="en-US"/>
+          </a:p>
+          <a:p>
+            <a:r>
+              <a:rPr lang="en-US" altLang="zh-CN"/>
+              <a:t>4.</a:t>
+            </a:r>
+            <a:r>
+              <a:rPr lang="zh-CN" altLang="en-US"/>
+              <a:t>生命</a:t>
+            </a:r>
+            <a:r>
+              <a:rPr lang="zh-CN" altLang="en-US"/>
+              <a:t>周期变化</a:t>
+            </a:r>
+            <a:endParaRPr lang="zh-CN" altLang="en-US"/>
+          </a:p>
+        </p:txBody>
+      </p:sp>
+      <p:sp>
+        <p:nvSpPr>
+          <p:cNvPr id="19" name="文本框 18"/>
+          <p:cNvSpPr txBox="1"/>
+          <p:nvPr/>
+        </p:nvSpPr>
+        <p:spPr>
+          <a:xfrm>
+            <a:off x="3554095" y="1336675"/>
+            <a:ext cx="9225280" cy="1307465"/>
+          </a:xfrm>
+          <a:prstGeom prst="rect">
+            <a:avLst/>
+          </a:prstGeom>
+          <a:noFill/>
+        </p:spPr>
+        <p:txBody>
+          <a:bodyPr wrap="square" rtlCol="0">
+            <a:noAutofit/>
+          </a:bodyPr>
+          <a:p>
+            <a:r>
+              <a:rPr lang="en-US" altLang="zh-CN"/>
+              <a:t>S0</a:t>
+            </a:r>
+            <a:r>
+              <a:rPr lang="zh-CN" altLang="en-US"/>
+              <a:t>：操作开始前的合法状态，例如成员数与计数一致，</a:t>
+            </a:r>
+            <a:r>
+              <a:rPr lang="en-US" altLang="zh-CN"/>
+              <a:t>active </a:t>
+            </a:r>
+            <a:r>
+              <a:rPr lang="zh-CN" altLang="en-US"/>
+              <a:t>指向</a:t>
+            </a:r>
+            <a:r>
+              <a:rPr lang="en-US" altLang="zh-CN"/>
+              <a:t> seed</a:t>
+            </a:r>
+            <a:r>
+              <a:rPr lang="zh-CN" altLang="en-US"/>
+              <a:t>。</a:t>
+            </a:r>
+            <a:endParaRPr lang="zh-CN" altLang="en-US"/>
+          </a:p>
+          <a:p>
+            <a:r>
+              <a:rPr lang="en-US" altLang="zh-CN"/>
+              <a:t>Δ</a:t>
+            </a:r>
+            <a:r>
+              <a:rPr lang="zh-CN" altLang="en-US"/>
+              <a:t>：当前路径造成的变化，例如加入成员、增加计数、切换指针、释放对象。</a:t>
+            </a:r>
+            <a:endParaRPr lang="zh-CN" altLang="en-US"/>
+          </a:p>
+          <a:p>
+            <a:r>
+              <a:rPr lang="zh-CN" altLang="en-US"/>
+              <a:t>义务：如果操作失败，就必须恢复相关关系，或者把恢复责任合法交给</a:t>
+            </a:r>
+            <a:r>
+              <a:rPr lang="en-US" altLang="zh-CN"/>
+              <a:t> transaction/recovery</a:t>
+            </a:r>
+            <a:r>
+              <a:rPr lang="zh-CN" altLang="en-US"/>
+              <a:t>。</a:t>
+            </a:r>
+            <a:endParaRPr lang="zh-CN" altLang="en-US"/>
+          </a:p>
+        </p:txBody>
+      </p:sp>
+      <p:sp>
+        <p:nvSpPr>
+          <p:cNvPr id="24" name="文本框 23"/>
+          <p:cNvSpPr txBox="1"/>
+          <p:nvPr/>
+        </p:nvSpPr>
+        <p:spPr>
+          <a:xfrm>
+            <a:off x="810260" y="3228975"/>
+            <a:ext cx="10010775" cy="2223770"/>
+          </a:xfrm>
+          <a:prstGeom prst="rect">
+            <a:avLst/>
+          </a:prstGeom>
+          <a:noFill/>
+        </p:spPr>
+        <p:txBody>
+          <a:bodyPr wrap="square" rtlCol="0">
+            <a:noAutofit/>
+          </a:bodyPr>
+          <a:p>
+            <a:r>
+              <a:rPr lang="zh-CN" altLang="en-US"/>
+              <a:t>主要有五类关系</a:t>
+            </a:r>
+            <a:endParaRPr lang="zh-CN" altLang="en-US"/>
+          </a:p>
+          <a:p>
+            <a:r>
+              <a:rPr lang="en-US" altLang="zh-CN"/>
+              <a:t>1. </a:t>
+            </a:r>
+            <a:r>
+              <a:rPr lang="zh-CN" altLang="en-US"/>
+              <a:t>成员与计数关系</a:t>
+            </a:r>
+            <a:endParaRPr lang="zh-CN" altLang="en-US"/>
+          </a:p>
+          <a:p>
+            <a:r>
+              <a:rPr lang="en-US" altLang="zh-CN"/>
+              <a:t>2. </a:t>
+            </a:r>
+            <a:r>
+              <a:rPr lang="zh-CN" altLang="en-US"/>
+              <a:t>指针与目标对象关系</a:t>
+            </a:r>
+            <a:endParaRPr lang="zh-CN" altLang="en-US"/>
+          </a:p>
+          <a:p>
+            <a:r>
+              <a:rPr lang="en-US" altLang="zh-CN"/>
+              <a:t>3. </a:t>
+            </a:r>
+            <a:r>
+              <a:rPr lang="zh-CN" altLang="en-US"/>
+              <a:t>对象生命周期与外部引用关系</a:t>
+            </a:r>
+            <a:endParaRPr lang="zh-CN" altLang="en-US"/>
+          </a:p>
+          <a:p>
+            <a:r>
+              <a:rPr lang="en-US" altLang="zh-CN"/>
+              <a:t>4. Transaction/recovery </a:t>
+            </a:r>
+            <a:r>
+              <a:rPr lang="zh-CN" altLang="en-US"/>
+              <a:t>与责任覆盖关系</a:t>
+            </a:r>
+            <a:endParaRPr lang="zh-CN" altLang="en-US"/>
+          </a:p>
+          <a:p>
+            <a:r>
+              <a:rPr lang="en-US" altLang="zh-CN"/>
+              <a:t>5. </a:t>
+            </a:r>
+            <a:r>
+              <a:rPr lang="zh-CN" altLang="en-US"/>
+              <a:t>协议阶段与返回结果关系</a:t>
+            </a:r>
+            <a:endParaRPr lang="zh-CN" altLang="en-US"/>
+          </a:p>
+          <a:p>
+            <a:endParaRPr lang="en-US" altLang="zh-CN"/>
+          </a:p>
+        </p:txBody>
+      </p:sp>
+    </p:spTree>
+  </p:cSld>
+  <p:clrMapOvr>
+    <a:masterClrMapping/>
+  </p:clrMapOvr>
+</p:sld>
+</file>
+
+<file path=ppt/slides/slide23.xml><?xml version="1.0" encoding="utf-8"?>
+<p:sld xmlns:a="http://schemas.openxmlformats.org/drawingml/2006/main" xmlns:r="http://schemas.openxmlformats.org/officeDocument/2006/relationships" xmlns:p="http://schemas.openxmlformats.org/presentationml/2006/main">
+  <p:cSld>
+    <p:spTree>
+      <p:nvGrpSpPr>
+        <p:cNvPr id="1" name=""/>
+        <p:cNvGrpSpPr/>
+        <p:nvPr/>
+      </p:nvGrpSpPr>
+      <p:grpSpPr/>
+      <p:sp>
+        <p:nvSpPr>
+          <p:cNvPr id="2" name="title-12"/>
+          <p:cNvSpPr>
+            <a:spLocks noGrp="1"/>
+          </p:cNvSpPr>
+          <p:nvPr/>
+        </p:nvSpPr>
+        <p:spPr>
+          <a:xfrm>
+            <a:off x="269875" y="95250"/>
+            <a:ext cx="11226800" cy="426085"/>
+          </a:xfrm>
+          <a:prstGeom prst="rect">
+            <a:avLst/>
+          </a:prstGeom>
+          <a:noFill/>
+          <a:ln w="0">
+            <a:noFill/>
+            <a:prstDash val="solid"/>
+          </a:ln>
+        </p:spPr>
+        <p:txBody>
+          <a:bodyPr anchor="t"/>
+          <a:lstStyle/>
+          <a:p>
+            <a:pPr algn="l">
+              <a:defRPr sz="3225" b="1">
+                <a:solidFill>
+                  <a:srgbClr val="111111"/>
+                </a:solidFill>
+                <a:latin typeface="微软雅黑" panose="020B0503020204020204" pitchFamily="34" charset="-122"/>
+                <a:ea typeface="微软雅黑" panose="020B0503020204020204" pitchFamily="34" charset="-122"/>
+                <a:cs typeface="微软雅黑" panose="020B0503020204020204" pitchFamily="34" charset="-122"/>
+              </a:defRPr>
+            </a:pPr>
+            <a:r>
+              <a:rPr lang="zh-CN" altLang="en-US" sz="1800" b="0">
+                <a:solidFill>
+                  <a:srgbClr val="111111"/>
+                </a:solidFill>
+                <a:latin typeface="微软雅黑" panose="020B0503020204020204" pitchFamily="34" charset="-122"/>
+                <a:ea typeface="微软雅黑" panose="020B0503020204020204" pitchFamily="34" charset="-122"/>
+                <a:cs typeface="微软雅黑" panose="020B0503020204020204" pitchFamily="34" charset="-122"/>
+              </a:rPr>
+              <a:t>责任传播</a:t>
+            </a:r>
+            <a:endParaRPr lang="zh-CN" altLang="en-US" sz="1800" b="0">
+              <a:solidFill>
+                <a:srgbClr val="111111"/>
+              </a:solidFill>
+              <a:latin typeface="微软雅黑" panose="020B0503020204020204" pitchFamily="34" charset="-122"/>
+              <a:ea typeface="微软雅黑" panose="020B0503020204020204" pitchFamily="34" charset="-122"/>
+              <a:cs typeface="微软雅黑" panose="020B0503020204020204" pitchFamily="34" charset="-122"/>
+            </a:endParaRPr>
+          </a:p>
+        </p:txBody>
+      </p:sp>
+      <p:cxnSp>
+        <p:nvCxnSpPr>
+          <p:cNvPr id="26" name="interproc-arrow-1"/>
+          <p:cNvCxnSpPr/>
+          <p:nvPr>
+            <p:custDataLst>
+              <p:tags r:id="rId1"/>
+            </p:custDataLst>
+          </p:nvPr>
+        </p:nvCxnSpPr>
+        <p:spPr>
+          <a:xfrm>
+            <a:off x="2835120" y="2017400"/>
+            <a:ext cx="438127" cy="95"/>
+          </a:xfrm>
+          <a:prstGeom prst="straightConnector1">
+            <a:avLst/>
+          </a:prstGeom>
+          <a:ln w="28575">
+            <a:solidFill>
+              <a:schemeClr val="tx1"/>
+            </a:solidFill>
+            <a:prstDash val="solid"/>
+          </a:ln>
+        </p:spPr>
+      </p:cxnSp>
+      <p:cxnSp>
+        <p:nvCxnSpPr>
+          <p:cNvPr id="27" name="interproc-arrow-2"/>
+          <p:cNvCxnSpPr/>
+          <p:nvPr>
+            <p:custDataLst>
+              <p:tags r:id="rId2"/>
+            </p:custDataLst>
+          </p:nvPr>
+        </p:nvCxnSpPr>
+        <p:spPr>
+          <a:xfrm>
+            <a:off x="5692471" y="2017400"/>
+            <a:ext cx="438127" cy="95"/>
+          </a:xfrm>
+          <a:prstGeom prst="straightConnector1">
+            <a:avLst/>
+          </a:prstGeom>
+          <a:ln w="28575">
+            <a:solidFill>
+              <a:schemeClr val="tx1"/>
+            </a:solidFill>
+            <a:prstDash val="solid"/>
+          </a:ln>
+        </p:spPr>
+      </p:cxnSp>
+      <p:sp>
+        <p:nvSpPr>
+          <p:cNvPr id="8" name="interproc-0-panel"/>
+          <p:cNvSpPr>
+            <a:spLocks noGrp="1"/>
+          </p:cNvSpPr>
+          <p:nvPr>
+            <p:custDataLst>
+              <p:tags r:id="rId3"/>
+            </p:custDataLst>
+          </p:nvPr>
+        </p:nvSpPr>
+        <p:spPr>
+          <a:xfrm>
+            <a:off x="263504" y="760165"/>
+            <a:ext cx="2571616" cy="2381126"/>
+          </a:xfrm>
+          <a:prstGeom prst="rect">
+            <a:avLst/>
+          </a:prstGeom>
+          <a:solidFill>
+            <a:srgbClr val="F6F7F8"/>
+          </a:solidFill>
+          <a:ln w="0">
+            <a:noFill/>
+            <a:prstDash val="solid"/>
+          </a:ln>
+        </p:spPr>
+      </p:sp>
+      <p:sp>
+        <p:nvSpPr>
+          <p:cNvPr id="9" name="interproc-0-title"/>
+          <p:cNvSpPr>
+            <a:spLocks noGrp="1"/>
+          </p:cNvSpPr>
+          <p:nvPr>
+            <p:custDataLst>
+              <p:tags r:id="rId4"/>
+            </p:custDataLst>
+          </p:nvPr>
+        </p:nvSpPr>
+        <p:spPr>
+          <a:xfrm>
+            <a:off x="492092" y="969705"/>
+            <a:ext cx="2114440" cy="361931"/>
+          </a:xfrm>
+          <a:prstGeom prst="rect">
+            <a:avLst/>
+          </a:prstGeom>
+          <a:noFill/>
+          <a:ln w="0">
+            <a:noFill/>
+            <a:prstDash val="solid"/>
+          </a:ln>
+        </p:spPr>
+        <p:txBody>
+          <a:bodyPr anchor="t"/>
+          <a:lstStyle/>
+          <a:p>
+            <a:pPr algn="l">
+              <a:defRPr sz="1875" b="1">
+                <a:solidFill>
+                  <a:srgbClr val="111111"/>
+                </a:solidFill>
+                <a:latin typeface="微软雅黑" panose="020B0503020204020204" pitchFamily="34" charset="-122"/>
+                <a:ea typeface="微软雅黑" panose="020B0503020204020204" pitchFamily="34" charset="-122"/>
+                <a:cs typeface="微软雅黑" panose="020B0503020204020204" pitchFamily="34" charset="-122"/>
+              </a:defRPr>
+            </a:pPr>
+            <a:r>
+              <a:rPr b="1">
+                <a:solidFill>
+                  <a:srgbClr val="111111"/>
+                </a:solidFill>
+                <a:latin typeface="微软雅黑" panose="020B0503020204020204" pitchFamily="34" charset="-122"/>
+                <a:ea typeface="微软雅黑" panose="020B0503020204020204" pitchFamily="34" charset="-122"/>
+                <a:cs typeface="微软雅黑" panose="020B0503020204020204" pitchFamily="34" charset="-122"/>
+              </a:rPr>
+              <a:t>失败分区</a:t>
+            </a:r>
+            <a:endParaRPr b="1">
+              <a:solidFill>
+                <a:srgbClr val="111111"/>
+              </a:solidFill>
+              <a:latin typeface="微软雅黑" panose="020B0503020204020204" pitchFamily="34" charset="-122"/>
+              <a:ea typeface="微软雅黑" panose="020B0503020204020204" pitchFamily="34" charset="-122"/>
+              <a:cs typeface="微软雅黑" panose="020B0503020204020204" pitchFamily="34" charset="-122"/>
+            </a:endParaRPr>
+          </a:p>
+        </p:txBody>
+      </p:sp>
+      <p:sp>
+        <p:nvSpPr>
+          <p:cNvPr id="10" name="interproc-0-body"/>
+          <p:cNvSpPr>
+            <a:spLocks noGrp="1"/>
+          </p:cNvSpPr>
+          <p:nvPr>
+            <p:custDataLst>
+              <p:tags r:id="rId5"/>
+            </p:custDataLst>
+          </p:nvPr>
+        </p:nvSpPr>
+        <p:spPr>
+          <a:xfrm>
+            <a:off x="492092" y="1445930"/>
+            <a:ext cx="2114440" cy="1504872"/>
+          </a:xfrm>
+          <a:prstGeom prst="rect">
+            <a:avLst/>
+          </a:prstGeom>
+          <a:noFill/>
+          <a:ln w="0">
+            <a:noFill/>
+            <a:prstDash val="solid"/>
+          </a:ln>
+        </p:spPr>
+        <p:txBody>
+          <a:bodyPr anchor="t"/>
+          <a:lstStyle/>
+          <a:p>
+            <a:pPr algn="l">
+              <a:defRPr sz="1500" b="0">
+                <a:solidFill>
+                  <a:srgbClr val="111111"/>
+                </a:solidFill>
+                <a:latin typeface="微软雅黑" panose="020B0503020204020204" pitchFamily="34" charset="-122"/>
+                <a:ea typeface="微软雅黑" panose="020B0503020204020204" pitchFamily="34" charset="-122"/>
+                <a:cs typeface="微软雅黑" panose="020B0503020204020204" pitchFamily="34" charset="-122"/>
+              </a:defRPr>
+            </a:pPr>
+            <a:r>
+              <a:rPr lang="zh-CN" altLang="en-US" b="0">
+                <a:solidFill>
+                  <a:srgbClr val="111111"/>
+                </a:solidFill>
+                <a:latin typeface="微软雅黑" panose="020B0503020204020204" pitchFamily="34" charset="-122"/>
+                <a:ea typeface="微软雅黑" panose="020B0503020204020204" pitchFamily="34" charset="-122"/>
+                <a:cs typeface="微软雅黑" panose="020B0503020204020204" pitchFamily="34" charset="-122"/>
+              </a:rPr>
+              <a:t>首先确定</a:t>
+            </a:r>
+            <a:r>
+              <a:rPr lang="en-US" altLang="zh-CN" b="0">
+                <a:solidFill>
+                  <a:srgbClr val="111111"/>
+                </a:solidFill>
+                <a:latin typeface="微软雅黑" panose="020B0503020204020204" pitchFamily="34" charset="-122"/>
+                <a:ea typeface="微软雅黑" panose="020B0503020204020204" pitchFamily="34" charset="-122"/>
+                <a:cs typeface="微软雅黑" panose="020B0503020204020204" pitchFamily="34" charset="-122"/>
+              </a:rPr>
+              <a:t> callee </a:t>
+            </a:r>
+            <a:r>
+              <a:rPr lang="zh-CN" altLang="en-US" b="0">
+                <a:solidFill>
+                  <a:srgbClr val="111111"/>
+                </a:solidFill>
+                <a:latin typeface="微软雅黑" panose="020B0503020204020204" pitchFamily="34" charset="-122"/>
+                <a:ea typeface="微软雅黑" panose="020B0503020204020204" pitchFamily="34" charset="-122"/>
+                <a:cs typeface="微软雅黑" panose="020B0503020204020204" pitchFamily="34" charset="-122"/>
+              </a:rPr>
+              <a:t>究竟走了哪个错误出口。</a:t>
+            </a:r>
+            <a:endParaRPr lang="zh-CN" altLang="en-US" b="0">
+              <a:solidFill>
+                <a:srgbClr val="111111"/>
+              </a:solidFill>
+              <a:latin typeface="微软雅黑" panose="020B0503020204020204" pitchFamily="34" charset="-122"/>
+              <a:ea typeface="微软雅黑" panose="020B0503020204020204" pitchFamily="34" charset="-122"/>
+              <a:cs typeface="微软雅黑" panose="020B0503020204020204" pitchFamily="34" charset="-122"/>
+            </a:endParaRPr>
+          </a:p>
+          <a:p>
+            <a:pPr algn="l">
+              <a:defRPr sz="1500" b="0">
+                <a:solidFill>
+                  <a:srgbClr val="111111"/>
+                </a:solidFill>
+                <a:latin typeface="微软雅黑" panose="020B0503020204020204" pitchFamily="34" charset="-122"/>
+                <a:ea typeface="微软雅黑" panose="020B0503020204020204" pitchFamily="34" charset="-122"/>
+                <a:cs typeface="微软雅黑" panose="020B0503020204020204" pitchFamily="34" charset="-122"/>
+              </a:defRPr>
+            </a:pPr>
+            <a:r>
+              <a:rPr lang="zh-CN" altLang="en-US" b="0">
+                <a:solidFill>
+                  <a:srgbClr val="111111"/>
+                </a:solidFill>
+                <a:latin typeface="微软雅黑" panose="020B0503020204020204" pitchFamily="34" charset="-122"/>
+                <a:ea typeface="微软雅黑" panose="020B0503020204020204" pitchFamily="34" charset="-122"/>
+                <a:cs typeface="微软雅黑" panose="020B0503020204020204" pitchFamily="34" charset="-122"/>
+              </a:rPr>
+              <a:t>一个函数可能有多个错误返回不同出口的元数据处理不一样。</a:t>
+            </a:r>
+            <a:endParaRPr lang="zh-CN" altLang="en-US" b="0">
+              <a:solidFill>
+                <a:srgbClr val="111111"/>
+              </a:solidFill>
+              <a:latin typeface="微软雅黑" panose="020B0503020204020204" pitchFamily="34" charset="-122"/>
+              <a:ea typeface="微软雅黑" panose="020B0503020204020204" pitchFamily="34" charset="-122"/>
+              <a:cs typeface="微软雅黑" panose="020B0503020204020204" pitchFamily="34" charset="-122"/>
+            </a:endParaRPr>
+          </a:p>
+        </p:txBody>
+      </p:sp>
+      <p:sp>
+        <p:nvSpPr>
+          <p:cNvPr id="11" name="interproc-1-panel"/>
+          <p:cNvSpPr>
+            <a:spLocks noGrp="1"/>
+          </p:cNvSpPr>
+          <p:nvPr>
+            <p:custDataLst>
+              <p:tags r:id="rId6"/>
+            </p:custDataLst>
+          </p:nvPr>
+        </p:nvSpPr>
+        <p:spPr>
+          <a:xfrm>
+            <a:off x="3121025" y="760095"/>
+            <a:ext cx="2555875" cy="4020820"/>
+          </a:xfrm>
+          <a:prstGeom prst="rect">
+            <a:avLst/>
+          </a:prstGeom>
+          <a:solidFill>
+            <a:srgbClr val="F6F7F8"/>
+          </a:solidFill>
+          <a:ln w="0">
+            <a:noFill/>
+            <a:prstDash val="solid"/>
+          </a:ln>
+        </p:spPr>
+      </p:sp>
+      <p:sp>
+        <p:nvSpPr>
+          <p:cNvPr id="12" name="interproc-1-title"/>
+          <p:cNvSpPr>
+            <a:spLocks noGrp="1"/>
+          </p:cNvSpPr>
+          <p:nvPr>
+            <p:custDataLst>
+              <p:tags r:id="rId7"/>
+            </p:custDataLst>
+          </p:nvPr>
+        </p:nvSpPr>
+        <p:spPr>
+          <a:xfrm>
+            <a:off x="3349443" y="969705"/>
+            <a:ext cx="2114440" cy="361931"/>
+          </a:xfrm>
+          <a:prstGeom prst="rect">
+            <a:avLst/>
+          </a:prstGeom>
+          <a:noFill/>
+          <a:ln w="0">
+            <a:noFill/>
+            <a:prstDash val="solid"/>
+          </a:ln>
+        </p:spPr>
+        <p:txBody>
+          <a:bodyPr anchor="t"/>
+          <a:lstStyle/>
+          <a:p>
+            <a:pPr algn="l">
+              <a:defRPr sz="1875" b="1">
+                <a:solidFill>
+                  <a:srgbClr val="111111"/>
+                </a:solidFill>
+                <a:latin typeface="微软雅黑" panose="020B0503020204020204" pitchFamily="34" charset="-122"/>
+                <a:ea typeface="微软雅黑" panose="020B0503020204020204" pitchFamily="34" charset="-122"/>
+                <a:cs typeface="微软雅黑" panose="020B0503020204020204" pitchFamily="34" charset="-122"/>
+              </a:defRPr>
+            </a:pPr>
+            <a:r>
+              <a:rPr b="1">
+                <a:solidFill>
+                  <a:srgbClr val="111111"/>
+                </a:solidFill>
+                <a:latin typeface="微软雅黑" panose="020B0503020204020204" pitchFamily="34" charset="-122"/>
+                <a:ea typeface="微软雅黑" panose="020B0503020204020204" pitchFamily="34" charset="-122"/>
+                <a:cs typeface="微软雅黑" panose="020B0503020204020204" pitchFamily="34" charset="-122"/>
+              </a:rPr>
+              <a:t>函数摘要</a:t>
+            </a:r>
+            <a:endParaRPr b="1">
+              <a:solidFill>
+                <a:srgbClr val="111111"/>
+              </a:solidFill>
+              <a:latin typeface="微软雅黑" panose="020B0503020204020204" pitchFamily="34" charset="-122"/>
+              <a:ea typeface="微软雅黑" panose="020B0503020204020204" pitchFamily="34" charset="-122"/>
+              <a:cs typeface="微软雅黑" panose="020B0503020204020204" pitchFamily="34" charset="-122"/>
+            </a:endParaRPr>
+          </a:p>
+        </p:txBody>
+      </p:sp>
+      <p:sp>
+        <p:nvSpPr>
+          <p:cNvPr id="13" name="interproc-1-body"/>
+          <p:cNvSpPr>
+            <a:spLocks noGrp="1"/>
+          </p:cNvSpPr>
+          <p:nvPr>
+            <p:custDataLst>
+              <p:tags r:id="rId8"/>
+            </p:custDataLst>
+          </p:nvPr>
+        </p:nvSpPr>
+        <p:spPr>
+          <a:xfrm>
+            <a:off x="3349443" y="1445930"/>
+            <a:ext cx="2114440" cy="1504872"/>
+          </a:xfrm>
+          <a:prstGeom prst="rect">
+            <a:avLst/>
+          </a:prstGeom>
+          <a:noFill/>
+          <a:ln w="0">
+            <a:noFill/>
+            <a:prstDash val="solid"/>
+          </a:ln>
+        </p:spPr>
+        <p:txBody>
+          <a:bodyPr anchor="t"/>
+          <a:lstStyle/>
+          <a:p>
+            <a:pPr algn="l">
+              <a:defRPr sz="1500" b="0">
+                <a:solidFill>
+                  <a:srgbClr val="111111"/>
+                </a:solidFill>
+                <a:latin typeface="微软雅黑" panose="020B0503020204020204" pitchFamily="34" charset="-122"/>
+                <a:ea typeface="微软雅黑" panose="020B0503020204020204" pitchFamily="34" charset="-122"/>
+                <a:cs typeface="微软雅黑" panose="020B0503020204020204" pitchFamily="34" charset="-122"/>
+              </a:defRPr>
+            </a:pPr>
+            <a:r>
+              <a:rPr lang="zh-CN" altLang="en-US" b="0">
+                <a:solidFill>
+                  <a:srgbClr val="111111"/>
+                </a:solidFill>
+                <a:latin typeface="微软雅黑" panose="020B0503020204020204" pitchFamily="34" charset="-122"/>
+                <a:ea typeface="微软雅黑" panose="020B0503020204020204" pitchFamily="34" charset="-122"/>
+                <a:cs typeface="微软雅黑" panose="020B0503020204020204" pitchFamily="34" charset="-122"/>
+              </a:rPr>
+              <a:t>确定错误出口后，</a:t>
+            </a:r>
+            <a:r>
+              <a:rPr lang="en-US" altLang="zh-CN" b="0">
+                <a:solidFill>
+                  <a:srgbClr val="111111"/>
+                </a:solidFill>
+                <a:latin typeface="微软雅黑" panose="020B0503020204020204" pitchFamily="34" charset="-122"/>
+                <a:ea typeface="微软雅黑" panose="020B0503020204020204" pitchFamily="34" charset="-122"/>
+                <a:cs typeface="微软雅黑" panose="020B0503020204020204" pitchFamily="34" charset="-122"/>
+              </a:rPr>
+              <a:t>callee </a:t>
+            </a:r>
+            <a:r>
+              <a:rPr lang="zh-CN" altLang="en-US" b="0">
+                <a:solidFill>
+                  <a:srgbClr val="111111"/>
+                </a:solidFill>
+                <a:latin typeface="微软雅黑" panose="020B0503020204020204" pitchFamily="34" charset="-122"/>
+                <a:ea typeface="微软雅黑" panose="020B0503020204020204" pitchFamily="34" charset="-122"/>
+                <a:cs typeface="微软雅黑" panose="020B0503020204020204" pitchFamily="34" charset="-122"/>
+              </a:rPr>
+              <a:t>导出一个协议摘要：</a:t>
+            </a:r>
+            <a:endParaRPr lang="zh-CN" altLang="en-US" b="0">
+              <a:solidFill>
+                <a:srgbClr val="111111"/>
+              </a:solidFill>
+              <a:latin typeface="微软雅黑" panose="020B0503020204020204" pitchFamily="34" charset="-122"/>
+              <a:ea typeface="微软雅黑" panose="020B0503020204020204" pitchFamily="34" charset="-122"/>
+              <a:cs typeface="微软雅黑" panose="020B0503020204020204" pitchFamily="34" charset="-122"/>
+            </a:endParaRPr>
+          </a:p>
+          <a:p>
+            <a:pPr algn="l">
+              <a:defRPr sz="1500" b="0">
+                <a:solidFill>
+                  <a:srgbClr val="111111"/>
+                </a:solidFill>
+                <a:latin typeface="微软雅黑" panose="020B0503020204020204" pitchFamily="34" charset="-122"/>
+                <a:ea typeface="微软雅黑" panose="020B0503020204020204" pitchFamily="34" charset="-122"/>
+                <a:cs typeface="微软雅黑" panose="020B0503020204020204" pitchFamily="34" charset="-122"/>
+              </a:defRPr>
+            </a:pPr>
+            <a:r>
+              <a:rPr lang="en-US" altLang="zh-CN" b="0">
+                <a:solidFill>
+                  <a:srgbClr val="111111"/>
+                </a:solidFill>
+                <a:latin typeface="微软雅黑" panose="020B0503020204020204" pitchFamily="34" charset="-122"/>
+                <a:ea typeface="微软雅黑" panose="020B0503020204020204" pitchFamily="34" charset="-122"/>
+                <a:cs typeface="微软雅黑" panose="020B0503020204020204" pitchFamily="34" charset="-122"/>
+              </a:rPr>
+              <a:t>FactDelta:</a:t>
+            </a:r>
+            <a:endParaRPr lang="en-US" altLang="zh-CN" b="0">
+              <a:solidFill>
+                <a:srgbClr val="111111"/>
+              </a:solidFill>
+              <a:latin typeface="微软雅黑" panose="020B0503020204020204" pitchFamily="34" charset="-122"/>
+              <a:ea typeface="微软雅黑" panose="020B0503020204020204" pitchFamily="34" charset="-122"/>
+              <a:cs typeface="微软雅黑" panose="020B0503020204020204" pitchFamily="34" charset="-122"/>
+            </a:endParaRPr>
+          </a:p>
+          <a:p>
+            <a:pPr algn="l">
+              <a:defRPr sz="1500" b="0">
+                <a:solidFill>
+                  <a:srgbClr val="111111"/>
+                </a:solidFill>
+                <a:latin typeface="微软雅黑" panose="020B0503020204020204" pitchFamily="34" charset="-122"/>
+                <a:ea typeface="微软雅黑" panose="020B0503020204020204" pitchFamily="34" charset="-122"/>
+                <a:cs typeface="微软雅黑" panose="020B0503020204020204" pitchFamily="34" charset="-122"/>
+              </a:defRPr>
+            </a:pPr>
+            <a:r>
+              <a:rPr lang="en-US" altLang="zh-CN" b="0">
+                <a:solidFill>
+                  <a:srgbClr val="111111"/>
+                </a:solidFill>
+                <a:latin typeface="微软雅黑" panose="020B0503020204020204" pitchFamily="34" charset="-122"/>
+                <a:ea typeface="微软雅黑" panose="020B0503020204020204" pitchFamily="34" charset="-122"/>
+                <a:cs typeface="微软雅黑" panose="020B0503020204020204" pitchFamily="34" charset="-122"/>
+              </a:rPr>
+              <a:t>  </a:t>
+            </a:r>
+            <a:r>
+              <a:rPr lang="zh-CN" altLang="en-US" b="0">
+                <a:solidFill>
+                  <a:srgbClr val="111111"/>
+                </a:solidFill>
+                <a:latin typeface="微软雅黑" panose="020B0503020204020204" pitchFamily="34" charset="-122"/>
+                <a:ea typeface="微软雅黑" panose="020B0503020204020204" pitchFamily="34" charset="-122"/>
+                <a:cs typeface="微软雅黑" panose="020B0503020204020204" pitchFamily="34" charset="-122"/>
+              </a:rPr>
+              <a:t>修改了哪些协议事实</a:t>
+            </a:r>
+            <a:endParaRPr lang="en-US" altLang="zh-CN" b="0">
+              <a:solidFill>
+                <a:srgbClr val="111111"/>
+              </a:solidFill>
+              <a:latin typeface="微软雅黑" panose="020B0503020204020204" pitchFamily="34" charset="-122"/>
+              <a:ea typeface="微软雅黑" panose="020B0503020204020204" pitchFamily="34" charset="-122"/>
+              <a:cs typeface="微软雅黑" panose="020B0503020204020204" pitchFamily="34" charset="-122"/>
+            </a:endParaRPr>
+          </a:p>
+          <a:p>
+            <a:pPr algn="l">
+              <a:defRPr sz="1500" b="0">
+                <a:solidFill>
+                  <a:srgbClr val="111111"/>
+                </a:solidFill>
+                <a:latin typeface="微软雅黑" panose="020B0503020204020204" pitchFamily="34" charset="-122"/>
+                <a:ea typeface="微软雅黑" panose="020B0503020204020204" pitchFamily="34" charset="-122"/>
+                <a:cs typeface="微软雅黑" panose="020B0503020204020204" pitchFamily="34" charset="-122"/>
+              </a:defRPr>
+            </a:pPr>
+            <a:r>
+              <a:rPr lang="en-US" altLang="zh-CN" b="0">
+                <a:solidFill>
+                  <a:srgbClr val="111111"/>
+                </a:solidFill>
+                <a:latin typeface="微软雅黑" panose="020B0503020204020204" pitchFamily="34" charset="-122"/>
+                <a:ea typeface="微软雅黑" panose="020B0503020204020204" pitchFamily="34" charset="-122"/>
+                <a:cs typeface="微软雅黑" panose="020B0503020204020204" pitchFamily="34" charset="-122"/>
+              </a:rPr>
+              <a:t>Phase:</a:t>
+            </a:r>
+            <a:endParaRPr lang="en-US" altLang="zh-CN" b="0">
+              <a:solidFill>
+                <a:srgbClr val="111111"/>
+              </a:solidFill>
+              <a:latin typeface="微软雅黑" panose="020B0503020204020204" pitchFamily="34" charset="-122"/>
+              <a:ea typeface="微软雅黑" panose="020B0503020204020204" pitchFamily="34" charset="-122"/>
+              <a:cs typeface="微软雅黑" panose="020B0503020204020204" pitchFamily="34" charset="-122"/>
+            </a:endParaRPr>
+          </a:p>
+          <a:p>
+            <a:pPr algn="l">
+              <a:defRPr sz="1500" b="0">
+                <a:solidFill>
+                  <a:srgbClr val="111111"/>
+                </a:solidFill>
+                <a:latin typeface="微软雅黑" panose="020B0503020204020204" pitchFamily="34" charset="-122"/>
+                <a:ea typeface="微软雅黑" panose="020B0503020204020204" pitchFamily="34" charset="-122"/>
+                <a:cs typeface="微软雅黑" panose="020B0503020204020204" pitchFamily="34" charset="-122"/>
+              </a:defRPr>
+            </a:pPr>
+            <a:r>
+              <a:rPr lang="en-US" altLang="zh-CN" b="0">
+                <a:solidFill>
+                  <a:srgbClr val="111111"/>
+                </a:solidFill>
+                <a:latin typeface="微软雅黑" panose="020B0503020204020204" pitchFamily="34" charset="-122"/>
+                <a:ea typeface="微软雅黑" panose="020B0503020204020204" pitchFamily="34" charset="-122"/>
+                <a:cs typeface="微软雅黑" panose="020B0503020204020204" pitchFamily="34" charset="-122"/>
+              </a:rPr>
+              <a:t>  </a:t>
+            </a:r>
+            <a:r>
+              <a:rPr lang="zh-CN" altLang="en-US" b="0">
+                <a:solidFill>
+                  <a:srgbClr val="111111"/>
+                </a:solidFill>
+                <a:latin typeface="微软雅黑" panose="020B0503020204020204" pitchFamily="34" charset="-122"/>
+                <a:ea typeface="微软雅黑" panose="020B0503020204020204" pitchFamily="34" charset="-122"/>
+                <a:cs typeface="微软雅黑" panose="020B0503020204020204" pitchFamily="34" charset="-122"/>
+              </a:rPr>
+              <a:t>协议推进到了哪个阶段</a:t>
+            </a:r>
+            <a:endParaRPr lang="en-US" altLang="zh-CN" b="0">
+              <a:solidFill>
+                <a:srgbClr val="111111"/>
+              </a:solidFill>
+              <a:latin typeface="微软雅黑" panose="020B0503020204020204" pitchFamily="34" charset="-122"/>
+              <a:ea typeface="微软雅黑" panose="020B0503020204020204" pitchFamily="34" charset="-122"/>
+              <a:cs typeface="微软雅黑" panose="020B0503020204020204" pitchFamily="34" charset="-122"/>
+            </a:endParaRPr>
+          </a:p>
+          <a:p>
+            <a:pPr algn="l">
+              <a:defRPr sz="1500" b="0">
+                <a:solidFill>
+                  <a:srgbClr val="111111"/>
+                </a:solidFill>
+                <a:latin typeface="微软雅黑" panose="020B0503020204020204" pitchFamily="34" charset="-122"/>
+                <a:ea typeface="微软雅黑" panose="020B0503020204020204" pitchFamily="34" charset="-122"/>
+                <a:cs typeface="微软雅黑" panose="020B0503020204020204" pitchFamily="34" charset="-122"/>
+              </a:defRPr>
+            </a:pPr>
+            <a:r>
+              <a:rPr lang="en-US" altLang="zh-CN" b="0">
+                <a:solidFill>
+                  <a:srgbClr val="111111"/>
+                </a:solidFill>
+                <a:latin typeface="微软雅黑" panose="020B0503020204020204" pitchFamily="34" charset="-122"/>
+                <a:ea typeface="微软雅黑" panose="020B0503020204020204" pitchFamily="34" charset="-122"/>
+                <a:cs typeface="微软雅黑" panose="020B0503020204020204" pitchFamily="34" charset="-122"/>
+              </a:rPr>
+              <a:t>Obligation:</a:t>
+            </a:r>
+            <a:endParaRPr lang="en-US" altLang="zh-CN" b="0">
+              <a:solidFill>
+                <a:srgbClr val="111111"/>
+              </a:solidFill>
+              <a:latin typeface="微软雅黑" panose="020B0503020204020204" pitchFamily="34" charset="-122"/>
+              <a:ea typeface="微软雅黑" panose="020B0503020204020204" pitchFamily="34" charset="-122"/>
+              <a:cs typeface="微软雅黑" panose="020B0503020204020204" pitchFamily="34" charset="-122"/>
+            </a:endParaRPr>
+          </a:p>
+          <a:p>
+            <a:pPr algn="l">
+              <a:defRPr sz="1500" b="0">
+                <a:solidFill>
+                  <a:srgbClr val="111111"/>
+                </a:solidFill>
+                <a:latin typeface="微软雅黑" panose="020B0503020204020204" pitchFamily="34" charset="-122"/>
+                <a:ea typeface="微软雅黑" panose="020B0503020204020204" pitchFamily="34" charset="-122"/>
+                <a:cs typeface="微软雅黑" panose="020B0503020204020204" pitchFamily="34" charset="-122"/>
+              </a:defRPr>
+            </a:pPr>
+            <a:r>
+              <a:rPr lang="en-US" altLang="zh-CN" b="0">
+                <a:solidFill>
+                  <a:srgbClr val="111111"/>
+                </a:solidFill>
+                <a:latin typeface="微软雅黑" panose="020B0503020204020204" pitchFamily="34" charset="-122"/>
+                <a:ea typeface="微软雅黑" panose="020B0503020204020204" pitchFamily="34" charset="-122"/>
+                <a:cs typeface="微软雅黑" panose="020B0503020204020204" pitchFamily="34" charset="-122"/>
+              </a:rPr>
+              <a:t>  </a:t>
+            </a:r>
+            <a:r>
+              <a:rPr lang="zh-CN" altLang="en-US" b="0">
+                <a:solidFill>
+                  <a:srgbClr val="111111"/>
+                </a:solidFill>
+                <a:latin typeface="微软雅黑" panose="020B0503020204020204" pitchFamily="34" charset="-122"/>
+                <a:ea typeface="微软雅黑" panose="020B0503020204020204" pitchFamily="34" charset="-122"/>
+                <a:cs typeface="微软雅黑" panose="020B0503020204020204" pitchFamily="34" charset="-122"/>
+              </a:rPr>
+              <a:t>还有什么义务没有完成</a:t>
+            </a:r>
+            <a:endParaRPr lang="zh-CN" altLang="en-US" b="0">
+              <a:solidFill>
+                <a:srgbClr val="111111"/>
+              </a:solidFill>
+              <a:latin typeface="微软雅黑" panose="020B0503020204020204" pitchFamily="34" charset="-122"/>
+              <a:ea typeface="微软雅黑" panose="020B0503020204020204" pitchFamily="34" charset="-122"/>
+              <a:cs typeface="微软雅黑" panose="020B0503020204020204" pitchFamily="34" charset="-122"/>
+            </a:endParaRPr>
+          </a:p>
+          <a:p>
+            <a:pPr algn="l">
+              <a:defRPr sz="1500" b="0">
+                <a:solidFill>
+                  <a:srgbClr val="111111"/>
+                </a:solidFill>
+                <a:latin typeface="微软雅黑" panose="020B0503020204020204" pitchFamily="34" charset="-122"/>
+                <a:ea typeface="微软雅黑" panose="020B0503020204020204" pitchFamily="34" charset="-122"/>
+                <a:cs typeface="微软雅黑" panose="020B0503020204020204" pitchFamily="34" charset="-122"/>
+              </a:defRPr>
+            </a:pPr>
+            <a:r>
+              <a:rPr lang="en-US" altLang="zh-CN" b="0">
+                <a:solidFill>
+                  <a:srgbClr val="111111"/>
+                </a:solidFill>
+                <a:latin typeface="微软雅黑" panose="020B0503020204020204" pitchFamily="34" charset="-122"/>
+                <a:ea typeface="微软雅黑" panose="020B0503020204020204" pitchFamily="34" charset="-122"/>
+                <a:cs typeface="微软雅黑" panose="020B0503020204020204" pitchFamily="34" charset="-122"/>
+              </a:rPr>
+              <a:t>Claim:</a:t>
+            </a:r>
+            <a:endParaRPr lang="en-US" altLang="zh-CN" b="0">
+              <a:solidFill>
+                <a:srgbClr val="111111"/>
+              </a:solidFill>
+              <a:latin typeface="微软雅黑" panose="020B0503020204020204" pitchFamily="34" charset="-122"/>
+              <a:ea typeface="微软雅黑" panose="020B0503020204020204" pitchFamily="34" charset="-122"/>
+              <a:cs typeface="微软雅黑" panose="020B0503020204020204" pitchFamily="34" charset="-122"/>
+            </a:endParaRPr>
+          </a:p>
+          <a:p>
+            <a:pPr algn="l">
+              <a:defRPr sz="1500" b="0">
+                <a:solidFill>
+                  <a:srgbClr val="111111"/>
+                </a:solidFill>
+                <a:latin typeface="微软雅黑" panose="020B0503020204020204" pitchFamily="34" charset="-122"/>
+                <a:ea typeface="微软雅黑" panose="020B0503020204020204" pitchFamily="34" charset="-122"/>
+                <a:cs typeface="微软雅黑" panose="020B0503020204020204" pitchFamily="34" charset="-122"/>
+              </a:defRPr>
+            </a:pPr>
+            <a:r>
+              <a:rPr lang="en-US" altLang="zh-CN" b="0">
+                <a:solidFill>
+                  <a:srgbClr val="111111"/>
+                </a:solidFill>
+                <a:latin typeface="微软雅黑" panose="020B0503020204020204" pitchFamily="34" charset="-122"/>
+                <a:ea typeface="微软雅黑" panose="020B0503020204020204" pitchFamily="34" charset="-122"/>
+                <a:cs typeface="微软雅黑" panose="020B0503020204020204" pitchFamily="34" charset="-122"/>
+              </a:rPr>
+              <a:t>  </a:t>
+            </a:r>
+            <a:r>
+              <a:rPr lang="zh-CN" altLang="en-US" b="0">
+                <a:solidFill>
+                  <a:srgbClr val="111111"/>
+                </a:solidFill>
+                <a:latin typeface="微软雅黑" panose="020B0503020204020204" pitchFamily="34" charset="-122"/>
+                <a:ea typeface="微软雅黑" panose="020B0503020204020204" pitchFamily="34" charset="-122"/>
+                <a:cs typeface="微软雅黑" panose="020B0503020204020204" pitchFamily="34" charset="-122"/>
+              </a:rPr>
+              <a:t>是否声明把义务交给其他主体</a:t>
+            </a:r>
+            <a:endParaRPr lang="zh-CN" altLang="en-US" b="0">
+              <a:solidFill>
+                <a:srgbClr val="111111"/>
+              </a:solidFill>
+              <a:latin typeface="微软雅黑" panose="020B0503020204020204" pitchFamily="34" charset="-122"/>
+              <a:ea typeface="微软雅黑" panose="020B0503020204020204" pitchFamily="34" charset="-122"/>
+              <a:cs typeface="微软雅黑" panose="020B0503020204020204" pitchFamily="34" charset="-122"/>
+            </a:endParaRPr>
+          </a:p>
+        </p:txBody>
+      </p:sp>
+      <p:sp>
+        <p:nvSpPr>
+          <p:cNvPr id="17" name="interproc-3-panel"/>
+          <p:cNvSpPr>
+            <a:spLocks noGrp="1"/>
+          </p:cNvSpPr>
+          <p:nvPr>
+            <p:custDataLst>
+              <p:tags r:id="rId9"/>
+            </p:custDataLst>
+          </p:nvPr>
+        </p:nvSpPr>
+        <p:spPr>
+          <a:xfrm>
+            <a:off x="6239043" y="760165"/>
+            <a:ext cx="2571616" cy="2381126"/>
+          </a:xfrm>
+          <a:prstGeom prst="rect">
+            <a:avLst/>
+          </a:prstGeom>
+          <a:solidFill>
+            <a:srgbClr val="F6F7F8"/>
+          </a:solidFill>
+          <a:ln w="0">
+            <a:noFill/>
+            <a:prstDash val="solid"/>
+          </a:ln>
+        </p:spPr>
+      </p:sp>
+      <p:sp>
+        <p:nvSpPr>
+          <p:cNvPr id="18" name="interproc-3-title"/>
+          <p:cNvSpPr>
+            <a:spLocks noGrp="1"/>
+          </p:cNvSpPr>
+          <p:nvPr>
+            <p:custDataLst>
+              <p:tags r:id="rId10"/>
+            </p:custDataLst>
+          </p:nvPr>
+        </p:nvSpPr>
+        <p:spPr>
+          <a:xfrm>
+            <a:off x="6467631" y="969705"/>
+            <a:ext cx="2114440" cy="361931"/>
+          </a:xfrm>
+          <a:prstGeom prst="rect">
+            <a:avLst/>
+          </a:prstGeom>
+          <a:noFill/>
+          <a:ln w="0">
+            <a:noFill/>
+            <a:prstDash val="solid"/>
+          </a:ln>
+        </p:spPr>
+        <p:txBody>
+          <a:bodyPr anchor="t"/>
+          <a:lstStyle/>
+          <a:p>
+            <a:pPr algn="l">
+              <a:defRPr sz="1875" b="1">
+                <a:solidFill>
+                  <a:srgbClr val="111111"/>
+                </a:solidFill>
+                <a:latin typeface="微软雅黑" panose="020B0503020204020204" pitchFamily="34" charset="-122"/>
+                <a:ea typeface="微软雅黑" panose="020B0503020204020204" pitchFamily="34" charset="-122"/>
+                <a:cs typeface="微软雅黑" panose="020B0503020204020204" pitchFamily="34" charset="-122"/>
+              </a:defRPr>
+            </a:pPr>
+            <a:r>
+              <a:rPr b="1">
+                <a:solidFill>
+                  <a:srgbClr val="111111"/>
+                </a:solidFill>
+                <a:latin typeface="微软雅黑" panose="020B0503020204020204" pitchFamily="34" charset="-122"/>
+                <a:ea typeface="微软雅黑" panose="020B0503020204020204" pitchFamily="34" charset="-122"/>
+                <a:cs typeface="微软雅黑" panose="020B0503020204020204" pitchFamily="34" charset="-122"/>
+              </a:rPr>
+              <a:t>责任声明</a:t>
+            </a:r>
+            <a:endParaRPr b="1">
+              <a:solidFill>
+                <a:srgbClr val="111111"/>
+              </a:solidFill>
+              <a:latin typeface="微软雅黑" panose="020B0503020204020204" pitchFamily="34" charset="-122"/>
+              <a:ea typeface="微软雅黑" panose="020B0503020204020204" pitchFamily="34" charset="-122"/>
+              <a:cs typeface="微软雅黑" panose="020B0503020204020204" pitchFamily="34" charset="-122"/>
+            </a:endParaRPr>
+          </a:p>
+        </p:txBody>
+      </p:sp>
+      <p:sp>
+        <p:nvSpPr>
+          <p:cNvPr id="19" name="interproc-3-body"/>
+          <p:cNvSpPr>
+            <a:spLocks noGrp="1"/>
+          </p:cNvSpPr>
+          <p:nvPr>
+            <p:custDataLst>
+              <p:tags r:id="rId11"/>
+            </p:custDataLst>
+          </p:nvPr>
+        </p:nvSpPr>
+        <p:spPr>
+          <a:xfrm>
+            <a:off x="6467631" y="1445930"/>
+            <a:ext cx="2114440" cy="1504872"/>
+          </a:xfrm>
+          <a:prstGeom prst="rect">
+            <a:avLst/>
+          </a:prstGeom>
+          <a:noFill/>
+          <a:ln w="0">
+            <a:noFill/>
+            <a:prstDash val="solid"/>
+          </a:ln>
+        </p:spPr>
+        <p:txBody>
+          <a:bodyPr anchor="t"/>
+          <a:lstStyle/>
+          <a:p>
+            <a:pPr algn="l">
+              <a:defRPr sz="1500" b="0">
+                <a:solidFill>
+                  <a:srgbClr val="111111"/>
+                </a:solidFill>
+                <a:latin typeface="微软雅黑" panose="020B0503020204020204" pitchFamily="34" charset="-122"/>
+                <a:ea typeface="微软雅黑" panose="020B0503020204020204" pitchFamily="34" charset="-122"/>
+                <a:cs typeface="微软雅黑" panose="020B0503020204020204" pitchFamily="34" charset="-122"/>
+              </a:defRPr>
+            </a:pPr>
+            <a:r>
+              <a:rPr lang="zh-CN" altLang="en-US" b="0">
+                <a:solidFill>
+                  <a:srgbClr val="111111"/>
+                </a:solidFill>
+                <a:latin typeface="微软雅黑" panose="020B0503020204020204" pitchFamily="34" charset="-122"/>
+                <a:ea typeface="微软雅黑" panose="020B0503020204020204" pitchFamily="34" charset="-122"/>
+                <a:cs typeface="微软雅黑" panose="020B0503020204020204" pitchFamily="34" charset="-122"/>
+              </a:rPr>
+              <a:t>义务传播到</a:t>
+            </a:r>
+            <a:r>
+              <a:rPr lang="en-US" altLang="zh-CN" b="0">
+                <a:solidFill>
+                  <a:srgbClr val="111111"/>
+                </a:solidFill>
+                <a:latin typeface="微软雅黑" panose="020B0503020204020204" pitchFamily="34" charset="-122"/>
+                <a:ea typeface="微软雅黑" panose="020B0503020204020204" pitchFamily="34" charset="-122"/>
+                <a:cs typeface="微软雅黑" panose="020B0503020204020204" pitchFamily="34" charset="-122"/>
+              </a:rPr>
+              <a:t> caller </a:t>
+            </a:r>
+            <a:r>
+              <a:rPr lang="zh-CN" altLang="en-US" b="0">
+                <a:solidFill>
+                  <a:srgbClr val="111111"/>
+                </a:solidFill>
+                <a:latin typeface="微软雅黑" panose="020B0503020204020204" pitchFamily="34" charset="-122"/>
+                <a:ea typeface="微软雅黑" panose="020B0503020204020204" pitchFamily="34" charset="-122"/>
+                <a:cs typeface="微软雅黑" panose="020B0503020204020204" pitchFamily="34" charset="-122"/>
+              </a:rPr>
+              <a:t>后，工具检查谁负责完成它。</a:t>
+            </a:r>
+            <a:endParaRPr lang="zh-CN" altLang="en-US" b="0">
+              <a:solidFill>
+                <a:srgbClr val="111111"/>
+              </a:solidFill>
+              <a:latin typeface="微软雅黑" panose="020B0503020204020204" pitchFamily="34" charset="-122"/>
+              <a:ea typeface="微软雅黑" panose="020B0503020204020204" pitchFamily="34" charset="-122"/>
+              <a:cs typeface="微软雅黑" panose="020B0503020204020204" pitchFamily="34" charset="-122"/>
+            </a:endParaRPr>
+          </a:p>
+        </p:txBody>
+      </p:sp>
+    </p:spTree>
+  </p:cSld>
+  <p:clrMapOvr>
+    <a:masterClrMapping/>
+  </p:clrMapOvr>
+</p:sld>
+</file>
+
+<file path=ppt/slides/slide24.xml><?xml version="1.0" encoding="utf-8"?>
+<p:sld xmlns:a="http://schemas.openxmlformats.org/drawingml/2006/main" xmlns:r="http://schemas.openxmlformats.org/officeDocument/2006/relationships" xmlns:p="http://schemas.openxmlformats.org/presentationml/2006/main">
+  <p:cSld>
+    <p:spTree>
+      <p:nvGrpSpPr>
+        <p:cNvPr id="1" name=""/>
+        <p:cNvGrpSpPr/>
+        <p:nvPr/>
+      </p:nvGrpSpPr>
+      <p:grpSpPr/>
+      <p:sp>
+        <p:nvSpPr>
+          <p:cNvPr id="2" name="title-13"/>
+          <p:cNvSpPr>
+            <a:spLocks noGrp="1"/>
+          </p:cNvSpPr>
+          <p:nvPr/>
+        </p:nvSpPr>
+        <p:spPr>
+          <a:xfrm>
+            <a:off x="403225" y="133350"/>
+            <a:ext cx="11159490" cy="445770"/>
+          </a:xfrm>
+          <a:prstGeom prst="rect">
+            <a:avLst/>
+          </a:prstGeom>
+          <a:noFill/>
+          <a:ln w="0">
+            <a:noFill/>
+            <a:prstDash val="solid"/>
+          </a:ln>
+        </p:spPr>
+        <p:txBody>
+          <a:bodyPr anchor="t"/>
+          <a:lstStyle/>
+          <a:p>
+            <a:pPr algn="l">
+              <a:defRPr sz="3225" b="1">
+                <a:solidFill>
+                  <a:srgbClr val="111111"/>
+                </a:solidFill>
+                <a:latin typeface="微软雅黑" panose="020B0503020204020204" pitchFamily="34" charset="-122"/>
+                <a:ea typeface="微软雅黑" panose="020B0503020204020204" pitchFamily="34" charset="-122"/>
+                <a:cs typeface="微软雅黑" panose="020B0503020204020204" pitchFamily="34" charset="-122"/>
+              </a:defRPr>
+            </a:pPr>
+            <a:r>
+              <a:rPr sz="1800" b="0">
+                <a:solidFill>
+                  <a:srgbClr val="111111"/>
+                </a:solidFill>
+                <a:latin typeface="微软雅黑" panose="020B0503020204020204" pitchFamily="34" charset="-122"/>
+                <a:ea typeface="微软雅黑" panose="020B0503020204020204" pitchFamily="34" charset="-122"/>
+                <a:cs typeface="微软雅黑" panose="020B0503020204020204" pitchFamily="34" charset="-122"/>
+              </a:rPr>
+              <a:t>协议结算</a:t>
+            </a:r>
+            <a:endParaRPr sz="1800" b="0">
+              <a:solidFill>
+                <a:srgbClr val="111111"/>
+              </a:solidFill>
+              <a:latin typeface="微软雅黑" panose="020B0503020204020204" pitchFamily="34" charset="-122"/>
+              <a:ea typeface="微软雅黑" panose="020B0503020204020204" pitchFamily="34" charset="-122"/>
+              <a:cs typeface="微软雅黑" panose="020B0503020204020204" pitchFamily="34" charset="-122"/>
+            </a:endParaRPr>
+          </a:p>
+        </p:txBody>
+      </p:sp>
+      <p:sp>
+        <p:nvSpPr>
+          <p:cNvPr id="3" name="文本框 2"/>
+          <p:cNvSpPr txBox="1"/>
+          <p:nvPr/>
+        </p:nvSpPr>
+        <p:spPr>
+          <a:xfrm>
+            <a:off x="636270" y="664845"/>
+            <a:ext cx="5913120" cy="1412240"/>
+          </a:xfrm>
+          <a:prstGeom prst="rect">
+            <a:avLst/>
+          </a:prstGeom>
+          <a:noFill/>
+        </p:spPr>
+        <p:txBody>
+          <a:bodyPr wrap="square" rtlCol="0">
+            <a:noAutofit/>
+          </a:bodyPr>
+          <a:p>
+            <a:r>
+              <a:rPr lang="zh-CN" altLang="en-US" sz="1600"/>
+              <a:t>在这之前已经知道以下：</a:t>
+            </a:r>
+            <a:br>
+              <a:rPr lang="zh-CN" altLang="en-US" sz="1600"/>
+            </a:br>
+            <a:r>
+              <a:rPr lang="zh-CN" altLang="en-US" sz="1600"/>
+              <a:t>当前分析的是哪个元数据协议实例</a:t>
+            </a:r>
+            <a:endParaRPr lang="zh-CN" altLang="en-US" sz="1600"/>
+          </a:p>
+          <a:p>
+            <a:r>
+              <a:rPr lang="zh-CN" altLang="en-US" sz="1600"/>
+              <a:t>当前协议处于什么阶段</a:t>
+            </a:r>
+            <a:endParaRPr lang="zh-CN" altLang="en-US" sz="1600"/>
+          </a:p>
+          <a:p>
+            <a:r>
+              <a:rPr lang="zh-CN" altLang="en-US" sz="1600"/>
+              <a:t>当前抽象元数据状态</a:t>
+            </a:r>
+            <a:endParaRPr lang="zh-CN" altLang="en-US" sz="1600"/>
+          </a:p>
+          <a:p>
+            <a:r>
+              <a:rPr lang="zh-CN" altLang="en-US" sz="1600"/>
+              <a:t>尚未完成的协议义务</a:t>
+            </a:r>
+            <a:endParaRPr lang="zh-CN" altLang="en-US" sz="1600"/>
+          </a:p>
+          <a:p>
+            <a:r>
+              <a:rPr lang="zh-CN" altLang="en-US" sz="1600"/>
+              <a:t>责任声明</a:t>
+            </a:r>
+            <a:endParaRPr lang="zh-CN" altLang="en-US" sz="1600"/>
+          </a:p>
+          <a:p>
+            <a:r>
+              <a:rPr lang="zh-CN" altLang="en-US" sz="1600"/>
+              <a:t>函数最终返回结果</a:t>
+            </a:r>
+            <a:endParaRPr lang="zh-CN" altLang="en-US" sz="1600"/>
+          </a:p>
+        </p:txBody>
+      </p:sp>
+      <p:sp>
+        <p:nvSpPr>
+          <p:cNvPr id="17" name="文本框 16"/>
+          <p:cNvSpPr txBox="1"/>
+          <p:nvPr/>
+        </p:nvSpPr>
+        <p:spPr>
+          <a:xfrm>
+            <a:off x="531495" y="2773045"/>
+            <a:ext cx="5563870" cy="4141470"/>
+          </a:xfrm>
+          <a:prstGeom prst="rect">
+            <a:avLst/>
+          </a:prstGeom>
+          <a:noFill/>
+        </p:spPr>
+        <p:txBody>
+          <a:bodyPr wrap="square" rtlCol="0">
+            <a:noAutofit/>
+          </a:bodyPr>
+          <a:p>
+            <a:r>
+              <a:rPr lang="zh-CN" altLang="en-US" sz="1600"/>
+              <a:t>结算首先要回答：</a:t>
+            </a:r>
+            <a:endParaRPr lang="zh-CN" altLang="en-US" sz="1600"/>
+          </a:p>
+          <a:p>
+            <a:r>
+              <a:rPr lang="zh-CN" altLang="en-US" sz="1600"/>
+              <a:t>现在是否已经到了必须判断协议是否合法的位置？</a:t>
+            </a:r>
+            <a:endParaRPr lang="zh-CN" altLang="en-US" sz="1600"/>
+          </a:p>
+          <a:p>
+            <a:endParaRPr lang="en-US" altLang="zh-CN" sz="1600"/>
+          </a:p>
+          <a:p>
+            <a:r>
+              <a:rPr lang="zh-CN" altLang="en-US" sz="1600"/>
+              <a:t>五类结算边界。</a:t>
+            </a:r>
+            <a:endParaRPr lang="zh-CN" altLang="en-US" sz="1600"/>
+          </a:p>
+          <a:p>
+            <a:r>
+              <a:rPr lang="en-US" altLang="zh-CN" sz="1600"/>
+              <a:t>1.</a:t>
+            </a:r>
+            <a:r>
+              <a:rPr lang="zh-CN" altLang="en-US" sz="1600"/>
+              <a:t>完整文件系统操作即将返回。</a:t>
+            </a:r>
+            <a:endParaRPr lang="zh-CN" altLang="en-US" sz="1600"/>
+          </a:p>
+          <a:p>
+            <a:r>
+              <a:rPr lang="en-US" altLang="zh-CN" sz="1600"/>
+              <a:t>2.</a:t>
+            </a:r>
+            <a:r>
+              <a:rPr lang="zh-CN" altLang="en-US" sz="1600"/>
+              <a:t>协议参与对象即将被释放或销毁。</a:t>
+            </a:r>
+            <a:endParaRPr lang="zh-CN" altLang="en-US" sz="1600"/>
+          </a:p>
+          <a:p>
+            <a:r>
+              <a:rPr lang="en-US" altLang="zh-CN" sz="1600"/>
+              <a:t>3.</a:t>
+            </a:r>
+            <a:r>
+              <a:rPr lang="zh-CN" altLang="en-US" sz="1600"/>
+              <a:t>事务即将提交</a:t>
+            </a:r>
+            <a:endParaRPr lang="zh-CN" altLang="en-US" sz="1600"/>
+          </a:p>
+          <a:p>
+            <a:r>
+              <a:rPr lang="en-US" altLang="zh-CN" sz="1600"/>
+              <a:t>4.</a:t>
+            </a:r>
+            <a:r>
+              <a:rPr lang="zh-CN" altLang="en-US" sz="1600"/>
+              <a:t>系统已经建立</a:t>
+            </a:r>
+            <a:r>
+              <a:rPr lang="en-US" altLang="zh-CN" sz="1600"/>
+              <a:t> journal</a:t>
+            </a:r>
+            <a:r>
+              <a:rPr lang="zh-CN" altLang="en-US" sz="1600"/>
+              <a:t>、</a:t>
+            </a:r>
+            <a:r>
+              <a:rPr lang="en-US" altLang="zh-CN" sz="1600"/>
+              <a:t>orphan </a:t>
+            </a:r>
+            <a:r>
+              <a:rPr lang="zh-CN" altLang="en-US" sz="1600"/>
+              <a:t>或其他持久恢复记录，并进入恢复责任验证阶段。</a:t>
+            </a:r>
+            <a:endParaRPr lang="zh-CN" altLang="en-US" sz="1600"/>
+          </a:p>
+          <a:p>
+            <a:r>
+              <a:rPr lang="en-US" altLang="zh-CN" sz="1600"/>
+              <a:t>5.</a:t>
+            </a:r>
+            <a:r>
+              <a:rPr lang="zh-CN" altLang="en-US" sz="1600"/>
+              <a:t>文件系统进入</a:t>
+            </a:r>
+            <a:r>
+              <a:rPr lang="en-US" altLang="zh-CN" sz="1600"/>
+              <a:t> fatal shutdown</a:t>
+            </a:r>
+            <a:r>
+              <a:rPr lang="zh-CN" altLang="en-US" sz="1600"/>
+              <a:t>、强制只读或其他阻止正常观察的状态。</a:t>
+            </a:r>
+            <a:endParaRPr lang="zh-CN" altLang="en-US" sz="1600"/>
+          </a:p>
+          <a:p>
+            <a:endParaRPr lang="zh-CN" altLang="en-US" sz="1600"/>
+          </a:p>
+        </p:txBody>
+      </p:sp>
+      <p:sp>
+        <p:nvSpPr>
+          <p:cNvPr id="20" name="文本框 19"/>
+          <p:cNvSpPr txBox="1"/>
+          <p:nvPr/>
+        </p:nvSpPr>
+        <p:spPr>
+          <a:xfrm>
+            <a:off x="6522085" y="579120"/>
+            <a:ext cx="5472430" cy="5429885"/>
+          </a:xfrm>
+          <a:prstGeom prst="rect">
+            <a:avLst/>
+          </a:prstGeom>
+          <a:noFill/>
+        </p:spPr>
+        <p:txBody>
+          <a:bodyPr wrap="square" rtlCol="0">
+            <a:noAutofit/>
+          </a:bodyPr>
+          <a:p>
+            <a:r>
+              <a:rPr lang="zh-CN" altLang="en-US" sz="1600"/>
+              <a:t>确定结算边界后：</a:t>
+            </a:r>
+            <a:endParaRPr lang="zh-CN" altLang="en-US" sz="1600"/>
+          </a:p>
+          <a:p>
+            <a:r>
+              <a:rPr lang="zh-CN" altLang="en-US" sz="1600">
+                <a:sym typeface="+mn-ea"/>
+              </a:rPr>
+              <a:t>工具</a:t>
+            </a:r>
+            <a:r>
+              <a:rPr lang="zh-CN" altLang="en-US" sz="1600"/>
+              <a:t>联合检查五项内容。</a:t>
+            </a:r>
+            <a:endParaRPr lang="zh-CN" altLang="en-US" sz="1600"/>
+          </a:p>
+          <a:p>
+            <a:r>
+              <a:rPr lang="en-US" altLang="zh-CN" sz="1600"/>
+              <a:t>1. </a:t>
+            </a:r>
+            <a:r>
+              <a:rPr lang="zh-CN" altLang="en-US" sz="1600"/>
+              <a:t>跨对象元数据关系是否合法。</a:t>
+            </a:r>
+            <a:endParaRPr lang="zh-CN" altLang="en-US" sz="1600"/>
+          </a:p>
+          <a:p>
+            <a:r>
+              <a:rPr lang="en-US" altLang="zh-CN" sz="1600"/>
+              <a:t>2. </a:t>
+            </a:r>
+            <a:r>
+              <a:rPr lang="zh-CN" altLang="en-US" sz="1600"/>
+              <a:t>协议产生的义务是否：</a:t>
+            </a:r>
+            <a:endParaRPr lang="zh-CN" altLang="en-US" sz="1600"/>
+          </a:p>
+          <a:p>
+            <a:r>
+              <a:rPr lang="zh-CN" altLang="en-US" sz="1600"/>
+              <a:t>已经完成</a:t>
+            </a:r>
+            <a:endParaRPr lang="zh-CN" altLang="en-US" sz="1600"/>
+          </a:p>
+          <a:p>
+            <a:r>
+              <a:rPr lang="zh-CN" altLang="en-US" sz="1600"/>
+              <a:t>或者合法转移给其他责任主体</a:t>
+            </a:r>
+            <a:endParaRPr lang="zh-CN" altLang="en-US" sz="1600"/>
+          </a:p>
+          <a:p>
+            <a:r>
+              <a:rPr lang="en-US" altLang="zh-CN" sz="1600"/>
+              <a:t>3. </a:t>
+            </a:r>
+            <a:r>
+              <a:rPr lang="zh-CN" altLang="en-US" sz="1600"/>
+              <a:t>责任声明必须同时满足：</a:t>
+            </a:r>
+            <a:endParaRPr lang="zh-CN" altLang="en-US" sz="1600"/>
+          </a:p>
+          <a:p>
+            <a:r>
+              <a:rPr lang="en-US" altLang="zh-CN" sz="1600"/>
+              <a:t>authority   </a:t>
+            </a:r>
+            <a:r>
+              <a:rPr lang="zh-CN" altLang="en-US" sz="1600"/>
+              <a:t>该主体是否有权接管</a:t>
+            </a:r>
+            <a:endParaRPr lang="zh-CN" altLang="en-US" sz="1600"/>
+          </a:p>
+          <a:p>
+            <a:r>
+              <a:rPr lang="en-US" altLang="zh-CN" sz="1600"/>
+              <a:t>coverage    </a:t>
+            </a:r>
+            <a:r>
+              <a:rPr lang="zh-CN" altLang="en-US" sz="1600"/>
+              <a:t>是否覆盖这个具体义务</a:t>
+            </a:r>
+            <a:endParaRPr lang="zh-CN" altLang="en-US" sz="1600"/>
+          </a:p>
+          <a:p>
+            <a:r>
+              <a:rPr lang="en-US" altLang="zh-CN" sz="1600"/>
+              <a:t>activation  </a:t>
+            </a:r>
+            <a:r>
+              <a:rPr lang="zh-CN" altLang="en-US" sz="1600"/>
+              <a:t>接管机制是否已经生效</a:t>
+            </a:r>
+            <a:endParaRPr lang="zh-CN" altLang="en-US" sz="1600"/>
+          </a:p>
+          <a:p>
+            <a:r>
+              <a:rPr lang="en-US" altLang="zh-CN" sz="1600"/>
+              <a:t>lifetime    </a:t>
+            </a:r>
+            <a:r>
+              <a:rPr lang="zh-CN" altLang="en-US" sz="1600"/>
+              <a:t>接管者是否仍然存活</a:t>
+            </a:r>
+            <a:endParaRPr lang="zh-CN" altLang="en-US" sz="1600"/>
+          </a:p>
+          <a:p>
+            <a:r>
+              <a:rPr lang="en-US" altLang="zh-CN" sz="1600"/>
+              <a:t>4. </a:t>
+            </a:r>
+            <a:r>
+              <a:rPr lang="zh-CN" altLang="en-US" sz="1600"/>
+              <a:t>返回结果必须与协议完成阶段一致：</a:t>
+            </a:r>
+            <a:endParaRPr lang="zh-CN" altLang="en-US" sz="1600"/>
+          </a:p>
+          <a:p>
+            <a:r>
+              <a:rPr lang="en-US" altLang="zh-CN" sz="1600"/>
+              <a:t>5. </a:t>
+            </a:r>
+            <a:r>
+              <a:rPr lang="zh-CN" altLang="en-US" sz="1600"/>
+              <a:t>错误状态是否仍可能被正常代码观察。</a:t>
+            </a:r>
+            <a:endParaRPr lang="zh-CN" altLang="en-US" sz="1600"/>
+          </a:p>
+          <a:p>
+            <a:endParaRPr lang="en-US" altLang="zh-CN" sz="1600"/>
+          </a:p>
+        </p:txBody>
+      </p:sp>
+    </p:spTree>
+  </p:cSld>
+  <p:clrMapOvr>
+    <a:masterClrMapping/>
+  </p:clrMapOvr>
+</p:sld>
+</file>
+
+<file path=ppt/slides/slide25.xml><?xml version="1.0" encoding="utf-8"?>
+<p:sld xmlns:a="http://schemas.openxmlformats.org/drawingml/2006/main" xmlns:r="http://schemas.openxmlformats.org/officeDocument/2006/relationships" xmlns:p="http://schemas.openxmlformats.org/presentationml/2006/main">
+  <p:cSld>
+    <p:spTree>
+      <p:nvGrpSpPr>
+        <p:cNvPr id="1" name=""/>
+        <p:cNvGrpSpPr/>
+        <p:nvPr/>
+      </p:nvGrpSpPr>
+      <p:grpSpPr/>
+      <p:graphicFrame>
+        <p:nvGraphicFramePr>
+          <p:cNvPr id="11" name="表格 10"/>
+          <p:cNvGraphicFramePr/>
+          <p:nvPr/>
+        </p:nvGraphicFramePr>
+        <p:xfrm>
+          <a:off x="579099" y="708745"/>
+          <a:ext cx="11391265" cy="3886200"/>
+        </p:xfrm>
+        <a:graphic>
+          <a:graphicData uri="http://schemas.openxmlformats.org/drawingml/2006/table">
+            <a:tbl>
+              <a:tblPr/>
+              <a:tblGrid>
+                <a:gridCol w="2190750"/>
+                <a:gridCol w="3048000"/>
+              </a:tblGrid>
+              <a:tr h="647700">
+                <a:tc>
+                  <a:txBody>
+                    <a:bodyPr/>
+                    <a:lstStyle/>
+                    <a:p>
+                      <a:r>
+                        <a:rPr sz="1425" b="1">
+                          <a:solidFill>
+                            <a:schemeClr val="tx1"/>
+                          </a:solidFill>
+                          <a:latin typeface="微软雅黑" panose="020B0503020204020204" pitchFamily="34" charset="-122"/>
+                          <a:ea typeface="微软雅黑" panose="020B0503020204020204" pitchFamily="34" charset="-122"/>
+                          <a:cs typeface="微软雅黑" panose="020B0503020204020204" pitchFamily="34" charset="-122"/>
+                        </a:rPr>
+                        <a:t>阶段</a:t>
+                      </a:r>
+                      <a:endParaRPr sz="1425" b="1">
+                        <a:solidFill>
+                          <a:schemeClr val="tx1"/>
+                        </a:solidFill>
+                        <a:latin typeface="微软雅黑" panose="020B0503020204020204" pitchFamily="34" charset="-122"/>
+                        <a:ea typeface="微软雅黑" panose="020B0503020204020204" pitchFamily="34" charset="-122"/>
+                        <a:cs typeface="微软雅黑" panose="020B0503020204020204" pitchFamily="34" charset="-122"/>
+                      </a:endParaRPr>
+                    </a:p>
+                  </a:txBody>
+                  <a:tcPr marL="91435" marR="91435" marT="45717" marB="45717">
+                    <a:solidFill>
+                      <a:schemeClr val="bg1"/>
+                    </a:solidFill>
+                  </a:tcPr>
+                </a:tc>
+                <a:tc>
+                  <a:txBody>
+                    <a:bodyPr/>
+                    <a:lstStyle/>
+                    <a:p>
+                      <a:r>
+                        <a:rPr sz="1425" b="1">
+                          <a:solidFill>
+                            <a:schemeClr val="tx1"/>
+                          </a:solidFill>
+                          <a:latin typeface="微软雅黑" panose="020B0503020204020204" pitchFamily="34" charset="-122"/>
+                          <a:ea typeface="微软雅黑" panose="020B0503020204020204" pitchFamily="34" charset="-122"/>
+                          <a:cs typeface="微软雅黑" panose="020B0503020204020204" pitchFamily="34" charset="-122"/>
+                        </a:rPr>
+                        <a:t>解决的问题</a:t>
+                      </a:r>
+                      <a:endParaRPr sz="1425" b="1">
+                        <a:solidFill>
+                          <a:schemeClr val="tx1"/>
+                        </a:solidFill>
+                        <a:latin typeface="微软雅黑" panose="020B0503020204020204" pitchFamily="34" charset="-122"/>
+                        <a:ea typeface="微软雅黑" panose="020B0503020204020204" pitchFamily="34" charset="-122"/>
+                        <a:cs typeface="微软雅黑" panose="020B0503020204020204" pitchFamily="34" charset="-122"/>
+                      </a:endParaRPr>
+                    </a:p>
+                  </a:txBody>
+                  <a:tcPr marL="91435" marR="91435" marT="45717" marB="45717">
+                    <a:solidFill>
+                      <a:schemeClr val="bg1"/>
+                    </a:solidFill>
+                  </a:tcPr>
+                </a:tc>
+              </a:tr>
+              <a:tr h="647700">
+                <a:tc>
+                  <a:txBody>
+                    <a:bodyPr/>
+                    <a:lstStyle/>
+                    <a:p>
+                      <a:r>
+                        <a:rPr sz="1275" b="1">
+                          <a:solidFill>
+                            <a:schemeClr val="tx1"/>
+                          </a:solidFill>
+                          <a:latin typeface="微软雅黑" panose="020B0503020204020204" pitchFamily="34" charset="-122"/>
+                          <a:ea typeface="微软雅黑" panose="020B0503020204020204" pitchFamily="34" charset="-122"/>
+                          <a:cs typeface="微软雅黑" panose="020B0503020204020204" pitchFamily="34" charset="-122"/>
+                        </a:rPr>
+                        <a:t>1–2 证据与类型</a:t>
+                      </a:r>
+                      <a:endParaRPr sz="1275" b="1">
+                        <a:solidFill>
+                          <a:schemeClr val="tx1"/>
+                        </a:solidFill>
+                        <a:latin typeface="微软雅黑" panose="020B0503020204020204" pitchFamily="34" charset="-122"/>
+                        <a:ea typeface="微软雅黑" panose="020B0503020204020204" pitchFamily="34" charset="-122"/>
+                        <a:cs typeface="微软雅黑" panose="020B0503020204020204" pitchFamily="34" charset="-122"/>
+                      </a:endParaRPr>
+                    </a:p>
+                  </a:txBody>
+                  <a:tcPr marL="91435" marR="91435" marT="45717" marB="45717">
+                    <a:solidFill>
+                      <a:schemeClr val="bg1"/>
+                    </a:solidFill>
+                  </a:tcPr>
+                </a:tc>
+                <a:tc>
+                  <a:txBody>
+                    <a:bodyPr/>
+                    <a:lstStyle/>
+                    <a:p>
+                      <a:r>
+                        <a:rPr sz="1275" b="0">
+                          <a:solidFill>
+                            <a:schemeClr val="tx1"/>
+                          </a:solidFill>
+                          <a:latin typeface="微软雅黑" panose="020B0503020204020204" pitchFamily="34" charset="-122"/>
+                          <a:ea typeface="微软雅黑" panose="020B0503020204020204" pitchFamily="34" charset="-122"/>
+                          <a:cs typeface="微软雅黑" panose="020B0503020204020204" pitchFamily="34" charset="-122"/>
+                        </a:rPr>
+                        <a:t>源码修改意味着什么</a:t>
+                      </a:r>
+                      <a:endParaRPr sz="1275" b="0">
+                        <a:solidFill>
+                          <a:schemeClr val="tx1"/>
+                        </a:solidFill>
+                        <a:latin typeface="微软雅黑" panose="020B0503020204020204" pitchFamily="34" charset="-122"/>
+                        <a:ea typeface="微软雅黑" panose="020B0503020204020204" pitchFamily="34" charset="-122"/>
+                        <a:cs typeface="微软雅黑" panose="020B0503020204020204" pitchFamily="34" charset="-122"/>
+                      </a:endParaRPr>
+                    </a:p>
+                  </a:txBody>
+                  <a:tcPr marL="91435" marR="91435" marT="45717" marB="45717">
+                    <a:solidFill>
+                      <a:schemeClr val="bg1"/>
+                    </a:solidFill>
+                  </a:tcPr>
+                </a:tc>
+              </a:tr>
+              <a:tr h="647700">
+                <a:tc>
+                  <a:txBody>
+                    <a:bodyPr/>
+                    <a:lstStyle/>
+                    <a:p>
+                      <a:r>
+                        <a:rPr sz="1275" b="1">
+                          <a:solidFill>
+                            <a:schemeClr val="tx1"/>
+                          </a:solidFill>
+                          <a:latin typeface="微软雅黑" panose="020B0503020204020204" pitchFamily="34" charset="-122"/>
+                          <a:ea typeface="微软雅黑" panose="020B0503020204020204" pitchFamily="34" charset="-122"/>
+                          <a:cs typeface="微软雅黑" panose="020B0503020204020204" pitchFamily="34" charset="-122"/>
+                        </a:rPr>
+                        <a:t>3 实例重建</a:t>
+                      </a:r>
+                      <a:endParaRPr sz="1275" b="1">
+                        <a:solidFill>
+                          <a:schemeClr val="tx1"/>
+                        </a:solidFill>
+                        <a:latin typeface="微软雅黑" panose="020B0503020204020204" pitchFamily="34" charset="-122"/>
+                        <a:ea typeface="微软雅黑" panose="020B0503020204020204" pitchFamily="34" charset="-122"/>
+                        <a:cs typeface="微软雅黑" panose="020B0503020204020204" pitchFamily="34" charset="-122"/>
+                      </a:endParaRPr>
+                    </a:p>
+                  </a:txBody>
+                  <a:tcPr marL="91435" marR="91435" marT="45717" marB="45717">
+                    <a:solidFill>
+                      <a:schemeClr val="bg1"/>
+                    </a:solidFill>
+                  </a:tcPr>
+                </a:tc>
+                <a:tc>
+                  <a:txBody>
+                    <a:bodyPr/>
+                    <a:lstStyle/>
+                    <a:p>
+                      <a:r>
+                        <a:rPr sz="1275" b="0">
+                          <a:solidFill>
+                            <a:schemeClr val="tx1"/>
+                          </a:solidFill>
+                          <a:latin typeface="微软雅黑" panose="020B0503020204020204" pitchFamily="34" charset="-122"/>
+                          <a:ea typeface="微软雅黑" panose="020B0503020204020204" pitchFamily="34" charset="-122"/>
+                          <a:cs typeface="微软雅黑" panose="020B0503020204020204" pitchFamily="34" charset="-122"/>
+                        </a:rPr>
+                        <a:t>哪些事件属于同一操作</a:t>
+                      </a:r>
+                      <a:endParaRPr sz="1275" b="0">
+                        <a:solidFill>
+                          <a:schemeClr val="tx1"/>
+                        </a:solidFill>
+                        <a:latin typeface="微软雅黑" panose="020B0503020204020204" pitchFamily="34" charset="-122"/>
+                        <a:ea typeface="微软雅黑" panose="020B0503020204020204" pitchFamily="34" charset="-122"/>
+                        <a:cs typeface="微软雅黑" panose="020B0503020204020204" pitchFamily="34" charset="-122"/>
+                      </a:endParaRPr>
+                    </a:p>
+                  </a:txBody>
+                  <a:tcPr marL="91435" marR="91435" marT="45717" marB="45717">
+                    <a:solidFill>
+                      <a:schemeClr val="bg1"/>
+                    </a:solidFill>
+                  </a:tcPr>
+                </a:tc>
+              </a:tr>
+              <a:tr h="647700">
+                <a:tc>
+                  <a:txBody>
+                    <a:bodyPr/>
+                    <a:lstStyle/>
+                    <a:p>
+                      <a:r>
+                        <a:rPr sz="1275" b="1">
+                          <a:solidFill>
+                            <a:schemeClr val="tx1"/>
+                          </a:solidFill>
+                          <a:latin typeface="微软雅黑" panose="020B0503020204020204" pitchFamily="34" charset="-122"/>
+                          <a:ea typeface="微软雅黑" panose="020B0503020204020204" pitchFamily="34" charset="-122"/>
+                          <a:cs typeface="微软雅黑" panose="020B0503020204020204" pitchFamily="34" charset="-122"/>
+                        </a:rPr>
+                        <a:t>4–5 状态与义务</a:t>
+                      </a:r>
+                      <a:endParaRPr sz="1275" b="1">
+                        <a:solidFill>
+                          <a:schemeClr val="tx1"/>
+                        </a:solidFill>
+                        <a:latin typeface="微软雅黑" panose="020B0503020204020204" pitchFamily="34" charset="-122"/>
+                        <a:ea typeface="微软雅黑" panose="020B0503020204020204" pitchFamily="34" charset="-122"/>
+                        <a:cs typeface="微软雅黑" panose="020B0503020204020204" pitchFamily="34" charset="-122"/>
+                      </a:endParaRPr>
+                    </a:p>
+                  </a:txBody>
+                  <a:tcPr marL="91435" marR="91435" marT="45717" marB="45717">
+                    <a:solidFill>
+                      <a:schemeClr val="bg1"/>
+                    </a:solidFill>
+                  </a:tcPr>
+                </a:tc>
+                <a:tc>
+                  <a:txBody>
+                    <a:bodyPr/>
+                    <a:lstStyle/>
+                    <a:p>
+                      <a:r>
+                        <a:rPr sz="1275" b="0">
+                          <a:solidFill>
+                            <a:schemeClr val="tx1"/>
+                          </a:solidFill>
+                          <a:latin typeface="微软雅黑" panose="020B0503020204020204" pitchFamily="34" charset="-122"/>
+                          <a:ea typeface="微软雅黑" panose="020B0503020204020204" pitchFamily="34" charset="-122"/>
+                          <a:cs typeface="微软雅黑" panose="020B0503020204020204" pitchFamily="34" charset="-122"/>
+                        </a:rPr>
+                        <a:t>关系是否保持、还欠什么</a:t>
+                      </a:r>
+                      <a:endParaRPr sz="1275" b="0">
+                        <a:solidFill>
+                          <a:schemeClr val="tx1"/>
+                        </a:solidFill>
+                        <a:latin typeface="微软雅黑" panose="020B0503020204020204" pitchFamily="34" charset="-122"/>
+                        <a:ea typeface="微软雅黑" panose="020B0503020204020204" pitchFamily="34" charset="-122"/>
+                        <a:cs typeface="微软雅黑" panose="020B0503020204020204" pitchFamily="34" charset="-122"/>
+                      </a:endParaRPr>
+                    </a:p>
+                  </a:txBody>
+                  <a:tcPr marL="91435" marR="91435" marT="45717" marB="45717">
+                    <a:solidFill>
+                      <a:schemeClr val="bg1"/>
+                    </a:solidFill>
+                  </a:tcPr>
+                </a:tc>
+              </a:tr>
+              <a:tr h="647700">
+                <a:tc>
+                  <a:txBody>
+                    <a:bodyPr/>
+                    <a:lstStyle/>
+                    <a:p>
+                      <a:r>
+                        <a:rPr sz="1275" b="1">
+                          <a:solidFill>
+                            <a:schemeClr val="tx1"/>
+                          </a:solidFill>
+                          <a:latin typeface="微软雅黑" panose="020B0503020204020204" pitchFamily="34" charset="-122"/>
+                          <a:ea typeface="微软雅黑" panose="020B0503020204020204" pitchFamily="34" charset="-122"/>
+                          <a:cs typeface="微软雅黑" panose="020B0503020204020204" pitchFamily="34" charset="-122"/>
+                        </a:rPr>
+                        <a:t>6 责任传播</a:t>
+                      </a:r>
+                      <a:endParaRPr sz="1275" b="1">
+                        <a:solidFill>
+                          <a:schemeClr val="tx1"/>
+                        </a:solidFill>
+                        <a:latin typeface="微软雅黑" panose="020B0503020204020204" pitchFamily="34" charset="-122"/>
+                        <a:ea typeface="微软雅黑" panose="020B0503020204020204" pitchFamily="34" charset="-122"/>
+                        <a:cs typeface="微软雅黑" panose="020B0503020204020204" pitchFamily="34" charset="-122"/>
+                      </a:endParaRPr>
+                    </a:p>
+                  </a:txBody>
+                  <a:tcPr marL="91435" marR="91435" marT="45717" marB="45717">
+                    <a:solidFill>
+                      <a:schemeClr val="bg1"/>
+                    </a:solidFill>
+                  </a:tcPr>
+                </a:tc>
+                <a:tc>
+                  <a:txBody>
+                    <a:bodyPr/>
+                    <a:lstStyle/>
+                    <a:p>
+                      <a:r>
+                        <a:rPr sz="1275" b="0">
+                          <a:solidFill>
+                            <a:schemeClr val="tx1"/>
+                          </a:solidFill>
+                          <a:latin typeface="微软雅黑" panose="020B0503020204020204" pitchFamily="34" charset="-122"/>
+                          <a:ea typeface="微软雅黑" panose="020B0503020204020204" pitchFamily="34" charset="-122"/>
+                          <a:cs typeface="微软雅黑" panose="020B0503020204020204" pitchFamily="34" charset="-122"/>
+                        </a:rPr>
+                        <a:t>谁继续完成义务</a:t>
+                      </a:r>
+                      <a:endParaRPr sz="1275" b="0">
+                        <a:solidFill>
+                          <a:schemeClr val="tx1"/>
+                        </a:solidFill>
+                        <a:latin typeface="微软雅黑" panose="020B0503020204020204" pitchFamily="34" charset="-122"/>
+                        <a:ea typeface="微软雅黑" panose="020B0503020204020204" pitchFamily="34" charset="-122"/>
+                        <a:cs typeface="微软雅黑" panose="020B0503020204020204" pitchFamily="34" charset="-122"/>
+                      </a:endParaRPr>
+                    </a:p>
+                  </a:txBody>
+                  <a:tcPr marL="91435" marR="91435" marT="45717" marB="45717">
+                    <a:solidFill>
+                      <a:schemeClr val="bg1"/>
+                    </a:solidFill>
+                  </a:tcPr>
+                </a:tc>
+              </a:tr>
+              <a:tr h="647700">
+                <a:tc>
+                  <a:txBody>
+                    <a:bodyPr/>
+                    <a:lstStyle/>
+                    <a:p>
+                      <a:r>
+                        <a:rPr sz="1275" b="1">
+                          <a:solidFill>
+                            <a:schemeClr val="tx1"/>
+                          </a:solidFill>
+                          <a:latin typeface="微软雅黑" panose="020B0503020204020204" pitchFamily="34" charset="-122"/>
+                          <a:ea typeface="微软雅黑" panose="020B0503020204020204" pitchFamily="34" charset="-122"/>
+                          <a:cs typeface="微软雅黑" panose="020B0503020204020204" pitchFamily="34" charset="-122"/>
+                        </a:rPr>
+                        <a:t>7 结算判定</a:t>
+                      </a:r>
+                      <a:endParaRPr sz="1275" b="1">
+                        <a:solidFill>
+                          <a:schemeClr val="tx1"/>
+                        </a:solidFill>
+                        <a:latin typeface="微软雅黑" panose="020B0503020204020204" pitchFamily="34" charset="-122"/>
+                        <a:ea typeface="微软雅黑" panose="020B0503020204020204" pitchFamily="34" charset="-122"/>
+                        <a:cs typeface="微软雅黑" panose="020B0503020204020204" pitchFamily="34" charset="-122"/>
+                      </a:endParaRPr>
+                    </a:p>
+                  </a:txBody>
+                  <a:tcPr marL="91435" marR="91435" marT="45717" marB="45717">
+                    <a:solidFill>
+                      <a:schemeClr val="bg1"/>
+                    </a:solidFill>
+                  </a:tcPr>
+                </a:tc>
+                <a:tc>
+                  <a:txBody>
+                    <a:bodyPr/>
+                    <a:lstStyle/>
+                    <a:p>
+                      <a:r>
+                        <a:rPr sz="1275" b="0">
+                          <a:solidFill>
+                            <a:schemeClr val="tx1"/>
+                          </a:solidFill>
+                          <a:latin typeface="微软雅黑" panose="020B0503020204020204" pitchFamily="34" charset="-122"/>
+                          <a:ea typeface="微软雅黑" panose="020B0503020204020204" pitchFamily="34" charset="-122"/>
+                          <a:cs typeface="微软雅黑" panose="020B0503020204020204" pitchFamily="34" charset="-122"/>
+                        </a:rPr>
+                        <a:t>何时检查、最终是否合法</a:t>
+                      </a:r>
+                      <a:endParaRPr sz="1275" b="0">
+                        <a:solidFill>
+                          <a:schemeClr val="tx1"/>
+                        </a:solidFill>
+                        <a:latin typeface="微软雅黑" panose="020B0503020204020204" pitchFamily="34" charset="-122"/>
+                        <a:ea typeface="微软雅黑" panose="020B0503020204020204" pitchFamily="34" charset="-122"/>
+                        <a:cs typeface="微软雅黑" panose="020B0503020204020204" pitchFamily="34" charset="-122"/>
+                      </a:endParaRPr>
+                    </a:p>
+                  </a:txBody>
+                  <a:tcPr marL="91435" marR="91435" marT="45717" marB="45717">
+                    <a:solidFill>
+                      <a:schemeClr val="bg1"/>
+                    </a:solidFill>
+                  </a:tcPr>
+                </a:tc>
+              </a:tr>
+            </a:tbl>
+          </a:graphicData>
+        </a:graphic>
+      </p:graphicFrame>
+    </p:spTree>
+  </p:cSld>
+  <p:clrMapOvr>
+    <a:masterClrMapping/>
+  </p:clrMapOvr>
+</p:sld>
+</file>
+
+<file path=ppt/slides/slide26.xml><?xml version="1.0" encoding="utf-8"?>
+<p:sld xmlns:a="http://schemas.openxmlformats.org/drawingml/2006/main" xmlns:r="http://schemas.openxmlformats.org/officeDocument/2006/relationships" xmlns:p="http://schemas.openxmlformats.org/presentationml/2006/main">
+  <p:cSld>
+    <p:spTree>
+      <p:nvGrpSpPr>
+        <p:cNvPr id="1" name=""/>
+        <p:cNvGrpSpPr/>
+        <p:nvPr/>
+      </p:nvGrpSpPr>
+      <p:grpSpPr/>
+      <p:sp>
+        <p:nvSpPr>
+          <p:cNvPr id="2" name="文本框 1"/>
+          <p:cNvSpPr txBox="1"/>
+          <p:nvPr/>
+        </p:nvSpPr>
+        <p:spPr>
+          <a:xfrm>
+            <a:off x="459105" y="130810"/>
+            <a:ext cx="4064000" cy="368300"/>
+          </a:xfrm>
+          <a:prstGeom prst="rect">
+            <a:avLst/>
+          </a:prstGeom>
+          <a:noFill/>
+        </p:spPr>
+        <p:txBody>
+          <a:bodyPr wrap="square" rtlCol="0">
+            <a:spAutoFit/>
+          </a:bodyPr>
+          <a:p>
+            <a:r>
+              <a:rPr lang="en-US" altLang="zh-CN"/>
+              <a:t>Bug</a:t>
+            </a:r>
+            <a:r>
+              <a:rPr lang="zh-CN" altLang="en-US"/>
+              <a:t>展示</a:t>
+            </a:r>
+            <a:endParaRPr lang="zh-CN" altLang="en-US"/>
+          </a:p>
+        </p:txBody>
+      </p:sp>
+      <p:sp>
+        <p:nvSpPr>
+          <p:cNvPr id="3" name="文本框 2"/>
+          <p:cNvSpPr txBox="1"/>
+          <p:nvPr/>
+        </p:nvSpPr>
+        <p:spPr>
+          <a:xfrm>
+            <a:off x="357505" y="629285"/>
+            <a:ext cx="7384415" cy="5631180"/>
+          </a:xfrm>
+          <a:prstGeom prst="rect">
+            <a:avLst/>
+          </a:prstGeom>
+          <a:noFill/>
+        </p:spPr>
+        <p:txBody>
+          <a:bodyPr wrap="square" rtlCol="0">
+            <a:noAutofit/>
+          </a:bodyPr>
+          <a:p>
+            <a:r>
+              <a:rPr lang="en-US" altLang="zh-CN"/>
+              <a:t>int fs_link(struct inode *dir, const char *name, struct inode *inode)</a:t>
+            </a:r>
+            <a:endParaRPr lang="en-US" altLang="zh-CN"/>
+          </a:p>
+          <a:p>
+            <a:r>
+              <a:rPr lang="en-US" altLang="zh-CN"/>
+              <a:t>{</a:t>
+            </a:r>
+            <a:endParaRPr lang="en-US" altLang="zh-CN"/>
+          </a:p>
+          <a:p>
+            <a:r>
+              <a:rPr lang="en-US" altLang="zh-CN"/>
+              <a:t>    int ret;</a:t>
+            </a:r>
+            <a:endParaRPr lang="en-US" altLang="zh-CN"/>
+          </a:p>
+          <a:p>
+            <a:endParaRPr lang="en-US" altLang="zh-CN"/>
+          </a:p>
+          <a:p>
+            <a:r>
+              <a:rPr lang="en-US" altLang="zh-CN"/>
+              <a:t>    ret = insert_dirent(dir, name, inode);</a:t>
+            </a:r>
+            <a:endParaRPr lang="en-US" altLang="zh-CN"/>
+          </a:p>
+          <a:p>
+            <a:r>
+              <a:rPr lang="en-US" altLang="zh-CN"/>
+              <a:t>    if (ret)</a:t>
+            </a:r>
+            <a:endParaRPr lang="en-US" altLang="zh-CN"/>
+          </a:p>
+          <a:p>
+            <a:r>
+              <a:rPr lang="en-US" altLang="zh-CN"/>
+              <a:t>        return ret;</a:t>
+            </a:r>
+            <a:endParaRPr lang="en-US" altLang="zh-CN"/>
+          </a:p>
+          <a:p>
+            <a:endParaRPr lang="en-US" altLang="zh-CN"/>
+          </a:p>
+          <a:p>
+            <a:r>
+              <a:rPr lang="en-US" altLang="zh-CN"/>
+              <a:t>    inc_nlink(inode);</a:t>
+            </a:r>
+            <a:endParaRPr lang="en-US" altLang="zh-CN"/>
+          </a:p>
+          <a:p>
+            <a:endParaRPr lang="en-US" altLang="zh-CN"/>
+          </a:p>
+          <a:p>
+            <a:r>
+              <a:rPr lang="en-US" altLang="zh-CN"/>
+              <a:t>    ret = journal_metadata(dir, inode);</a:t>
+            </a:r>
+            <a:endParaRPr lang="en-US" altLang="zh-CN"/>
+          </a:p>
+          <a:p>
+            <a:r>
+              <a:rPr lang="en-US" altLang="zh-CN"/>
+              <a:t>    if (ret)</a:t>
+            </a:r>
+            <a:endParaRPr lang="en-US" altLang="zh-CN"/>
+          </a:p>
+          <a:p>
+            <a:r>
+              <a:rPr lang="en-US" altLang="zh-CN"/>
+              <a:t>        goto rollback;</a:t>
+            </a:r>
+            <a:endParaRPr lang="en-US" altLang="zh-CN"/>
+          </a:p>
+          <a:p>
+            <a:endParaRPr lang="en-US" altLang="zh-CN"/>
+          </a:p>
+          <a:p>
+            <a:r>
+              <a:rPr lang="en-US" altLang="zh-CN"/>
+              <a:t>    return 0;</a:t>
+            </a:r>
+            <a:endParaRPr lang="en-US" altLang="zh-CN"/>
+          </a:p>
+          <a:p>
+            <a:endParaRPr lang="en-US" altLang="zh-CN"/>
+          </a:p>
+          <a:p>
+            <a:r>
+              <a:rPr lang="en-US" altLang="zh-CN"/>
+              <a:t>rollback:</a:t>
+            </a:r>
+            <a:endParaRPr lang="en-US" altLang="zh-CN"/>
+          </a:p>
+          <a:p>
+            <a:r>
+              <a:rPr lang="en-US" altLang="zh-CN"/>
+              <a:t>    remove_dirent(dir, name);</a:t>
+            </a:r>
+            <a:endParaRPr lang="en-US" altLang="zh-CN"/>
+          </a:p>
+          <a:p>
+            <a:r>
+              <a:rPr lang="en-US" altLang="zh-CN"/>
+              <a:t>        return ret;</a:t>
+            </a:r>
+            <a:endParaRPr lang="en-US" altLang="zh-CN"/>
+          </a:p>
+          <a:p>
+            <a:r>
+              <a:rPr lang="en-US" altLang="zh-CN"/>
+              <a:t>}</a:t>
+            </a:r>
+            <a:endParaRPr lang="en-US" altLang="zh-CN"/>
+          </a:p>
+        </p:txBody>
+      </p:sp>
+      <p:sp>
+        <p:nvSpPr>
+          <p:cNvPr id="4" name="文本框 3"/>
+          <p:cNvSpPr txBox="1"/>
+          <p:nvPr/>
+        </p:nvSpPr>
+        <p:spPr>
+          <a:xfrm>
+            <a:off x="5507990" y="1969770"/>
+            <a:ext cx="4064000" cy="2306955"/>
+          </a:xfrm>
+          <a:prstGeom prst="rect">
+            <a:avLst/>
+          </a:prstGeom>
+          <a:noFill/>
+        </p:spPr>
+        <p:txBody>
+          <a:bodyPr wrap="square" rtlCol="0">
+            <a:spAutoFit/>
+          </a:bodyPr>
+          <a:p>
+            <a:r>
+              <a:rPr lang="zh-CN" altLang="en-US"/>
+              <a:t>从单个字段看：</a:t>
+            </a:r>
+            <a:endParaRPr lang="zh-CN" altLang="en-US"/>
+          </a:p>
+          <a:p>
+            <a:r>
+              <a:rPr lang="zh-CN" altLang="en-US"/>
+              <a:t>目录项已经删除</a:t>
+            </a:r>
+            <a:endParaRPr lang="zh-CN" altLang="en-US"/>
+          </a:p>
+          <a:p>
+            <a:r>
+              <a:rPr lang="zh-CN" altLang="en-US"/>
+              <a:t>函数也返回了错误</a:t>
+            </a:r>
+            <a:endParaRPr lang="zh-CN" altLang="en-US"/>
+          </a:p>
+          <a:p>
+            <a:r>
+              <a:rPr lang="zh-CN" altLang="en-US"/>
+              <a:t>似乎完成了回滚。</a:t>
+            </a:r>
+            <a:endParaRPr lang="zh-CN" altLang="en-US"/>
+          </a:p>
+          <a:p>
+            <a:r>
+              <a:rPr lang="zh-CN" altLang="en-US"/>
+              <a:t>但联合检查两个对象后发现：</a:t>
+            </a:r>
+            <a:endParaRPr lang="zh-CN" altLang="en-US"/>
+          </a:p>
+          <a:p>
+            <a:r>
+              <a:rPr lang="zh-CN" altLang="en-US"/>
+              <a:t>目录项对</a:t>
+            </a:r>
+            <a:r>
+              <a:rPr lang="en-US" altLang="zh-CN"/>
+              <a:t> inode </a:t>
+            </a:r>
+            <a:r>
+              <a:rPr lang="zh-CN" altLang="en-US"/>
+              <a:t>的引用增量</a:t>
+            </a:r>
+            <a:r>
+              <a:rPr lang="en-US" altLang="zh-CN"/>
+              <a:t> = 0</a:t>
+            </a:r>
+            <a:endParaRPr lang="en-US" altLang="zh-CN"/>
+          </a:p>
+          <a:p>
+            <a:r>
+              <a:rPr lang="en-US" altLang="zh-CN"/>
+              <a:t>inode link count </a:t>
+            </a:r>
+            <a:r>
+              <a:rPr lang="zh-CN" altLang="en-US"/>
+              <a:t>增量</a:t>
+            </a:r>
+            <a:r>
+              <a:rPr lang="en-US" altLang="zh-CN"/>
+              <a:t>      = +1</a:t>
+            </a:r>
+            <a:endParaRPr lang="en-US" altLang="zh-CN"/>
+          </a:p>
+          <a:p>
+            <a:r>
+              <a:rPr lang="zh-CN" altLang="en-US"/>
+              <a:t>关系不再一致。</a:t>
+            </a:r>
+            <a:endParaRPr lang="zh-CN" altLang="en-US"/>
+          </a:p>
+        </p:txBody>
+      </p:sp>
+    </p:spTree>
+  </p:cSld>
+  <p:clrMapOvr>
+    <a:masterClrMapping/>
+  </p:clrMapOvr>
+</p:sld>
+</file>
+
+<file path=ppt/slides/slide27.xml><?xml version="1.0" encoding="utf-8"?>
+<p:sld xmlns:a="http://schemas.openxmlformats.org/drawingml/2006/main" xmlns:r="http://schemas.openxmlformats.org/officeDocument/2006/relationships" xmlns:p="http://schemas.openxmlformats.org/presentationml/2006/main">
+  <p:cSld>
+    <p:spTree>
+      <p:nvGrpSpPr>
+        <p:cNvPr id="1" name=""/>
+        <p:cNvGrpSpPr/>
+        <p:nvPr/>
+      </p:nvGrpSpPr>
+      <p:grpSpPr/>
+      <p:sp>
+        <p:nvSpPr>
+          <p:cNvPr id="3" name="文本框 2"/>
+          <p:cNvSpPr txBox="1"/>
+          <p:nvPr/>
+        </p:nvSpPr>
+        <p:spPr>
+          <a:xfrm>
+            <a:off x="242570" y="238760"/>
+            <a:ext cx="4064000" cy="1753235"/>
+          </a:xfrm>
+          <a:prstGeom prst="rect">
+            <a:avLst/>
+          </a:prstGeom>
+          <a:noFill/>
+        </p:spPr>
+        <p:txBody>
+          <a:bodyPr wrap="square" rtlCol="0">
+            <a:spAutoFit/>
+          </a:bodyPr>
+          <a:p>
+            <a:r>
+              <a:rPr lang="en-US" altLang="zh-CN"/>
+              <a:t>1. </a:t>
+            </a:r>
+            <a:r>
+              <a:rPr lang="zh-CN" altLang="en-US"/>
+              <a:t>提取源码</a:t>
+            </a:r>
+            <a:r>
+              <a:rPr lang="en-US" altLang="zh-CN"/>
+              <a:t> effect</a:t>
+            </a:r>
+            <a:endParaRPr lang="en-US" altLang="zh-CN"/>
+          </a:p>
+          <a:p>
+            <a:r>
+              <a:rPr lang="en-US" altLang="zh-CN"/>
+              <a:t>insert_dirent(dir, name, inode)</a:t>
+            </a:r>
+            <a:endParaRPr lang="en-US" altLang="zh-CN"/>
+          </a:p>
+          <a:p>
+            <a:r>
+              <a:rPr lang="en-US" altLang="zh-CN"/>
+              <a:t>inc_nlink(inode)</a:t>
+            </a:r>
+            <a:endParaRPr lang="en-US" altLang="zh-CN"/>
+          </a:p>
+          <a:p>
+            <a:r>
+              <a:rPr lang="en-US" altLang="zh-CN"/>
+              <a:t>journal_metadata(...) fails</a:t>
+            </a:r>
+            <a:endParaRPr lang="en-US" altLang="zh-CN"/>
+          </a:p>
+          <a:p>
+            <a:r>
+              <a:rPr lang="en-US" altLang="zh-CN"/>
+              <a:t>remove_dirent(dir, name, inode)</a:t>
+            </a:r>
+            <a:endParaRPr lang="en-US" altLang="zh-CN"/>
+          </a:p>
+          <a:p>
+            <a:r>
+              <a:rPr lang="en-US" altLang="zh-CN"/>
+              <a:t>return error</a:t>
+            </a:r>
+            <a:endParaRPr lang="zh-CN" altLang="en-US"/>
+          </a:p>
+        </p:txBody>
+      </p:sp>
+      <p:sp>
+        <p:nvSpPr>
+          <p:cNvPr id="4" name="文本框 3"/>
+          <p:cNvSpPr txBox="1"/>
+          <p:nvPr/>
+        </p:nvSpPr>
+        <p:spPr>
+          <a:xfrm>
+            <a:off x="242570" y="2225675"/>
+            <a:ext cx="4064000" cy="4246245"/>
+          </a:xfrm>
+          <a:prstGeom prst="rect">
+            <a:avLst/>
+          </a:prstGeom>
+          <a:noFill/>
+        </p:spPr>
+        <p:txBody>
+          <a:bodyPr wrap="square" rtlCol="0">
+            <a:spAutoFit/>
+          </a:bodyPr>
+          <a:p>
+            <a:r>
+              <a:rPr lang="en-US" altLang="zh-CN"/>
+              <a:t>2. </a:t>
+            </a:r>
+            <a:r>
+              <a:rPr lang="zh-CN" altLang="en-US"/>
+              <a:t>转成类型化事件</a:t>
+            </a:r>
+            <a:endParaRPr lang="zh-CN" altLang="en-US"/>
+          </a:p>
+          <a:p>
+            <a:r>
+              <a:rPr lang="en-US" altLang="zh-CN"/>
+              <a:t>REFERENCE_ADD(</a:t>
+            </a:r>
+            <a:endParaRPr lang="en-US" altLang="zh-CN"/>
+          </a:p>
+          <a:p>
+            <a:r>
+              <a:rPr lang="en-US" altLang="zh-CN"/>
+              <a:t>    source = Dirent(dir, name),</a:t>
+            </a:r>
+            <a:endParaRPr lang="en-US" altLang="zh-CN"/>
+          </a:p>
+          <a:p>
+            <a:r>
+              <a:rPr lang="en-US" altLang="zh-CN"/>
+              <a:t>    target = inode</a:t>
+            </a:r>
+            <a:endParaRPr lang="en-US" altLang="zh-CN"/>
+          </a:p>
+          <a:p>
+            <a:r>
+              <a:rPr lang="en-US" altLang="zh-CN"/>
+              <a:t>)</a:t>
+            </a:r>
+            <a:endParaRPr lang="en-US" altLang="zh-CN"/>
+          </a:p>
+          <a:p>
+            <a:endParaRPr lang="en-US" altLang="zh-CN"/>
+          </a:p>
+          <a:p>
+            <a:r>
+              <a:rPr lang="en-US" altLang="zh-CN"/>
+              <a:t>COUNTER_DELTA(</a:t>
+            </a:r>
+            <a:endParaRPr lang="en-US" altLang="zh-CN"/>
+          </a:p>
+          <a:p>
+            <a:r>
+              <a:rPr lang="en-US" altLang="zh-CN"/>
+              <a:t>    field = inode.i_nlink,</a:t>
+            </a:r>
+            <a:endParaRPr lang="en-US" altLang="zh-CN"/>
+          </a:p>
+          <a:p>
+            <a:r>
+              <a:rPr lang="en-US" altLang="zh-CN"/>
+              <a:t>    delta = +1</a:t>
+            </a:r>
+            <a:endParaRPr lang="en-US" altLang="zh-CN"/>
+          </a:p>
+          <a:p>
+            <a:r>
+              <a:rPr lang="en-US" altLang="zh-CN"/>
+              <a:t>)</a:t>
+            </a:r>
+            <a:endParaRPr lang="en-US" altLang="zh-CN"/>
+          </a:p>
+          <a:p>
+            <a:endParaRPr lang="en-US" altLang="zh-CN"/>
+          </a:p>
+          <a:p>
+            <a:r>
+              <a:rPr lang="en-US" altLang="zh-CN"/>
+              <a:t>REFERENCE_REMOVE(</a:t>
+            </a:r>
+            <a:endParaRPr lang="en-US" altLang="zh-CN"/>
+          </a:p>
+          <a:p>
+            <a:r>
+              <a:rPr lang="en-US" altLang="zh-CN"/>
+              <a:t>    source = Dirent(dir, name),</a:t>
+            </a:r>
+            <a:endParaRPr lang="en-US" altLang="zh-CN"/>
+          </a:p>
+          <a:p>
+            <a:r>
+              <a:rPr lang="en-US" altLang="zh-CN"/>
+              <a:t>    target = inode</a:t>
+            </a:r>
+            <a:endParaRPr lang="en-US" altLang="zh-CN"/>
+          </a:p>
+          <a:p>
+            <a:r>
+              <a:rPr lang="en-US" altLang="zh-CN"/>
+              <a:t>)</a:t>
+            </a:r>
+            <a:endParaRPr lang="en-US" altLang="zh-CN"/>
+          </a:p>
+        </p:txBody>
+      </p:sp>
+      <p:sp>
+        <p:nvSpPr>
+          <p:cNvPr id="5" name="文本框 4"/>
+          <p:cNvSpPr txBox="1"/>
+          <p:nvPr/>
+        </p:nvSpPr>
+        <p:spPr>
+          <a:xfrm>
+            <a:off x="5189855" y="400685"/>
+            <a:ext cx="4064000" cy="1753235"/>
+          </a:xfrm>
+          <a:prstGeom prst="rect">
+            <a:avLst/>
+          </a:prstGeom>
+          <a:noFill/>
+        </p:spPr>
+        <p:txBody>
+          <a:bodyPr wrap="square" rtlCol="0">
+            <a:spAutoFit/>
+          </a:bodyPr>
+          <a:p>
+            <a:r>
+              <a:rPr lang="en-US" altLang="zh-CN"/>
+              <a:t>DirectoryLinkInstance {</a:t>
+            </a:r>
+            <a:endParaRPr lang="en-US" altLang="zh-CN"/>
+          </a:p>
+          <a:p>
+            <a:r>
+              <a:rPr lang="en-US" altLang="zh-CN"/>
+              <a:t>    directory = dir#A</a:t>
+            </a:r>
+            <a:endParaRPr lang="en-US" altLang="zh-CN"/>
+          </a:p>
+          <a:p>
+            <a:r>
+              <a:rPr lang="en-US" altLang="zh-CN"/>
+              <a:t>    inode     = inode#B</a:t>
+            </a:r>
+            <a:endParaRPr lang="en-US" altLang="zh-CN"/>
+          </a:p>
+          <a:p>
+            <a:r>
+              <a:rPr lang="en-US" altLang="zh-CN"/>
+              <a:t>    name      = "new_name"</a:t>
+            </a:r>
+            <a:endParaRPr lang="en-US" altLang="zh-CN"/>
+          </a:p>
+          <a:p>
+            <a:r>
+              <a:rPr lang="en-US" altLang="zh-CN"/>
+              <a:t>    epoch     = current link attempt</a:t>
+            </a:r>
+            <a:endParaRPr lang="en-US" altLang="zh-CN"/>
+          </a:p>
+          <a:p>
+            <a:r>
+              <a:rPr lang="en-US" altLang="zh-CN"/>
+              <a:t>}</a:t>
+            </a:r>
+            <a:endParaRPr lang="en-US" altLang="zh-CN"/>
+          </a:p>
+        </p:txBody>
+      </p:sp>
+      <p:sp>
+        <p:nvSpPr>
+          <p:cNvPr id="6" name="文本框 5"/>
+          <p:cNvSpPr txBox="1"/>
+          <p:nvPr/>
+        </p:nvSpPr>
+        <p:spPr>
+          <a:xfrm>
+            <a:off x="5325110" y="171450"/>
+            <a:ext cx="4064000" cy="368300"/>
+          </a:xfrm>
+          <a:prstGeom prst="rect">
+            <a:avLst/>
+          </a:prstGeom>
+          <a:noFill/>
+        </p:spPr>
+        <p:txBody>
+          <a:bodyPr wrap="square" rtlCol="0">
+            <a:spAutoFit/>
+          </a:bodyPr>
+          <a:p>
+            <a:r>
+              <a:rPr lang="en-US" altLang="zh-CN"/>
+              <a:t>3. </a:t>
+            </a:r>
+            <a:r>
+              <a:rPr lang="zh-CN" altLang="en-US"/>
+              <a:t>重建协议实例</a:t>
+            </a:r>
+            <a:endParaRPr lang="zh-CN" altLang="en-US"/>
+          </a:p>
+        </p:txBody>
+      </p:sp>
+      <p:sp>
+        <p:nvSpPr>
+          <p:cNvPr id="7" name="文本框 6"/>
+          <p:cNvSpPr txBox="1"/>
+          <p:nvPr/>
+        </p:nvSpPr>
+        <p:spPr>
+          <a:xfrm>
+            <a:off x="5703570" y="2590800"/>
+            <a:ext cx="4064000" cy="3692525"/>
+          </a:xfrm>
+          <a:prstGeom prst="rect">
+            <a:avLst/>
+          </a:prstGeom>
+          <a:noFill/>
+        </p:spPr>
+        <p:txBody>
+          <a:bodyPr wrap="square" rtlCol="0">
+            <a:spAutoFit/>
+          </a:bodyPr>
+          <a:p>
+            <a:r>
+              <a:rPr lang="en-US" altLang="zh-CN"/>
+              <a:t>4. </a:t>
+            </a:r>
+            <a:r>
+              <a:rPr lang="zh-CN" altLang="en-US"/>
+              <a:t>计算状态增量</a:t>
+            </a:r>
+            <a:endParaRPr lang="zh-CN" altLang="en-US"/>
+          </a:p>
+          <a:p>
+            <a:r>
+              <a:rPr lang="en-US" altLang="zh-CN"/>
+              <a:t>S0:</a:t>
+            </a:r>
+            <a:endParaRPr lang="en-US" altLang="zh-CN"/>
+          </a:p>
+          <a:p>
+            <a:r>
+              <a:rPr lang="en-US" altLang="zh-CN"/>
+              <a:t>  reference = absent</a:t>
+            </a:r>
+            <a:endParaRPr lang="en-US" altLang="zh-CN"/>
+          </a:p>
+          <a:p>
+            <a:r>
+              <a:rPr lang="en-US" altLang="zh-CN"/>
+              <a:t>  i_nlink = N</a:t>
+            </a:r>
+            <a:endParaRPr lang="en-US" altLang="zh-CN"/>
+          </a:p>
+          <a:p>
+            <a:endParaRPr lang="en-US" altLang="zh-CN"/>
+          </a:p>
+          <a:p>
+            <a:r>
+              <a:rPr lang="en-US" altLang="zh-CN"/>
+              <a:t>Δ:</a:t>
+            </a:r>
+            <a:endParaRPr lang="en-US" altLang="zh-CN"/>
+          </a:p>
+          <a:p>
+            <a:r>
+              <a:rPr lang="en-US" altLang="zh-CN"/>
+              <a:t>  reference += 1</a:t>
+            </a:r>
+            <a:endParaRPr lang="en-US" altLang="zh-CN"/>
+          </a:p>
+          <a:p>
+            <a:r>
+              <a:rPr lang="en-US" altLang="zh-CN"/>
+              <a:t>  i_nlink += 1</a:t>
+            </a:r>
+            <a:endParaRPr lang="en-US" altLang="zh-CN"/>
+          </a:p>
+          <a:p>
+            <a:r>
+              <a:rPr lang="en-US" altLang="zh-CN"/>
+              <a:t>  reference -= 1</a:t>
+            </a:r>
+            <a:endParaRPr lang="en-US" altLang="zh-CN"/>
+          </a:p>
+          <a:p>
+            <a:endParaRPr lang="en-US" altLang="zh-CN"/>
+          </a:p>
+          <a:p>
+            <a:r>
+              <a:rPr lang="en-US" altLang="zh-CN"/>
+              <a:t>Sf:</a:t>
+            </a:r>
+            <a:endParaRPr lang="en-US" altLang="zh-CN"/>
+          </a:p>
+          <a:p>
+            <a:r>
+              <a:rPr lang="en-US" altLang="zh-CN"/>
+              <a:t>  reference = absent</a:t>
+            </a:r>
+            <a:endParaRPr lang="en-US" altLang="zh-CN"/>
+          </a:p>
+          <a:p>
+            <a:r>
+              <a:rPr lang="en-US" altLang="zh-CN"/>
+              <a:t>  i_nlink = N + 1</a:t>
+            </a:r>
+            <a:endParaRPr lang="en-US" altLang="zh-CN"/>
+          </a:p>
+        </p:txBody>
+      </p:sp>
+    </p:spTree>
+  </p:cSld>
+  <p:clrMapOvr>
+    <a:masterClrMapping/>
+  </p:clrMapOvr>
+</p:sld>
+</file>
+
+<file path=ppt/slides/slide28.xml><?xml version="1.0" encoding="utf-8"?>
+<p:sld xmlns:a="http://schemas.openxmlformats.org/drawingml/2006/main" xmlns:r="http://schemas.openxmlformats.org/officeDocument/2006/relationships" xmlns:p="http://schemas.openxmlformats.org/presentationml/2006/main">
+  <p:cSld>
+    <p:spTree>
+      <p:nvGrpSpPr>
+        <p:cNvPr id="1" name=""/>
+        <p:cNvGrpSpPr/>
+        <p:nvPr/>
+      </p:nvGrpSpPr>
+      <p:grpSpPr/>
+      <p:sp>
+        <p:nvSpPr>
+          <p:cNvPr id="2" name="文本框 1"/>
+          <p:cNvSpPr txBox="1"/>
+          <p:nvPr/>
+        </p:nvSpPr>
+        <p:spPr>
+          <a:xfrm>
+            <a:off x="661670" y="144145"/>
+            <a:ext cx="5434330" cy="6176645"/>
+          </a:xfrm>
+          <a:prstGeom prst="rect">
+            <a:avLst/>
+          </a:prstGeom>
+          <a:noFill/>
+        </p:spPr>
+        <p:txBody>
+          <a:bodyPr wrap="square" rtlCol="0">
+            <a:noAutofit/>
+          </a:bodyPr>
+          <a:p>
+            <a:r>
+              <a:rPr lang="en-US" altLang="zh-CN"/>
+              <a:t>5. </a:t>
+            </a:r>
+            <a:r>
+              <a:rPr lang="zh-CN" altLang="en-US"/>
+              <a:t>产生未完成义务</a:t>
+            </a:r>
+            <a:endParaRPr lang="zh-CN" altLang="en-US"/>
+          </a:p>
+          <a:p>
+            <a:r>
+              <a:rPr lang="zh-CN" altLang="en-US"/>
+              <a:t>执行：</a:t>
+            </a:r>
+            <a:endParaRPr lang="zh-CN" altLang="en-US"/>
+          </a:p>
+          <a:p>
+            <a:r>
+              <a:rPr lang="en-US" altLang="zh-CN"/>
+              <a:t>REFERENCE_REMOVE(dirent, inode)</a:t>
+            </a:r>
+            <a:endParaRPr lang="en-US" altLang="zh-CN"/>
+          </a:p>
+          <a:p>
+            <a:r>
+              <a:rPr lang="zh-CN" altLang="en-US"/>
+              <a:t>后，协议要求：</a:t>
+            </a:r>
+            <a:endParaRPr lang="zh-CN" altLang="en-US"/>
+          </a:p>
+          <a:p>
+            <a:r>
+              <a:rPr lang="en-US" altLang="zh-CN"/>
+              <a:t>COUNTER_DELTA(inode.i_nlink, -1)</a:t>
+            </a:r>
+            <a:endParaRPr lang="en-US" altLang="zh-CN"/>
+          </a:p>
+          <a:p>
+            <a:r>
+              <a:rPr lang="zh-CN" altLang="en-US"/>
+              <a:t>但错误路径中不存在这个事件，因此：</a:t>
+            </a:r>
+            <a:endParaRPr lang="zh-CN" altLang="en-US"/>
+          </a:p>
+          <a:p>
+            <a:r>
+              <a:rPr lang="en-US" altLang="zh-CN"/>
+              <a:t>Obligation:</a:t>
+            </a:r>
+            <a:endParaRPr lang="en-US" altLang="zh-CN"/>
+          </a:p>
+          <a:p>
+            <a:r>
+              <a:rPr lang="en-US" altLang="zh-CN"/>
+              <a:t>  type     = RESTORE_LINK_COUNT</a:t>
+            </a:r>
+            <a:endParaRPr lang="en-US" altLang="zh-CN"/>
+          </a:p>
+          <a:p>
+            <a:r>
+              <a:rPr lang="en-US" altLang="zh-CN"/>
+              <a:t>  state    = OPEN</a:t>
+            </a:r>
+            <a:endParaRPr lang="en-US" altLang="zh-CN"/>
+          </a:p>
+          <a:p>
+            <a:r>
+              <a:rPr lang="en-US" altLang="zh-CN"/>
+              <a:t>  deadline = OperationReturn</a:t>
+            </a:r>
+            <a:endParaRPr lang="en-US" altLang="zh-CN"/>
+          </a:p>
+          <a:p>
+            <a:endParaRPr lang="en-US" altLang="zh-CN"/>
+          </a:p>
+          <a:p>
+            <a:r>
+              <a:rPr lang="en-US" altLang="zh-CN"/>
+              <a:t>6. </a:t>
+            </a:r>
+            <a:r>
+              <a:rPr lang="zh-CN" altLang="en-US"/>
+              <a:t>结算与报告</a:t>
+            </a:r>
+            <a:endParaRPr lang="zh-CN" altLang="en-US"/>
+          </a:p>
+          <a:p>
+            <a:r>
+              <a:rPr lang="zh-CN" altLang="en-US"/>
+              <a:t>到达错误返回时：</a:t>
+            </a:r>
+            <a:endParaRPr lang="zh-CN" altLang="en-US"/>
+          </a:p>
+          <a:p>
+            <a:r>
+              <a:rPr lang="en-US" altLang="zh-CN"/>
+              <a:t>phase                = ABORTED</a:t>
+            </a:r>
+            <a:endParaRPr lang="en-US" altLang="zh-CN"/>
+          </a:p>
+          <a:p>
+            <a:r>
+              <a:rPr lang="en-US" altLang="zh-CN"/>
+              <a:t>dirent                = absent</a:t>
+            </a:r>
+            <a:endParaRPr lang="en-US" altLang="zh-CN"/>
+          </a:p>
+          <a:p>
+            <a:r>
+              <a:rPr lang="en-US" altLang="zh-CN"/>
+              <a:t>inode.i_nlink         = N + 1</a:t>
+            </a:r>
+            <a:endParaRPr lang="en-US" altLang="zh-CN"/>
+          </a:p>
+          <a:p>
+            <a:r>
+              <a:rPr lang="en-US" altLang="zh-CN"/>
+              <a:t>RESTORE_LINK_COUNT    = OPEN</a:t>
+            </a:r>
+            <a:endParaRPr lang="en-US" altLang="zh-CN"/>
+          </a:p>
+          <a:p>
+            <a:r>
+              <a:rPr lang="en-US" altLang="zh-CN"/>
+              <a:t>valid recovery claim = none</a:t>
+            </a:r>
+            <a:endParaRPr lang="en-US" altLang="zh-CN"/>
+          </a:p>
+          <a:p>
+            <a:r>
+              <a:rPr lang="en-US" altLang="zh-CN"/>
+              <a:t>outcome               = error</a:t>
+            </a:r>
+            <a:endParaRPr lang="en-US" altLang="zh-CN"/>
+          </a:p>
+          <a:p>
+            <a:r>
+              <a:rPr lang="zh-CN" altLang="en-US"/>
+              <a:t>返回值与失败阶段一致，但跨对象关系不一致：</a:t>
+            </a:r>
+            <a:endParaRPr lang="zh-CN" altLang="en-US"/>
+          </a:p>
+          <a:p>
+            <a:r>
+              <a:rPr lang="en-US" altLang="zh-CN"/>
+              <a:t>AcceptP = false</a:t>
+            </a:r>
+            <a:endParaRPr lang="en-US" altLang="zh-CN"/>
+          </a:p>
+        </p:txBody>
+      </p:sp>
+    </p:spTree>
+  </p:cSld>
+  <p:clrMapOvr>
+    <a:masterClrMapping/>
+  </p:clrMapOvr>
+</p:sld>
+</file>
+
+<file path=ppt/slides/slide29.xml><?xml version="1.0" encoding="utf-8"?>
+<p:sld xmlns:a="http://schemas.openxmlformats.org/drawingml/2006/main" xmlns:r="http://schemas.openxmlformats.org/officeDocument/2006/relationships" xmlns:p="http://schemas.openxmlformats.org/presentationml/2006/main">
+  <p:cSld>
+    <p:spTree>
+      <p:nvGrpSpPr>
+        <p:cNvPr id="1" name=""/>
+        <p:cNvGrpSpPr/>
+        <p:nvPr/>
+      </p:nvGrpSpPr>
+      <p:grpSpPr/>
+      <p:sp>
+        <p:nvSpPr>
+          <p:cNvPr id="2" name="文本框 1"/>
+          <p:cNvSpPr txBox="1"/>
+          <p:nvPr/>
+        </p:nvSpPr>
+        <p:spPr>
+          <a:xfrm>
+            <a:off x="596265" y="196850"/>
+            <a:ext cx="4064000" cy="368300"/>
+          </a:xfrm>
+          <a:prstGeom prst="rect">
+            <a:avLst/>
+          </a:prstGeom>
+          <a:noFill/>
+        </p:spPr>
+        <p:txBody>
+          <a:bodyPr wrap="square" rtlCol="0">
+            <a:spAutoFit/>
+          </a:bodyPr>
+          <a:p>
+            <a:r>
+              <a:rPr lang="en-US" altLang="zh-CN"/>
+              <a:t>statetype</a:t>
+            </a:r>
+            <a:endParaRPr lang="en-US" altLang="zh-CN"/>
+          </a:p>
+        </p:txBody>
+      </p:sp>
+      <p:sp>
+        <p:nvSpPr>
+          <p:cNvPr id="3" name="文本框 2"/>
+          <p:cNvSpPr txBox="1"/>
+          <p:nvPr/>
+        </p:nvSpPr>
+        <p:spPr>
+          <a:xfrm>
+            <a:off x="805815" y="698500"/>
+            <a:ext cx="9512300" cy="833755"/>
+          </a:xfrm>
+          <a:prstGeom prst="rect">
+            <a:avLst/>
+          </a:prstGeom>
+          <a:noFill/>
+        </p:spPr>
+        <p:txBody>
+          <a:bodyPr wrap="square" rtlCol="0">
+            <a:noAutofit/>
+          </a:bodyPr>
+          <a:p>
+            <a:r>
+              <a:rPr lang="zh-CN" altLang="en-US"/>
+              <a:t>由编译器静态追踪对象当前处于什么状态，并根据该状态决定此刻允许执行哪些操作。</a:t>
+            </a:r>
+            <a:endParaRPr lang="zh-CN" altLang="en-US"/>
+          </a:p>
+        </p:txBody>
+      </p:sp>
+    </p:spTree>
+  </p:cSld>
+  <p:clrMapOvr>
+    <a:masterClrMapping/>
+  </p:clrMapOvr>
+</p:sld>
+</file>
+
 <file path=ppt/slides/slide3.xml><?xml version="1.0" encoding="utf-8"?>
 <p:sld xmlns:a="http://schemas.openxmlformats.org/drawingml/2006/main" xmlns:r="http://schemas.openxmlformats.org/officeDocument/2006/relationships" xmlns:p="http://schemas.openxmlformats.org/presentationml/2006/main">
   <p:cSld>
@@ -7834,19 +16666,19 @@
 
 <file path=ppt/tags/tag10.xml><?xml version="1.0" encoding="utf-8"?>
 <p:tagLst xmlns:p="http://schemas.openxmlformats.org/presentationml/2006/main">
-  <p:tag name="KSO_WM_DIAGRAM_VIRTUALLY_FRAME" val="{&quot;height&quot;:116.8,&quot;left&quot;:36,&quot;top&quot;:115.5,&quot;width&quot;:890.9}"/>
+  <p:tag name="KSO_WM_DIAGRAM_VIRTUALLY_FRAME" val="{&quot;height&quot;:116.8,&quot;left&quot;:35.99811023622047,&quot;top&quot;:115.5,&quot;width&quot;:890.9018897637795}"/>
 </p:tagLst>
 </file>
 
 <file path=ppt/tags/tag11.xml><?xml version="1.0" encoding="utf-8"?>
 <p:tagLst xmlns:p="http://schemas.openxmlformats.org/presentationml/2006/main">
-  <p:tag name="KSO_WM_DIAGRAM_VIRTUALLY_FRAME" val="{&quot;height&quot;:116.8,&quot;left&quot;:36,&quot;top&quot;:115.5,&quot;width&quot;:890.9}"/>
+  <p:tag name="KSO_WM_DIAGRAM_VIRTUALLY_FRAME" val="{&quot;height&quot;:116.8,&quot;left&quot;:35.99811023622047,&quot;top&quot;:115.5,&quot;width&quot;:890.9018897637795}"/>
 </p:tagLst>
 </file>
 
 <file path=ppt/tags/tag12.xml><?xml version="1.0" encoding="utf-8"?>
 <p:tagLst xmlns:p="http://schemas.openxmlformats.org/presentationml/2006/main">
-  <p:tag name="KSO_WM_DIAGRAM_VIRTUALLY_FRAME" val="{&quot;height&quot;:116.8,&quot;left&quot;:36,&quot;top&quot;:115.5,&quot;width&quot;:890.9}"/>
+  <p:tag name="KSO_WM_DIAGRAM_VIRTUALLY_FRAME" val="{&quot;height&quot;:116.8,&quot;left&quot;:35.99811023622047,&quot;top&quot;:115.5,&quot;width&quot;:890.9018897637795}"/>
 </p:tagLst>
 </file>
 
@@ -7868,9 +16700,93 @@
 </p:tagLst>
 </file>
 
+<file path=ppt/tags/tag16.xml><?xml version="1.0" encoding="utf-8"?>
+<p:tagLst xmlns:p="http://schemas.openxmlformats.org/presentationml/2006/main">
+  <p:tag name="KSO_WM_DIAGRAM_VIRTUALLY_FRAME" val="{&quot;height&quot;:274.49156250000004,&quot;left&quot;:280.4853543307087,&quot;top&quot;:208.50320312499997,&quot;width&quot;:524.1455050442913}"/>
+</p:tagLst>
+</file>
+
+<file path=ppt/tags/tag17.xml><?xml version="1.0" encoding="utf-8"?>
+<p:tagLst xmlns:p="http://schemas.openxmlformats.org/presentationml/2006/main">
+  <p:tag name="KSO_WM_DIAGRAM_VIRTUALLY_FRAME" val="{&quot;height&quot;:274.49156250000004,&quot;left&quot;:280.4853543307087,&quot;top&quot;:208.50320312499997,&quot;width&quot;:524.1455050442913}"/>
+</p:tagLst>
+</file>
+
+<file path=ppt/tags/tag18.xml><?xml version="1.0" encoding="utf-8"?>
+<p:tagLst xmlns:p="http://schemas.openxmlformats.org/presentationml/2006/main">
+  <p:tag name="KSO_WM_DIAGRAM_VIRTUALLY_FRAME" val="{&quot;height&quot;:274.49156250000004,&quot;left&quot;:280.4853543307087,&quot;top&quot;:208.50320312499997,&quot;width&quot;:524.1455050442913}"/>
+</p:tagLst>
+</file>
+
+<file path=ppt/tags/tag19.xml><?xml version="1.0" encoding="utf-8"?>
+<p:tagLst xmlns:p="http://schemas.openxmlformats.org/presentationml/2006/main">
+  <p:tag name="KSO_WM_DIAGRAM_VIRTUALLY_FRAME" val="{&quot;height&quot;:274.49156250000004,&quot;left&quot;:280.4853543307087,&quot;top&quot;:208.50320312499997,&quot;width&quot;:524.1455050442913}"/>
+</p:tagLst>
+</file>
+
 <file path=ppt/tags/tag2.xml><?xml version="1.0" encoding="utf-8"?>
 <p:tagLst xmlns:p="http://schemas.openxmlformats.org/presentationml/2006/main">
   <p:tag name="KSO_WM_DIAGRAM_VIRTUALLY_FRAME" val="{&quot;height&quot;:322.5,&quot;left&quot;:565.4705511811023,&quot;top&quot;:115.5,&quot;width&quot;:358.5294488188976}"/>
+</p:tagLst>
+</file>
+
+<file path=ppt/tags/tag20.xml><?xml version="1.0" encoding="utf-8"?>
+<p:tagLst xmlns:p="http://schemas.openxmlformats.org/presentationml/2006/main">
+  <p:tag name="KSO_WM_DIAGRAM_VIRTUALLY_FRAME" val="{&quot;height&quot;:274.49156250000004,&quot;left&quot;:280.4853543307087,&quot;top&quot;:208.50320312499997,&quot;width&quot;:524.1455050442913}"/>
+</p:tagLst>
+</file>
+
+<file path=ppt/tags/tag21.xml><?xml version="1.0" encoding="utf-8"?>
+<p:tagLst xmlns:p="http://schemas.openxmlformats.org/presentationml/2006/main">
+  <p:tag name="KSO_WM_DIAGRAM_VIRTUALLY_FRAME" val="{&quot;height&quot;:274.49156250000004,&quot;left&quot;:280.4853543307087,&quot;top&quot;:208.50320312499997,&quot;width&quot;:524.1455050442913}"/>
+</p:tagLst>
+</file>
+
+<file path=ppt/tags/tag22.xml><?xml version="1.0" encoding="utf-8"?>
+<p:tagLst xmlns:p="http://schemas.openxmlformats.org/presentationml/2006/main">
+  <p:tag name="KSO_WM_DIAGRAM_VIRTUALLY_FRAME" val="{&quot;height&quot;:274.49156250000004,&quot;left&quot;:280.4853543307087,&quot;top&quot;:208.50320312499997,&quot;width&quot;:524.1455050442913}"/>
+</p:tagLst>
+</file>
+
+<file path=ppt/tags/tag23.xml><?xml version="1.0" encoding="utf-8"?>
+<p:tagLst xmlns:p="http://schemas.openxmlformats.org/presentationml/2006/main">
+  <p:tag name="KSO_WM_DIAGRAM_VIRTUALLY_FRAME" val="{&quot;height&quot;:274.49156250000004,&quot;left&quot;:280.4853543307087,&quot;top&quot;:208.50320312499997,&quot;width&quot;:524.1455050442913}"/>
+</p:tagLst>
+</file>
+
+<file path=ppt/tags/tag24.xml><?xml version="1.0" encoding="utf-8"?>
+<p:tagLst xmlns:p="http://schemas.openxmlformats.org/presentationml/2006/main">
+  <p:tag name="KSO_WM_DIAGRAM_VIRTUALLY_FRAME" val="{&quot;height&quot;:274.49156250000004,&quot;left&quot;:280.4853543307087,&quot;top&quot;:208.50320312499997,&quot;width&quot;:524.1455050442913}"/>
+</p:tagLst>
+</file>
+
+<file path=ppt/tags/tag25.xml><?xml version="1.0" encoding="utf-8"?>
+<p:tagLst xmlns:p="http://schemas.openxmlformats.org/presentationml/2006/main">
+  <p:tag name="KSO_WM_DIAGRAM_VIRTUALLY_FRAME" val="{&quot;height&quot;:274.49156250000004,&quot;left&quot;:280.4853543307087,&quot;top&quot;:208.50320312499997,&quot;width&quot;:524.1455050442913}"/>
+</p:tagLst>
+</file>
+
+<file path=ppt/tags/tag26.xml><?xml version="1.0" encoding="utf-8"?>
+<p:tagLst xmlns:p="http://schemas.openxmlformats.org/presentationml/2006/main">
+  <p:tag name="KSO_WM_DIAGRAM_VIRTUALLY_FRAME" val="{&quot;height&quot;:274.49156250000004,&quot;left&quot;:280.4853543307087,&quot;top&quot;:208.50320312499997,&quot;width&quot;:524.1455050442913}"/>
+</p:tagLst>
+</file>
+
+<file path=ppt/tags/tag27.xml><?xml version="1.0" encoding="utf-8"?>
+<p:tagLst xmlns:p="http://schemas.openxmlformats.org/presentationml/2006/main">
+  <p:tag name="KSO_WM_DIAGRAM_VIRTUALLY_FRAME" val="{&quot;height&quot;:274.49156250000004,&quot;left&quot;:280.4853543307087,&quot;top&quot;:208.50320312499997,&quot;width&quot;:524.1455050442913}"/>
+</p:tagLst>
+</file>
+
+<file path=ppt/tags/tag28.xml><?xml version="1.0" encoding="utf-8"?>
+<p:tagLst xmlns:p="http://schemas.openxmlformats.org/presentationml/2006/main">
+  <p:tag name="KSO_WM_DIAGRAM_VIRTUALLY_FRAME" val="{&quot;height&quot;:274.49156250000004,&quot;left&quot;:280.4853543307087,&quot;top&quot;:208.50320312499997,&quot;width&quot;:524.1455050442913}"/>
+</p:tagLst>
+</file>
+
+<file path=ppt/tags/tag29.xml><?xml version="1.0" encoding="utf-8"?>
+<p:tagLst xmlns:p="http://schemas.openxmlformats.org/presentationml/2006/main">
+  <p:tag name="KSO_WM_DIAGRAM_VIRTUALLY_FRAME" val="{&quot;height&quot;:274.49156250000004,&quot;left&quot;:280.4853543307087,&quot;top&quot;:208.50320312499997,&quot;width&quot;:524.1455050442913}"/>
 </p:tagLst>
 </file>
 
@@ -7880,39 +16796,147 @@
 </p:tagLst>
 </file>
 
+<file path=ppt/tags/tag30.xml><?xml version="1.0" encoding="utf-8"?>
+<p:tagLst xmlns:p="http://schemas.openxmlformats.org/presentationml/2006/main">
+  <p:tag name="KSO_WM_DIAGRAM_VIRTUALLY_FRAME" val="{&quot;height&quot;:274.49156250000004,&quot;left&quot;:280.4853543307087,&quot;top&quot;:208.50320312499997,&quot;width&quot;:524.1455050442913}"/>
+</p:tagLst>
+</file>
+
+<file path=ppt/tags/tag31.xml><?xml version="1.0" encoding="utf-8"?>
+<p:tagLst xmlns:p="http://schemas.openxmlformats.org/presentationml/2006/main">
+  <p:tag name="KSO_WM_DIAGRAM_VIRTUALLY_FRAME" val="{&quot;height&quot;:274.49156250000004,&quot;left&quot;:280.4853543307087,&quot;top&quot;:208.50320312499997,&quot;width&quot;:524.1455050442913}"/>
+</p:tagLst>
+</file>
+
+<file path=ppt/tags/tag32.xml><?xml version="1.0" encoding="utf-8"?>
+<p:tagLst xmlns:p="http://schemas.openxmlformats.org/presentationml/2006/main">
+  <p:tag name="KSO_WM_DIAGRAM_VIRTUALLY_FRAME" val="{&quot;height&quot;:274.49156250000004,&quot;left&quot;:280.4853543307087,&quot;top&quot;:208.50320312499997,&quot;width&quot;:524.1455050442913}"/>
+</p:tagLst>
+</file>
+
+<file path=ppt/tags/tag33.xml><?xml version="1.0" encoding="utf-8"?>
+<p:tagLst xmlns:p="http://schemas.openxmlformats.org/presentationml/2006/main">
+  <p:tag name="KSO_WM_DIAGRAM_VIRTUALLY_FRAME" val="{&quot;height&quot;:274.49156250000004,&quot;left&quot;:280.4853543307087,&quot;top&quot;:208.50320312499997,&quot;width&quot;:524.1455050442913}"/>
+</p:tagLst>
+</file>
+
+<file path=ppt/tags/tag34.xml><?xml version="1.0" encoding="utf-8"?>
+<p:tagLst xmlns:p="http://schemas.openxmlformats.org/presentationml/2006/main">
+  <p:tag name="KSO_WM_DIAGRAM_VIRTUALLY_FRAME" val="{&quot;height&quot;:274.49156250000004,&quot;left&quot;:280.4853543307087,&quot;top&quot;:208.50320312499997,&quot;width&quot;:524.1455050442913}"/>
+</p:tagLst>
+</file>
+
+<file path=ppt/tags/tag35.xml><?xml version="1.0" encoding="utf-8"?>
+<p:tagLst xmlns:p="http://schemas.openxmlformats.org/presentationml/2006/main">
+  <p:tag name="KSO_WM_DIAGRAM_VIRTUALLY_FRAME" val="{&quot;height&quot;:274.49156250000004,&quot;left&quot;:280.4853543307087,&quot;top&quot;:208.50320312499997,&quot;width&quot;:524.1455050442913}"/>
+</p:tagLst>
+</file>
+
+<file path=ppt/tags/tag36.xml><?xml version="1.0" encoding="utf-8"?>
+<p:tagLst xmlns:p="http://schemas.openxmlformats.org/presentationml/2006/main">
+  <p:tag name="KSO_WM_DIAGRAM_VIRTUALLY_FRAME" val="{&quot;height&quot;:274.49156250000004,&quot;left&quot;:280.4853543307087,&quot;top&quot;:208.50320312499997,&quot;width&quot;:524.1455050442913}"/>
+</p:tagLst>
+</file>
+
+<file path=ppt/tags/tag37.xml><?xml version="1.0" encoding="utf-8"?>
+<p:tagLst xmlns:p="http://schemas.openxmlformats.org/presentationml/2006/main">
+  <p:tag name="KSO_WM_DIAGRAM_VIRTUALLY_FRAME" val="{&quot;height&quot;:316.6,&quot;left&quot;:20.748359374999996,&quot;top&quot;:59.85,&quot;width&quot;:888.204296875}"/>
+</p:tagLst>
+</file>
+
+<file path=ppt/tags/tag38.xml><?xml version="1.0" encoding="utf-8"?>
+<p:tagLst xmlns:p="http://schemas.openxmlformats.org/presentationml/2006/main">
+  <p:tag name="KSO_WM_DIAGRAM_VIRTUALLY_FRAME" val="{&quot;height&quot;:316.6,&quot;left&quot;:20.748359374999996,&quot;top&quot;:59.85,&quot;width&quot;:888.204296875}"/>
+</p:tagLst>
+</file>
+
+<file path=ppt/tags/tag39.xml><?xml version="1.0" encoding="utf-8"?>
+<p:tagLst xmlns:p="http://schemas.openxmlformats.org/presentationml/2006/main">
+  <p:tag name="KSO_WM_DIAGRAM_VIRTUALLY_FRAME" val="{&quot;height&quot;:316.6,&quot;left&quot;:20.748359374999996,&quot;top&quot;:59.85,&quot;width&quot;:888.204296875}"/>
+</p:tagLst>
+</file>
+
 <file path=ppt/tags/tag4.xml><?xml version="1.0" encoding="utf-8"?>
 <p:tagLst xmlns:p="http://schemas.openxmlformats.org/presentationml/2006/main">
-  <p:tag name="KSO_WM_DIAGRAM_VIRTUALLY_FRAME" val="{&quot;height&quot;:116.8,&quot;left&quot;:36,&quot;top&quot;:115.5,&quot;width&quot;:890.9}"/>
+  <p:tag name="KSO_WM_DIAGRAM_VIRTUALLY_FRAME" val="{&quot;height&quot;:116.8,&quot;left&quot;:35.99811023622047,&quot;top&quot;:115.5,&quot;width&quot;:890.9018897637795}"/>
+</p:tagLst>
+</file>
+
+<file path=ppt/tags/tag40.xml><?xml version="1.0" encoding="utf-8"?>
+<p:tagLst xmlns:p="http://schemas.openxmlformats.org/presentationml/2006/main">
+  <p:tag name="KSO_WM_DIAGRAM_VIRTUALLY_FRAME" val="{&quot;height&quot;:316.6,&quot;left&quot;:20.748359374999996,&quot;top&quot;:59.85,&quot;width&quot;:888.204296875}"/>
+</p:tagLst>
+</file>
+
+<file path=ppt/tags/tag41.xml><?xml version="1.0" encoding="utf-8"?>
+<p:tagLst xmlns:p="http://schemas.openxmlformats.org/presentationml/2006/main">
+  <p:tag name="KSO_WM_DIAGRAM_VIRTUALLY_FRAME" val="{&quot;height&quot;:316.6,&quot;left&quot;:20.748359374999996,&quot;top&quot;:59.85,&quot;width&quot;:888.204296875}"/>
+</p:tagLst>
+</file>
+
+<file path=ppt/tags/tag42.xml><?xml version="1.0" encoding="utf-8"?>
+<p:tagLst xmlns:p="http://schemas.openxmlformats.org/presentationml/2006/main">
+  <p:tag name="KSO_WM_DIAGRAM_VIRTUALLY_FRAME" val="{&quot;height&quot;:316.6,&quot;left&quot;:20.748359374999996,&quot;top&quot;:59.85,&quot;width&quot;:888.204296875}"/>
+</p:tagLst>
+</file>
+
+<file path=ppt/tags/tag43.xml><?xml version="1.0" encoding="utf-8"?>
+<p:tagLst xmlns:p="http://schemas.openxmlformats.org/presentationml/2006/main">
+  <p:tag name="KSO_WM_DIAGRAM_VIRTUALLY_FRAME" val="{&quot;height&quot;:316.6,&quot;left&quot;:20.748359374999996,&quot;top&quot;:59.85,&quot;width&quot;:888.204296875}"/>
+</p:tagLst>
+</file>
+
+<file path=ppt/tags/tag44.xml><?xml version="1.0" encoding="utf-8"?>
+<p:tagLst xmlns:p="http://schemas.openxmlformats.org/presentationml/2006/main">
+  <p:tag name="KSO_WM_DIAGRAM_VIRTUALLY_FRAME" val="{&quot;height&quot;:316.6,&quot;left&quot;:20.748359374999996,&quot;top&quot;:59.85,&quot;width&quot;:888.204296875}"/>
+</p:tagLst>
+</file>
+
+<file path=ppt/tags/tag45.xml><?xml version="1.0" encoding="utf-8"?>
+<p:tagLst xmlns:p="http://schemas.openxmlformats.org/presentationml/2006/main">
+  <p:tag name="KSO_WM_DIAGRAM_VIRTUALLY_FRAME" val="{&quot;height&quot;:316.6,&quot;left&quot;:20.748359374999996,&quot;top&quot;:59.85,&quot;width&quot;:888.204296875}"/>
+</p:tagLst>
+</file>
+
+<file path=ppt/tags/tag46.xml><?xml version="1.0" encoding="utf-8"?>
+<p:tagLst xmlns:p="http://schemas.openxmlformats.org/presentationml/2006/main">
+  <p:tag name="KSO_WM_DIAGRAM_VIRTUALLY_FRAME" val="{&quot;height&quot;:316.6,&quot;left&quot;:20.748359374999996,&quot;top&quot;:59.85,&quot;width&quot;:888.204296875}"/>
+</p:tagLst>
+</file>
+
+<file path=ppt/tags/tag47.xml><?xml version="1.0" encoding="utf-8"?>
+<p:tagLst xmlns:p="http://schemas.openxmlformats.org/presentationml/2006/main">
+  <p:tag name="KSO_WM_DIAGRAM_VIRTUALLY_FRAME" val="{&quot;height&quot;:316.6,&quot;left&quot;:20.748359374999996,&quot;top&quot;:59.85,&quot;width&quot;:888.204296875}"/>
 </p:tagLst>
 </file>
 
 <file path=ppt/tags/tag5.xml><?xml version="1.0" encoding="utf-8"?>
 <p:tagLst xmlns:p="http://schemas.openxmlformats.org/presentationml/2006/main">
-  <p:tag name="KSO_WM_DIAGRAM_VIRTUALLY_FRAME" val="{&quot;height&quot;:116.8,&quot;left&quot;:36,&quot;top&quot;:115.5,&quot;width&quot;:890.9}"/>
+  <p:tag name="KSO_WM_DIAGRAM_VIRTUALLY_FRAME" val="{&quot;height&quot;:116.8,&quot;left&quot;:35.99811023622047,&quot;top&quot;:115.5,&quot;width&quot;:890.9018897637795}"/>
 </p:tagLst>
 </file>
 
 <file path=ppt/tags/tag6.xml><?xml version="1.0" encoding="utf-8"?>
 <p:tagLst xmlns:p="http://schemas.openxmlformats.org/presentationml/2006/main">
-  <p:tag name="KSO_WM_DIAGRAM_VIRTUALLY_FRAME" val="{&quot;height&quot;:116.8,&quot;left&quot;:36,&quot;top&quot;:115.5,&quot;width&quot;:890.9}"/>
+  <p:tag name="KSO_WM_DIAGRAM_VIRTUALLY_FRAME" val="{&quot;height&quot;:116.8,&quot;left&quot;:35.99811023622047,&quot;top&quot;:115.5,&quot;width&quot;:890.9018897637795}"/>
 </p:tagLst>
 </file>
 
 <file path=ppt/tags/tag7.xml><?xml version="1.0" encoding="utf-8"?>
 <p:tagLst xmlns:p="http://schemas.openxmlformats.org/presentationml/2006/main">
-  <p:tag name="KSO_WM_DIAGRAM_VIRTUALLY_FRAME" val="{&quot;height&quot;:116.8,&quot;left&quot;:36,&quot;top&quot;:115.5,&quot;width&quot;:890.9}"/>
+  <p:tag name="KSO_WM_DIAGRAM_VIRTUALLY_FRAME" val="{&quot;height&quot;:116.8,&quot;left&quot;:35.99811023622047,&quot;top&quot;:115.5,&quot;width&quot;:890.9018897637795}"/>
 </p:tagLst>
 </file>
 
 <file path=ppt/tags/tag8.xml><?xml version="1.0" encoding="utf-8"?>
 <p:tagLst xmlns:p="http://schemas.openxmlformats.org/presentationml/2006/main">
-  <p:tag name="KSO_WM_DIAGRAM_VIRTUALLY_FRAME" val="{&quot;height&quot;:116.8,&quot;left&quot;:36,&quot;top&quot;:115.5,&quot;width&quot;:890.9}"/>
+  <p:tag name="KSO_WM_DIAGRAM_VIRTUALLY_FRAME" val="{&quot;height&quot;:116.8,&quot;left&quot;:35.99811023622047,&quot;top&quot;:115.5,&quot;width&quot;:890.9018897637795}"/>
 </p:tagLst>
 </file>
 
 <file path=ppt/tags/tag9.xml><?xml version="1.0" encoding="utf-8"?>
 <p:tagLst xmlns:p="http://schemas.openxmlformats.org/presentationml/2006/main">
-  <p:tag name="KSO_WM_DIAGRAM_VIRTUALLY_FRAME" val="{&quot;height&quot;:116.8,&quot;left&quot;:36,&quot;top&quot;:115.5,&quot;width&quot;:890.9}"/>
+  <p:tag name="KSO_WM_DIAGRAM_VIRTUALLY_FRAME" val="{&quot;height&quot;:116.8,&quot;left&quot;:35.99811023622047,&quot;top&quot;:115.5,&quot;width&quot;:890.9018897637795}"/>
 </p:tagLst>
 </file>
 
